--- a/docs/presentation/cohort-pnc-2026.pptx
+++ b/docs/presentation/cohort-pnc-2026.pptx
@@ -553,7 +553,7 @@
           </a:p>
           <a:p>
             <a:r>
-              <a:t>Opening. Introduce yourself and your affiliation verbally. This is a presentation of working research tools, with a bounded example, not a claim to solve translator ascription.</a:t>
+              <a:t>Opening. Authors: Shu-Kai Hsieh, Da-Chen Lian, Chunki Lim and Lang-Ching Yeh. All are affiliated with the Graduate Institute of Linguistics, National Taiwan University. Shu-Kai Hsieh and Da-Chen Lian also list the Humanistic-AI lab, College of Liberal Arts, National Taiwan University. Affiliations follow the supplied abstract; name spellings follow the presenter’s correction. This is a presentation of working research tools, with a bounded example, not a claim to solve translator ascription.</a:t>
             </a:r>
           </a:p>
           <a:p/>
@@ -7548,42 +7548,138 @@
         </p:nvSpPr>
         <p:spPr>
           <a:xfrm>
-            <a:off x="552450" y="5410200"/>
-            <a:ext cx="10477500" cy="428625"/>
-          </a:xfrm>
-          <a:prstGeom prst="rect">
-            <a:avLst/>
-          </a:prstGeom>
-          <a:noFill/>
-        </p:spPr>
-        <p:txBody>
-          <a:bodyPr wrap="square" lIns="0" rIns="0" tIns="0" bIns="0">
-            <a:spAutoFit/>
-          </a:bodyPr>
-          <a:lstStyle/>
-          <a:p>
-            <a:pPr>
-              <a:lnSpc>
-                <a:spcPct val="118000"/>
-              </a:lnSpc>
-              <a:spcBef>
-                <a:spcPts val="0"/>
-              </a:spcBef>
-              <a:spcAft>
-                <a:spcPts val="0"/>
-              </a:spcAft>
-              <a:defRPr sz="2100" b="0">
-                <a:solidFill>
-                  <a:srgbClr val="526778"/>
-                </a:solidFill>
-                <a:latin typeface="Lato"/>
-              </a:defRPr>
-            </a:pPr>
-            <a:r>
-              <a:rPr>
-                <a:ea typeface="Microsoft JhengHei"/>
-              </a:rPr>
-              <a:t>Chinese Buddhist texts · researcher-controlled investigation</a:t>
+            <a:off x="552450" y="5124450"/>
+            <a:ext cx="11049000" cy="333375"/>
+          </a:xfrm>
+          <a:prstGeom prst="rect">
+            <a:avLst/>
+          </a:prstGeom>
+          <a:noFill/>
+        </p:spPr>
+        <p:txBody>
+          <a:bodyPr wrap="square" lIns="0" rIns="0" tIns="0" bIns="0">
+            <a:spAutoFit/>
+          </a:bodyPr>
+          <a:lstStyle/>
+          <a:p>
+            <a:pPr>
+              <a:lnSpc>
+                <a:spcPct val="118000"/>
+              </a:lnSpc>
+              <a:spcBef>
+                <a:spcPts val="0"/>
+              </a:spcBef>
+              <a:spcAft>
+                <a:spcPts val="0"/>
+              </a:spcAft>
+              <a:defRPr sz="2300" b="0">
+                <a:solidFill>
+                  <a:srgbClr val="24384A"/>
+                </a:solidFill>
+                <a:latin typeface="Lato"/>
+              </a:defRPr>
+            </a:pPr>
+            <a:r>
+              <a:rPr>
+                <a:ea typeface="Microsoft JhengHei"/>
+              </a:rPr>
+              <a:t>Shu-Kai Hsieh¹² · Da-Chen Lian¹² · Chunki Lim¹ · Lang-Ching Yeh¹</a:t>
+            </a:r>
+          </a:p>
+        </p:txBody>
+      </p:sp>
+      <p:sp>
+        <p:nvSpPr>
+          <p:cNvPr id="9" name="TextBox 8"/>
+          <p:cNvSpPr txBox="1"/>
+          <p:nvPr/>
+        </p:nvSpPr>
+        <p:spPr>
+          <a:xfrm>
+            <a:off x="552450" y="5600700"/>
+            <a:ext cx="11049000" cy="333375"/>
+          </a:xfrm>
+          <a:prstGeom prst="rect">
+            <a:avLst/>
+          </a:prstGeom>
+          <a:noFill/>
+        </p:spPr>
+        <p:txBody>
+          <a:bodyPr wrap="square" lIns="0" rIns="0" tIns="0" bIns="0">
+            <a:spAutoFit/>
+          </a:bodyPr>
+          <a:lstStyle/>
+          <a:p>
+            <a:pPr>
+              <a:lnSpc>
+                <a:spcPct val="118000"/>
+              </a:lnSpc>
+              <a:spcBef>
+                <a:spcPts val="0"/>
+              </a:spcBef>
+              <a:spcAft>
+                <a:spcPts val="0"/>
+              </a:spcAft>
+              <a:defRPr sz="1700" b="0">
+                <a:solidFill>
+                  <a:srgbClr val="24384A"/>
+                </a:solidFill>
+                <a:latin typeface="Lato"/>
+              </a:defRPr>
+            </a:pPr>
+            <a:r>
+              <a:rPr>
+                <a:ea typeface="Microsoft JhengHei"/>
+              </a:rPr>
+              <a:t>¹ Graduate Institute of Linguistics, National Taiwan University, Taipei, Taiwan</a:t>
+            </a:r>
+          </a:p>
+        </p:txBody>
+      </p:sp>
+      <p:sp>
+        <p:nvSpPr>
+          <p:cNvPr id="10" name="TextBox 9"/>
+          <p:cNvSpPr txBox="1"/>
+          <p:nvPr/>
+        </p:nvSpPr>
+        <p:spPr>
+          <a:xfrm>
+            <a:off x="552450" y="5876925"/>
+            <a:ext cx="11049000" cy="333375"/>
+          </a:xfrm>
+          <a:prstGeom prst="rect">
+            <a:avLst/>
+          </a:prstGeom>
+          <a:noFill/>
+        </p:spPr>
+        <p:txBody>
+          <a:bodyPr wrap="square" lIns="0" rIns="0" tIns="0" bIns="0">
+            <a:spAutoFit/>
+          </a:bodyPr>
+          <a:lstStyle/>
+          <a:p>
+            <a:pPr>
+              <a:lnSpc>
+                <a:spcPct val="118000"/>
+              </a:lnSpc>
+              <a:spcBef>
+                <a:spcPts val="0"/>
+              </a:spcBef>
+              <a:spcAft>
+                <a:spcPts val="0"/>
+              </a:spcAft>
+              <a:defRPr sz="1700" b="0">
+                <a:solidFill>
+                  <a:srgbClr val="24384A"/>
+                </a:solidFill>
+                <a:latin typeface="Lato"/>
+              </a:defRPr>
+            </a:pPr>
+            <a:r>
+              <a:rPr>
+                <a:ea typeface="Microsoft JhengHei"/>
+              </a:rPr>
+              <a:t>² Humanistic-AI lab, College of Liberal Arts, National Taiwan University, Taipei, Taiwan</a:t>
             </a:r>
           </a:p>
         </p:txBody>

--- a/docs/presentation/cohort-pnc-2026.pptx
+++ b/docs/presentation/cohort-pnc-2026.pptx
@@ -15001,7 +15001,7 @@
               <a:rPr>
                 <a:ea typeface="Microsoft JhengHei"/>
               </a:rPr>
-              <a:t>Data and thanks</a:t>
+              <a:t>Acknowledgement</a:t>
             </a:r>
           </a:p>
         </p:txBody>

--- a/docs/presentation/cohort-pnc-2026.pptx
+++ b/docs/presentation/cohort-pnc-2026.pptx
@@ -1376,178 +1376,34 @@
           <a:lstStyle/>
           <a:p>
             <a:r>
-              <a:t>SAY: The worker chooses tools and proposes. The reviewer records checks. The analyst explains a selected view and can investigate further, but cannot write graph proposals.</a:t>
+              <a:t>SAY: The worker can pull material together, suggest explanations we might want to examine, and propose a next search. These are possibilities for research. We inspect the cited passages and recorded checks before deciding what to pursue.</a:t>
             </a:r>
           </a:p>
           <a:p/>
           <a:p>
             <a:r>
-              <a:t>BACKGROUND</a:t>
-            </a:r>
-          </a:p>
-          <a:p>
-            <a:r>
-              <a:t>## Technical reference: what runs in each tab</a:t>
+              <a:t>EXAMPLE: When a commentary shares wording with an earlier text, the worker could suggest reuse, a common source or a recurring formula. A useful next step is to search other texts for the same wording, or repeat the vocabulary comparison with the commentary excluded. These are examples of questions an agent can propose, not a claim that the saved run discovered a new historical relationship.</a:t>
             </a:r>
           </a:p>
           <a:p/>
           <a:p>
             <a:r>
-              <a:t>| Tab | What runs | What it saves |</a:t>
-            </a:r>
-          </a:p>
-          <a:p>
-            <a:r>
-              <a:t>|---|---|---|</a:t>
-            </a:r>
-          </a:p>
-          <a:p>
-            <a:r>
-              <a:t>| Corpus | Exact phrase search reads the local corpus. Related passages compares stored embedding vectors. Shared-wording checks locate matching character sequences. | Browsing alone adds nothing to the evidence graph. Investigate this passage fills an Inquiry draft. |</a:t>
-            </a:r>
-          </a:p>
-          <a:p>
-            <a:r>
-              <a:t>| Vocabulary comparison | Counts strings in the target and scores it against catalogue-labelled group profiles. The target’s whole work is withheld; you can exclude other works. | Calculations alone add no graph nodes. The ranking changes with the vocabulary and reference material. |</a:t>
-            </a:r>
-          </a:p>
-          <a:p>
-            <a:r>
-              <a:t>| Inquiry | A language-model worker chooses tools and proposes claims or conjectures. A separate reviewer uses a different model family to check proposals. | The question, recorded proposals, citations, checks and run activity. Reopen completed runs under Run results. |</a:t>
-            </a:r>
-          </a:p>
-          <a:p>
-            <a:r>
-              <a:t>| Findings | Reads the saved claims and conjectures, their cited passages and recorded checks. | It displays the existing investigation; opening the tab does not run another worker. |</a:t>
-            </a:r>
-          </a:p>
-          <a:p>
-            <a:r>
-              <a:t>| Graph | Draws saved records and their relationships. Show exploration adds recorded tool activity. | Accepting or rejecting an eligible record saves a researcher decision. Hiding nodes only changes the view. |</a:t>
+              <a:t>GROUNDING: The Graph stores links between passages and proposals, source locations, author/model records, checks and researcher decisions. It lets us inspect the basis of a proposal. It does not make an interpretation true. A reviewer can verify that a quotation occurs while still making a mistaken judgement about what it supports.</a:t>
             </a:r>
           </a:p>
           <a:p/>
           <a:p>
             <a:r>
-              <a:t>Graph and Vocabulary comparison also have an AI analyst. It can use read-only tools and continue a conversation about the selected view. Its explanation does not automatically become a graph proposal.</a:t>
+              <a:t>ROLES: The Inquiry worker calls tools and records proposals. A reviewer from a different model family records checks. The separate analyst in Graph and Vocabulary comparison can explain outputs and make further read-only tool calls; its response does not automatically become a graph proposal.</a:t>
             </a:r>
           </a:p>
           <a:p/>
           <a:p>
             <a:r>
-              <a:t>### The embedder and the worker are different models</a:t>
+              <a:t>DIAGRAM: This is a high-level workflow, not the Graph's edge vocabulary or a promise that every retrieved passage is saved. The researcher chooses what to pursue; opening a tab does not execute this sequence.</a:t>
             </a:r>
           </a:p>
           <a:p/>
-          <a:p>
-            <a:r>
-              <a:t>The configured embedding file is `mitra-qwen35-embedder.npz`. It holds vectors computed before the session. Corpus → Related passages compares the selected passage’s vector with other stored vectors using cosine similarity. Higher scores mean closer vectors; read the returned passages to decide whether the relationship is useful.</a:t>
-            </a:r>
-          </a:p>
-          <a:p/>
-          <a:p>
-            <a:r>
-              <a:t>Inquiry workers and the view analyst can search these embeddings with `semantic_neighbors`. They use them only if they call that tool. Exact phrase search, string-frequency rankings, citation checks and graph drawing do not use the embedder.</a:t>
-            </a:r>
-          </a:p>
-          <a:p/>
-          <a:p>
-            <a:r>
-              <a:t>The filename identifies the embedder as `mitra-qwen35-embedder`. The legacy index does not record its exact model revision. Its coverage and training limitations are described under Semantic analysis and alignment below. The worker and reviewer model names are shown separately in Inquiry and in saved run records.</a:t>
-            </a:r>
-          </a:p>
-          <a:p/>
-          <a:p/>
-          <a:p>
-            <a:r>
-              <a:t>The index has no recorded model revision. Do not claim that the example texts were absent from training.</a:t>
-            </a:r>
-          </a:p>
-          <a:p/>
-          <a:p>
-            <a:r>
-              <a:t>Open Analyze this view without starting a run. Show a saved analysis if one is available. The analyst can use read-only tools, but does not promote its answer into a graph proposal.</a:t>
-            </a:r>
-          </a:p>
-          <a:p/>
-          <a:p>
-            <a:r>
-              <a:t>Click **Analyze this view**. A side panel opens without moving the main tab. Choose or retain the model, then click **Start analysis**. Merely opening the panel does not call a model.</a:t>
-            </a:r>
-          </a:p>
-          <a:p/>
-          <a:p>
-            <a:r>
-              <a:t>The analyst can inspect records, search passages, read bounded source material and repeat available evidence comparisons. Its final answer is formatted text with expandable actions and reasons. It cannot propose, accept, reject or modify graph records. Its explanation is an AI interpretation, not a verification.</a:t>
-            </a:r>
-          </a:p>
-          <a:p/>
-          <a:p>
-            <a:r>
-              <a:t>Select an entry under **Saved analyses** to reopen it. The answer describes the view supplied when that analysis began; later changes to the graph or exclusion settings do not rewrite it. Close the panel to inspect the underlying view. Closing or switching tabs does not stop an active run. Only one inquiry or analysis runs at a time in this instance.</a:t>
-            </a:r>
-          </a:p>
-          <a:p/>
-          <a:p>
-            <a:r>
-              <a:t>Do not click Accept just to create an ending. Show available controls and explain their actual eligibility rules. The reviewer cannot be treated as a reliable semantic validator; explain the current limitation if asked.</a:t>
-            </a:r>
-          </a:p>
-          <a:p/>
-          <a:p>
-            <a:r>
-              <a:t>| Status | Meaning |</a:t>
-            </a:r>
-          </a:p>
-          <a:p>
-            <a:r>
-              <a:t>|---|---|</a:t>
-            </a:r>
-          </a:p>
-          <a:p>
-            <a:r>
-              <a:t>| Proposed | Submitted for consideration |</a:t>
-            </a:r>
-          </a:p>
-          <a:p>
-            <a:r>
-              <a:t>| Attested | The required promotion checks for that record type passed |</a:t>
-            </a:r>
-          </a:p>
-          <a:p>
-            <a:r>
-              <a:t>| Accepted | The researcher approved this record under Cohort’s citation rules |</a:t>
-            </a:r>
-          </a:p>
-          <a:p>
-            <a:r>
-              <a:t>| Rejected | The researcher rejected this record with a reason |</a:t>
-            </a:r>
-          </a:p>
-          <a:p/>
-          <a:p>
-            <a:r>
-              <a:t>A **contradiction** relationship is distinct from a researcher’s rejection. Colour alone is insufficient: some imported experiment records also have calculated assessment colours. Read the selected record’s status.</a:t>
-            </a:r>
-          </a:p>
-          <a:p/>
-          <a:p>
-            <a:r>
-              <a:t>An eligible attested record can be accepted. Accepting a passage changes that passage’s status; it does not accept every connected claim. Rejecting a record preserves it and the reason rather than deleting a source text. Reopening a rejected record also requires a reason.</a:t>
-            </a:r>
-          </a:p>
-          <a:p/>
-          <a:p>
-            <a:r>
-              <a:t>The reviewer is fallible. In the current implementation, its tool re-fetches cited passages and checks their spans, but the reviewer does not have a complete evidence-reading workflow before choosing its semantic verdict. A reviewer’s statement that it checked an interpretation or reproduced a calculation is not enough to establish that it did so. The researcher should inspect the passages and numerical output directly. This limitation remains open; do not say it has been repaired by changing model names.</a:t>
-            </a:r>
-          </a:p>
-          <a:p/>
-          <a:p>
-            <a:r>
-              <a:t>The Vocabulary comparison tab does not currently offer a grounded `quotes` or `parallel_of` edge proposal for later acceptance. Accepting a graph record also does not change Vocabulary comparison profiles. The exclusion above is a separate researcher-controlled calculation.</a:t>
-            </a:r>
-          </a:p>
         </p:txBody>
       </p:sp>
       <p:sp>
@@ -9353,7 +9209,7 @@
               <a:rPr>
                 <a:ea typeface="Microsoft JhengHei"/>
               </a:rPr>
-              <a:t>Agent roles</a:t>
+              <a:t>Interpretation · agents and researcher</a:t>
             </a:r>
           </a:p>
         </p:txBody>
@@ -9367,7 +9223,7 @@
         <p:spPr>
           <a:xfrm>
             <a:off x="495299" y="742950"/>
-            <a:ext cx="11144250" cy="1047749"/>
+            <a:ext cx="11144250" cy="952500"/>
           </a:xfrm>
           <a:prstGeom prst="rect">
             <a:avLst/>
@@ -9401,7 +9257,7 @@
               <a:rPr>
                 <a:ea typeface="Microsoft JhengHei"/>
               </a:rPr>
-              <a:t>Worker, reviewer and analyst</a:t>
+              <a:t>From passages to research proposals</a:t>
             </a:r>
           </a:p>
         </p:txBody>
@@ -9414,79 +9270,31 @@
         </p:nvSpPr>
         <p:spPr>
           <a:xfrm>
-            <a:off x="714375" y="2247900"/>
-            <a:ext cx="2952750" cy="476250"/>
-          </a:xfrm>
-          <a:prstGeom prst="rect">
-            <a:avLst/>
-          </a:prstGeom>
-          <a:noFill/>
-        </p:spPr>
-        <p:txBody>
-          <a:bodyPr wrap="square" lIns="0" rIns="0" tIns="0" bIns="0">
-            <a:spAutoFit/>
-          </a:bodyPr>
-          <a:lstStyle/>
-          <a:p>
-            <a:pPr>
-              <a:lnSpc>
-                <a:spcPct val="118000"/>
-              </a:lnSpc>
-              <a:spcBef>
-                <a:spcPts val="0"/>
-              </a:spcBef>
-              <a:spcAft>
-                <a:spcPts val="0"/>
-              </a:spcAft>
-              <a:defRPr sz="2300" b="1">
-                <a:solidFill>
-                  <a:srgbClr val="65439A"/>
-                </a:solidFill>
-                <a:latin typeface="Lato"/>
-              </a:defRPr>
-            </a:pPr>
-            <a:r>
-              <a:rPr>
-                <a:ea typeface="Microsoft JhengHei"/>
-              </a:rPr>
-              <a:t>Worker</a:t>
-            </a:r>
-          </a:p>
-        </p:txBody>
-      </p:sp>
-      <p:sp>
-        <p:nvSpPr>
-          <p:cNvPr id="5" name="TextBox 4"/>
-          <p:cNvSpPr txBox="1"/>
-          <p:nvPr/>
-        </p:nvSpPr>
-        <p:spPr>
-          <a:xfrm>
-            <a:off x="714375" y="2857500"/>
-            <a:ext cx="2952750" cy="1762125"/>
-          </a:xfrm>
-          <a:prstGeom prst="rect">
-            <a:avLst/>
-          </a:prstGeom>
-          <a:noFill/>
-        </p:spPr>
-        <p:txBody>
-          <a:bodyPr wrap="square" lIns="0" rIns="0" tIns="0" bIns="0">
-            <a:spAutoFit/>
-          </a:bodyPr>
-          <a:lstStyle/>
-          <a:p>
-            <a:pPr>
-              <a:lnSpc>
-                <a:spcPct val="118000"/>
-              </a:lnSpc>
-              <a:spcBef>
-                <a:spcPts val="0"/>
-              </a:spcBef>
-              <a:spcAft>
-                <a:spcPts val="0"/>
-              </a:spcAft>
-              <a:defRPr sz="2100" b="0">
+            <a:off x="523874" y="1828800"/>
+            <a:ext cx="11049000" cy="781050"/>
+          </a:xfrm>
+          <a:prstGeom prst="rect">
+            <a:avLst/>
+          </a:prstGeom>
+          <a:noFill/>
+        </p:spPr>
+        <p:txBody>
+          <a:bodyPr wrap="square" lIns="0" rIns="0" tIns="0" bIns="0">
+            <a:spAutoFit/>
+          </a:bodyPr>
+          <a:lstStyle/>
+          <a:p>
+            <a:pPr>
+              <a:lnSpc>
+                <a:spcPct val="118000"/>
+              </a:lnSpc>
+              <a:spcBef>
+                <a:spcPts val="0"/>
+              </a:spcBef>
+              <a:spcAft>
+                <a:spcPts val="0"/>
+              </a:spcAft>
+              <a:defRPr sz="2600" b="0">
                 <a:solidFill>
                   <a:srgbClr val="24384A"/>
                 </a:solidFill>
@@ -9497,478 +9305,31 @@
               <a:rPr>
                 <a:ea typeface="Microsoft JhengHei"/>
               </a:rPr>
-              <a:t>Search and compare</a:t>
-            </a:r>
-          </a:p>
-          <a:p>
-            <a:pPr>
-              <a:lnSpc>
-                <a:spcPct val="118000"/>
-              </a:lnSpc>
-              <a:spcBef>
-                <a:spcPts val="0"/>
-              </a:spcBef>
-              <a:spcAft>
-                <a:spcPts val="0"/>
-              </a:spcAft>
-              <a:defRPr sz="2100" b="0">
-                <a:solidFill>
-                  <a:srgbClr val="24384A"/>
-                </a:solidFill>
-                <a:latin typeface="Lato"/>
-              </a:defRPr>
-            </a:pPr>
-          </a:p>
-          <a:p>
-            <a:pPr>
-              <a:lnSpc>
-                <a:spcPct val="118000"/>
-              </a:lnSpc>
-              <a:spcBef>
-                <a:spcPts val="0"/>
-              </a:spcBef>
-              <a:spcAft>
-                <a:spcPts val="0"/>
-              </a:spcAft>
-              <a:defRPr sz="2100" b="0">
-                <a:solidFill>
-                  <a:srgbClr val="24384A"/>
-                </a:solidFill>
-                <a:latin typeface="Lato"/>
-              </a:defRPr>
-            </a:pPr>
-            <a:r>
-              <a:rPr>
-                <a:ea typeface="Microsoft JhengHei"/>
-              </a:rPr>
-              <a:t>Record proposals</a:t>
-            </a:r>
-          </a:p>
-          <a:p>
-            <a:pPr>
-              <a:lnSpc>
-                <a:spcPct val="118000"/>
-              </a:lnSpc>
-              <a:spcBef>
-                <a:spcPts val="0"/>
-              </a:spcBef>
-              <a:spcAft>
-                <a:spcPts val="0"/>
-              </a:spcAft>
-              <a:defRPr sz="2100" b="0">
-                <a:solidFill>
-                  <a:srgbClr val="24384A"/>
-                </a:solidFill>
-                <a:latin typeface="Lato"/>
-              </a:defRPr>
-            </a:pPr>
-            <a:r>
-              <a:rPr>
-                <a:ea typeface="Microsoft JhengHei"/>
-              </a:rPr>
-              <a:t>and citations</a:t>
-            </a:r>
-          </a:p>
-        </p:txBody>
-      </p:sp>
-      <p:sp>
-        <p:nvSpPr>
-          <p:cNvPr id="6" name="TextBox 5"/>
-          <p:cNvSpPr txBox="1"/>
-          <p:nvPr/>
-        </p:nvSpPr>
-        <p:spPr>
-          <a:xfrm>
-            <a:off x="4619625" y="2247900"/>
-            <a:ext cx="2952750" cy="476250"/>
-          </a:xfrm>
-          <a:prstGeom prst="rect">
-            <a:avLst/>
-          </a:prstGeom>
-          <a:noFill/>
-        </p:spPr>
-        <p:txBody>
-          <a:bodyPr wrap="square" lIns="0" rIns="0" tIns="0" bIns="0">
-            <a:spAutoFit/>
-          </a:bodyPr>
-          <a:lstStyle/>
-          <a:p>
-            <a:pPr>
-              <a:lnSpc>
-                <a:spcPct val="118000"/>
-              </a:lnSpc>
-              <a:spcBef>
-                <a:spcPts val="0"/>
-              </a:spcBef>
-              <a:spcAft>
-                <a:spcPts val="0"/>
-              </a:spcAft>
-              <a:defRPr sz="2300" b="1">
-                <a:solidFill>
-                  <a:srgbClr val="146C68"/>
-                </a:solidFill>
-                <a:latin typeface="Lato"/>
-              </a:defRPr>
-            </a:pPr>
-            <a:r>
-              <a:rPr>
-                <a:ea typeface="Microsoft JhengHei"/>
-              </a:rPr>
-              <a:t>Reviewer</a:t>
-            </a:r>
-          </a:p>
-        </p:txBody>
-      </p:sp>
-      <p:sp>
-        <p:nvSpPr>
-          <p:cNvPr id="7" name="TextBox 6"/>
-          <p:cNvSpPr txBox="1"/>
-          <p:nvPr/>
-        </p:nvSpPr>
-        <p:spPr>
-          <a:xfrm>
-            <a:off x="4619625" y="2857500"/>
-            <a:ext cx="2952750" cy="1762125"/>
-          </a:xfrm>
-          <a:prstGeom prst="rect">
-            <a:avLst/>
-          </a:prstGeom>
-          <a:noFill/>
-        </p:spPr>
-        <p:txBody>
-          <a:bodyPr wrap="square" lIns="0" rIns="0" tIns="0" bIns="0">
-            <a:spAutoFit/>
-          </a:bodyPr>
-          <a:lstStyle/>
-          <a:p>
-            <a:pPr>
-              <a:lnSpc>
-                <a:spcPct val="118000"/>
-              </a:lnSpc>
-              <a:spcBef>
-                <a:spcPts val="0"/>
-              </a:spcBef>
-              <a:spcAft>
-                <a:spcPts val="0"/>
-              </a:spcAft>
-              <a:defRPr sz="2100" b="0">
-                <a:solidFill>
-                  <a:srgbClr val="24384A"/>
-                </a:solidFill>
-                <a:latin typeface="Lato"/>
-              </a:defRPr>
-            </a:pPr>
-            <a:r>
-              <a:rPr>
-                <a:ea typeface="Microsoft JhengHei"/>
-              </a:rPr>
-              <a:t>Different model family</a:t>
-            </a:r>
-          </a:p>
-          <a:p>
-            <a:pPr>
-              <a:lnSpc>
-                <a:spcPct val="118000"/>
-              </a:lnSpc>
-              <a:spcBef>
-                <a:spcPts val="0"/>
-              </a:spcBef>
-              <a:spcAft>
-                <a:spcPts val="0"/>
-              </a:spcAft>
-              <a:defRPr sz="2100" b="0">
-                <a:solidFill>
-                  <a:srgbClr val="24384A"/>
-                </a:solidFill>
-                <a:latin typeface="Lato"/>
-              </a:defRPr>
-            </a:pPr>
-          </a:p>
-          <a:p>
-            <a:pPr>
-              <a:lnSpc>
-                <a:spcPct val="118000"/>
-              </a:lnSpc>
-              <a:spcBef>
-                <a:spcPts val="0"/>
-              </a:spcBef>
-              <a:spcAft>
-                <a:spcPts val="0"/>
-              </a:spcAft>
-              <a:defRPr sz="2100" b="0">
-                <a:solidFill>
-                  <a:srgbClr val="24384A"/>
-                </a:solidFill>
-                <a:latin typeface="Lato"/>
-              </a:defRPr>
-            </a:pPr>
-            <a:r>
-              <a:rPr>
-                <a:ea typeface="Microsoft JhengHei"/>
-              </a:rPr>
-              <a:t>Record citation checks</a:t>
-            </a:r>
-          </a:p>
-          <a:p>
-            <a:pPr>
-              <a:lnSpc>
-                <a:spcPct val="118000"/>
-              </a:lnSpc>
-              <a:spcBef>
-                <a:spcPts val="0"/>
-              </a:spcBef>
-              <a:spcAft>
-                <a:spcPts val="0"/>
-              </a:spcAft>
-              <a:defRPr sz="2100" b="0">
-                <a:solidFill>
-                  <a:srgbClr val="24384A"/>
-                </a:solidFill>
-                <a:latin typeface="Lato"/>
-              </a:defRPr>
-            </a:pPr>
-            <a:r>
-              <a:rPr>
-                <a:ea typeface="Microsoft JhengHei"/>
-              </a:rPr>
-              <a:t>and review verdicts</a:t>
-            </a:r>
-          </a:p>
-        </p:txBody>
-      </p:sp>
-      <p:sp>
-        <p:nvSpPr>
-          <p:cNvPr id="8" name="TextBox 7"/>
-          <p:cNvSpPr txBox="1"/>
-          <p:nvPr/>
-        </p:nvSpPr>
-        <p:spPr>
-          <a:xfrm>
-            <a:off x="8524875" y="2247900"/>
-            <a:ext cx="2952750" cy="476250"/>
-          </a:xfrm>
-          <a:prstGeom prst="rect">
-            <a:avLst/>
-          </a:prstGeom>
-          <a:noFill/>
-        </p:spPr>
-        <p:txBody>
-          <a:bodyPr wrap="square" lIns="0" rIns="0" tIns="0" bIns="0">
-            <a:spAutoFit/>
-          </a:bodyPr>
-          <a:lstStyle/>
-          <a:p>
-            <a:pPr>
-              <a:lnSpc>
-                <a:spcPct val="118000"/>
-              </a:lnSpc>
-              <a:spcBef>
-                <a:spcPts val="0"/>
-              </a:spcBef>
-              <a:spcAft>
-                <a:spcPts val="0"/>
-              </a:spcAft>
-              <a:defRPr sz="2300" b="1">
-                <a:solidFill>
-                  <a:srgbClr val="155F88"/>
-                </a:solidFill>
-                <a:latin typeface="Lato"/>
-              </a:defRPr>
-            </a:pPr>
-            <a:r>
-              <a:rPr>
-                <a:ea typeface="Microsoft JhengHei"/>
-              </a:rPr>
-              <a:t>View analyst</a:t>
-            </a:r>
-          </a:p>
-        </p:txBody>
-      </p:sp>
-      <p:sp>
-        <p:nvSpPr>
-          <p:cNvPr id="9" name="TextBox 8"/>
-          <p:cNvSpPr txBox="1"/>
-          <p:nvPr/>
-        </p:nvSpPr>
-        <p:spPr>
-          <a:xfrm>
-            <a:off x="8524875" y="2857500"/>
-            <a:ext cx="2952750" cy="1762125"/>
-          </a:xfrm>
-          <a:prstGeom prst="rect">
-            <a:avLst/>
-          </a:prstGeom>
-          <a:noFill/>
-        </p:spPr>
-        <p:txBody>
-          <a:bodyPr wrap="square" lIns="0" rIns="0" tIns="0" bIns="0">
-            <a:spAutoFit/>
-          </a:bodyPr>
-          <a:lstStyle/>
-          <a:p>
-            <a:pPr>
-              <a:lnSpc>
-                <a:spcPct val="118000"/>
-              </a:lnSpc>
-              <a:spcBef>
-                <a:spcPts val="0"/>
-              </a:spcBef>
-              <a:spcAft>
-                <a:spcPts val="0"/>
-              </a:spcAft>
-              <a:defRPr sz="2100" b="0">
-                <a:solidFill>
-                  <a:srgbClr val="24384A"/>
-                </a:solidFill>
-                <a:latin typeface="Lato"/>
-              </a:defRPr>
-            </a:pPr>
-            <a:r>
-              <a:rPr>
-                <a:ea typeface="Microsoft JhengHei"/>
-              </a:rPr>
-              <a:t>Graph and vocabulary</a:t>
-            </a:r>
-          </a:p>
-          <a:p>
-            <a:pPr>
-              <a:lnSpc>
-                <a:spcPct val="118000"/>
-              </a:lnSpc>
-              <a:spcBef>
-                <a:spcPts val="0"/>
-              </a:spcBef>
-              <a:spcAft>
-                <a:spcPts val="0"/>
-              </a:spcAft>
-              <a:defRPr sz="2100" b="0">
-                <a:solidFill>
-                  <a:srgbClr val="24384A"/>
-                </a:solidFill>
-                <a:latin typeface="Lato"/>
-              </a:defRPr>
-            </a:pPr>
-          </a:p>
-          <a:p>
-            <a:pPr>
-              <a:lnSpc>
-                <a:spcPct val="118000"/>
-              </a:lnSpc>
-              <a:spcBef>
-                <a:spcPts val="0"/>
-              </a:spcBef>
-              <a:spcAft>
-                <a:spcPts val="0"/>
-              </a:spcAft>
-              <a:defRPr sz="2100" b="0">
-                <a:solidFill>
-                  <a:srgbClr val="24384A"/>
-                </a:solidFill>
-                <a:latin typeface="Lato"/>
-              </a:defRPr>
-            </a:pPr>
-            <a:r>
-              <a:rPr>
-                <a:ea typeface="Microsoft JhengHei"/>
-              </a:rPr>
-              <a:t>Explain outputs; use</a:t>
-            </a:r>
-          </a:p>
-          <a:p>
-            <a:pPr>
-              <a:lnSpc>
-                <a:spcPct val="118000"/>
-              </a:lnSpc>
-              <a:spcBef>
-                <a:spcPts val="0"/>
-              </a:spcBef>
-              <a:spcAft>
-                <a:spcPts val="0"/>
-              </a:spcAft>
-              <a:defRPr sz="2100" b="0">
-                <a:solidFill>
-                  <a:srgbClr val="24384A"/>
-                </a:solidFill>
-                <a:latin typeface="Lato"/>
-              </a:defRPr>
-            </a:pPr>
-            <a:r>
-              <a:rPr>
-                <a:ea typeface="Microsoft JhengHei"/>
-              </a:rPr>
-              <a:t>read-only tools</a:t>
-            </a:r>
-          </a:p>
-        </p:txBody>
-      </p:sp>
-      <p:sp>
-        <p:nvSpPr>
-          <p:cNvPr id="10" name="TextBox 9"/>
-          <p:cNvSpPr txBox="1"/>
-          <p:nvPr/>
-        </p:nvSpPr>
-        <p:spPr>
-          <a:xfrm>
-            <a:off x="523874" y="5324475"/>
-            <a:ext cx="11049000" cy="762000"/>
-          </a:xfrm>
-          <a:prstGeom prst="rect">
-            <a:avLst/>
-          </a:prstGeom>
-          <a:noFill/>
-        </p:spPr>
-        <p:txBody>
-          <a:bodyPr wrap="square" lIns="0" rIns="0" tIns="0" bIns="0">
-            <a:spAutoFit/>
-          </a:bodyPr>
-          <a:lstStyle/>
-          <a:p>
-            <a:pPr>
-              <a:lnSpc>
-                <a:spcPct val="118000"/>
-              </a:lnSpc>
-              <a:spcBef>
-                <a:spcPts val="0"/>
-              </a:spcBef>
-              <a:spcAft>
-                <a:spcPts val="0"/>
-              </a:spcAft>
-              <a:defRPr sz="2500" b="0">
-                <a:solidFill>
-                  <a:srgbClr val="24384A"/>
-                </a:solidFill>
-                <a:latin typeface="Lato"/>
-              </a:defRPr>
-            </a:pPr>
-            <a:r>
-              <a:rPr>
-                <a:ea typeface="Microsoft JhengHei"/>
-              </a:rPr>
-              <a:t>Model names and actions are recorded. A reviewer can still be wrong.</a:t>
-            </a:r>
-          </a:p>
-        </p:txBody>
-      </p:sp>
-      <p:sp>
-        <p:nvSpPr>
-          <p:cNvPr id="11" name="Rectangle 10"/>
+              <a:t>Agents can compare material, suggest explanations and propose follow-up searches.</a:t>
+            </a:r>
+          </a:p>
+        </p:txBody>
+      </p:sp>
+      <p:sp>
+        <p:nvSpPr>
+          <p:cNvPr id="5" name="Rectangle 4"/>
           <p:cNvSpPr/>
           <p:nvPr/>
         </p:nvSpPr>
         <p:spPr>
           <a:xfrm>
-            <a:off x="11334750" y="6429375"/>
-            <a:ext cx="647700" cy="333375"/>
+            <a:off x="523874" y="3048000"/>
+            <a:ext cx="3333750" cy="1666875"/>
           </a:xfrm>
           <a:prstGeom prst="rect">
             <a:avLst/>
           </a:prstGeom>
           <a:solidFill>
-            <a:srgbClr val="24384A"/>
+            <a:srgbClr val="E8F3FA"/>
           </a:solidFill>
           <a:ln w="12700">
             <a:solidFill>
-              <a:srgbClr val="24384A"/>
+              <a:srgbClr val="155F88"/>
             </a:solidFill>
           </a:ln>
         </p:spPr>
@@ -9996,7 +9357,721 @@
       </p:sp>
       <p:sp>
         <p:nvSpPr>
+          <p:cNvPr id="6" name="TextBox 5"/>
+          <p:cNvSpPr txBox="1"/>
+          <p:nvPr/>
+        </p:nvSpPr>
+        <p:spPr>
+          <a:xfrm>
+            <a:off x="695325" y="3219450"/>
+            <a:ext cx="2990850" cy="476250"/>
+          </a:xfrm>
+          <a:prstGeom prst="rect">
+            <a:avLst/>
+          </a:prstGeom>
+          <a:noFill/>
+        </p:spPr>
+        <p:txBody>
+          <a:bodyPr wrap="square" lIns="0" rIns="0" tIns="0" bIns="0">
+            <a:spAutoFit/>
+          </a:bodyPr>
+          <a:lstStyle/>
+          <a:p>
+            <a:pPr>
+              <a:lnSpc>
+                <a:spcPct val="118000"/>
+              </a:lnSpc>
+              <a:spcBef>
+                <a:spcPts val="0"/>
+              </a:spcBef>
+              <a:spcAft>
+                <a:spcPts val="0"/>
+              </a:spcAft>
+              <a:defRPr sz="2200" b="1">
+                <a:solidFill>
+                  <a:srgbClr val="155F88"/>
+                </a:solidFill>
+                <a:latin typeface="Lato"/>
+              </a:defRPr>
+            </a:pPr>
+            <a:r>
+              <a:rPr>
+                <a:ea typeface="Microsoft JhengHei"/>
+              </a:rPr>
+              <a:t>Read and compare</a:t>
+            </a:r>
+          </a:p>
+        </p:txBody>
+      </p:sp>
+      <p:sp>
+        <p:nvSpPr>
+          <p:cNvPr id="7" name="TextBox 6"/>
+          <p:cNvSpPr txBox="1"/>
+          <p:nvPr/>
+        </p:nvSpPr>
+        <p:spPr>
+          <a:xfrm>
+            <a:off x="695325" y="3857625"/>
+            <a:ext cx="2990850" cy="742950"/>
+          </a:xfrm>
+          <a:prstGeom prst="rect">
+            <a:avLst/>
+          </a:prstGeom>
+          <a:noFill/>
+        </p:spPr>
+        <p:txBody>
+          <a:bodyPr wrap="square" lIns="0" rIns="0" tIns="0" bIns="0">
+            <a:spAutoFit/>
+          </a:bodyPr>
+          <a:lstStyle/>
+          <a:p>
+            <a:pPr>
+              <a:lnSpc>
+                <a:spcPct val="118000"/>
+              </a:lnSpc>
+              <a:spcBef>
+                <a:spcPts val="0"/>
+              </a:spcBef>
+              <a:spcAft>
+                <a:spcPts val="0"/>
+              </a:spcAft>
+              <a:defRPr sz="2000" b="0">
+                <a:solidFill>
+                  <a:srgbClr val="24384A"/>
+                </a:solidFill>
+                <a:latin typeface="Lato"/>
+              </a:defRPr>
+            </a:pPr>
+            <a:r>
+              <a:rPr>
+                <a:ea typeface="Microsoft JhengHei"/>
+              </a:rPr>
+              <a:t>Retrieve passages</a:t>
+            </a:r>
+          </a:p>
+          <a:p>
+            <a:pPr>
+              <a:lnSpc>
+                <a:spcPct val="118000"/>
+              </a:lnSpc>
+              <a:spcBef>
+                <a:spcPts val="0"/>
+              </a:spcBef>
+              <a:spcAft>
+                <a:spcPts val="0"/>
+              </a:spcAft>
+              <a:defRPr sz="2000" b="0">
+                <a:solidFill>
+                  <a:srgbClr val="24384A"/>
+                </a:solidFill>
+                <a:latin typeface="Lato"/>
+              </a:defRPr>
+            </a:pPr>
+            <a:r>
+              <a:rPr>
+                <a:ea typeface="Microsoft JhengHei"/>
+              </a:rPr>
+              <a:t>Summarise observations</a:t>
+            </a:r>
+          </a:p>
+        </p:txBody>
+      </p:sp>
+      <p:sp>
+        <p:nvSpPr>
+          <p:cNvPr id="8" name="Rectangle 7"/>
+          <p:cNvSpPr/>
+          <p:nvPr/>
+        </p:nvSpPr>
+        <p:spPr>
+          <a:xfrm>
+            <a:off x="4429125" y="3048000"/>
+            <a:ext cx="3333750" cy="1666875"/>
+          </a:xfrm>
+          <a:prstGeom prst="rect">
+            <a:avLst/>
+          </a:prstGeom>
+          <a:solidFill>
+            <a:srgbClr val="F0EBF8"/>
+          </a:solidFill>
+          <a:ln w="12700">
+            <a:solidFill>
+              <a:srgbClr val="65439A"/>
+            </a:solidFill>
+          </a:ln>
+        </p:spPr>
+        <p:style>
+          <a:lnRef idx="1">
+            <a:schemeClr val="accent1"/>
+          </a:lnRef>
+          <a:fillRef idx="3">
+            <a:schemeClr val="accent1"/>
+          </a:fillRef>
+          <a:effectRef idx="2">
+            <a:schemeClr val="accent1"/>
+          </a:effectRef>
+          <a:fontRef idx="minor">
+            <a:schemeClr val="lt1"/>
+          </a:fontRef>
+        </p:style>
+        <p:txBody>
+          <a:bodyPr rtlCol="0" anchor="ctr"/>
+          <a:lstStyle/>
+          <a:p>
+            <a:pPr algn="ctr"/>
+          </a:p>
+        </p:txBody>
+      </p:sp>
+      <p:sp>
+        <p:nvSpPr>
+          <p:cNvPr id="9" name="TextBox 8"/>
+          <p:cNvSpPr txBox="1"/>
+          <p:nvPr/>
+        </p:nvSpPr>
+        <p:spPr>
+          <a:xfrm>
+            <a:off x="4600575" y="3219450"/>
+            <a:ext cx="2990850" cy="476250"/>
+          </a:xfrm>
+          <a:prstGeom prst="rect">
+            <a:avLst/>
+          </a:prstGeom>
+          <a:noFill/>
+        </p:spPr>
+        <p:txBody>
+          <a:bodyPr wrap="square" lIns="0" rIns="0" tIns="0" bIns="0">
+            <a:spAutoFit/>
+          </a:bodyPr>
+          <a:lstStyle/>
+          <a:p>
+            <a:pPr>
+              <a:lnSpc>
+                <a:spcPct val="118000"/>
+              </a:lnSpc>
+              <a:spcBef>
+                <a:spcPts val="0"/>
+              </a:spcBef>
+              <a:spcAft>
+                <a:spcPts val="0"/>
+              </a:spcAft>
+              <a:defRPr sz="2200" b="1">
+                <a:solidFill>
+                  <a:srgbClr val="65439A"/>
+                </a:solidFill>
+                <a:latin typeface="Lato"/>
+              </a:defRPr>
+            </a:pPr>
+            <a:r>
+              <a:rPr>
+                <a:ea typeface="Microsoft JhengHei"/>
+              </a:rPr>
+              <a:t>Propose</a:t>
+            </a:r>
+          </a:p>
+        </p:txBody>
+      </p:sp>
+      <p:sp>
+        <p:nvSpPr>
+          <p:cNvPr id="10" name="TextBox 9"/>
+          <p:cNvSpPr txBox="1"/>
+          <p:nvPr/>
+        </p:nvSpPr>
+        <p:spPr>
+          <a:xfrm>
+            <a:off x="4600575" y="3857625"/>
+            <a:ext cx="2990850" cy="742950"/>
+          </a:xfrm>
+          <a:prstGeom prst="rect">
+            <a:avLst/>
+          </a:prstGeom>
+          <a:noFill/>
+        </p:spPr>
+        <p:txBody>
+          <a:bodyPr wrap="square" lIns="0" rIns="0" tIns="0" bIns="0">
+            <a:spAutoFit/>
+          </a:bodyPr>
+          <a:lstStyle/>
+          <a:p>
+            <a:pPr>
+              <a:lnSpc>
+                <a:spcPct val="118000"/>
+              </a:lnSpc>
+              <a:spcBef>
+                <a:spcPts val="0"/>
+              </a:spcBef>
+              <a:spcAft>
+                <a:spcPts val="0"/>
+              </a:spcAft>
+              <a:defRPr sz="2000" b="0">
+                <a:solidFill>
+                  <a:srgbClr val="24384A"/>
+                </a:solidFill>
+                <a:latin typeface="Lato"/>
+              </a:defRPr>
+            </a:pPr>
+            <a:r>
+              <a:rPr>
+                <a:ea typeface="Microsoft JhengHei"/>
+              </a:rPr>
+              <a:t>Possible explanations</a:t>
+            </a:r>
+          </a:p>
+          <a:p>
+            <a:pPr>
+              <a:lnSpc>
+                <a:spcPct val="118000"/>
+              </a:lnSpc>
+              <a:spcBef>
+                <a:spcPts val="0"/>
+              </a:spcBef>
+              <a:spcAft>
+                <a:spcPts val="0"/>
+              </a:spcAft>
+              <a:defRPr sz="2000" b="0">
+                <a:solidFill>
+                  <a:srgbClr val="24384A"/>
+                </a:solidFill>
+                <a:latin typeface="Lato"/>
+              </a:defRPr>
+            </a:pPr>
+            <a:r>
+              <a:rPr>
+                <a:ea typeface="Microsoft JhengHei"/>
+              </a:rPr>
+              <a:t>Questions to investigate</a:t>
+            </a:r>
+          </a:p>
+        </p:txBody>
+      </p:sp>
+      <p:sp>
+        <p:nvSpPr>
+          <p:cNvPr id="11" name="Rectangle 10"/>
+          <p:cNvSpPr/>
+          <p:nvPr/>
+        </p:nvSpPr>
+        <p:spPr>
+          <a:xfrm>
+            <a:off x="8334375" y="3048000"/>
+            <a:ext cx="3333750" cy="1666875"/>
+          </a:xfrm>
+          <a:prstGeom prst="rect">
+            <a:avLst/>
+          </a:prstGeom>
+          <a:solidFill>
+            <a:srgbClr val="E8F4F1"/>
+          </a:solidFill>
+          <a:ln w="12700">
+            <a:solidFill>
+              <a:srgbClr val="146C68"/>
+            </a:solidFill>
+          </a:ln>
+        </p:spPr>
+        <p:style>
+          <a:lnRef idx="1">
+            <a:schemeClr val="accent1"/>
+          </a:lnRef>
+          <a:fillRef idx="3">
+            <a:schemeClr val="accent1"/>
+          </a:fillRef>
+          <a:effectRef idx="2">
+            <a:schemeClr val="accent1"/>
+          </a:effectRef>
+          <a:fontRef idx="minor">
+            <a:schemeClr val="lt1"/>
+          </a:fontRef>
+        </p:style>
+        <p:txBody>
+          <a:bodyPr rtlCol="0" anchor="ctr"/>
+          <a:lstStyle/>
+          <a:p>
+            <a:pPr algn="ctr"/>
+          </a:p>
+        </p:txBody>
+      </p:sp>
+      <p:sp>
+        <p:nvSpPr>
           <p:cNvPr id="12" name="TextBox 11"/>
+          <p:cNvSpPr txBox="1"/>
+          <p:nvPr/>
+        </p:nvSpPr>
+        <p:spPr>
+          <a:xfrm>
+            <a:off x="8505825" y="3219450"/>
+            <a:ext cx="2990850" cy="476250"/>
+          </a:xfrm>
+          <a:prstGeom prst="rect">
+            <a:avLst/>
+          </a:prstGeom>
+          <a:noFill/>
+        </p:spPr>
+        <p:txBody>
+          <a:bodyPr wrap="square" lIns="0" rIns="0" tIns="0" bIns="0">
+            <a:spAutoFit/>
+          </a:bodyPr>
+          <a:lstStyle/>
+          <a:p>
+            <a:pPr>
+              <a:lnSpc>
+                <a:spcPct val="118000"/>
+              </a:lnSpc>
+              <a:spcBef>
+                <a:spcPts val="0"/>
+              </a:spcBef>
+              <a:spcAft>
+                <a:spcPts val="0"/>
+              </a:spcAft>
+              <a:defRPr sz="2200" b="1">
+                <a:solidFill>
+                  <a:srgbClr val="146C68"/>
+                </a:solidFill>
+                <a:latin typeface="Lato"/>
+              </a:defRPr>
+            </a:pPr>
+            <a:r>
+              <a:rPr>
+                <a:ea typeface="Microsoft JhengHei"/>
+              </a:rPr>
+              <a:t>Inspect and decide</a:t>
+            </a:r>
+          </a:p>
+        </p:txBody>
+      </p:sp>
+      <p:sp>
+        <p:nvSpPr>
+          <p:cNvPr id="13" name="TextBox 12"/>
+          <p:cNvSpPr txBox="1"/>
+          <p:nvPr/>
+        </p:nvSpPr>
+        <p:spPr>
+          <a:xfrm>
+            <a:off x="8505825" y="3857625"/>
+            <a:ext cx="2990850" cy="742950"/>
+          </a:xfrm>
+          <a:prstGeom prst="rect">
+            <a:avLst/>
+          </a:prstGeom>
+          <a:noFill/>
+        </p:spPr>
+        <p:txBody>
+          <a:bodyPr wrap="square" lIns="0" rIns="0" tIns="0" bIns="0">
+            <a:spAutoFit/>
+          </a:bodyPr>
+          <a:lstStyle/>
+          <a:p>
+            <a:pPr>
+              <a:lnSpc>
+                <a:spcPct val="118000"/>
+              </a:lnSpc>
+              <a:spcBef>
+                <a:spcPts val="0"/>
+              </a:spcBef>
+              <a:spcAft>
+                <a:spcPts val="0"/>
+              </a:spcAft>
+              <a:defRPr sz="2000" b="0">
+                <a:solidFill>
+                  <a:srgbClr val="24384A"/>
+                </a:solidFill>
+                <a:latin typeface="Lato"/>
+              </a:defRPr>
+            </a:pPr>
+            <a:r>
+              <a:rPr>
+                <a:ea typeface="Microsoft JhengHei"/>
+              </a:rPr>
+              <a:t>Read the cited sources</a:t>
+            </a:r>
+          </a:p>
+          <a:p>
+            <a:pPr>
+              <a:lnSpc>
+                <a:spcPct val="118000"/>
+              </a:lnSpc>
+              <a:spcBef>
+                <a:spcPts val="0"/>
+              </a:spcBef>
+              <a:spcAft>
+                <a:spcPts val="0"/>
+              </a:spcAft>
+              <a:defRPr sz="2000" b="0">
+                <a:solidFill>
+                  <a:srgbClr val="24384A"/>
+                </a:solidFill>
+                <a:latin typeface="Lato"/>
+              </a:defRPr>
+            </a:pPr>
+            <a:r>
+              <a:rPr>
+                <a:ea typeface="Microsoft JhengHei"/>
+              </a:rPr>
+              <a:t>Choose what to pursue</a:t>
+            </a:r>
+          </a:p>
+        </p:txBody>
+      </p:sp>
+      <p:cxnSp>
+        <p:nvCxnSpPr>
+          <p:cNvPr id="14" name="Connector 13"/>
+          <p:cNvCxnSpPr/>
+          <p:nvPr/>
+        </p:nvCxnSpPr>
+        <p:spPr>
+          <a:xfrm>
+            <a:off x="3933824" y="3857625"/>
+            <a:ext cx="409575" cy="0"/>
+          </a:xfrm>
+          <a:prstGeom prst="line">
+            <a:avLst/>
+          </a:prstGeom>
+          <a:ln w="19050">
+            <a:solidFill>
+              <a:srgbClr val="526778"/>
+            </a:solidFill>
+            <a:tailEnd type="triangle"/>
+          </a:ln>
+        </p:spPr>
+        <p:style>
+          <a:lnRef idx="2">
+            <a:schemeClr val="accent1"/>
+          </a:lnRef>
+          <a:fillRef idx="0">
+            <a:schemeClr val="accent1"/>
+          </a:fillRef>
+          <a:effectRef idx="1">
+            <a:schemeClr val="accent1"/>
+          </a:effectRef>
+          <a:fontRef idx="minor">
+            <a:schemeClr val="tx1"/>
+          </a:fontRef>
+        </p:style>
+      </p:cxnSp>
+      <p:cxnSp>
+        <p:nvCxnSpPr>
+          <p:cNvPr id="15" name="Connector 14"/>
+          <p:cNvCxnSpPr/>
+          <p:nvPr/>
+        </p:nvCxnSpPr>
+        <p:spPr>
+          <a:xfrm>
+            <a:off x="7839074" y="3857625"/>
+            <a:ext cx="409575" cy="0"/>
+          </a:xfrm>
+          <a:prstGeom prst="line">
+            <a:avLst/>
+          </a:prstGeom>
+          <a:ln w="19050">
+            <a:solidFill>
+              <a:srgbClr val="526778"/>
+            </a:solidFill>
+            <a:tailEnd type="triangle"/>
+          </a:ln>
+        </p:spPr>
+        <p:style>
+          <a:lnRef idx="2">
+            <a:schemeClr val="accent1"/>
+          </a:lnRef>
+          <a:fillRef idx="0">
+            <a:schemeClr val="accent1"/>
+          </a:fillRef>
+          <a:effectRef idx="1">
+            <a:schemeClr val="accent1"/>
+          </a:effectRef>
+          <a:fontRef idx="minor">
+            <a:schemeClr val="tx1"/>
+          </a:fontRef>
+        </p:style>
+      </p:cxnSp>
+      <p:sp>
+        <p:nvSpPr>
+          <p:cNvPr id="16" name="TextBox 15"/>
+          <p:cNvSpPr txBox="1"/>
+          <p:nvPr/>
+        </p:nvSpPr>
+        <p:spPr>
+          <a:xfrm>
+            <a:off x="523874" y="5105400"/>
+            <a:ext cx="2286000" cy="447675"/>
+          </a:xfrm>
+          <a:prstGeom prst="rect">
+            <a:avLst/>
+          </a:prstGeom>
+          <a:noFill/>
+        </p:spPr>
+        <p:txBody>
+          <a:bodyPr wrap="square" lIns="0" rIns="0" tIns="0" bIns="0">
+            <a:spAutoFit/>
+          </a:bodyPr>
+          <a:lstStyle/>
+          <a:p>
+            <a:pPr>
+              <a:lnSpc>
+                <a:spcPct val="118000"/>
+              </a:lnSpc>
+              <a:spcBef>
+                <a:spcPts val="0"/>
+              </a:spcBef>
+              <a:spcAft>
+                <a:spcPts val="0"/>
+              </a:spcAft>
+              <a:defRPr sz="2500" b="1">
+                <a:solidFill>
+                  <a:srgbClr val="146C68"/>
+                </a:solidFill>
+                <a:latin typeface="Lato"/>
+              </a:defRPr>
+            </a:pPr>
+            <a:r>
+              <a:rPr>
+                <a:ea typeface="Microsoft JhengHei"/>
+              </a:rPr>
+              <a:t>Graph</a:t>
+            </a:r>
+          </a:p>
+        </p:txBody>
+      </p:sp>
+      <p:sp>
+        <p:nvSpPr>
+          <p:cNvPr id="17" name="TextBox 16"/>
+          <p:cNvSpPr txBox="1"/>
+          <p:nvPr/>
+        </p:nvSpPr>
+        <p:spPr>
+          <a:xfrm>
+            <a:off x="2762250" y="5105400"/>
+            <a:ext cx="8858250" cy="762000"/>
+          </a:xfrm>
+          <a:prstGeom prst="rect">
+            <a:avLst/>
+          </a:prstGeom>
+          <a:noFill/>
+        </p:spPr>
+        <p:txBody>
+          <a:bodyPr wrap="square" lIns="0" rIns="0" tIns="0" bIns="0">
+            <a:spAutoFit/>
+          </a:bodyPr>
+          <a:lstStyle/>
+          <a:p>
+            <a:pPr>
+              <a:lnSpc>
+                <a:spcPct val="118000"/>
+              </a:lnSpc>
+              <a:spcBef>
+                <a:spcPts val="0"/>
+              </a:spcBef>
+              <a:spcAft>
+                <a:spcPts val="0"/>
+              </a:spcAft>
+              <a:defRPr sz="2300" b="0">
+                <a:solidFill>
+                  <a:srgbClr val="24384A"/>
+                </a:solidFill>
+                <a:latin typeface="Lato"/>
+              </a:defRPr>
+            </a:pPr>
+            <a:r>
+              <a:rPr>
+                <a:ea typeface="Microsoft JhengHei"/>
+              </a:rPr>
+              <a:t>Keeps proposals linked to passages, checks and researcher decisions.</a:t>
+            </a:r>
+          </a:p>
+        </p:txBody>
+      </p:sp>
+      <p:sp>
+        <p:nvSpPr>
+          <p:cNvPr id="18" name="TextBox 17"/>
+          <p:cNvSpPr txBox="1"/>
+          <p:nvPr/>
+        </p:nvSpPr>
+        <p:spPr>
+          <a:xfrm>
+            <a:off x="523874" y="5962650"/>
+            <a:ext cx="11049000" cy="390525"/>
+          </a:xfrm>
+          <a:prstGeom prst="rect">
+            <a:avLst/>
+          </a:prstGeom>
+          <a:noFill/>
+        </p:spPr>
+        <p:txBody>
+          <a:bodyPr wrap="square" lIns="0" rIns="0" tIns="0" bIns="0">
+            <a:spAutoFit/>
+          </a:bodyPr>
+          <a:lstStyle/>
+          <a:p>
+            <a:pPr>
+              <a:lnSpc>
+                <a:spcPct val="118000"/>
+              </a:lnSpc>
+              <a:spcBef>
+                <a:spcPts val="0"/>
+              </a:spcBef>
+              <a:spcAft>
+                <a:spcPts val="0"/>
+              </a:spcAft>
+              <a:defRPr sz="2200" b="0">
+                <a:solidFill>
+                  <a:srgbClr val="526778"/>
+                </a:solidFill>
+                <a:latin typeface="Lato"/>
+              </a:defRPr>
+            </a:pPr>
+            <a:r>
+              <a:rPr>
+                <a:ea typeface="Microsoft JhengHei"/>
+              </a:rPr>
+              <a:t>A citation that resolves can still support a weak interpretation.</a:t>
+            </a:r>
+          </a:p>
+        </p:txBody>
+      </p:sp>
+      <p:sp>
+        <p:nvSpPr>
+          <p:cNvPr id="19" name="Rectangle 18"/>
+          <p:cNvSpPr/>
+          <p:nvPr/>
+        </p:nvSpPr>
+        <p:spPr>
+          <a:xfrm>
+            <a:off x="11334750" y="6429375"/>
+            <a:ext cx="647700" cy="333375"/>
+          </a:xfrm>
+          <a:prstGeom prst="rect">
+            <a:avLst/>
+          </a:prstGeom>
+          <a:solidFill>
+            <a:srgbClr val="24384A"/>
+          </a:solidFill>
+          <a:ln w="12700">
+            <a:solidFill>
+              <a:srgbClr val="24384A"/>
+            </a:solidFill>
+          </a:ln>
+        </p:spPr>
+        <p:style>
+          <a:lnRef idx="1">
+            <a:schemeClr val="accent1"/>
+          </a:lnRef>
+          <a:fillRef idx="3">
+            <a:schemeClr val="accent1"/>
+          </a:fillRef>
+          <a:effectRef idx="2">
+            <a:schemeClr val="accent1"/>
+          </a:effectRef>
+          <a:fontRef idx="minor">
+            <a:schemeClr val="lt1"/>
+          </a:fontRef>
+        </p:style>
+        <p:txBody>
+          <a:bodyPr rtlCol="0" anchor="ctr"/>
+          <a:lstStyle/>
+          <a:p>
+            <a:pPr algn="ctr"/>
+          </a:p>
+        </p:txBody>
+      </p:sp>
+      <p:sp>
+        <p:nvSpPr>
+          <p:cNvPr id="20" name="TextBox 19"/>
           <p:cNvSpPr txBox="1"/>
           <p:nvPr/>
         </p:nvSpPr>

--- a/docs/presentation/cohort-pnc-2026.pptx
+++ b/docs/presentation/cohort-pnc-2026.pptx
@@ -1060,6 +1060,12 @@
               <a:t>This compares a text against pooled groups using string counts, not embeddings. Use the live view for exclusions. Source passages are hidden in the screenshot. </a:t>
             </a:r>
           </a:p>
+          <a:p/>
+          <a:p>
+            <a:r>
+              <a:t>VISUAL: The screenshot orients the audience; the diagram explains the operation. Read the diagram first. Its arrows show UI workflow, not evidence-graph edge types. In Corpus the two top boxes are alternative search modes; in Vocabulary comparison and Inquiry they are inputs used together.</a:t>
+            </a:r>
+          </a:p>
         </p:txBody>
       </p:sp>
       <p:sp>
@@ -1309,6 +1315,12 @@
               <a:t>Show the distinction between a research question and research instructions. The screenshot shows an unsent draft; no new model run was started. Run history was hidden for this capture. </a:t>
             </a:r>
           </a:p>
+          <a:p/>
+          <a:p>
+            <a:r>
+              <a:t>VISUAL: The screenshot orients the audience; the diagram explains the operation. Read the diagram first. Its arrows show UI workflow, not evidence-graph edge types. In Corpus the two top boxes are alternative search modes; in Vocabulary comparison and Inquiry they are inputs used together.</a:t>
+            </a:r>
+          </a:p>
         </p:txBody>
       </p:sp>
       <p:sp>
@@ -1491,6 +1503,12 @@
               <a:t>These are saved proposals, not established conclusions. The conjecture review found weaknesses; do not imply attested means correct. No proposal was accepted for the screenshot. </a:t>
             </a:r>
           </a:p>
+          <a:p/>
+          <a:p>
+            <a:r>
+              <a:t>VISUAL: The screenshot orients the audience; the diagram explains the operation. Read the diagram first. Its arrows show UI workflow, not evidence-graph edge types. In Corpus the two top boxes are alternative search modes; in Vocabulary comparison and Inquiry they are inputs used together.</a:t>
+            </a:r>
+          </a:p>
         </p:txBody>
       </p:sp>
       <p:sp>
@@ -1636,6 +1654,12 @@
           </a:p>
           <a:p/>
           <a:p/>
+          <a:p/>
+          <a:p>
+            <a:r>
+              <a:t>VISUAL: The screenshot orients the audience; the diagram explains the operation. Read the diagram first. Its arrows show UI workflow, not evidence-graph edge types. In Corpus the two top boxes are alternative search modes; in Vocabulary comparison and Inquiry they are inputs used together.</a:t>
+            </a:r>
+          </a:p>
         </p:txBody>
       </p:sp>
       <p:sp>
@@ -2784,6 +2808,12 @@
           <a:p>
             <a:r>
               <a:t>The selected passage is on the left; related results scroll on the right. This is the stored-embedding mode, not exact-phrase search. Source text is hidden in the screenshot. </a:t>
+            </a:r>
+          </a:p>
+          <a:p/>
+          <a:p>
+            <a:r>
+              <a:t>VISUAL: The screenshot orients the audience; the diagram explains the operation. Read the diagram first. Its arrows show UI workflow, not evidence-graph edge types. In Corpus the two top boxes are alternative search modes; in Vocabulary comparison and Inquiry they are inputs used together.</a:t>
             </a:r>
           </a:p>
         </p:txBody>
@@ -7465,369 +7495,9 @@
           </a:p>
         </p:txBody>
       </p:sp>
-      <p:pic>
-        <p:nvPicPr>
-          <p:cNvPr id="4" name="Picture 3" descr="vocabulary.png"/>
-          <p:cNvPicPr>
-            <a:picLocks noChangeAspect="1"/>
-          </p:cNvPicPr>
-          <p:nvPr/>
-        </p:nvPicPr>
-        <p:blipFill>
-          <a:blip r:embed="rId2"/>
-          <a:stretch>
-            <a:fillRect/>
-          </a:stretch>
-        </p:blipFill>
-        <p:spPr>
-          <a:xfrm>
-            <a:off x="495299" y="1809750"/>
-            <a:ext cx="8381999" cy="4657725"/>
-          </a:xfrm>
-          <a:prstGeom prst="rect">
-            <a:avLst/>
-          </a:prstGeom>
-        </p:spPr>
-      </p:pic>
-      <p:sp>
-        <p:nvSpPr>
-          <p:cNvPr id="5" name="TextBox 4"/>
-          <p:cNvSpPr txBox="1"/>
-          <p:nvPr/>
-        </p:nvSpPr>
-        <p:spPr>
-          <a:xfrm>
-            <a:off x="9372600" y="1943100"/>
-            <a:ext cx="2324100" cy="371475"/>
-          </a:xfrm>
-          <a:prstGeom prst="rect">
-            <a:avLst/>
-          </a:prstGeom>
-          <a:noFill/>
-        </p:spPr>
-        <p:txBody>
-          <a:bodyPr wrap="square" lIns="0" rIns="0" tIns="0" bIns="0">
-            <a:spAutoFit/>
-          </a:bodyPr>
-          <a:lstStyle/>
-          <a:p>
-            <a:pPr>
-              <a:lnSpc>
-                <a:spcPct val="118000"/>
-              </a:lnSpc>
-              <a:spcBef>
-                <a:spcPts val="0"/>
-              </a:spcBef>
-              <a:spcAft>
-                <a:spcPts val="0"/>
-              </a:spcAft>
-              <a:defRPr sz="2000" b="1">
-                <a:solidFill>
-                  <a:srgbClr val="80511B"/>
-                </a:solidFill>
-                <a:latin typeface="Lato"/>
-              </a:defRPr>
-            </a:pPr>
-            <a:r>
-              <a:rPr>
-                <a:ea typeface="Microsoft JhengHei"/>
-              </a:rPr>
-              <a:t>Rankings</a:t>
-            </a:r>
-          </a:p>
-        </p:txBody>
-      </p:sp>
-      <p:sp>
-        <p:nvSpPr>
-          <p:cNvPr id="6" name="TextBox 5"/>
-          <p:cNvSpPr txBox="1"/>
-          <p:nvPr/>
-        </p:nvSpPr>
-        <p:spPr>
-          <a:xfrm>
-            <a:off x="9372600" y="2352675"/>
-            <a:ext cx="2324100" cy="895350"/>
-          </a:xfrm>
-          <a:prstGeom prst="rect">
-            <a:avLst/>
-          </a:prstGeom>
-          <a:noFill/>
-        </p:spPr>
-        <p:txBody>
-          <a:bodyPr wrap="square" lIns="0" rIns="0" tIns="0" bIns="0">
-            <a:spAutoFit/>
-          </a:bodyPr>
-          <a:lstStyle/>
-          <a:p>
-            <a:pPr>
-              <a:lnSpc>
-                <a:spcPct val="118000"/>
-              </a:lnSpc>
-              <a:spcBef>
-                <a:spcPts val="0"/>
-              </a:spcBef>
-              <a:spcAft>
-                <a:spcPts val="0"/>
-              </a:spcAft>
-              <a:defRPr sz="1800" b="0">
-                <a:solidFill>
-                  <a:srgbClr val="24384A"/>
-                </a:solidFill>
-                <a:latin typeface="Lato"/>
-              </a:defRPr>
-            </a:pPr>
-            <a:r>
-              <a:rPr>
-                <a:ea typeface="Microsoft JhengHei"/>
-              </a:rPr>
-              <a:t>Which group’s string frequencies resemble this text?</a:t>
-            </a:r>
-          </a:p>
-        </p:txBody>
-      </p:sp>
-      <p:sp>
-        <p:nvSpPr>
-          <p:cNvPr id="7" name="TextBox 6"/>
-          <p:cNvSpPr txBox="1"/>
-          <p:nvPr/>
-        </p:nvSpPr>
-        <p:spPr>
-          <a:xfrm>
-            <a:off x="9372600" y="3305175"/>
-            <a:ext cx="2324100" cy="371475"/>
-          </a:xfrm>
-          <a:prstGeom prst="rect">
-            <a:avLst/>
-          </a:prstGeom>
-          <a:noFill/>
-        </p:spPr>
-        <p:txBody>
-          <a:bodyPr wrap="square" lIns="0" rIns="0" tIns="0" bIns="0">
-            <a:spAutoFit/>
-          </a:bodyPr>
-          <a:lstStyle/>
-          <a:p>
-            <a:pPr>
-              <a:lnSpc>
-                <a:spcPct val="118000"/>
-              </a:lnSpc>
-              <a:spcBef>
-                <a:spcPts val="0"/>
-              </a:spcBef>
-              <a:spcAft>
-                <a:spcPts val="0"/>
-              </a:spcAft>
-              <a:defRPr sz="2000" b="1">
-                <a:solidFill>
-                  <a:srgbClr val="80511B"/>
-                </a:solidFill>
-                <a:latin typeface="Lato"/>
-              </a:defRPr>
-            </a:pPr>
-            <a:r>
-              <a:rPr>
-                <a:ea typeface="Microsoft JhengHei"/>
-              </a:rPr>
-              <a:t>Colours</a:t>
-            </a:r>
-          </a:p>
-        </p:txBody>
-      </p:sp>
-      <p:sp>
-        <p:nvSpPr>
-          <p:cNvPr id="8" name="TextBox 7"/>
-          <p:cNvSpPr txBox="1"/>
-          <p:nvPr/>
-        </p:nvSpPr>
-        <p:spPr>
-          <a:xfrm>
-            <a:off x="9372600" y="3714750"/>
-            <a:ext cx="2324100" cy="895350"/>
-          </a:xfrm>
-          <a:prstGeom prst="rect">
-            <a:avLst/>
-          </a:prstGeom>
-          <a:noFill/>
-        </p:spPr>
-        <p:txBody>
-          <a:bodyPr wrap="square" lIns="0" rIns="0" tIns="0" bIns="0">
-            <a:spAutoFit/>
-          </a:bodyPr>
-          <a:lstStyle/>
-          <a:p>
-            <a:pPr>
-              <a:lnSpc>
-                <a:spcPct val="118000"/>
-              </a:lnSpc>
-              <a:spcBef>
-                <a:spcPts val="0"/>
-              </a:spcBef>
-              <a:spcAft>
-                <a:spcPts val="0"/>
-              </a:spcAft>
-              <a:defRPr sz="1800" b="0">
-                <a:solidFill>
-                  <a:srgbClr val="24384A"/>
-                </a:solidFill>
-                <a:latin typeface="Lato"/>
-              </a:defRPr>
-            </a:pPr>
-            <a:r>
-              <a:rPr>
-                <a:ea typeface="Microsoft JhengHei"/>
-              </a:rPr>
-              <a:t>Teal adds weight to A; rust adds weight to B.</a:t>
-            </a:r>
-          </a:p>
-        </p:txBody>
-      </p:sp>
-      <p:sp>
-        <p:nvSpPr>
-          <p:cNvPr id="9" name="TextBox 8"/>
-          <p:cNvSpPr txBox="1"/>
-          <p:nvPr/>
-        </p:nvSpPr>
-        <p:spPr>
-          <a:xfrm>
-            <a:off x="9372600" y="4667250"/>
-            <a:ext cx="2324100" cy="371475"/>
-          </a:xfrm>
-          <a:prstGeom prst="rect">
-            <a:avLst/>
-          </a:prstGeom>
-          <a:noFill/>
-        </p:spPr>
-        <p:txBody>
-          <a:bodyPr wrap="square" lIns="0" rIns="0" tIns="0" bIns="0">
-            <a:spAutoFit/>
-          </a:bodyPr>
-          <a:lstStyle/>
-          <a:p>
-            <a:pPr>
-              <a:lnSpc>
-                <a:spcPct val="118000"/>
-              </a:lnSpc>
-              <a:spcBef>
-                <a:spcPts val="0"/>
-              </a:spcBef>
-              <a:spcAft>
-                <a:spcPts val="0"/>
-              </a:spcAft>
-              <a:defRPr sz="2000" b="1">
-                <a:solidFill>
-                  <a:srgbClr val="80511B"/>
-                </a:solidFill>
-                <a:latin typeface="Lato"/>
-              </a:defRPr>
-            </a:pPr>
-            <a:r>
-              <a:rPr>
-                <a:ea typeface="Microsoft JhengHei"/>
-              </a:rPr>
-              <a:t>Exclusions</a:t>
-            </a:r>
-          </a:p>
-        </p:txBody>
-      </p:sp>
-      <p:sp>
-        <p:nvSpPr>
-          <p:cNvPr id="10" name="TextBox 9"/>
-          <p:cNvSpPr txBox="1"/>
-          <p:nvPr/>
-        </p:nvSpPr>
-        <p:spPr>
-          <a:xfrm>
-            <a:off x="9372600" y="5076825"/>
-            <a:ext cx="2324100" cy="895350"/>
-          </a:xfrm>
-          <a:prstGeom prst="rect">
-            <a:avLst/>
-          </a:prstGeom>
-          <a:noFill/>
-        </p:spPr>
-        <p:txBody>
-          <a:bodyPr wrap="square" lIns="0" rIns="0" tIns="0" bIns="0">
-            <a:spAutoFit/>
-          </a:bodyPr>
-          <a:lstStyle/>
-          <a:p>
-            <a:pPr>
-              <a:lnSpc>
-                <a:spcPct val="118000"/>
-              </a:lnSpc>
-              <a:spcBef>
-                <a:spcPts val="0"/>
-              </a:spcBef>
-              <a:spcAft>
-                <a:spcPts val="0"/>
-              </a:spcAft>
-              <a:defRPr sz="1800" b="0">
-                <a:solidFill>
-                  <a:srgbClr val="24384A"/>
-                </a:solidFill>
-                <a:latin typeface="Lato"/>
-              </a:defRPr>
-            </a:pPr>
-            <a:r>
-              <a:rPr>
-                <a:ea typeface="Microsoft JhengHei"/>
-              </a:rPr>
-              <a:t>Remove comparison material and calculate again.</a:t>
-            </a:r>
-          </a:p>
-        </p:txBody>
-      </p:sp>
-      <p:sp>
-        <p:nvSpPr>
-          <p:cNvPr id="11" name="TextBox 10"/>
-          <p:cNvSpPr txBox="1"/>
-          <p:nvPr/>
-        </p:nvSpPr>
-        <p:spPr>
-          <a:xfrm>
-            <a:off x="533400" y="6486525"/>
-            <a:ext cx="8334375" cy="209550"/>
-          </a:xfrm>
-          <a:prstGeom prst="rect">
-            <a:avLst/>
-          </a:prstGeom>
-          <a:noFill/>
-        </p:spPr>
-        <p:txBody>
-          <a:bodyPr wrap="square" lIns="0" rIns="0" tIns="0" bIns="0">
-            <a:spAutoFit/>
-          </a:bodyPr>
-          <a:lstStyle/>
-          <a:p>
-            <a:pPr>
-              <a:lnSpc>
-                <a:spcPct val="118000"/>
-              </a:lnSpc>
-              <a:spcBef>
-                <a:spcPts val="0"/>
-              </a:spcBef>
-              <a:spcAft>
-                <a:spcPts val="0"/>
-              </a:spcAft>
-              <a:defRPr sz="1000" b="0">
-                <a:solidFill>
-                  <a:srgbClr val="526778"/>
-                </a:solidFill>
-                <a:latin typeface="Lato"/>
-              </a:defRPr>
-            </a:pPr>
-            <a:r>
-              <a:rPr>
-                <a:ea typeface="Microsoft JhengHei"/>
-              </a:rPr>
-              <a:t>Source passages hidden; controls and recorded outputs retained.</a:t>
-            </a:r>
-          </a:p>
-        </p:txBody>
-      </p:sp>
-      <p:sp>
-        <p:nvSpPr>
-          <p:cNvPr id="12" name="Rectangle 11"/>
+      <p:sp>
+        <p:nvSpPr>
+          <p:cNvPr id="4" name="Rectangle 3"/>
           <p:cNvSpPr/>
           <p:nvPr/>
         </p:nvSpPr>
@@ -7872,7 +7542,7 @@
       </p:sp>
       <p:sp>
         <p:nvSpPr>
-          <p:cNvPr id="13" name="TextBox 12"/>
+          <p:cNvPr id="5" name="TextBox 4"/>
           <p:cNvSpPr txBox="1"/>
           <p:nvPr/>
         </p:nvSpPr>
@@ -7914,6 +7584,750 @@
                 <a:ea typeface="Microsoft JhengHei"/>
               </a:rPr>
               <a:t>11</a:t>
+            </a:r>
+          </a:p>
+        </p:txBody>
+      </p:sp>
+      <p:pic>
+        <p:nvPicPr>
+          <p:cNvPr id="6" name="Picture 5" descr="vocabulary.png"/>
+          <p:cNvPicPr>
+            <a:picLocks noChangeAspect="1"/>
+          </p:cNvPicPr>
+          <p:nvPr/>
+        </p:nvPicPr>
+        <p:blipFill>
+          <a:blip r:embed="rId2"/>
+          <a:stretch>
+            <a:fillRect/>
+          </a:stretch>
+        </p:blipFill>
+        <p:spPr>
+          <a:xfrm>
+            <a:off x="495299" y="2057400"/>
+            <a:ext cx="6477000" cy="3600450"/>
+          </a:xfrm>
+          <a:prstGeom prst="rect">
+            <a:avLst/>
+          </a:prstGeom>
+        </p:spPr>
+      </p:pic>
+      <p:sp>
+        <p:nvSpPr>
+          <p:cNvPr id="7" name="TextBox 6"/>
+          <p:cNvSpPr txBox="1"/>
+          <p:nvPr/>
+        </p:nvSpPr>
+        <p:spPr>
+          <a:xfrm>
+            <a:off x="523874" y="1762125"/>
+            <a:ext cx="6477000" cy="276225"/>
+          </a:xfrm>
+          <a:prstGeom prst="rect">
+            <a:avLst/>
+          </a:prstGeom>
+          <a:noFill/>
+        </p:spPr>
+        <p:txBody>
+          <a:bodyPr wrap="square" lIns="0" rIns="0" tIns="0" bIns="0">
+            <a:spAutoFit/>
+          </a:bodyPr>
+          <a:lstStyle/>
+          <a:p>
+            <a:pPr>
+              <a:lnSpc>
+                <a:spcPct val="118000"/>
+              </a:lnSpc>
+              <a:spcBef>
+                <a:spcPts val="0"/>
+              </a:spcBef>
+              <a:spcAft>
+                <a:spcPts val="0"/>
+              </a:spcAft>
+              <a:defRPr sz="1300" b="0">
+                <a:solidFill>
+                  <a:srgbClr val="526778"/>
+                </a:solidFill>
+                <a:latin typeface="Lato"/>
+              </a:defRPr>
+            </a:pPr>
+            <a:r>
+              <a:rPr>
+                <a:ea typeface="Microsoft JhengHei"/>
+              </a:rPr>
+              <a:t>Interface</a:t>
+            </a:r>
+          </a:p>
+        </p:txBody>
+      </p:sp>
+      <p:sp>
+        <p:nvSpPr>
+          <p:cNvPr id="8" name="TextBox 7"/>
+          <p:cNvSpPr txBox="1"/>
+          <p:nvPr/>
+        </p:nvSpPr>
+        <p:spPr>
+          <a:xfrm>
+            <a:off x="7477125" y="1762125"/>
+            <a:ext cx="4048124" cy="276225"/>
+          </a:xfrm>
+          <a:prstGeom prst="rect">
+            <a:avLst/>
+          </a:prstGeom>
+          <a:noFill/>
+        </p:spPr>
+        <p:txBody>
+          <a:bodyPr wrap="square" lIns="0" rIns="0" tIns="0" bIns="0">
+            <a:spAutoFit/>
+          </a:bodyPr>
+          <a:lstStyle/>
+          <a:p>
+            <a:pPr>
+              <a:lnSpc>
+                <a:spcPct val="118000"/>
+              </a:lnSpc>
+              <a:spcBef>
+                <a:spcPts val="0"/>
+              </a:spcBef>
+              <a:spcAft>
+                <a:spcPts val="0"/>
+              </a:spcAft>
+              <a:defRPr sz="1300" b="0">
+                <a:solidFill>
+                  <a:srgbClr val="526778"/>
+                </a:solidFill>
+                <a:latin typeface="Lato"/>
+              </a:defRPr>
+            </a:pPr>
+            <a:r>
+              <a:rPr>
+                <a:ea typeface="Microsoft JhengHei"/>
+              </a:rPr>
+              <a:t>How to use it</a:t>
+            </a:r>
+          </a:p>
+        </p:txBody>
+      </p:sp>
+      <p:sp>
+        <p:nvSpPr>
+          <p:cNvPr id="9" name="Rectangle 8"/>
+          <p:cNvSpPr/>
+          <p:nvPr/>
+        </p:nvSpPr>
+        <p:spPr>
+          <a:xfrm>
+            <a:off x="7477125" y="2190750"/>
+            <a:ext cx="1905000" cy="762000"/>
+          </a:xfrm>
+          <a:prstGeom prst="rect">
+            <a:avLst/>
+          </a:prstGeom>
+          <a:solidFill>
+            <a:srgbClr val="FFFFFF"/>
+          </a:solidFill>
+          <a:ln w="12700">
+            <a:solidFill>
+              <a:srgbClr val="80511B"/>
+            </a:solidFill>
+          </a:ln>
+        </p:spPr>
+        <p:style>
+          <a:lnRef idx="1">
+            <a:schemeClr val="accent1"/>
+          </a:lnRef>
+          <a:fillRef idx="3">
+            <a:schemeClr val="accent1"/>
+          </a:fillRef>
+          <a:effectRef idx="2">
+            <a:schemeClr val="accent1"/>
+          </a:effectRef>
+          <a:fontRef idx="minor">
+            <a:schemeClr val="lt1"/>
+          </a:fontRef>
+        </p:style>
+        <p:txBody>
+          <a:bodyPr rtlCol="0" anchor="ctr"/>
+          <a:lstStyle/>
+          <a:p>
+            <a:pPr algn="ctr"/>
+          </a:p>
+        </p:txBody>
+      </p:sp>
+      <p:sp>
+        <p:nvSpPr>
+          <p:cNvPr id="10" name="TextBox 9"/>
+          <p:cNvSpPr txBox="1"/>
+          <p:nvPr/>
+        </p:nvSpPr>
+        <p:spPr>
+          <a:xfrm>
+            <a:off x="7620000" y="2333625"/>
+            <a:ext cx="1619250" cy="571500"/>
+          </a:xfrm>
+          <a:prstGeom prst="rect">
+            <a:avLst/>
+          </a:prstGeom>
+          <a:noFill/>
+        </p:spPr>
+        <p:txBody>
+          <a:bodyPr wrap="square" lIns="0" rIns="0" tIns="0" bIns="0">
+            <a:spAutoFit/>
+          </a:bodyPr>
+          <a:lstStyle/>
+          <a:p>
+            <a:pPr>
+              <a:lnSpc>
+                <a:spcPct val="118000"/>
+              </a:lnSpc>
+              <a:spcBef>
+                <a:spcPts val="0"/>
+              </a:spcBef>
+              <a:spcAft>
+                <a:spcPts val="0"/>
+              </a:spcAft>
+              <a:defRPr sz="1900" b="1">
+                <a:solidFill>
+                  <a:srgbClr val="80511B"/>
+                </a:solidFill>
+                <a:latin typeface="Lato"/>
+              </a:defRPr>
+            </a:pPr>
+            <a:r>
+              <a:rPr>
+                <a:ea typeface="Microsoft JhengHei"/>
+              </a:rPr>
+              <a:t>Target + strings</a:t>
+            </a:r>
+          </a:p>
+        </p:txBody>
+      </p:sp>
+      <p:sp>
+        <p:nvSpPr>
+          <p:cNvPr id="11" name="Rectangle 10"/>
+          <p:cNvSpPr/>
+          <p:nvPr/>
+        </p:nvSpPr>
+        <p:spPr>
+          <a:xfrm>
+            <a:off x="9667875" y="2190750"/>
+            <a:ext cx="2000250" cy="762000"/>
+          </a:xfrm>
+          <a:prstGeom prst="rect">
+            <a:avLst/>
+          </a:prstGeom>
+          <a:solidFill>
+            <a:srgbClr val="FFFFFF"/>
+          </a:solidFill>
+          <a:ln w="12700">
+            <a:solidFill>
+              <a:srgbClr val="80511B"/>
+            </a:solidFill>
+          </a:ln>
+        </p:spPr>
+        <p:style>
+          <a:lnRef idx="1">
+            <a:schemeClr val="accent1"/>
+          </a:lnRef>
+          <a:fillRef idx="3">
+            <a:schemeClr val="accent1"/>
+          </a:fillRef>
+          <a:effectRef idx="2">
+            <a:schemeClr val="accent1"/>
+          </a:effectRef>
+          <a:fontRef idx="minor">
+            <a:schemeClr val="lt1"/>
+          </a:fontRef>
+        </p:style>
+        <p:txBody>
+          <a:bodyPr rtlCol="0" anchor="ctr"/>
+          <a:lstStyle/>
+          <a:p>
+            <a:pPr algn="ctr"/>
+          </a:p>
+        </p:txBody>
+      </p:sp>
+      <p:sp>
+        <p:nvSpPr>
+          <p:cNvPr id="12" name="TextBox 11"/>
+          <p:cNvSpPr txBox="1"/>
+          <p:nvPr/>
+        </p:nvSpPr>
+        <p:spPr>
+          <a:xfrm>
+            <a:off x="9810750" y="2333625"/>
+            <a:ext cx="1714500" cy="571500"/>
+          </a:xfrm>
+          <a:prstGeom prst="rect">
+            <a:avLst/>
+          </a:prstGeom>
+          <a:noFill/>
+        </p:spPr>
+        <p:txBody>
+          <a:bodyPr wrap="square" lIns="0" rIns="0" tIns="0" bIns="0">
+            <a:spAutoFit/>
+          </a:bodyPr>
+          <a:lstStyle/>
+          <a:p>
+            <a:pPr>
+              <a:lnSpc>
+                <a:spcPct val="118000"/>
+              </a:lnSpc>
+              <a:spcBef>
+                <a:spcPts val="0"/>
+              </a:spcBef>
+              <a:spcAft>
+                <a:spcPts val="0"/>
+              </a:spcAft>
+              <a:defRPr sz="1900" b="1">
+                <a:solidFill>
+                  <a:srgbClr val="80511B"/>
+                </a:solidFill>
+                <a:latin typeface="Lato"/>
+              </a:defRPr>
+            </a:pPr>
+            <a:r>
+              <a:rPr>
+                <a:ea typeface="Microsoft JhengHei"/>
+              </a:rPr>
+              <a:t>Labelled texts</a:t>
+            </a:r>
+          </a:p>
+        </p:txBody>
+      </p:sp>
+      <p:cxnSp>
+        <p:nvCxnSpPr>
+          <p:cNvPr id="13" name="Connector 12"/>
+          <p:cNvCxnSpPr/>
+          <p:nvPr/>
+        </p:nvCxnSpPr>
+        <p:spPr>
+          <a:xfrm>
+            <a:off x="8429625" y="3028950"/>
+            <a:ext cx="1095375" cy="400050"/>
+          </a:xfrm>
+          <a:prstGeom prst="line">
+            <a:avLst/>
+          </a:prstGeom>
+          <a:ln w="19050">
+            <a:solidFill>
+              <a:srgbClr val="526778"/>
+            </a:solidFill>
+            <a:tailEnd type="triangle"/>
+          </a:ln>
+        </p:spPr>
+        <p:style>
+          <a:lnRef idx="2">
+            <a:schemeClr val="accent1"/>
+          </a:lnRef>
+          <a:fillRef idx="0">
+            <a:schemeClr val="accent1"/>
+          </a:fillRef>
+          <a:effectRef idx="1">
+            <a:schemeClr val="accent1"/>
+          </a:effectRef>
+          <a:fontRef idx="minor">
+            <a:schemeClr val="tx1"/>
+          </a:fontRef>
+        </p:style>
+      </p:cxnSp>
+      <p:cxnSp>
+        <p:nvCxnSpPr>
+          <p:cNvPr id="14" name="Connector 13"/>
+          <p:cNvCxnSpPr/>
+          <p:nvPr/>
+        </p:nvCxnSpPr>
+        <p:spPr>
+          <a:xfrm flipH="1">
+            <a:off x="9525000" y="3028950"/>
+            <a:ext cx="1143000" cy="400050"/>
+          </a:xfrm>
+          <a:prstGeom prst="line">
+            <a:avLst/>
+          </a:prstGeom>
+          <a:ln w="19050">
+            <a:solidFill>
+              <a:srgbClr val="526778"/>
+            </a:solidFill>
+            <a:tailEnd type="triangle"/>
+          </a:ln>
+        </p:spPr>
+        <p:style>
+          <a:lnRef idx="2">
+            <a:schemeClr val="accent1"/>
+          </a:lnRef>
+          <a:fillRef idx="0">
+            <a:schemeClr val="accent1"/>
+          </a:fillRef>
+          <a:effectRef idx="1">
+            <a:schemeClr val="accent1"/>
+          </a:effectRef>
+          <a:fontRef idx="minor">
+            <a:schemeClr val="tx1"/>
+          </a:fontRef>
+        </p:style>
+      </p:cxnSp>
+      <p:sp>
+        <p:nvSpPr>
+          <p:cNvPr id="15" name="Rectangle 14"/>
+          <p:cNvSpPr/>
+          <p:nvPr/>
+        </p:nvSpPr>
+        <p:spPr>
+          <a:xfrm>
+            <a:off x="7477125" y="3590925"/>
+            <a:ext cx="4190999" cy="762000"/>
+          </a:xfrm>
+          <a:prstGeom prst="rect">
+            <a:avLst/>
+          </a:prstGeom>
+          <a:solidFill>
+            <a:srgbClr val="FFFFFF"/>
+          </a:solidFill>
+          <a:ln w="12700">
+            <a:solidFill>
+              <a:srgbClr val="80511B"/>
+            </a:solidFill>
+          </a:ln>
+        </p:spPr>
+        <p:style>
+          <a:lnRef idx="1">
+            <a:schemeClr val="accent1"/>
+          </a:lnRef>
+          <a:fillRef idx="3">
+            <a:schemeClr val="accent1"/>
+          </a:fillRef>
+          <a:effectRef idx="2">
+            <a:schemeClr val="accent1"/>
+          </a:effectRef>
+          <a:fontRef idx="minor">
+            <a:schemeClr val="lt1"/>
+          </a:fontRef>
+        </p:style>
+        <p:txBody>
+          <a:bodyPr rtlCol="0" anchor="ctr"/>
+          <a:lstStyle/>
+          <a:p>
+            <a:pPr algn="ctr"/>
+          </a:p>
+        </p:txBody>
+      </p:sp>
+      <p:sp>
+        <p:nvSpPr>
+          <p:cNvPr id="16" name="TextBox 15"/>
+          <p:cNvSpPr txBox="1"/>
+          <p:nvPr/>
+        </p:nvSpPr>
+        <p:spPr>
+          <a:xfrm>
+            <a:off x="7620000" y="3733799"/>
+            <a:ext cx="3905249" cy="571500"/>
+          </a:xfrm>
+          <a:prstGeom prst="rect">
+            <a:avLst/>
+          </a:prstGeom>
+          <a:noFill/>
+        </p:spPr>
+        <p:txBody>
+          <a:bodyPr wrap="square" lIns="0" rIns="0" tIns="0" bIns="0">
+            <a:spAutoFit/>
+          </a:bodyPr>
+          <a:lstStyle/>
+          <a:p>
+            <a:pPr>
+              <a:lnSpc>
+                <a:spcPct val="118000"/>
+              </a:lnSpc>
+              <a:spcBef>
+                <a:spcPts val="0"/>
+              </a:spcBef>
+              <a:spcAft>
+                <a:spcPts val="0"/>
+              </a:spcAft>
+              <a:defRPr sz="1900" b="1">
+                <a:solidFill>
+                  <a:srgbClr val="80511B"/>
+                </a:solidFill>
+                <a:latin typeface="Lato"/>
+              </a:defRPr>
+            </a:pPr>
+            <a:r>
+              <a:rPr>
+                <a:ea typeface="Microsoft JhengHei"/>
+              </a:rPr>
+              <a:t>Compare string frequencies</a:t>
+            </a:r>
+          </a:p>
+        </p:txBody>
+      </p:sp>
+      <p:cxnSp>
+        <p:nvCxnSpPr>
+          <p:cNvPr id="17" name="Connector 16"/>
+          <p:cNvCxnSpPr/>
+          <p:nvPr/>
+        </p:nvCxnSpPr>
+        <p:spPr>
+          <a:xfrm>
+            <a:off x="9572625" y="4419600"/>
+            <a:ext cx="0" cy="371475"/>
+          </a:xfrm>
+          <a:prstGeom prst="line">
+            <a:avLst/>
+          </a:prstGeom>
+          <a:ln w="19050">
+            <a:solidFill>
+              <a:srgbClr val="526778"/>
+            </a:solidFill>
+            <a:tailEnd type="triangle"/>
+          </a:ln>
+        </p:spPr>
+        <p:style>
+          <a:lnRef idx="2">
+            <a:schemeClr val="accent1"/>
+          </a:lnRef>
+          <a:fillRef idx="0">
+            <a:schemeClr val="accent1"/>
+          </a:fillRef>
+          <a:effectRef idx="1">
+            <a:schemeClr val="accent1"/>
+          </a:effectRef>
+          <a:fontRef idx="minor">
+            <a:schemeClr val="tx1"/>
+          </a:fontRef>
+        </p:style>
+      </p:cxnSp>
+      <p:sp>
+        <p:nvSpPr>
+          <p:cNvPr id="18" name="Rectangle 17"/>
+          <p:cNvSpPr/>
+          <p:nvPr/>
+        </p:nvSpPr>
+        <p:spPr>
+          <a:xfrm>
+            <a:off x="7477125" y="4953000"/>
+            <a:ext cx="4190999" cy="762000"/>
+          </a:xfrm>
+          <a:prstGeom prst="rect">
+            <a:avLst/>
+          </a:prstGeom>
+          <a:solidFill>
+            <a:srgbClr val="FFFFFF"/>
+          </a:solidFill>
+          <a:ln w="12700">
+            <a:solidFill>
+              <a:srgbClr val="80511B"/>
+            </a:solidFill>
+          </a:ln>
+        </p:spPr>
+        <p:style>
+          <a:lnRef idx="1">
+            <a:schemeClr val="accent1"/>
+          </a:lnRef>
+          <a:fillRef idx="3">
+            <a:schemeClr val="accent1"/>
+          </a:fillRef>
+          <a:effectRef idx="2">
+            <a:schemeClr val="accent1"/>
+          </a:effectRef>
+          <a:fontRef idx="minor">
+            <a:schemeClr val="lt1"/>
+          </a:fontRef>
+        </p:style>
+        <p:txBody>
+          <a:bodyPr rtlCol="0" anchor="ctr"/>
+          <a:lstStyle/>
+          <a:p>
+            <a:pPr algn="ctr"/>
+          </a:p>
+        </p:txBody>
+      </p:sp>
+      <p:sp>
+        <p:nvSpPr>
+          <p:cNvPr id="19" name="TextBox 18"/>
+          <p:cNvSpPr txBox="1"/>
+          <p:nvPr/>
+        </p:nvSpPr>
+        <p:spPr>
+          <a:xfrm>
+            <a:off x="7620000" y="5095875"/>
+            <a:ext cx="3905249" cy="571500"/>
+          </a:xfrm>
+          <a:prstGeom prst="rect">
+            <a:avLst/>
+          </a:prstGeom>
+          <a:noFill/>
+        </p:spPr>
+        <p:txBody>
+          <a:bodyPr wrap="square" lIns="0" rIns="0" tIns="0" bIns="0">
+            <a:spAutoFit/>
+          </a:bodyPr>
+          <a:lstStyle/>
+          <a:p>
+            <a:pPr>
+              <a:lnSpc>
+                <a:spcPct val="118000"/>
+              </a:lnSpc>
+              <a:spcBef>
+                <a:spcPts val="0"/>
+              </a:spcBef>
+              <a:spcAft>
+                <a:spcPts val="0"/>
+              </a:spcAft>
+              <a:defRPr sz="1900" b="1">
+                <a:solidFill>
+                  <a:srgbClr val="80511B"/>
+                </a:solidFill>
+                <a:latin typeface="Lato"/>
+              </a:defRPr>
+            </a:pPr>
+            <a:r>
+              <a:rPr>
+                <a:ea typeface="Microsoft JhengHei"/>
+              </a:rPr>
+              <a:t>Rank the catalogue groups</a:t>
+            </a:r>
+          </a:p>
+        </p:txBody>
+      </p:sp>
+      <p:sp>
+        <p:nvSpPr>
+          <p:cNvPr id="20" name="TextBox 19"/>
+          <p:cNvSpPr txBox="1"/>
+          <p:nvPr/>
+        </p:nvSpPr>
+        <p:spPr>
+          <a:xfrm>
+            <a:off x="523874" y="5924550"/>
+            <a:ext cx="6477000" cy="495299"/>
+          </a:xfrm>
+          <a:prstGeom prst="rect">
+            <a:avLst/>
+          </a:prstGeom>
+          <a:noFill/>
+        </p:spPr>
+        <p:txBody>
+          <a:bodyPr wrap="square" lIns="0" rIns="0" tIns="0" bIns="0">
+            <a:spAutoFit/>
+          </a:bodyPr>
+          <a:lstStyle/>
+          <a:p>
+            <a:pPr>
+              <a:lnSpc>
+                <a:spcPct val="118000"/>
+              </a:lnSpc>
+              <a:spcBef>
+                <a:spcPts val="0"/>
+              </a:spcBef>
+              <a:spcAft>
+                <a:spcPts val="0"/>
+              </a:spcAft>
+              <a:defRPr sz="2100" b="0">
+                <a:solidFill>
+                  <a:srgbClr val="80511B"/>
+                </a:solidFill>
+                <a:latin typeface="Lato"/>
+              </a:defRPr>
+            </a:pPr>
+            <a:r>
+              <a:rPr>
+                <a:ea typeface="Microsoft JhengHei"/>
+              </a:rPr>
+              <a:t>Exclude a comparison text and repeat.</a:t>
+            </a:r>
+          </a:p>
+        </p:txBody>
+      </p:sp>
+      <p:sp>
+        <p:nvSpPr>
+          <p:cNvPr id="21" name="TextBox 20"/>
+          <p:cNvSpPr txBox="1"/>
+          <p:nvPr/>
+        </p:nvSpPr>
+        <p:spPr>
+          <a:xfrm>
+            <a:off x="7477125" y="5924550"/>
+            <a:ext cx="4190999" cy="485775"/>
+          </a:xfrm>
+          <a:prstGeom prst="rect">
+            <a:avLst/>
+          </a:prstGeom>
+          <a:noFill/>
+        </p:spPr>
+        <p:txBody>
+          <a:bodyPr wrap="square" lIns="0" rIns="0" tIns="0" bIns="0">
+            <a:spAutoFit/>
+          </a:bodyPr>
+          <a:lstStyle/>
+          <a:p>
+            <a:pPr>
+              <a:lnSpc>
+                <a:spcPct val="118000"/>
+              </a:lnSpc>
+              <a:spcBef>
+                <a:spcPts val="0"/>
+              </a:spcBef>
+              <a:spcAft>
+                <a:spcPts val="0"/>
+              </a:spcAft>
+              <a:defRPr sz="1700" b="0">
+                <a:solidFill>
+                  <a:srgbClr val="526778"/>
+                </a:solidFill>
+                <a:latin typeface="Lato"/>
+              </a:defRPr>
+            </a:pPr>
+            <a:r>
+              <a:rPr>
+                <a:ea typeface="Microsoft JhengHei"/>
+              </a:rPr>
+              <a:t>The vocabulary selects which strings count.</a:t>
+            </a:r>
+          </a:p>
+        </p:txBody>
+      </p:sp>
+      <p:sp>
+        <p:nvSpPr>
+          <p:cNvPr id="22" name="TextBox 21"/>
+          <p:cNvSpPr txBox="1"/>
+          <p:nvPr/>
+        </p:nvSpPr>
+        <p:spPr>
+          <a:xfrm>
+            <a:off x="523874" y="6515100"/>
+            <a:ext cx="10477500" cy="200025"/>
+          </a:xfrm>
+          <a:prstGeom prst="rect">
+            <a:avLst/>
+          </a:prstGeom>
+          <a:noFill/>
+        </p:spPr>
+        <p:txBody>
+          <a:bodyPr wrap="square" lIns="0" rIns="0" tIns="0" bIns="0">
+            <a:spAutoFit/>
+          </a:bodyPr>
+          <a:lstStyle/>
+          <a:p>
+            <a:pPr>
+              <a:lnSpc>
+                <a:spcPct val="118000"/>
+              </a:lnSpc>
+              <a:spcBef>
+                <a:spcPts val="0"/>
+              </a:spcBef>
+              <a:spcAft>
+                <a:spcPts val="0"/>
+              </a:spcAft>
+              <a:defRPr sz="1000" b="0">
+                <a:solidFill>
+                  <a:srgbClr val="526778"/>
+                </a:solidFill>
+                <a:latin typeface="Lato"/>
+              </a:defRPr>
+            </a:pPr>
+            <a:r>
+              <a:rPr>
+                <a:ea typeface="Microsoft JhengHei"/>
+              </a:rPr>
+              <a:t>Screenshot: source passages hidden where applicable. Diagram: schematic.</a:t>
             </a:r>
           </a:p>
         </p:txBody>
@@ -8695,369 +9109,9 @@
           </a:p>
         </p:txBody>
       </p:sp>
-      <p:pic>
-        <p:nvPicPr>
-          <p:cNvPr id="4" name="Picture 3" descr="inquiry.png"/>
-          <p:cNvPicPr>
-            <a:picLocks noChangeAspect="1"/>
-          </p:cNvPicPr>
-          <p:nvPr/>
-        </p:nvPicPr>
-        <p:blipFill>
-          <a:blip r:embed="rId2"/>
-          <a:stretch>
-            <a:fillRect/>
-          </a:stretch>
-        </p:blipFill>
-        <p:spPr>
-          <a:xfrm>
-            <a:off x="495299" y="1809750"/>
-            <a:ext cx="8381999" cy="4657725"/>
-          </a:xfrm>
-          <a:prstGeom prst="rect">
-            <a:avLst/>
-          </a:prstGeom>
-        </p:spPr>
-      </p:pic>
-      <p:sp>
-        <p:nvSpPr>
-          <p:cNvPr id="5" name="TextBox 4"/>
-          <p:cNvSpPr txBox="1"/>
-          <p:nvPr/>
-        </p:nvSpPr>
-        <p:spPr>
-          <a:xfrm>
-            <a:off x="9372600" y="1943100"/>
-            <a:ext cx="2324100" cy="371475"/>
-          </a:xfrm>
-          <a:prstGeom prst="rect">
-            <a:avLst/>
-          </a:prstGeom>
-          <a:noFill/>
-        </p:spPr>
-        <p:txBody>
-          <a:bodyPr wrap="square" lIns="0" rIns="0" tIns="0" bIns="0">
-            <a:spAutoFit/>
-          </a:bodyPr>
-          <a:lstStyle/>
-          <a:p>
-            <a:pPr>
-              <a:lnSpc>
-                <a:spcPct val="118000"/>
-              </a:lnSpc>
-              <a:spcBef>
-                <a:spcPts val="0"/>
-              </a:spcBef>
-              <a:spcAft>
-                <a:spcPts val="0"/>
-              </a:spcAft>
-              <a:defRPr sz="2000" b="1">
-                <a:solidFill>
-                  <a:srgbClr val="65439A"/>
-                </a:solidFill>
-                <a:latin typeface="Lato"/>
-              </a:defRPr>
-            </a:pPr>
-            <a:r>
-              <a:rPr>
-                <a:ea typeface="Microsoft JhengHei"/>
-              </a:rPr>
-              <a:t>Question</a:t>
-            </a:r>
-          </a:p>
-        </p:txBody>
-      </p:sp>
-      <p:sp>
-        <p:nvSpPr>
-          <p:cNvPr id="6" name="TextBox 5"/>
-          <p:cNvSpPr txBox="1"/>
-          <p:nvPr/>
-        </p:nvSpPr>
-        <p:spPr>
-          <a:xfrm>
-            <a:off x="9372600" y="2352675"/>
-            <a:ext cx="2324100" cy="895350"/>
-          </a:xfrm>
-          <a:prstGeom prst="rect">
-            <a:avLst/>
-          </a:prstGeom>
-          <a:noFill/>
-        </p:spPr>
-        <p:txBody>
-          <a:bodyPr wrap="square" lIns="0" rIns="0" tIns="0" bIns="0">
-            <a:spAutoFit/>
-          </a:bodyPr>
-          <a:lstStyle/>
-          <a:p>
-            <a:pPr>
-              <a:lnSpc>
-                <a:spcPct val="118000"/>
-              </a:lnSpc>
-              <a:spcBef>
-                <a:spcPts val="0"/>
-              </a:spcBef>
-              <a:spcAft>
-                <a:spcPts val="0"/>
-              </a:spcAft>
-              <a:defRPr sz="1800" b="0">
-                <a:solidFill>
-                  <a:srgbClr val="24384A"/>
-                </a:solidFill>
-                <a:latin typeface="Lato"/>
-              </a:defRPr>
-            </a:pPr>
-            <a:r>
-              <a:rPr>
-                <a:ea typeface="Microsoft JhengHei"/>
-              </a:rPr>
-              <a:t>What do you want to find out?</a:t>
-            </a:r>
-          </a:p>
-        </p:txBody>
-      </p:sp>
-      <p:sp>
-        <p:nvSpPr>
-          <p:cNvPr id="7" name="TextBox 6"/>
-          <p:cNvSpPr txBox="1"/>
-          <p:nvPr/>
-        </p:nvSpPr>
-        <p:spPr>
-          <a:xfrm>
-            <a:off x="9372600" y="3305175"/>
-            <a:ext cx="2324100" cy="371475"/>
-          </a:xfrm>
-          <a:prstGeom prst="rect">
-            <a:avLst/>
-          </a:prstGeom>
-          <a:noFill/>
-        </p:spPr>
-        <p:txBody>
-          <a:bodyPr wrap="square" lIns="0" rIns="0" tIns="0" bIns="0">
-            <a:spAutoFit/>
-          </a:bodyPr>
-          <a:lstStyle/>
-          <a:p>
-            <a:pPr>
-              <a:lnSpc>
-                <a:spcPct val="118000"/>
-              </a:lnSpc>
-              <a:spcBef>
-                <a:spcPts val="0"/>
-              </a:spcBef>
-              <a:spcAft>
-                <a:spcPts val="0"/>
-              </a:spcAft>
-              <a:defRPr sz="2000" b="1">
-                <a:solidFill>
-                  <a:srgbClr val="65439A"/>
-                </a:solidFill>
-                <a:latin typeface="Lato"/>
-              </a:defRPr>
-            </a:pPr>
-            <a:r>
-              <a:rPr>
-                <a:ea typeface="Microsoft JhengHei"/>
-              </a:rPr>
-              <a:t>Instructions</a:t>
-            </a:r>
-          </a:p>
-        </p:txBody>
-      </p:sp>
-      <p:sp>
-        <p:nvSpPr>
-          <p:cNvPr id="8" name="TextBox 7"/>
-          <p:cNvSpPr txBox="1"/>
-          <p:nvPr/>
-        </p:nvSpPr>
-        <p:spPr>
-          <a:xfrm>
-            <a:off x="9372600" y="3714750"/>
-            <a:ext cx="2324100" cy="895350"/>
-          </a:xfrm>
-          <a:prstGeom prst="rect">
-            <a:avLst/>
-          </a:prstGeom>
-          <a:noFill/>
-        </p:spPr>
-        <p:txBody>
-          <a:bodyPr wrap="square" lIns="0" rIns="0" tIns="0" bIns="0">
-            <a:spAutoFit/>
-          </a:bodyPr>
-          <a:lstStyle/>
-          <a:p>
-            <a:pPr>
-              <a:lnSpc>
-                <a:spcPct val="118000"/>
-              </a:lnSpc>
-              <a:spcBef>
-                <a:spcPts val="0"/>
-              </a:spcBef>
-              <a:spcAft>
-                <a:spcPts val="0"/>
-              </a:spcAft>
-              <a:defRPr sz="1800" b="0">
-                <a:solidFill>
-                  <a:srgbClr val="24384A"/>
-                </a:solidFill>
-                <a:latin typeface="Lato"/>
-              </a:defRPr>
-            </a:pPr>
-            <a:r>
-              <a:rPr>
-                <a:ea typeface="Microsoft JhengHei"/>
-              </a:rPr>
-              <a:t>How should the worker investigate it?</a:t>
-            </a:r>
-          </a:p>
-        </p:txBody>
-      </p:sp>
-      <p:sp>
-        <p:nvSpPr>
-          <p:cNvPr id="9" name="TextBox 8"/>
-          <p:cNvSpPr txBox="1"/>
-          <p:nvPr/>
-        </p:nvSpPr>
-        <p:spPr>
-          <a:xfrm>
-            <a:off x="9372600" y="4667250"/>
-            <a:ext cx="2324100" cy="371475"/>
-          </a:xfrm>
-          <a:prstGeom prst="rect">
-            <a:avLst/>
-          </a:prstGeom>
-          <a:noFill/>
-        </p:spPr>
-        <p:txBody>
-          <a:bodyPr wrap="square" lIns="0" rIns="0" tIns="0" bIns="0">
-            <a:spAutoFit/>
-          </a:bodyPr>
-          <a:lstStyle/>
-          <a:p>
-            <a:pPr>
-              <a:lnSpc>
-                <a:spcPct val="118000"/>
-              </a:lnSpc>
-              <a:spcBef>
-                <a:spcPts val="0"/>
-              </a:spcBef>
-              <a:spcAft>
-                <a:spcPts val="0"/>
-              </a:spcAft>
-              <a:defRPr sz="2000" b="1">
-                <a:solidFill>
-                  <a:srgbClr val="65439A"/>
-                </a:solidFill>
-                <a:latin typeface="Lato"/>
-              </a:defRPr>
-            </a:pPr>
-            <a:r>
-              <a:rPr>
-                <a:ea typeface="Microsoft JhengHei"/>
-              </a:rPr>
-              <a:t>Run results</a:t>
-            </a:r>
-          </a:p>
-        </p:txBody>
-      </p:sp>
-      <p:sp>
-        <p:nvSpPr>
-          <p:cNvPr id="10" name="TextBox 9"/>
-          <p:cNvSpPr txBox="1"/>
-          <p:nvPr/>
-        </p:nvSpPr>
-        <p:spPr>
-          <a:xfrm>
-            <a:off x="9372600" y="5076825"/>
-            <a:ext cx="2324100" cy="895350"/>
-          </a:xfrm>
-          <a:prstGeom prst="rect">
-            <a:avLst/>
-          </a:prstGeom>
-          <a:noFill/>
-        </p:spPr>
-        <p:txBody>
-          <a:bodyPr wrap="square" lIns="0" rIns="0" tIns="0" bIns="0">
-            <a:spAutoFit/>
-          </a:bodyPr>
-          <a:lstStyle/>
-          <a:p>
-            <a:pPr>
-              <a:lnSpc>
-                <a:spcPct val="118000"/>
-              </a:lnSpc>
-              <a:spcBef>
-                <a:spcPts val="0"/>
-              </a:spcBef>
-              <a:spcAft>
-                <a:spcPts val="0"/>
-              </a:spcAft>
-              <a:defRPr sz="1800" b="0">
-                <a:solidFill>
-                  <a:srgbClr val="24384A"/>
-                </a:solidFill>
-                <a:latin typeface="Lato"/>
-              </a:defRPr>
-            </a:pPr>
-            <a:r>
-              <a:rPr>
-                <a:ea typeface="Microsoft JhengHei"/>
-              </a:rPr>
-              <a:t>Reopen the actions, inputs and outputs.</a:t>
-            </a:r>
-          </a:p>
-        </p:txBody>
-      </p:sp>
-      <p:sp>
-        <p:nvSpPr>
-          <p:cNvPr id="11" name="TextBox 10"/>
-          <p:cNvSpPr txBox="1"/>
-          <p:nvPr/>
-        </p:nvSpPr>
-        <p:spPr>
-          <a:xfrm>
-            <a:off x="533400" y="6486525"/>
-            <a:ext cx="8334375" cy="209550"/>
-          </a:xfrm>
-          <a:prstGeom prst="rect">
-            <a:avLst/>
-          </a:prstGeom>
-          <a:noFill/>
-        </p:spPr>
-        <p:txBody>
-          <a:bodyPr wrap="square" lIns="0" rIns="0" tIns="0" bIns="0">
-            <a:spAutoFit/>
-          </a:bodyPr>
-          <a:lstStyle/>
-          <a:p>
-            <a:pPr>
-              <a:lnSpc>
-                <a:spcPct val="118000"/>
-              </a:lnSpc>
-              <a:spcBef>
-                <a:spcPts val="0"/>
-              </a:spcBef>
-              <a:spcAft>
-                <a:spcPts val="0"/>
-              </a:spcAft>
-              <a:defRPr sz="1000" b="0">
-                <a:solidFill>
-                  <a:srgbClr val="526778"/>
-                </a:solidFill>
-                <a:latin typeface="Lato"/>
-              </a:defRPr>
-            </a:pPr>
-            <a:r>
-              <a:rPr>
-                <a:ea typeface="Microsoft JhengHei"/>
-              </a:rPr>
-              <a:t>Source passages hidden; controls and recorded outputs retained.</a:t>
-            </a:r>
-          </a:p>
-        </p:txBody>
-      </p:sp>
-      <p:sp>
-        <p:nvSpPr>
-          <p:cNvPr id="12" name="Rectangle 11"/>
+      <p:sp>
+        <p:nvSpPr>
+          <p:cNvPr id="4" name="Rectangle 3"/>
           <p:cNvSpPr/>
           <p:nvPr/>
         </p:nvSpPr>
@@ -9102,7 +9156,7 @@
       </p:sp>
       <p:sp>
         <p:nvSpPr>
-          <p:cNvPr id="13" name="TextBox 12"/>
+          <p:cNvPr id="5" name="TextBox 4"/>
           <p:cNvSpPr txBox="1"/>
           <p:nvPr/>
         </p:nvSpPr>
@@ -9144,6 +9198,750 @@
                 <a:ea typeface="Microsoft JhengHei"/>
               </a:rPr>
               <a:t>13</a:t>
+            </a:r>
+          </a:p>
+        </p:txBody>
+      </p:sp>
+      <p:pic>
+        <p:nvPicPr>
+          <p:cNvPr id="6" name="Picture 5" descr="inquiry.png"/>
+          <p:cNvPicPr>
+            <a:picLocks noChangeAspect="1"/>
+          </p:cNvPicPr>
+          <p:nvPr/>
+        </p:nvPicPr>
+        <p:blipFill>
+          <a:blip r:embed="rId2"/>
+          <a:stretch>
+            <a:fillRect/>
+          </a:stretch>
+        </p:blipFill>
+        <p:spPr>
+          <a:xfrm>
+            <a:off x="495299" y="2057400"/>
+            <a:ext cx="6477000" cy="3600450"/>
+          </a:xfrm>
+          <a:prstGeom prst="rect">
+            <a:avLst/>
+          </a:prstGeom>
+        </p:spPr>
+      </p:pic>
+      <p:sp>
+        <p:nvSpPr>
+          <p:cNvPr id="7" name="TextBox 6"/>
+          <p:cNvSpPr txBox="1"/>
+          <p:nvPr/>
+        </p:nvSpPr>
+        <p:spPr>
+          <a:xfrm>
+            <a:off x="523874" y="1762125"/>
+            <a:ext cx="6477000" cy="276225"/>
+          </a:xfrm>
+          <a:prstGeom prst="rect">
+            <a:avLst/>
+          </a:prstGeom>
+          <a:noFill/>
+        </p:spPr>
+        <p:txBody>
+          <a:bodyPr wrap="square" lIns="0" rIns="0" tIns="0" bIns="0">
+            <a:spAutoFit/>
+          </a:bodyPr>
+          <a:lstStyle/>
+          <a:p>
+            <a:pPr>
+              <a:lnSpc>
+                <a:spcPct val="118000"/>
+              </a:lnSpc>
+              <a:spcBef>
+                <a:spcPts val="0"/>
+              </a:spcBef>
+              <a:spcAft>
+                <a:spcPts val="0"/>
+              </a:spcAft>
+              <a:defRPr sz="1300" b="0">
+                <a:solidFill>
+                  <a:srgbClr val="526778"/>
+                </a:solidFill>
+                <a:latin typeface="Lato"/>
+              </a:defRPr>
+            </a:pPr>
+            <a:r>
+              <a:rPr>
+                <a:ea typeface="Microsoft JhengHei"/>
+              </a:rPr>
+              <a:t>Interface</a:t>
+            </a:r>
+          </a:p>
+        </p:txBody>
+      </p:sp>
+      <p:sp>
+        <p:nvSpPr>
+          <p:cNvPr id="8" name="TextBox 7"/>
+          <p:cNvSpPr txBox="1"/>
+          <p:nvPr/>
+        </p:nvSpPr>
+        <p:spPr>
+          <a:xfrm>
+            <a:off x="7477125" y="1762125"/>
+            <a:ext cx="4048124" cy="276225"/>
+          </a:xfrm>
+          <a:prstGeom prst="rect">
+            <a:avLst/>
+          </a:prstGeom>
+          <a:noFill/>
+        </p:spPr>
+        <p:txBody>
+          <a:bodyPr wrap="square" lIns="0" rIns="0" tIns="0" bIns="0">
+            <a:spAutoFit/>
+          </a:bodyPr>
+          <a:lstStyle/>
+          <a:p>
+            <a:pPr>
+              <a:lnSpc>
+                <a:spcPct val="118000"/>
+              </a:lnSpc>
+              <a:spcBef>
+                <a:spcPts val="0"/>
+              </a:spcBef>
+              <a:spcAft>
+                <a:spcPts val="0"/>
+              </a:spcAft>
+              <a:defRPr sz="1300" b="0">
+                <a:solidFill>
+                  <a:srgbClr val="526778"/>
+                </a:solidFill>
+                <a:latin typeface="Lato"/>
+              </a:defRPr>
+            </a:pPr>
+            <a:r>
+              <a:rPr>
+                <a:ea typeface="Microsoft JhengHei"/>
+              </a:rPr>
+              <a:t>How to use it</a:t>
+            </a:r>
+          </a:p>
+        </p:txBody>
+      </p:sp>
+      <p:sp>
+        <p:nvSpPr>
+          <p:cNvPr id="9" name="Rectangle 8"/>
+          <p:cNvSpPr/>
+          <p:nvPr/>
+        </p:nvSpPr>
+        <p:spPr>
+          <a:xfrm>
+            <a:off x="7477125" y="2190750"/>
+            <a:ext cx="1905000" cy="762000"/>
+          </a:xfrm>
+          <a:prstGeom prst="rect">
+            <a:avLst/>
+          </a:prstGeom>
+          <a:solidFill>
+            <a:srgbClr val="FFFFFF"/>
+          </a:solidFill>
+          <a:ln w="12700">
+            <a:solidFill>
+              <a:srgbClr val="65439A"/>
+            </a:solidFill>
+          </a:ln>
+        </p:spPr>
+        <p:style>
+          <a:lnRef idx="1">
+            <a:schemeClr val="accent1"/>
+          </a:lnRef>
+          <a:fillRef idx="3">
+            <a:schemeClr val="accent1"/>
+          </a:fillRef>
+          <a:effectRef idx="2">
+            <a:schemeClr val="accent1"/>
+          </a:effectRef>
+          <a:fontRef idx="minor">
+            <a:schemeClr val="lt1"/>
+          </a:fontRef>
+        </p:style>
+        <p:txBody>
+          <a:bodyPr rtlCol="0" anchor="ctr"/>
+          <a:lstStyle/>
+          <a:p>
+            <a:pPr algn="ctr"/>
+          </a:p>
+        </p:txBody>
+      </p:sp>
+      <p:sp>
+        <p:nvSpPr>
+          <p:cNvPr id="10" name="TextBox 9"/>
+          <p:cNvSpPr txBox="1"/>
+          <p:nvPr/>
+        </p:nvSpPr>
+        <p:spPr>
+          <a:xfrm>
+            <a:off x="7620000" y="2333625"/>
+            <a:ext cx="1619250" cy="571500"/>
+          </a:xfrm>
+          <a:prstGeom prst="rect">
+            <a:avLst/>
+          </a:prstGeom>
+          <a:noFill/>
+        </p:spPr>
+        <p:txBody>
+          <a:bodyPr wrap="square" lIns="0" rIns="0" tIns="0" bIns="0">
+            <a:spAutoFit/>
+          </a:bodyPr>
+          <a:lstStyle/>
+          <a:p>
+            <a:pPr>
+              <a:lnSpc>
+                <a:spcPct val="118000"/>
+              </a:lnSpc>
+              <a:spcBef>
+                <a:spcPts val="0"/>
+              </a:spcBef>
+              <a:spcAft>
+                <a:spcPts val="0"/>
+              </a:spcAft>
+              <a:defRPr sz="1900" b="1">
+                <a:solidFill>
+                  <a:srgbClr val="65439A"/>
+                </a:solidFill>
+                <a:latin typeface="Lato"/>
+              </a:defRPr>
+            </a:pPr>
+            <a:r>
+              <a:rPr>
+                <a:ea typeface="Microsoft JhengHei"/>
+              </a:rPr>
+              <a:t>Question</a:t>
+            </a:r>
+          </a:p>
+        </p:txBody>
+      </p:sp>
+      <p:sp>
+        <p:nvSpPr>
+          <p:cNvPr id="11" name="Rectangle 10"/>
+          <p:cNvSpPr/>
+          <p:nvPr/>
+        </p:nvSpPr>
+        <p:spPr>
+          <a:xfrm>
+            <a:off x="9667875" y="2190750"/>
+            <a:ext cx="2000250" cy="762000"/>
+          </a:xfrm>
+          <a:prstGeom prst="rect">
+            <a:avLst/>
+          </a:prstGeom>
+          <a:solidFill>
+            <a:srgbClr val="FFFFFF"/>
+          </a:solidFill>
+          <a:ln w="12700">
+            <a:solidFill>
+              <a:srgbClr val="65439A"/>
+            </a:solidFill>
+          </a:ln>
+        </p:spPr>
+        <p:style>
+          <a:lnRef idx="1">
+            <a:schemeClr val="accent1"/>
+          </a:lnRef>
+          <a:fillRef idx="3">
+            <a:schemeClr val="accent1"/>
+          </a:fillRef>
+          <a:effectRef idx="2">
+            <a:schemeClr val="accent1"/>
+          </a:effectRef>
+          <a:fontRef idx="minor">
+            <a:schemeClr val="lt1"/>
+          </a:fontRef>
+        </p:style>
+        <p:txBody>
+          <a:bodyPr rtlCol="0" anchor="ctr"/>
+          <a:lstStyle/>
+          <a:p>
+            <a:pPr algn="ctr"/>
+          </a:p>
+        </p:txBody>
+      </p:sp>
+      <p:sp>
+        <p:nvSpPr>
+          <p:cNvPr id="12" name="TextBox 11"/>
+          <p:cNvSpPr txBox="1"/>
+          <p:nvPr/>
+        </p:nvSpPr>
+        <p:spPr>
+          <a:xfrm>
+            <a:off x="9810750" y="2333625"/>
+            <a:ext cx="1714500" cy="571500"/>
+          </a:xfrm>
+          <a:prstGeom prst="rect">
+            <a:avLst/>
+          </a:prstGeom>
+          <a:noFill/>
+        </p:spPr>
+        <p:txBody>
+          <a:bodyPr wrap="square" lIns="0" rIns="0" tIns="0" bIns="0">
+            <a:spAutoFit/>
+          </a:bodyPr>
+          <a:lstStyle/>
+          <a:p>
+            <a:pPr>
+              <a:lnSpc>
+                <a:spcPct val="118000"/>
+              </a:lnSpc>
+              <a:spcBef>
+                <a:spcPts val="0"/>
+              </a:spcBef>
+              <a:spcAft>
+                <a:spcPts val="0"/>
+              </a:spcAft>
+              <a:defRPr sz="1900" b="1">
+                <a:solidFill>
+                  <a:srgbClr val="65439A"/>
+                </a:solidFill>
+                <a:latin typeface="Lato"/>
+              </a:defRPr>
+            </a:pPr>
+            <a:r>
+              <a:rPr>
+                <a:ea typeface="Microsoft JhengHei"/>
+              </a:rPr>
+              <a:t>Instructions</a:t>
+            </a:r>
+          </a:p>
+        </p:txBody>
+      </p:sp>
+      <p:cxnSp>
+        <p:nvCxnSpPr>
+          <p:cNvPr id="13" name="Connector 12"/>
+          <p:cNvCxnSpPr/>
+          <p:nvPr/>
+        </p:nvCxnSpPr>
+        <p:spPr>
+          <a:xfrm>
+            <a:off x="8429625" y="3028950"/>
+            <a:ext cx="1095375" cy="400050"/>
+          </a:xfrm>
+          <a:prstGeom prst="line">
+            <a:avLst/>
+          </a:prstGeom>
+          <a:ln w="19050">
+            <a:solidFill>
+              <a:srgbClr val="526778"/>
+            </a:solidFill>
+            <a:tailEnd type="triangle"/>
+          </a:ln>
+        </p:spPr>
+        <p:style>
+          <a:lnRef idx="2">
+            <a:schemeClr val="accent1"/>
+          </a:lnRef>
+          <a:fillRef idx="0">
+            <a:schemeClr val="accent1"/>
+          </a:fillRef>
+          <a:effectRef idx="1">
+            <a:schemeClr val="accent1"/>
+          </a:effectRef>
+          <a:fontRef idx="minor">
+            <a:schemeClr val="tx1"/>
+          </a:fontRef>
+        </p:style>
+      </p:cxnSp>
+      <p:cxnSp>
+        <p:nvCxnSpPr>
+          <p:cNvPr id="14" name="Connector 13"/>
+          <p:cNvCxnSpPr/>
+          <p:nvPr/>
+        </p:nvCxnSpPr>
+        <p:spPr>
+          <a:xfrm flipH="1">
+            <a:off x="9525000" y="3028950"/>
+            <a:ext cx="1143000" cy="400050"/>
+          </a:xfrm>
+          <a:prstGeom prst="line">
+            <a:avLst/>
+          </a:prstGeom>
+          <a:ln w="19050">
+            <a:solidFill>
+              <a:srgbClr val="526778"/>
+            </a:solidFill>
+            <a:tailEnd type="triangle"/>
+          </a:ln>
+        </p:spPr>
+        <p:style>
+          <a:lnRef idx="2">
+            <a:schemeClr val="accent1"/>
+          </a:lnRef>
+          <a:fillRef idx="0">
+            <a:schemeClr val="accent1"/>
+          </a:fillRef>
+          <a:effectRef idx="1">
+            <a:schemeClr val="accent1"/>
+          </a:effectRef>
+          <a:fontRef idx="minor">
+            <a:schemeClr val="tx1"/>
+          </a:fontRef>
+        </p:style>
+      </p:cxnSp>
+      <p:sp>
+        <p:nvSpPr>
+          <p:cNvPr id="15" name="Rectangle 14"/>
+          <p:cNvSpPr/>
+          <p:nvPr/>
+        </p:nvSpPr>
+        <p:spPr>
+          <a:xfrm>
+            <a:off x="7477125" y="3590925"/>
+            <a:ext cx="4190999" cy="762000"/>
+          </a:xfrm>
+          <a:prstGeom prst="rect">
+            <a:avLst/>
+          </a:prstGeom>
+          <a:solidFill>
+            <a:srgbClr val="FFFFFF"/>
+          </a:solidFill>
+          <a:ln w="12700">
+            <a:solidFill>
+              <a:srgbClr val="65439A"/>
+            </a:solidFill>
+          </a:ln>
+        </p:spPr>
+        <p:style>
+          <a:lnRef idx="1">
+            <a:schemeClr val="accent1"/>
+          </a:lnRef>
+          <a:fillRef idx="3">
+            <a:schemeClr val="accent1"/>
+          </a:fillRef>
+          <a:effectRef idx="2">
+            <a:schemeClr val="accent1"/>
+          </a:effectRef>
+          <a:fontRef idx="minor">
+            <a:schemeClr val="lt1"/>
+          </a:fontRef>
+        </p:style>
+        <p:txBody>
+          <a:bodyPr rtlCol="0" anchor="ctr"/>
+          <a:lstStyle/>
+          <a:p>
+            <a:pPr algn="ctr"/>
+          </a:p>
+        </p:txBody>
+      </p:sp>
+      <p:sp>
+        <p:nvSpPr>
+          <p:cNvPr id="16" name="TextBox 15"/>
+          <p:cNvSpPr txBox="1"/>
+          <p:nvPr/>
+        </p:nvSpPr>
+        <p:spPr>
+          <a:xfrm>
+            <a:off x="7620000" y="3733799"/>
+            <a:ext cx="3905249" cy="571500"/>
+          </a:xfrm>
+          <a:prstGeom prst="rect">
+            <a:avLst/>
+          </a:prstGeom>
+          <a:noFill/>
+        </p:spPr>
+        <p:txBody>
+          <a:bodyPr wrap="square" lIns="0" rIns="0" tIns="0" bIns="0">
+            <a:spAutoFit/>
+          </a:bodyPr>
+          <a:lstStyle/>
+          <a:p>
+            <a:pPr>
+              <a:lnSpc>
+                <a:spcPct val="118000"/>
+              </a:lnSpc>
+              <a:spcBef>
+                <a:spcPts val="0"/>
+              </a:spcBef>
+              <a:spcAft>
+                <a:spcPts val="0"/>
+              </a:spcAft>
+              <a:defRPr sz="1900" b="1">
+                <a:solidFill>
+                  <a:srgbClr val="65439A"/>
+                </a:solidFill>
+                <a:latin typeface="Lato"/>
+              </a:defRPr>
+            </a:pPr>
+            <a:r>
+              <a:rPr>
+                <a:ea typeface="Microsoft JhengHei"/>
+              </a:rPr>
+              <a:t>Worker calls tools</a:t>
+            </a:r>
+          </a:p>
+        </p:txBody>
+      </p:sp>
+      <p:cxnSp>
+        <p:nvCxnSpPr>
+          <p:cNvPr id="17" name="Connector 16"/>
+          <p:cNvCxnSpPr/>
+          <p:nvPr/>
+        </p:nvCxnSpPr>
+        <p:spPr>
+          <a:xfrm>
+            <a:off x="9572625" y="4419600"/>
+            <a:ext cx="0" cy="371475"/>
+          </a:xfrm>
+          <a:prstGeom prst="line">
+            <a:avLst/>
+          </a:prstGeom>
+          <a:ln w="19050">
+            <a:solidFill>
+              <a:srgbClr val="526778"/>
+            </a:solidFill>
+            <a:tailEnd type="triangle"/>
+          </a:ln>
+        </p:spPr>
+        <p:style>
+          <a:lnRef idx="2">
+            <a:schemeClr val="accent1"/>
+          </a:lnRef>
+          <a:fillRef idx="0">
+            <a:schemeClr val="accent1"/>
+          </a:fillRef>
+          <a:effectRef idx="1">
+            <a:schemeClr val="accent1"/>
+          </a:effectRef>
+          <a:fontRef idx="minor">
+            <a:schemeClr val="tx1"/>
+          </a:fontRef>
+        </p:style>
+      </p:cxnSp>
+      <p:sp>
+        <p:nvSpPr>
+          <p:cNvPr id="18" name="Rectangle 17"/>
+          <p:cNvSpPr/>
+          <p:nvPr/>
+        </p:nvSpPr>
+        <p:spPr>
+          <a:xfrm>
+            <a:off x="7477125" y="4953000"/>
+            <a:ext cx="4190999" cy="762000"/>
+          </a:xfrm>
+          <a:prstGeom prst="rect">
+            <a:avLst/>
+          </a:prstGeom>
+          <a:solidFill>
+            <a:srgbClr val="FFFFFF"/>
+          </a:solidFill>
+          <a:ln w="12700">
+            <a:solidFill>
+              <a:srgbClr val="65439A"/>
+            </a:solidFill>
+          </a:ln>
+        </p:spPr>
+        <p:style>
+          <a:lnRef idx="1">
+            <a:schemeClr val="accent1"/>
+          </a:lnRef>
+          <a:fillRef idx="3">
+            <a:schemeClr val="accent1"/>
+          </a:fillRef>
+          <a:effectRef idx="2">
+            <a:schemeClr val="accent1"/>
+          </a:effectRef>
+          <a:fontRef idx="minor">
+            <a:schemeClr val="lt1"/>
+          </a:fontRef>
+        </p:style>
+        <p:txBody>
+          <a:bodyPr rtlCol="0" anchor="ctr"/>
+          <a:lstStyle/>
+          <a:p>
+            <a:pPr algn="ctr"/>
+          </a:p>
+        </p:txBody>
+      </p:sp>
+      <p:sp>
+        <p:nvSpPr>
+          <p:cNvPr id="19" name="TextBox 18"/>
+          <p:cNvSpPr txBox="1"/>
+          <p:nvPr/>
+        </p:nvSpPr>
+        <p:spPr>
+          <a:xfrm>
+            <a:off x="7620000" y="5095875"/>
+            <a:ext cx="3905249" cy="571500"/>
+          </a:xfrm>
+          <a:prstGeom prst="rect">
+            <a:avLst/>
+          </a:prstGeom>
+          <a:noFill/>
+        </p:spPr>
+        <p:txBody>
+          <a:bodyPr wrap="square" lIns="0" rIns="0" tIns="0" bIns="0">
+            <a:spAutoFit/>
+          </a:bodyPr>
+          <a:lstStyle/>
+          <a:p>
+            <a:pPr>
+              <a:lnSpc>
+                <a:spcPct val="118000"/>
+              </a:lnSpc>
+              <a:spcBef>
+                <a:spcPts val="0"/>
+              </a:spcBef>
+              <a:spcAft>
+                <a:spcPts val="0"/>
+              </a:spcAft>
+              <a:defRPr sz="1900" b="1">
+                <a:solidFill>
+                  <a:srgbClr val="65439A"/>
+                </a:solidFill>
+                <a:latin typeface="Lato"/>
+              </a:defRPr>
+            </a:pPr>
+            <a:r>
+              <a:rPr>
+                <a:ea typeface="Microsoft JhengHei"/>
+              </a:rPr>
+              <a:t>Save actions and proposals</a:t>
+            </a:r>
+          </a:p>
+        </p:txBody>
+      </p:sp>
+      <p:sp>
+        <p:nvSpPr>
+          <p:cNvPr id="20" name="TextBox 19"/>
+          <p:cNvSpPr txBox="1"/>
+          <p:nvPr/>
+        </p:nvSpPr>
+        <p:spPr>
+          <a:xfrm>
+            <a:off x="523874" y="5924550"/>
+            <a:ext cx="6477000" cy="495299"/>
+          </a:xfrm>
+          <a:prstGeom prst="rect">
+            <a:avLst/>
+          </a:prstGeom>
+          <a:noFill/>
+        </p:spPr>
+        <p:txBody>
+          <a:bodyPr wrap="square" lIns="0" rIns="0" tIns="0" bIns="0">
+            <a:spAutoFit/>
+          </a:bodyPr>
+          <a:lstStyle/>
+          <a:p>
+            <a:pPr>
+              <a:lnSpc>
+                <a:spcPct val="118000"/>
+              </a:lnSpc>
+              <a:spcBef>
+                <a:spcPts val="0"/>
+              </a:spcBef>
+              <a:spcAft>
+                <a:spcPts val="0"/>
+              </a:spcAft>
+              <a:defRPr sz="2100" b="0">
+                <a:solidFill>
+                  <a:srgbClr val="65439A"/>
+                </a:solidFill>
+                <a:latin typeface="Lato"/>
+              </a:defRPr>
+            </a:pPr>
+            <a:r>
+              <a:rPr>
+                <a:ea typeface="Microsoft JhengHei"/>
+              </a:rPr>
+              <a:t>A separate reviewer records checks.</a:t>
+            </a:r>
+          </a:p>
+        </p:txBody>
+      </p:sp>
+      <p:sp>
+        <p:nvSpPr>
+          <p:cNvPr id="21" name="TextBox 20"/>
+          <p:cNvSpPr txBox="1"/>
+          <p:nvPr/>
+        </p:nvSpPr>
+        <p:spPr>
+          <a:xfrm>
+            <a:off x="7477125" y="5924550"/>
+            <a:ext cx="4190999" cy="485775"/>
+          </a:xfrm>
+          <a:prstGeom prst="rect">
+            <a:avLst/>
+          </a:prstGeom>
+          <a:noFill/>
+        </p:spPr>
+        <p:txBody>
+          <a:bodyPr wrap="square" lIns="0" rIns="0" tIns="0" bIns="0">
+            <a:spAutoFit/>
+          </a:bodyPr>
+          <a:lstStyle/>
+          <a:p>
+            <a:pPr>
+              <a:lnSpc>
+                <a:spcPct val="118000"/>
+              </a:lnSpc>
+              <a:spcBef>
+                <a:spcPts val="0"/>
+              </a:spcBef>
+              <a:spcAft>
+                <a:spcPts val="0"/>
+              </a:spcAft>
+              <a:defRPr sz="1700" b="0">
+                <a:solidFill>
+                  <a:srgbClr val="526778"/>
+                </a:solidFill>
+                <a:latin typeface="Lato"/>
+              </a:defRPr>
+            </a:pPr>
+            <a:r>
+              <a:rPr>
+                <a:ea typeface="Microsoft JhengHei"/>
+              </a:rPr>
+              <a:t>Reopen completed work in Run results.</a:t>
+            </a:r>
+          </a:p>
+        </p:txBody>
+      </p:sp>
+      <p:sp>
+        <p:nvSpPr>
+          <p:cNvPr id="22" name="TextBox 21"/>
+          <p:cNvSpPr txBox="1"/>
+          <p:nvPr/>
+        </p:nvSpPr>
+        <p:spPr>
+          <a:xfrm>
+            <a:off x="523874" y="6515100"/>
+            <a:ext cx="10477500" cy="200025"/>
+          </a:xfrm>
+          <a:prstGeom prst="rect">
+            <a:avLst/>
+          </a:prstGeom>
+          <a:noFill/>
+        </p:spPr>
+        <p:txBody>
+          <a:bodyPr wrap="square" lIns="0" rIns="0" tIns="0" bIns="0">
+            <a:spAutoFit/>
+          </a:bodyPr>
+          <a:lstStyle/>
+          <a:p>
+            <a:pPr>
+              <a:lnSpc>
+                <a:spcPct val="118000"/>
+              </a:lnSpc>
+              <a:spcBef>
+                <a:spcPts val="0"/>
+              </a:spcBef>
+              <a:spcAft>
+                <a:spcPts val="0"/>
+              </a:spcAft>
+              <a:defRPr sz="1000" b="0">
+                <a:solidFill>
+                  <a:srgbClr val="526778"/>
+                </a:solidFill>
+                <a:latin typeface="Lato"/>
+              </a:defRPr>
+            </a:pPr>
+            <a:r>
+              <a:rPr>
+                <a:ea typeface="Microsoft JhengHei"/>
+              </a:rPr>
+              <a:t>Screenshot: source passages hidden where applicable. Diagram: schematic.</a:t>
             </a:r>
           </a:p>
         </p:txBody>
@@ -10231,369 +11029,9 @@
           </a:p>
         </p:txBody>
       </p:sp>
-      <p:pic>
-        <p:nvPicPr>
-          <p:cNvPr id="4" name="Picture 3" descr="findings.png"/>
-          <p:cNvPicPr>
-            <a:picLocks noChangeAspect="1"/>
-          </p:cNvPicPr>
-          <p:nvPr/>
-        </p:nvPicPr>
-        <p:blipFill>
-          <a:blip r:embed="rId2"/>
-          <a:stretch>
-            <a:fillRect/>
-          </a:stretch>
-        </p:blipFill>
-        <p:spPr>
-          <a:xfrm>
-            <a:off x="495299" y="1809750"/>
-            <a:ext cx="8381999" cy="4657725"/>
-          </a:xfrm>
-          <a:prstGeom prst="rect">
-            <a:avLst/>
-          </a:prstGeom>
-        </p:spPr>
-      </p:pic>
-      <p:sp>
-        <p:nvSpPr>
-          <p:cNvPr id="5" name="TextBox 4"/>
-          <p:cNvSpPr txBox="1"/>
-          <p:nvPr/>
-        </p:nvSpPr>
-        <p:spPr>
-          <a:xfrm>
-            <a:off x="9372600" y="1943100"/>
-            <a:ext cx="2324100" cy="371475"/>
-          </a:xfrm>
-          <a:prstGeom prst="rect">
-            <a:avLst/>
-          </a:prstGeom>
-          <a:noFill/>
-        </p:spPr>
-        <p:txBody>
-          <a:bodyPr wrap="square" lIns="0" rIns="0" tIns="0" bIns="0">
-            <a:spAutoFit/>
-          </a:bodyPr>
-          <a:lstStyle/>
-          <a:p>
-            <a:pPr>
-              <a:lnSpc>
-                <a:spcPct val="118000"/>
-              </a:lnSpc>
-              <a:spcBef>
-                <a:spcPts val="0"/>
-              </a:spcBef>
-              <a:spcAft>
-                <a:spcPts val="0"/>
-              </a:spcAft>
-              <a:defRPr sz="2000" b="1">
-                <a:solidFill>
-                  <a:srgbClr val="146C68"/>
-                </a:solidFill>
-                <a:latin typeface="Lato"/>
-              </a:defRPr>
-            </a:pPr>
-            <a:r>
-              <a:rPr>
-                <a:ea typeface="Microsoft JhengHei"/>
-              </a:rPr>
-              <a:t>Proposal</a:t>
-            </a:r>
-          </a:p>
-        </p:txBody>
-      </p:sp>
-      <p:sp>
-        <p:nvSpPr>
-          <p:cNvPr id="6" name="TextBox 5"/>
-          <p:cNvSpPr txBox="1"/>
-          <p:nvPr/>
-        </p:nvSpPr>
-        <p:spPr>
-          <a:xfrm>
-            <a:off x="9372600" y="2352675"/>
-            <a:ext cx="2324100" cy="895350"/>
-          </a:xfrm>
-          <a:prstGeom prst="rect">
-            <a:avLst/>
-          </a:prstGeom>
-          <a:noFill/>
-        </p:spPr>
-        <p:txBody>
-          <a:bodyPr wrap="square" lIns="0" rIns="0" tIns="0" bIns="0">
-            <a:spAutoFit/>
-          </a:bodyPr>
-          <a:lstStyle/>
-          <a:p>
-            <a:pPr>
-              <a:lnSpc>
-                <a:spcPct val="118000"/>
-              </a:lnSpc>
-              <a:spcBef>
-                <a:spcPts val="0"/>
-              </a:spcBef>
-              <a:spcAft>
-                <a:spcPts val="0"/>
-              </a:spcAft>
-              <a:defRPr sz="1800" b="0">
-                <a:solidFill>
-                  <a:srgbClr val="24384A"/>
-                </a:solidFill>
-                <a:latin typeface="Lato"/>
-              </a:defRPr>
-            </a:pPr>
-            <a:r>
-              <a:rPr>
-                <a:ea typeface="Microsoft JhengHei"/>
-              </a:rPr>
-              <a:t>A claim or a conjecture from the worker.</a:t>
-            </a:r>
-          </a:p>
-        </p:txBody>
-      </p:sp>
-      <p:sp>
-        <p:nvSpPr>
-          <p:cNvPr id="7" name="TextBox 6"/>
-          <p:cNvSpPr txBox="1"/>
-          <p:nvPr/>
-        </p:nvSpPr>
-        <p:spPr>
-          <a:xfrm>
-            <a:off x="9372600" y="3305175"/>
-            <a:ext cx="2324100" cy="371475"/>
-          </a:xfrm>
-          <a:prstGeom prst="rect">
-            <a:avLst/>
-          </a:prstGeom>
-          <a:noFill/>
-        </p:spPr>
-        <p:txBody>
-          <a:bodyPr wrap="square" lIns="0" rIns="0" tIns="0" bIns="0">
-            <a:spAutoFit/>
-          </a:bodyPr>
-          <a:lstStyle/>
-          <a:p>
-            <a:pPr>
-              <a:lnSpc>
-                <a:spcPct val="118000"/>
-              </a:lnSpc>
-              <a:spcBef>
-                <a:spcPts val="0"/>
-              </a:spcBef>
-              <a:spcAft>
-                <a:spcPts val="0"/>
-              </a:spcAft>
-              <a:defRPr sz="2000" b="1">
-                <a:solidFill>
-                  <a:srgbClr val="146C68"/>
-                </a:solidFill>
-                <a:latin typeface="Lato"/>
-              </a:defRPr>
-            </a:pPr>
-            <a:r>
-              <a:rPr>
-                <a:ea typeface="Microsoft JhengHei"/>
-              </a:rPr>
-              <a:t>Sources</a:t>
-            </a:r>
-          </a:p>
-        </p:txBody>
-      </p:sp>
-      <p:sp>
-        <p:nvSpPr>
-          <p:cNvPr id="8" name="TextBox 7"/>
-          <p:cNvSpPr txBox="1"/>
-          <p:nvPr/>
-        </p:nvSpPr>
-        <p:spPr>
-          <a:xfrm>
-            <a:off x="9372600" y="3714750"/>
-            <a:ext cx="2324100" cy="895350"/>
-          </a:xfrm>
-          <a:prstGeom prst="rect">
-            <a:avLst/>
-          </a:prstGeom>
-          <a:noFill/>
-        </p:spPr>
-        <p:txBody>
-          <a:bodyPr wrap="square" lIns="0" rIns="0" tIns="0" bIns="0">
-            <a:spAutoFit/>
-          </a:bodyPr>
-          <a:lstStyle/>
-          <a:p>
-            <a:pPr>
-              <a:lnSpc>
-                <a:spcPct val="118000"/>
-              </a:lnSpc>
-              <a:spcBef>
-                <a:spcPts val="0"/>
-              </a:spcBef>
-              <a:spcAft>
-                <a:spcPts val="0"/>
-              </a:spcAft>
-              <a:defRPr sz="1800" b="0">
-                <a:solidFill>
-                  <a:srgbClr val="24384A"/>
-                </a:solidFill>
-                <a:latin typeface="Lato"/>
-              </a:defRPr>
-            </a:pPr>
-            <a:r>
-              <a:rPr>
-                <a:ea typeface="Microsoft JhengHei"/>
-              </a:rPr>
-              <a:t>Read its citations and recorded checks.</a:t>
-            </a:r>
-          </a:p>
-        </p:txBody>
-      </p:sp>
-      <p:sp>
-        <p:nvSpPr>
-          <p:cNvPr id="9" name="TextBox 8"/>
-          <p:cNvSpPr txBox="1"/>
-          <p:nvPr/>
-        </p:nvSpPr>
-        <p:spPr>
-          <a:xfrm>
-            <a:off x="9372600" y="4667250"/>
-            <a:ext cx="2324100" cy="371475"/>
-          </a:xfrm>
-          <a:prstGeom prst="rect">
-            <a:avLst/>
-          </a:prstGeom>
-          <a:noFill/>
-        </p:spPr>
-        <p:txBody>
-          <a:bodyPr wrap="square" lIns="0" rIns="0" tIns="0" bIns="0">
-            <a:spAutoFit/>
-          </a:bodyPr>
-          <a:lstStyle/>
-          <a:p>
-            <a:pPr>
-              <a:lnSpc>
-                <a:spcPct val="118000"/>
-              </a:lnSpc>
-              <a:spcBef>
-                <a:spcPts val="0"/>
-              </a:spcBef>
-              <a:spcAft>
-                <a:spcPts val="0"/>
-              </a:spcAft>
-              <a:defRPr sz="2000" b="1">
-                <a:solidFill>
-                  <a:srgbClr val="146C68"/>
-                </a:solidFill>
-                <a:latin typeface="Lato"/>
-              </a:defRPr>
-            </a:pPr>
-            <a:r>
-              <a:rPr>
-                <a:ea typeface="Microsoft JhengHei"/>
-              </a:rPr>
-              <a:t>Alternatives</a:t>
-            </a:r>
-          </a:p>
-        </p:txBody>
-      </p:sp>
-      <p:sp>
-        <p:nvSpPr>
-          <p:cNvPr id="10" name="TextBox 9"/>
-          <p:cNvSpPr txBox="1"/>
-          <p:nvPr/>
-        </p:nvSpPr>
-        <p:spPr>
-          <a:xfrm>
-            <a:off x="9372600" y="5076825"/>
-            <a:ext cx="2324100" cy="895350"/>
-          </a:xfrm>
-          <a:prstGeom prst="rect">
-            <a:avLst/>
-          </a:prstGeom>
-          <a:noFill/>
-        </p:spPr>
-        <p:txBody>
-          <a:bodyPr wrap="square" lIns="0" rIns="0" tIns="0" bIns="0">
-            <a:spAutoFit/>
-          </a:bodyPr>
-          <a:lstStyle/>
-          <a:p>
-            <a:pPr>
-              <a:lnSpc>
-                <a:spcPct val="118000"/>
-              </a:lnSpc>
-              <a:spcBef>
-                <a:spcPts val="0"/>
-              </a:spcBef>
-              <a:spcAft>
-                <a:spcPts val="0"/>
-              </a:spcAft>
-              <a:defRPr sz="1800" b="0">
-                <a:solidFill>
-                  <a:srgbClr val="24384A"/>
-                </a:solidFill>
-                <a:latin typeface="Lato"/>
-              </a:defRPr>
-            </a:pPr>
-            <a:r>
-              <a:rPr>
-                <a:ea typeface="Microsoft JhengHei"/>
-              </a:rPr>
-              <a:t>Inspect what else could explain the observation.</a:t>
-            </a:r>
-          </a:p>
-        </p:txBody>
-      </p:sp>
-      <p:sp>
-        <p:nvSpPr>
-          <p:cNvPr id="11" name="TextBox 10"/>
-          <p:cNvSpPr txBox="1"/>
-          <p:nvPr/>
-        </p:nvSpPr>
-        <p:spPr>
-          <a:xfrm>
-            <a:off x="533400" y="6486525"/>
-            <a:ext cx="8334375" cy="209550"/>
-          </a:xfrm>
-          <a:prstGeom prst="rect">
-            <a:avLst/>
-          </a:prstGeom>
-          <a:noFill/>
-        </p:spPr>
-        <p:txBody>
-          <a:bodyPr wrap="square" lIns="0" rIns="0" tIns="0" bIns="0">
-            <a:spAutoFit/>
-          </a:bodyPr>
-          <a:lstStyle/>
-          <a:p>
-            <a:pPr>
-              <a:lnSpc>
-                <a:spcPct val="118000"/>
-              </a:lnSpc>
-              <a:spcBef>
-                <a:spcPts val="0"/>
-              </a:spcBef>
-              <a:spcAft>
-                <a:spcPts val="0"/>
-              </a:spcAft>
-              <a:defRPr sz="1000" b="0">
-                <a:solidFill>
-                  <a:srgbClr val="526778"/>
-                </a:solidFill>
-                <a:latin typeface="Lato"/>
-              </a:defRPr>
-            </a:pPr>
-            <a:r>
-              <a:rPr>
-                <a:ea typeface="Microsoft JhengHei"/>
-              </a:rPr>
-              <a:t>Source passages hidden; controls and recorded outputs retained.</a:t>
-            </a:r>
-          </a:p>
-        </p:txBody>
-      </p:sp>
-      <p:sp>
-        <p:nvSpPr>
-          <p:cNvPr id="12" name="Rectangle 11"/>
+      <p:sp>
+        <p:nvSpPr>
+          <p:cNvPr id="4" name="Rectangle 3"/>
           <p:cNvSpPr/>
           <p:nvPr/>
         </p:nvSpPr>
@@ -10638,7 +11076,7 @@
       </p:sp>
       <p:sp>
         <p:nvSpPr>
-          <p:cNvPr id="13" name="TextBox 12"/>
+          <p:cNvPr id="5" name="TextBox 4"/>
           <p:cNvSpPr txBox="1"/>
           <p:nvPr/>
         </p:nvSpPr>
@@ -10680,6 +11118,694 @@
                 <a:ea typeface="Microsoft JhengHei"/>
               </a:rPr>
               <a:t>15</a:t>
+            </a:r>
+          </a:p>
+        </p:txBody>
+      </p:sp>
+      <p:pic>
+        <p:nvPicPr>
+          <p:cNvPr id="6" name="Picture 5" descr="findings.png"/>
+          <p:cNvPicPr>
+            <a:picLocks noChangeAspect="1"/>
+          </p:cNvPicPr>
+          <p:nvPr/>
+        </p:nvPicPr>
+        <p:blipFill>
+          <a:blip r:embed="rId2"/>
+          <a:stretch>
+            <a:fillRect/>
+          </a:stretch>
+        </p:blipFill>
+        <p:spPr>
+          <a:xfrm>
+            <a:off x="495299" y="2057400"/>
+            <a:ext cx="6477000" cy="3600450"/>
+          </a:xfrm>
+          <a:prstGeom prst="rect">
+            <a:avLst/>
+          </a:prstGeom>
+        </p:spPr>
+      </p:pic>
+      <p:sp>
+        <p:nvSpPr>
+          <p:cNvPr id="7" name="TextBox 6"/>
+          <p:cNvSpPr txBox="1"/>
+          <p:nvPr/>
+        </p:nvSpPr>
+        <p:spPr>
+          <a:xfrm>
+            <a:off x="523874" y="1762125"/>
+            <a:ext cx="6477000" cy="276225"/>
+          </a:xfrm>
+          <a:prstGeom prst="rect">
+            <a:avLst/>
+          </a:prstGeom>
+          <a:noFill/>
+        </p:spPr>
+        <p:txBody>
+          <a:bodyPr wrap="square" lIns="0" rIns="0" tIns="0" bIns="0">
+            <a:spAutoFit/>
+          </a:bodyPr>
+          <a:lstStyle/>
+          <a:p>
+            <a:pPr>
+              <a:lnSpc>
+                <a:spcPct val="118000"/>
+              </a:lnSpc>
+              <a:spcBef>
+                <a:spcPts val="0"/>
+              </a:spcBef>
+              <a:spcAft>
+                <a:spcPts val="0"/>
+              </a:spcAft>
+              <a:defRPr sz="1300" b="0">
+                <a:solidFill>
+                  <a:srgbClr val="526778"/>
+                </a:solidFill>
+                <a:latin typeface="Lato"/>
+              </a:defRPr>
+            </a:pPr>
+            <a:r>
+              <a:rPr>
+                <a:ea typeface="Microsoft JhengHei"/>
+              </a:rPr>
+              <a:t>Interface</a:t>
+            </a:r>
+          </a:p>
+        </p:txBody>
+      </p:sp>
+      <p:sp>
+        <p:nvSpPr>
+          <p:cNvPr id="8" name="TextBox 7"/>
+          <p:cNvSpPr txBox="1"/>
+          <p:nvPr/>
+        </p:nvSpPr>
+        <p:spPr>
+          <a:xfrm>
+            <a:off x="7477125" y="1762125"/>
+            <a:ext cx="4048124" cy="276225"/>
+          </a:xfrm>
+          <a:prstGeom prst="rect">
+            <a:avLst/>
+          </a:prstGeom>
+          <a:noFill/>
+        </p:spPr>
+        <p:txBody>
+          <a:bodyPr wrap="square" lIns="0" rIns="0" tIns="0" bIns="0">
+            <a:spAutoFit/>
+          </a:bodyPr>
+          <a:lstStyle/>
+          <a:p>
+            <a:pPr>
+              <a:lnSpc>
+                <a:spcPct val="118000"/>
+              </a:lnSpc>
+              <a:spcBef>
+                <a:spcPts val="0"/>
+              </a:spcBef>
+              <a:spcAft>
+                <a:spcPts val="0"/>
+              </a:spcAft>
+              <a:defRPr sz="1300" b="0">
+                <a:solidFill>
+                  <a:srgbClr val="526778"/>
+                </a:solidFill>
+                <a:latin typeface="Lato"/>
+              </a:defRPr>
+            </a:pPr>
+            <a:r>
+              <a:rPr>
+                <a:ea typeface="Microsoft JhengHei"/>
+              </a:rPr>
+              <a:t>How to use it</a:t>
+            </a:r>
+          </a:p>
+        </p:txBody>
+      </p:sp>
+      <p:sp>
+        <p:nvSpPr>
+          <p:cNvPr id="9" name="Rectangle 8"/>
+          <p:cNvSpPr/>
+          <p:nvPr/>
+        </p:nvSpPr>
+        <p:spPr>
+          <a:xfrm>
+            <a:off x="7477125" y="2190750"/>
+            <a:ext cx="4190999" cy="762000"/>
+          </a:xfrm>
+          <a:prstGeom prst="rect">
+            <a:avLst/>
+          </a:prstGeom>
+          <a:solidFill>
+            <a:srgbClr val="FFFFFF"/>
+          </a:solidFill>
+          <a:ln w="12700">
+            <a:solidFill>
+              <a:srgbClr val="146C68"/>
+            </a:solidFill>
+          </a:ln>
+        </p:spPr>
+        <p:style>
+          <a:lnRef idx="1">
+            <a:schemeClr val="accent1"/>
+          </a:lnRef>
+          <a:fillRef idx="3">
+            <a:schemeClr val="accent1"/>
+          </a:fillRef>
+          <a:effectRef idx="2">
+            <a:schemeClr val="accent1"/>
+          </a:effectRef>
+          <a:fontRef idx="minor">
+            <a:schemeClr val="lt1"/>
+          </a:fontRef>
+        </p:style>
+        <p:txBody>
+          <a:bodyPr rtlCol="0" anchor="ctr"/>
+          <a:lstStyle/>
+          <a:p>
+            <a:pPr algn="ctr"/>
+          </a:p>
+        </p:txBody>
+      </p:sp>
+      <p:sp>
+        <p:nvSpPr>
+          <p:cNvPr id="10" name="TextBox 9"/>
+          <p:cNvSpPr txBox="1"/>
+          <p:nvPr/>
+        </p:nvSpPr>
+        <p:spPr>
+          <a:xfrm>
+            <a:off x="7620000" y="2333625"/>
+            <a:ext cx="3905249" cy="571500"/>
+          </a:xfrm>
+          <a:prstGeom prst="rect">
+            <a:avLst/>
+          </a:prstGeom>
+          <a:noFill/>
+        </p:spPr>
+        <p:txBody>
+          <a:bodyPr wrap="square" lIns="0" rIns="0" tIns="0" bIns="0">
+            <a:spAutoFit/>
+          </a:bodyPr>
+          <a:lstStyle/>
+          <a:p>
+            <a:pPr>
+              <a:lnSpc>
+                <a:spcPct val="118000"/>
+              </a:lnSpc>
+              <a:spcBef>
+                <a:spcPts val="0"/>
+              </a:spcBef>
+              <a:spcAft>
+                <a:spcPts val="0"/>
+              </a:spcAft>
+              <a:defRPr sz="1900" b="1">
+                <a:solidFill>
+                  <a:srgbClr val="146C68"/>
+                </a:solidFill>
+                <a:latin typeface="Lato"/>
+              </a:defRPr>
+            </a:pPr>
+            <a:r>
+              <a:rPr>
+                <a:ea typeface="Microsoft JhengHei"/>
+              </a:rPr>
+              <a:t>Open a saved proposal</a:t>
+            </a:r>
+          </a:p>
+        </p:txBody>
+      </p:sp>
+      <p:cxnSp>
+        <p:nvCxnSpPr>
+          <p:cNvPr id="11" name="Connector 10"/>
+          <p:cNvCxnSpPr/>
+          <p:nvPr/>
+        </p:nvCxnSpPr>
+        <p:spPr>
+          <a:xfrm flipH="1">
+            <a:off x="8429625" y="3038475"/>
+            <a:ext cx="1095375" cy="457200"/>
+          </a:xfrm>
+          <a:prstGeom prst="line">
+            <a:avLst/>
+          </a:prstGeom>
+          <a:ln w="19050">
+            <a:solidFill>
+              <a:srgbClr val="526778"/>
+            </a:solidFill>
+            <a:tailEnd type="triangle"/>
+          </a:ln>
+        </p:spPr>
+        <p:style>
+          <a:lnRef idx="2">
+            <a:schemeClr val="accent1"/>
+          </a:lnRef>
+          <a:fillRef idx="0">
+            <a:schemeClr val="accent1"/>
+          </a:fillRef>
+          <a:effectRef idx="1">
+            <a:schemeClr val="accent1"/>
+          </a:effectRef>
+          <a:fontRef idx="minor">
+            <a:schemeClr val="tx1"/>
+          </a:fontRef>
+        </p:style>
+      </p:cxnSp>
+      <p:cxnSp>
+        <p:nvCxnSpPr>
+          <p:cNvPr id="12" name="Connector 11"/>
+          <p:cNvCxnSpPr/>
+          <p:nvPr/>
+        </p:nvCxnSpPr>
+        <p:spPr>
+          <a:xfrm>
+            <a:off x="9525000" y="3038475"/>
+            <a:ext cx="1143000" cy="457200"/>
+          </a:xfrm>
+          <a:prstGeom prst="line">
+            <a:avLst/>
+          </a:prstGeom>
+          <a:ln w="19050">
+            <a:solidFill>
+              <a:srgbClr val="526778"/>
+            </a:solidFill>
+            <a:tailEnd type="triangle"/>
+          </a:ln>
+        </p:spPr>
+        <p:style>
+          <a:lnRef idx="2">
+            <a:schemeClr val="accent1"/>
+          </a:lnRef>
+          <a:fillRef idx="0">
+            <a:schemeClr val="accent1"/>
+          </a:fillRef>
+          <a:effectRef idx="1">
+            <a:schemeClr val="accent1"/>
+          </a:effectRef>
+          <a:fontRef idx="minor">
+            <a:schemeClr val="tx1"/>
+          </a:fontRef>
+        </p:style>
+      </p:cxnSp>
+      <p:sp>
+        <p:nvSpPr>
+          <p:cNvPr id="13" name="Rectangle 12"/>
+          <p:cNvSpPr/>
+          <p:nvPr/>
+        </p:nvSpPr>
+        <p:spPr>
+          <a:xfrm>
+            <a:off x="7477125" y="3667125"/>
+            <a:ext cx="1905000" cy="819150"/>
+          </a:xfrm>
+          <a:prstGeom prst="rect">
+            <a:avLst/>
+          </a:prstGeom>
+          <a:solidFill>
+            <a:srgbClr val="FFFFFF"/>
+          </a:solidFill>
+          <a:ln w="12700">
+            <a:solidFill>
+              <a:srgbClr val="146C68"/>
+            </a:solidFill>
+          </a:ln>
+        </p:spPr>
+        <p:style>
+          <a:lnRef idx="1">
+            <a:schemeClr val="accent1"/>
+          </a:lnRef>
+          <a:fillRef idx="3">
+            <a:schemeClr val="accent1"/>
+          </a:fillRef>
+          <a:effectRef idx="2">
+            <a:schemeClr val="accent1"/>
+          </a:effectRef>
+          <a:fontRef idx="minor">
+            <a:schemeClr val="lt1"/>
+          </a:fontRef>
+        </p:style>
+        <p:txBody>
+          <a:bodyPr rtlCol="0" anchor="ctr"/>
+          <a:lstStyle/>
+          <a:p>
+            <a:pPr algn="ctr"/>
+          </a:p>
+        </p:txBody>
+      </p:sp>
+      <p:sp>
+        <p:nvSpPr>
+          <p:cNvPr id="14" name="TextBox 13"/>
+          <p:cNvSpPr txBox="1"/>
+          <p:nvPr/>
+        </p:nvSpPr>
+        <p:spPr>
+          <a:xfrm>
+            <a:off x="7620000" y="3810000"/>
+            <a:ext cx="1619250" cy="628650"/>
+          </a:xfrm>
+          <a:prstGeom prst="rect">
+            <a:avLst/>
+          </a:prstGeom>
+          <a:noFill/>
+        </p:spPr>
+        <p:txBody>
+          <a:bodyPr wrap="square" lIns="0" rIns="0" tIns="0" bIns="0">
+            <a:spAutoFit/>
+          </a:bodyPr>
+          <a:lstStyle/>
+          <a:p>
+            <a:pPr>
+              <a:lnSpc>
+                <a:spcPct val="118000"/>
+              </a:lnSpc>
+              <a:spcBef>
+                <a:spcPts val="0"/>
+              </a:spcBef>
+              <a:spcAft>
+                <a:spcPts val="0"/>
+              </a:spcAft>
+              <a:defRPr sz="1900" b="1">
+                <a:solidFill>
+                  <a:srgbClr val="146C68"/>
+                </a:solidFill>
+                <a:latin typeface="Lato"/>
+              </a:defRPr>
+            </a:pPr>
+            <a:r>
+              <a:rPr>
+                <a:ea typeface="Microsoft JhengHei"/>
+              </a:rPr>
+              <a:t>Cited passages</a:t>
+            </a:r>
+          </a:p>
+        </p:txBody>
+      </p:sp>
+      <p:sp>
+        <p:nvSpPr>
+          <p:cNvPr id="15" name="Rectangle 14"/>
+          <p:cNvSpPr/>
+          <p:nvPr/>
+        </p:nvSpPr>
+        <p:spPr>
+          <a:xfrm>
+            <a:off x="9667875" y="3667125"/>
+            <a:ext cx="2000250" cy="819150"/>
+          </a:xfrm>
+          <a:prstGeom prst="rect">
+            <a:avLst/>
+          </a:prstGeom>
+          <a:solidFill>
+            <a:srgbClr val="FFFFFF"/>
+          </a:solidFill>
+          <a:ln w="12700">
+            <a:solidFill>
+              <a:srgbClr val="146C68"/>
+            </a:solidFill>
+          </a:ln>
+        </p:spPr>
+        <p:style>
+          <a:lnRef idx="1">
+            <a:schemeClr val="accent1"/>
+          </a:lnRef>
+          <a:fillRef idx="3">
+            <a:schemeClr val="accent1"/>
+          </a:fillRef>
+          <a:effectRef idx="2">
+            <a:schemeClr val="accent1"/>
+          </a:effectRef>
+          <a:fontRef idx="minor">
+            <a:schemeClr val="lt1"/>
+          </a:fontRef>
+        </p:style>
+        <p:txBody>
+          <a:bodyPr rtlCol="0" anchor="ctr"/>
+          <a:lstStyle/>
+          <a:p>
+            <a:pPr algn="ctr"/>
+          </a:p>
+        </p:txBody>
+      </p:sp>
+      <p:sp>
+        <p:nvSpPr>
+          <p:cNvPr id="16" name="TextBox 15"/>
+          <p:cNvSpPr txBox="1"/>
+          <p:nvPr/>
+        </p:nvSpPr>
+        <p:spPr>
+          <a:xfrm>
+            <a:off x="9810750" y="3810000"/>
+            <a:ext cx="1714500" cy="628650"/>
+          </a:xfrm>
+          <a:prstGeom prst="rect">
+            <a:avLst/>
+          </a:prstGeom>
+          <a:noFill/>
+        </p:spPr>
+        <p:txBody>
+          <a:bodyPr wrap="square" lIns="0" rIns="0" tIns="0" bIns="0">
+            <a:spAutoFit/>
+          </a:bodyPr>
+          <a:lstStyle/>
+          <a:p>
+            <a:pPr>
+              <a:lnSpc>
+                <a:spcPct val="118000"/>
+              </a:lnSpc>
+              <a:spcBef>
+                <a:spcPts val="0"/>
+              </a:spcBef>
+              <a:spcAft>
+                <a:spcPts val="0"/>
+              </a:spcAft>
+              <a:defRPr sz="1900" b="1">
+                <a:solidFill>
+                  <a:srgbClr val="146C68"/>
+                </a:solidFill>
+                <a:latin typeface="Lato"/>
+              </a:defRPr>
+            </a:pPr>
+            <a:r>
+              <a:rPr>
+                <a:ea typeface="Microsoft JhengHei"/>
+              </a:rPr>
+              <a:t>Checks</a:t>
+            </a:r>
+          </a:p>
+        </p:txBody>
+      </p:sp>
+      <p:sp>
+        <p:nvSpPr>
+          <p:cNvPr id="17" name="TextBox 16"/>
+          <p:cNvSpPr txBox="1"/>
+          <p:nvPr/>
+        </p:nvSpPr>
+        <p:spPr>
+          <a:xfrm>
+            <a:off x="7477125" y="5010150"/>
+            <a:ext cx="4190999" cy="762000"/>
+          </a:xfrm>
+          <a:prstGeom prst="rect">
+            <a:avLst/>
+          </a:prstGeom>
+          <a:noFill/>
+        </p:spPr>
+        <p:txBody>
+          <a:bodyPr wrap="square" lIns="0" rIns="0" tIns="0" bIns="0">
+            <a:spAutoFit/>
+          </a:bodyPr>
+          <a:lstStyle/>
+          <a:p>
+            <a:pPr>
+              <a:lnSpc>
+                <a:spcPct val="118000"/>
+              </a:lnSpc>
+              <a:spcBef>
+                <a:spcPts val="0"/>
+              </a:spcBef>
+              <a:spcAft>
+                <a:spcPts val="0"/>
+              </a:spcAft>
+              <a:defRPr sz="2300" b="1">
+                <a:solidFill>
+                  <a:srgbClr val="146C68"/>
+                </a:solidFill>
+                <a:latin typeface="Lato"/>
+              </a:defRPr>
+            </a:pPr>
+            <a:r>
+              <a:rPr>
+                <a:ea typeface="Microsoft JhengHei"/>
+              </a:rPr>
+              <a:t>Read its explanation</a:t>
+            </a:r>
+          </a:p>
+          <a:p>
+            <a:pPr>
+              <a:lnSpc>
+                <a:spcPct val="118000"/>
+              </a:lnSpc>
+              <a:spcBef>
+                <a:spcPts val="0"/>
+              </a:spcBef>
+              <a:spcAft>
+                <a:spcPts val="0"/>
+              </a:spcAft>
+              <a:defRPr sz="2300" b="1">
+                <a:solidFill>
+                  <a:srgbClr val="146C68"/>
+                </a:solidFill>
+                <a:latin typeface="Lato"/>
+              </a:defRPr>
+            </a:pPr>
+            <a:r>
+              <a:rPr>
+                <a:ea typeface="Microsoft JhengHei"/>
+              </a:rPr>
+              <a:t>and alternatives.</a:t>
+            </a:r>
+          </a:p>
+        </p:txBody>
+      </p:sp>
+      <p:sp>
+        <p:nvSpPr>
+          <p:cNvPr id="18" name="TextBox 17"/>
+          <p:cNvSpPr txBox="1"/>
+          <p:nvPr/>
+        </p:nvSpPr>
+        <p:spPr>
+          <a:xfrm>
+            <a:off x="523874" y="5924550"/>
+            <a:ext cx="6477000" cy="495299"/>
+          </a:xfrm>
+          <a:prstGeom prst="rect">
+            <a:avLst/>
+          </a:prstGeom>
+          <a:noFill/>
+        </p:spPr>
+        <p:txBody>
+          <a:bodyPr wrap="square" lIns="0" rIns="0" tIns="0" bIns="0">
+            <a:spAutoFit/>
+          </a:bodyPr>
+          <a:lstStyle/>
+          <a:p>
+            <a:pPr>
+              <a:lnSpc>
+                <a:spcPct val="118000"/>
+              </a:lnSpc>
+              <a:spcBef>
+                <a:spcPts val="0"/>
+              </a:spcBef>
+              <a:spcAft>
+                <a:spcPts val="0"/>
+              </a:spcAft>
+              <a:defRPr sz="2100" b="0">
+                <a:solidFill>
+                  <a:srgbClr val="146C68"/>
+                </a:solidFill>
+                <a:latin typeface="Lato"/>
+              </a:defRPr>
+            </a:pPr>
+            <a:r>
+              <a:rPr>
+                <a:ea typeface="Microsoft JhengHei"/>
+              </a:rPr>
+              <a:t>Follow a citation into Graph to inspect its source.</a:t>
+            </a:r>
+          </a:p>
+        </p:txBody>
+      </p:sp>
+      <p:sp>
+        <p:nvSpPr>
+          <p:cNvPr id="19" name="TextBox 18"/>
+          <p:cNvSpPr txBox="1"/>
+          <p:nvPr/>
+        </p:nvSpPr>
+        <p:spPr>
+          <a:xfrm>
+            <a:off x="7477125" y="5924550"/>
+            <a:ext cx="4190999" cy="485775"/>
+          </a:xfrm>
+          <a:prstGeom prst="rect">
+            <a:avLst/>
+          </a:prstGeom>
+          <a:noFill/>
+        </p:spPr>
+        <p:txBody>
+          <a:bodyPr wrap="square" lIns="0" rIns="0" tIns="0" bIns="0">
+            <a:spAutoFit/>
+          </a:bodyPr>
+          <a:lstStyle/>
+          <a:p>
+            <a:pPr>
+              <a:lnSpc>
+                <a:spcPct val="118000"/>
+              </a:lnSpc>
+              <a:spcBef>
+                <a:spcPts val="0"/>
+              </a:spcBef>
+              <a:spcAft>
+                <a:spcPts val="0"/>
+              </a:spcAft>
+              <a:defRPr sz="1700" b="0">
+                <a:solidFill>
+                  <a:srgbClr val="526778"/>
+                </a:solidFill>
+                <a:latin typeface="Lato"/>
+              </a:defRPr>
+            </a:pPr>
+            <a:r>
+              <a:rPr>
+                <a:ea typeface="Microsoft JhengHei"/>
+              </a:rPr>
+              <a:t>Inspect one proposal at a time.</a:t>
+            </a:r>
+          </a:p>
+        </p:txBody>
+      </p:sp>
+      <p:sp>
+        <p:nvSpPr>
+          <p:cNvPr id="20" name="TextBox 19"/>
+          <p:cNvSpPr txBox="1"/>
+          <p:nvPr/>
+        </p:nvSpPr>
+        <p:spPr>
+          <a:xfrm>
+            <a:off x="523874" y="6515100"/>
+            <a:ext cx="10477500" cy="200025"/>
+          </a:xfrm>
+          <a:prstGeom prst="rect">
+            <a:avLst/>
+          </a:prstGeom>
+          <a:noFill/>
+        </p:spPr>
+        <p:txBody>
+          <a:bodyPr wrap="square" lIns="0" rIns="0" tIns="0" bIns="0">
+            <a:spAutoFit/>
+          </a:bodyPr>
+          <a:lstStyle/>
+          <a:p>
+            <a:pPr>
+              <a:lnSpc>
+                <a:spcPct val="118000"/>
+              </a:lnSpc>
+              <a:spcBef>
+                <a:spcPts val="0"/>
+              </a:spcBef>
+              <a:spcAft>
+                <a:spcPts val="0"/>
+              </a:spcAft>
+              <a:defRPr sz="1000" b="0">
+                <a:solidFill>
+                  <a:srgbClr val="526778"/>
+                </a:solidFill>
+                <a:latin typeface="Lato"/>
+              </a:defRPr>
+            </a:pPr>
+            <a:r>
+              <a:rPr>
+                <a:ea typeface="Microsoft JhengHei"/>
+              </a:rPr>
+              <a:t>Screenshot: source passages hidden where applicable. Diagram: schematic.</a:t>
             </a:r>
           </a:p>
         </p:txBody>
@@ -10798,369 +11924,9 @@
           </a:p>
         </p:txBody>
       </p:sp>
-      <p:pic>
-        <p:nvPicPr>
-          <p:cNvPr id="4" name="Picture 3" descr="graph.png"/>
-          <p:cNvPicPr>
-            <a:picLocks noChangeAspect="1"/>
-          </p:cNvPicPr>
-          <p:nvPr/>
-        </p:nvPicPr>
-        <p:blipFill>
-          <a:blip r:embed="rId2"/>
-          <a:stretch>
-            <a:fillRect/>
-          </a:stretch>
-        </p:blipFill>
-        <p:spPr>
-          <a:xfrm>
-            <a:off x="495299" y="1809750"/>
-            <a:ext cx="8381999" cy="4657725"/>
-          </a:xfrm>
-          <a:prstGeom prst="rect">
-            <a:avLst/>
-          </a:prstGeom>
-        </p:spPr>
-      </p:pic>
-      <p:sp>
-        <p:nvSpPr>
-          <p:cNvPr id="5" name="TextBox 4"/>
-          <p:cNvSpPr txBox="1"/>
-          <p:nvPr/>
-        </p:nvSpPr>
-        <p:spPr>
-          <a:xfrm>
-            <a:off x="9372600" y="1943100"/>
-            <a:ext cx="2324100" cy="371475"/>
-          </a:xfrm>
-          <a:prstGeom prst="rect">
-            <a:avLst/>
-          </a:prstGeom>
-          <a:noFill/>
-        </p:spPr>
-        <p:txBody>
-          <a:bodyPr wrap="square" lIns="0" rIns="0" tIns="0" bIns="0">
-            <a:spAutoFit/>
-          </a:bodyPr>
-          <a:lstStyle/>
-          <a:p>
-            <a:pPr>
-              <a:lnSpc>
-                <a:spcPct val="118000"/>
-              </a:lnSpc>
-              <a:spcBef>
-                <a:spcPts val="0"/>
-              </a:spcBef>
-              <a:spcAft>
-                <a:spcPts val="0"/>
-              </a:spcAft>
-              <a:defRPr sz="2000" b="1">
-                <a:solidFill>
-                  <a:srgbClr val="24384A"/>
-                </a:solidFill>
-                <a:latin typeface="Lato"/>
-              </a:defRPr>
-            </a:pPr>
-            <a:r>
-              <a:rPr>
-                <a:ea typeface="Microsoft JhengHei"/>
-              </a:rPr>
-              <a:t>Records</a:t>
-            </a:r>
-          </a:p>
-        </p:txBody>
-      </p:sp>
-      <p:sp>
-        <p:nvSpPr>
-          <p:cNvPr id="6" name="TextBox 5"/>
-          <p:cNvSpPr txBox="1"/>
-          <p:nvPr/>
-        </p:nvSpPr>
-        <p:spPr>
-          <a:xfrm>
-            <a:off x="9372600" y="2352675"/>
-            <a:ext cx="2324100" cy="895350"/>
-          </a:xfrm>
-          <a:prstGeom prst="rect">
-            <a:avLst/>
-          </a:prstGeom>
-          <a:noFill/>
-        </p:spPr>
-        <p:txBody>
-          <a:bodyPr wrap="square" lIns="0" rIns="0" tIns="0" bIns="0">
-            <a:spAutoFit/>
-          </a:bodyPr>
-          <a:lstStyle/>
-          <a:p>
-            <a:pPr>
-              <a:lnSpc>
-                <a:spcPct val="118000"/>
-              </a:lnSpc>
-              <a:spcBef>
-                <a:spcPts val="0"/>
-              </a:spcBef>
-              <a:spcAft>
-                <a:spcPts val="0"/>
-              </a:spcAft>
-              <a:defRPr sz="1800" b="0">
-                <a:solidFill>
-                  <a:srgbClr val="24384A"/>
-                </a:solidFill>
-                <a:latin typeface="Lato"/>
-              </a:defRPr>
-            </a:pPr>
-            <a:r>
-              <a:rPr>
-                <a:ea typeface="Microsoft JhengHei"/>
-              </a:rPr>
-              <a:t>Sources, passages, proposals and questions.</a:t>
-            </a:r>
-          </a:p>
-        </p:txBody>
-      </p:sp>
-      <p:sp>
-        <p:nvSpPr>
-          <p:cNvPr id="7" name="TextBox 6"/>
-          <p:cNvSpPr txBox="1"/>
-          <p:nvPr/>
-        </p:nvSpPr>
-        <p:spPr>
-          <a:xfrm>
-            <a:off x="9372600" y="3305175"/>
-            <a:ext cx="2324100" cy="371475"/>
-          </a:xfrm>
-          <a:prstGeom prst="rect">
-            <a:avLst/>
-          </a:prstGeom>
-          <a:noFill/>
-        </p:spPr>
-        <p:txBody>
-          <a:bodyPr wrap="square" lIns="0" rIns="0" tIns="0" bIns="0">
-            <a:spAutoFit/>
-          </a:bodyPr>
-          <a:lstStyle/>
-          <a:p>
-            <a:pPr>
-              <a:lnSpc>
-                <a:spcPct val="118000"/>
-              </a:lnSpc>
-              <a:spcBef>
-                <a:spcPts val="0"/>
-              </a:spcBef>
-              <a:spcAft>
-                <a:spcPts val="0"/>
-              </a:spcAft>
-              <a:defRPr sz="2000" b="1">
-                <a:solidFill>
-                  <a:srgbClr val="24384A"/>
-                </a:solidFill>
-                <a:latin typeface="Lato"/>
-              </a:defRPr>
-            </a:pPr>
-            <a:r>
-              <a:rPr>
-                <a:ea typeface="Microsoft JhengHei"/>
-              </a:rPr>
-              <a:t>Links</a:t>
-            </a:r>
-          </a:p>
-        </p:txBody>
-      </p:sp>
-      <p:sp>
-        <p:nvSpPr>
-          <p:cNvPr id="8" name="TextBox 7"/>
-          <p:cNvSpPr txBox="1"/>
-          <p:nvPr/>
-        </p:nvSpPr>
-        <p:spPr>
-          <a:xfrm>
-            <a:off x="9372600" y="3714750"/>
-            <a:ext cx="2324100" cy="895350"/>
-          </a:xfrm>
-          <a:prstGeom prst="rect">
-            <a:avLst/>
-          </a:prstGeom>
-          <a:noFill/>
-        </p:spPr>
-        <p:txBody>
-          <a:bodyPr wrap="square" lIns="0" rIns="0" tIns="0" bIns="0">
-            <a:spAutoFit/>
-          </a:bodyPr>
-          <a:lstStyle/>
-          <a:p>
-            <a:pPr>
-              <a:lnSpc>
-                <a:spcPct val="118000"/>
-              </a:lnSpc>
-              <a:spcBef>
-                <a:spcPts val="0"/>
-              </a:spcBef>
-              <a:spcAft>
-                <a:spcPts val="0"/>
-              </a:spcAft>
-              <a:defRPr sz="1800" b="0">
-                <a:solidFill>
-                  <a:srgbClr val="24384A"/>
-                </a:solidFill>
-                <a:latin typeface="Lato"/>
-              </a:defRPr>
-            </a:pPr>
-            <a:r>
-              <a:rPr>
-                <a:ea typeface="Microsoft JhengHei"/>
-              </a:rPr>
-              <a:t>Read the relationship label on each arrow.</a:t>
-            </a:r>
-          </a:p>
-        </p:txBody>
-      </p:sp>
-      <p:sp>
-        <p:nvSpPr>
-          <p:cNvPr id="9" name="TextBox 8"/>
-          <p:cNvSpPr txBox="1"/>
-          <p:nvPr/>
-        </p:nvSpPr>
-        <p:spPr>
-          <a:xfrm>
-            <a:off x="9372600" y="4667250"/>
-            <a:ext cx="2324100" cy="371475"/>
-          </a:xfrm>
-          <a:prstGeom prst="rect">
-            <a:avLst/>
-          </a:prstGeom>
-          <a:noFill/>
-        </p:spPr>
-        <p:txBody>
-          <a:bodyPr wrap="square" lIns="0" rIns="0" tIns="0" bIns="0">
-            <a:spAutoFit/>
-          </a:bodyPr>
-          <a:lstStyle/>
-          <a:p>
-            <a:pPr>
-              <a:lnSpc>
-                <a:spcPct val="118000"/>
-              </a:lnSpc>
-              <a:spcBef>
-                <a:spcPts val="0"/>
-              </a:spcBef>
-              <a:spcAft>
-                <a:spcPts val="0"/>
-              </a:spcAft>
-              <a:defRPr sz="2000" b="1">
-                <a:solidFill>
-                  <a:srgbClr val="24384A"/>
-                </a:solidFill>
-                <a:latin typeface="Lato"/>
-              </a:defRPr>
-            </a:pPr>
-            <a:r>
-              <a:rPr>
-                <a:ea typeface="Microsoft JhengHei"/>
-              </a:rPr>
-              <a:t>Exploration</a:t>
-            </a:r>
-          </a:p>
-        </p:txBody>
-      </p:sp>
-      <p:sp>
-        <p:nvSpPr>
-          <p:cNvPr id="10" name="TextBox 9"/>
-          <p:cNvSpPr txBox="1"/>
-          <p:nvPr/>
-        </p:nvSpPr>
-        <p:spPr>
-          <a:xfrm>
-            <a:off x="9372600" y="5076825"/>
-            <a:ext cx="2324100" cy="895350"/>
-          </a:xfrm>
-          <a:prstGeom prst="rect">
-            <a:avLst/>
-          </a:prstGeom>
-          <a:noFill/>
-        </p:spPr>
-        <p:txBody>
-          <a:bodyPr wrap="square" lIns="0" rIns="0" tIns="0" bIns="0">
-            <a:spAutoFit/>
-          </a:bodyPr>
-          <a:lstStyle/>
-          <a:p>
-            <a:pPr>
-              <a:lnSpc>
-                <a:spcPct val="118000"/>
-              </a:lnSpc>
-              <a:spcBef>
-                <a:spcPts val="0"/>
-              </a:spcBef>
-              <a:spcAft>
-                <a:spcPts val="0"/>
-              </a:spcAft>
-              <a:defRPr sz="1800" b="0">
-                <a:solidFill>
-                  <a:srgbClr val="24384A"/>
-                </a:solidFill>
-                <a:latin typeface="Lato"/>
-              </a:defRPr>
-            </a:pPr>
-            <a:r>
-              <a:rPr>
-                <a:ea typeface="Microsoft JhengHei"/>
-              </a:rPr>
-              <a:t>Show recorded tool activity beyond cited evidence.</a:t>
-            </a:r>
-          </a:p>
-        </p:txBody>
-      </p:sp>
-      <p:sp>
-        <p:nvSpPr>
-          <p:cNvPr id="11" name="TextBox 10"/>
-          <p:cNvSpPr txBox="1"/>
-          <p:nvPr/>
-        </p:nvSpPr>
-        <p:spPr>
-          <a:xfrm>
-            <a:off x="533400" y="6486525"/>
-            <a:ext cx="8334375" cy="209550"/>
-          </a:xfrm>
-          <a:prstGeom prst="rect">
-            <a:avLst/>
-          </a:prstGeom>
-          <a:noFill/>
-        </p:spPr>
-        <p:txBody>
-          <a:bodyPr wrap="square" lIns="0" rIns="0" tIns="0" bIns="0">
-            <a:spAutoFit/>
-          </a:bodyPr>
-          <a:lstStyle/>
-          <a:p>
-            <a:pPr>
-              <a:lnSpc>
-                <a:spcPct val="118000"/>
-              </a:lnSpc>
-              <a:spcBef>
-                <a:spcPts val="0"/>
-              </a:spcBef>
-              <a:spcAft>
-                <a:spcPts val="0"/>
-              </a:spcAft>
-              <a:defRPr sz="1000" b="0">
-                <a:solidFill>
-                  <a:srgbClr val="526778"/>
-                </a:solidFill>
-                <a:latin typeface="Lato"/>
-              </a:defRPr>
-            </a:pPr>
-            <a:r>
-              <a:rPr>
-                <a:ea typeface="Microsoft JhengHei"/>
-              </a:rPr>
-              <a:t>Source passages hidden; controls and recorded outputs retained.</a:t>
-            </a:r>
-          </a:p>
-        </p:txBody>
-      </p:sp>
-      <p:sp>
-        <p:nvSpPr>
-          <p:cNvPr id="12" name="Rectangle 11"/>
+      <p:sp>
+        <p:nvSpPr>
+          <p:cNvPr id="4" name="Rectangle 3"/>
           <p:cNvSpPr/>
           <p:nvPr/>
         </p:nvSpPr>
@@ -11205,7 +11971,7 @@
       </p:sp>
       <p:sp>
         <p:nvSpPr>
-          <p:cNvPr id="13" name="TextBox 12"/>
+          <p:cNvPr id="5" name="TextBox 4"/>
           <p:cNvSpPr txBox="1"/>
           <p:nvPr/>
         </p:nvSpPr>
@@ -11247,6 +12013,621 @@
                 <a:ea typeface="Microsoft JhengHei"/>
               </a:rPr>
               <a:t>16</a:t>
+            </a:r>
+          </a:p>
+        </p:txBody>
+      </p:sp>
+      <p:pic>
+        <p:nvPicPr>
+          <p:cNvPr id="6" name="Picture 5" descr="graph.png"/>
+          <p:cNvPicPr>
+            <a:picLocks noChangeAspect="1"/>
+          </p:cNvPicPr>
+          <p:nvPr/>
+        </p:nvPicPr>
+        <p:blipFill>
+          <a:blip r:embed="rId2"/>
+          <a:stretch>
+            <a:fillRect/>
+          </a:stretch>
+        </p:blipFill>
+        <p:spPr>
+          <a:xfrm>
+            <a:off x="495299" y="2057400"/>
+            <a:ext cx="6477000" cy="3600450"/>
+          </a:xfrm>
+          <a:prstGeom prst="rect">
+            <a:avLst/>
+          </a:prstGeom>
+        </p:spPr>
+      </p:pic>
+      <p:sp>
+        <p:nvSpPr>
+          <p:cNvPr id="7" name="TextBox 6"/>
+          <p:cNvSpPr txBox="1"/>
+          <p:nvPr/>
+        </p:nvSpPr>
+        <p:spPr>
+          <a:xfrm>
+            <a:off x="523874" y="1762125"/>
+            <a:ext cx="6477000" cy="276225"/>
+          </a:xfrm>
+          <a:prstGeom prst="rect">
+            <a:avLst/>
+          </a:prstGeom>
+          <a:noFill/>
+        </p:spPr>
+        <p:txBody>
+          <a:bodyPr wrap="square" lIns="0" rIns="0" tIns="0" bIns="0">
+            <a:spAutoFit/>
+          </a:bodyPr>
+          <a:lstStyle/>
+          <a:p>
+            <a:pPr>
+              <a:lnSpc>
+                <a:spcPct val="118000"/>
+              </a:lnSpc>
+              <a:spcBef>
+                <a:spcPts val="0"/>
+              </a:spcBef>
+              <a:spcAft>
+                <a:spcPts val="0"/>
+              </a:spcAft>
+              <a:defRPr sz="1300" b="0">
+                <a:solidFill>
+                  <a:srgbClr val="526778"/>
+                </a:solidFill>
+                <a:latin typeface="Lato"/>
+              </a:defRPr>
+            </a:pPr>
+            <a:r>
+              <a:rPr>
+                <a:ea typeface="Microsoft JhengHei"/>
+              </a:rPr>
+              <a:t>Interface</a:t>
+            </a:r>
+          </a:p>
+        </p:txBody>
+      </p:sp>
+      <p:sp>
+        <p:nvSpPr>
+          <p:cNvPr id="8" name="TextBox 7"/>
+          <p:cNvSpPr txBox="1"/>
+          <p:nvPr/>
+        </p:nvSpPr>
+        <p:spPr>
+          <a:xfrm>
+            <a:off x="7477125" y="1762125"/>
+            <a:ext cx="4048124" cy="276225"/>
+          </a:xfrm>
+          <a:prstGeom prst="rect">
+            <a:avLst/>
+          </a:prstGeom>
+          <a:noFill/>
+        </p:spPr>
+        <p:txBody>
+          <a:bodyPr wrap="square" lIns="0" rIns="0" tIns="0" bIns="0">
+            <a:spAutoFit/>
+          </a:bodyPr>
+          <a:lstStyle/>
+          <a:p>
+            <a:pPr>
+              <a:lnSpc>
+                <a:spcPct val="118000"/>
+              </a:lnSpc>
+              <a:spcBef>
+                <a:spcPts val="0"/>
+              </a:spcBef>
+              <a:spcAft>
+                <a:spcPts val="0"/>
+              </a:spcAft>
+              <a:defRPr sz="1300" b="0">
+                <a:solidFill>
+                  <a:srgbClr val="526778"/>
+                </a:solidFill>
+                <a:latin typeface="Lato"/>
+              </a:defRPr>
+            </a:pPr>
+            <a:r>
+              <a:rPr>
+                <a:ea typeface="Microsoft JhengHei"/>
+              </a:rPr>
+              <a:t>How to use it</a:t>
+            </a:r>
+          </a:p>
+        </p:txBody>
+      </p:sp>
+      <p:sp>
+        <p:nvSpPr>
+          <p:cNvPr id="9" name="Rectangle 8"/>
+          <p:cNvSpPr/>
+          <p:nvPr/>
+        </p:nvSpPr>
+        <p:spPr>
+          <a:xfrm>
+            <a:off x="7477125" y="2190750"/>
+            <a:ext cx="4190999" cy="762000"/>
+          </a:xfrm>
+          <a:prstGeom prst="rect">
+            <a:avLst/>
+          </a:prstGeom>
+          <a:solidFill>
+            <a:srgbClr val="FFFFFF"/>
+          </a:solidFill>
+          <a:ln w="12700">
+            <a:solidFill>
+              <a:srgbClr val="24384A"/>
+            </a:solidFill>
+          </a:ln>
+        </p:spPr>
+        <p:style>
+          <a:lnRef idx="1">
+            <a:schemeClr val="accent1"/>
+          </a:lnRef>
+          <a:fillRef idx="3">
+            <a:schemeClr val="accent1"/>
+          </a:fillRef>
+          <a:effectRef idx="2">
+            <a:schemeClr val="accent1"/>
+          </a:effectRef>
+          <a:fontRef idx="minor">
+            <a:schemeClr val="lt1"/>
+          </a:fontRef>
+        </p:style>
+        <p:txBody>
+          <a:bodyPr rtlCol="0" anchor="ctr"/>
+          <a:lstStyle/>
+          <a:p>
+            <a:pPr algn="ctr"/>
+          </a:p>
+        </p:txBody>
+      </p:sp>
+      <p:sp>
+        <p:nvSpPr>
+          <p:cNvPr id="10" name="TextBox 9"/>
+          <p:cNvSpPr txBox="1"/>
+          <p:nvPr/>
+        </p:nvSpPr>
+        <p:spPr>
+          <a:xfrm>
+            <a:off x="7620000" y="2333625"/>
+            <a:ext cx="3905249" cy="571500"/>
+          </a:xfrm>
+          <a:prstGeom prst="rect">
+            <a:avLst/>
+          </a:prstGeom>
+          <a:noFill/>
+        </p:spPr>
+        <p:txBody>
+          <a:bodyPr wrap="square" lIns="0" rIns="0" tIns="0" bIns="0">
+            <a:spAutoFit/>
+          </a:bodyPr>
+          <a:lstStyle/>
+          <a:p>
+            <a:pPr>
+              <a:lnSpc>
+                <a:spcPct val="118000"/>
+              </a:lnSpc>
+              <a:spcBef>
+                <a:spcPts val="0"/>
+              </a:spcBef>
+              <a:spcAft>
+                <a:spcPts val="0"/>
+              </a:spcAft>
+              <a:defRPr sz="1900" b="1">
+                <a:solidFill>
+                  <a:srgbClr val="24384A"/>
+                </a:solidFill>
+                <a:latin typeface="Lato"/>
+              </a:defRPr>
+            </a:pPr>
+            <a:r>
+              <a:rPr>
+                <a:ea typeface="Microsoft JhengHei"/>
+              </a:rPr>
+              <a:t>Select a research question</a:t>
+            </a:r>
+          </a:p>
+        </p:txBody>
+      </p:sp>
+      <p:cxnSp>
+        <p:nvCxnSpPr>
+          <p:cNvPr id="11" name="Connector 10"/>
+          <p:cNvCxnSpPr/>
+          <p:nvPr/>
+        </p:nvCxnSpPr>
+        <p:spPr>
+          <a:xfrm>
+            <a:off x="9572625" y="3028950"/>
+            <a:ext cx="0" cy="400050"/>
+          </a:xfrm>
+          <a:prstGeom prst="line">
+            <a:avLst/>
+          </a:prstGeom>
+          <a:ln w="19050">
+            <a:solidFill>
+              <a:srgbClr val="526778"/>
+            </a:solidFill>
+            <a:tailEnd type="triangle"/>
+          </a:ln>
+        </p:spPr>
+        <p:style>
+          <a:lnRef idx="2">
+            <a:schemeClr val="accent1"/>
+          </a:lnRef>
+          <a:fillRef idx="0">
+            <a:schemeClr val="accent1"/>
+          </a:fillRef>
+          <a:effectRef idx="1">
+            <a:schemeClr val="accent1"/>
+          </a:effectRef>
+          <a:fontRef idx="minor">
+            <a:schemeClr val="tx1"/>
+          </a:fontRef>
+        </p:style>
+      </p:cxnSp>
+      <p:sp>
+        <p:nvSpPr>
+          <p:cNvPr id="12" name="Rectangle 11"/>
+          <p:cNvSpPr/>
+          <p:nvPr/>
+        </p:nvSpPr>
+        <p:spPr>
+          <a:xfrm>
+            <a:off x="7477125" y="3590925"/>
+            <a:ext cx="4190999" cy="762000"/>
+          </a:xfrm>
+          <a:prstGeom prst="rect">
+            <a:avLst/>
+          </a:prstGeom>
+          <a:solidFill>
+            <a:srgbClr val="FFFFFF"/>
+          </a:solidFill>
+          <a:ln w="12700">
+            <a:solidFill>
+              <a:srgbClr val="24384A"/>
+            </a:solidFill>
+          </a:ln>
+        </p:spPr>
+        <p:style>
+          <a:lnRef idx="1">
+            <a:schemeClr val="accent1"/>
+          </a:lnRef>
+          <a:fillRef idx="3">
+            <a:schemeClr val="accent1"/>
+          </a:fillRef>
+          <a:effectRef idx="2">
+            <a:schemeClr val="accent1"/>
+          </a:effectRef>
+          <a:fontRef idx="minor">
+            <a:schemeClr val="lt1"/>
+          </a:fontRef>
+        </p:style>
+        <p:txBody>
+          <a:bodyPr rtlCol="0" anchor="ctr"/>
+          <a:lstStyle/>
+          <a:p>
+            <a:pPr algn="ctr"/>
+          </a:p>
+        </p:txBody>
+      </p:sp>
+      <p:sp>
+        <p:nvSpPr>
+          <p:cNvPr id="13" name="TextBox 12"/>
+          <p:cNvSpPr txBox="1"/>
+          <p:nvPr/>
+        </p:nvSpPr>
+        <p:spPr>
+          <a:xfrm>
+            <a:off x="7620000" y="3733799"/>
+            <a:ext cx="3905249" cy="571500"/>
+          </a:xfrm>
+          <a:prstGeom prst="rect">
+            <a:avLst/>
+          </a:prstGeom>
+          <a:noFill/>
+        </p:spPr>
+        <p:txBody>
+          <a:bodyPr wrap="square" lIns="0" rIns="0" tIns="0" bIns="0">
+            <a:spAutoFit/>
+          </a:bodyPr>
+          <a:lstStyle/>
+          <a:p>
+            <a:pPr>
+              <a:lnSpc>
+                <a:spcPct val="118000"/>
+              </a:lnSpc>
+              <a:spcBef>
+                <a:spcPts val="0"/>
+              </a:spcBef>
+              <a:spcAft>
+                <a:spcPts val="0"/>
+              </a:spcAft>
+              <a:defRPr sz="1900" b="1">
+                <a:solidFill>
+                  <a:srgbClr val="24384A"/>
+                </a:solidFill>
+                <a:latin typeface="Lato"/>
+              </a:defRPr>
+            </a:pPr>
+            <a:r>
+              <a:rPr>
+                <a:ea typeface="Microsoft JhengHei"/>
+              </a:rPr>
+              <a:t>Inspect linked records</a:t>
+            </a:r>
+          </a:p>
+        </p:txBody>
+      </p:sp>
+      <p:cxnSp>
+        <p:nvCxnSpPr>
+          <p:cNvPr id="14" name="Connector 13"/>
+          <p:cNvCxnSpPr/>
+          <p:nvPr/>
+        </p:nvCxnSpPr>
+        <p:spPr>
+          <a:xfrm>
+            <a:off x="9572625" y="4419600"/>
+            <a:ext cx="0" cy="371475"/>
+          </a:xfrm>
+          <a:prstGeom prst="line">
+            <a:avLst/>
+          </a:prstGeom>
+          <a:ln w="19050">
+            <a:solidFill>
+              <a:srgbClr val="526778"/>
+            </a:solidFill>
+            <a:tailEnd type="triangle"/>
+          </a:ln>
+        </p:spPr>
+        <p:style>
+          <a:lnRef idx="2">
+            <a:schemeClr val="accent1"/>
+          </a:lnRef>
+          <a:fillRef idx="0">
+            <a:schemeClr val="accent1"/>
+          </a:fillRef>
+          <a:effectRef idx="1">
+            <a:schemeClr val="accent1"/>
+          </a:effectRef>
+          <a:fontRef idx="minor">
+            <a:schemeClr val="tx1"/>
+          </a:fontRef>
+        </p:style>
+      </p:cxnSp>
+      <p:sp>
+        <p:nvSpPr>
+          <p:cNvPr id="15" name="Rectangle 14"/>
+          <p:cNvSpPr/>
+          <p:nvPr/>
+        </p:nvSpPr>
+        <p:spPr>
+          <a:xfrm>
+            <a:off x="7477125" y="4953000"/>
+            <a:ext cx="4190999" cy="762000"/>
+          </a:xfrm>
+          <a:prstGeom prst="rect">
+            <a:avLst/>
+          </a:prstGeom>
+          <a:solidFill>
+            <a:srgbClr val="FFFFFF"/>
+          </a:solidFill>
+          <a:ln w="12700">
+            <a:solidFill>
+              <a:srgbClr val="24384A"/>
+            </a:solidFill>
+          </a:ln>
+        </p:spPr>
+        <p:style>
+          <a:lnRef idx="1">
+            <a:schemeClr val="accent1"/>
+          </a:lnRef>
+          <a:fillRef idx="3">
+            <a:schemeClr val="accent1"/>
+          </a:fillRef>
+          <a:effectRef idx="2">
+            <a:schemeClr val="accent1"/>
+          </a:effectRef>
+          <a:fontRef idx="minor">
+            <a:schemeClr val="lt1"/>
+          </a:fontRef>
+        </p:style>
+        <p:txBody>
+          <a:bodyPr rtlCol="0" anchor="ctr"/>
+          <a:lstStyle/>
+          <a:p>
+            <a:pPr algn="ctr"/>
+          </a:p>
+        </p:txBody>
+      </p:sp>
+      <p:sp>
+        <p:nvSpPr>
+          <p:cNvPr id="16" name="TextBox 15"/>
+          <p:cNvSpPr txBox="1"/>
+          <p:nvPr/>
+        </p:nvSpPr>
+        <p:spPr>
+          <a:xfrm>
+            <a:off x="7620000" y="5095875"/>
+            <a:ext cx="3905249" cy="571500"/>
+          </a:xfrm>
+          <a:prstGeom prst="rect">
+            <a:avLst/>
+          </a:prstGeom>
+          <a:noFill/>
+        </p:spPr>
+        <p:txBody>
+          <a:bodyPr wrap="square" lIns="0" rIns="0" tIns="0" bIns="0">
+            <a:spAutoFit/>
+          </a:bodyPr>
+          <a:lstStyle/>
+          <a:p>
+            <a:pPr>
+              <a:lnSpc>
+                <a:spcPct val="118000"/>
+              </a:lnSpc>
+              <a:spcBef>
+                <a:spcPts val="0"/>
+              </a:spcBef>
+              <a:spcAft>
+                <a:spcPts val="0"/>
+              </a:spcAft>
+              <a:defRPr sz="1900" b="1">
+                <a:solidFill>
+                  <a:srgbClr val="24384A"/>
+                </a:solidFill>
+                <a:latin typeface="Lato"/>
+              </a:defRPr>
+            </a:pPr>
+            <a:r>
+              <a:rPr>
+                <a:ea typeface="Microsoft JhengHei"/>
+              </a:rPr>
+              <a:t>Accept or reject a record</a:t>
+            </a:r>
+          </a:p>
+        </p:txBody>
+      </p:sp>
+      <p:sp>
+        <p:nvSpPr>
+          <p:cNvPr id="17" name="TextBox 16"/>
+          <p:cNvSpPr txBox="1"/>
+          <p:nvPr/>
+        </p:nvSpPr>
+        <p:spPr>
+          <a:xfrm>
+            <a:off x="523874" y="5924550"/>
+            <a:ext cx="6477000" cy="495299"/>
+          </a:xfrm>
+          <a:prstGeom prst="rect">
+            <a:avLst/>
+          </a:prstGeom>
+          <a:noFill/>
+        </p:spPr>
+        <p:txBody>
+          <a:bodyPr wrap="square" lIns="0" rIns="0" tIns="0" bIns="0">
+            <a:spAutoFit/>
+          </a:bodyPr>
+          <a:lstStyle/>
+          <a:p>
+            <a:pPr>
+              <a:lnSpc>
+                <a:spcPct val="118000"/>
+              </a:lnSpc>
+              <a:spcBef>
+                <a:spcPts val="0"/>
+              </a:spcBef>
+              <a:spcAft>
+                <a:spcPts val="0"/>
+              </a:spcAft>
+              <a:defRPr sz="2100" b="0">
+                <a:solidFill>
+                  <a:srgbClr val="24384A"/>
+                </a:solidFill>
+                <a:latin typeface="Lato"/>
+              </a:defRPr>
+            </a:pPr>
+            <a:r>
+              <a:rPr>
+                <a:ea typeface="Microsoft JhengHei"/>
+              </a:rPr>
+              <a:t>Show exploration adds recorded tool activity.</a:t>
+            </a:r>
+          </a:p>
+        </p:txBody>
+      </p:sp>
+      <p:sp>
+        <p:nvSpPr>
+          <p:cNvPr id="18" name="TextBox 17"/>
+          <p:cNvSpPr txBox="1"/>
+          <p:nvPr/>
+        </p:nvSpPr>
+        <p:spPr>
+          <a:xfrm>
+            <a:off x="7477125" y="5924550"/>
+            <a:ext cx="4190999" cy="485775"/>
+          </a:xfrm>
+          <a:prstGeom prst="rect">
+            <a:avLst/>
+          </a:prstGeom>
+          <a:noFill/>
+        </p:spPr>
+        <p:txBody>
+          <a:bodyPr wrap="square" lIns="0" rIns="0" tIns="0" bIns="0">
+            <a:spAutoFit/>
+          </a:bodyPr>
+          <a:lstStyle/>
+          <a:p>
+            <a:pPr>
+              <a:lnSpc>
+                <a:spcPct val="118000"/>
+              </a:lnSpc>
+              <a:spcBef>
+                <a:spcPts val="0"/>
+              </a:spcBef>
+              <a:spcAft>
+                <a:spcPts val="0"/>
+              </a:spcAft>
+              <a:defRPr sz="1700" b="0">
+                <a:solidFill>
+                  <a:srgbClr val="526778"/>
+                </a:solidFill>
+                <a:latin typeface="Lato"/>
+              </a:defRPr>
+            </a:pPr>
+            <a:r>
+              <a:rPr>
+                <a:ea typeface="Microsoft JhengHei"/>
+              </a:rPr>
+              <a:t>Filtering the view does not delete records.</a:t>
+            </a:r>
+          </a:p>
+        </p:txBody>
+      </p:sp>
+      <p:sp>
+        <p:nvSpPr>
+          <p:cNvPr id="19" name="TextBox 18"/>
+          <p:cNvSpPr txBox="1"/>
+          <p:nvPr/>
+        </p:nvSpPr>
+        <p:spPr>
+          <a:xfrm>
+            <a:off x="523874" y="6515100"/>
+            <a:ext cx="10477500" cy="200025"/>
+          </a:xfrm>
+          <a:prstGeom prst="rect">
+            <a:avLst/>
+          </a:prstGeom>
+          <a:noFill/>
+        </p:spPr>
+        <p:txBody>
+          <a:bodyPr wrap="square" lIns="0" rIns="0" tIns="0" bIns="0">
+            <a:spAutoFit/>
+          </a:bodyPr>
+          <a:lstStyle/>
+          <a:p>
+            <a:pPr>
+              <a:lnSpc>
+                <a:spcPct val="118000"/>
+              </a:lnSpc>
+              <a:spcBef>
+                <a:spcPts val="0"/>
+              </a:spcBef>
+              <a:spcAft>
+                <a:spcPts val="0"/>
+              </a:spcAft>
+              <a:defRPr sz="1000" b="0">
+                <a:solidFill>
+                  <a:srgbClr val="526778"/>
+                </a:solidFill>
+                <a:latin typeface="Lato"/>
+              </a:defRPr>
+            </a:pPr>
+            <a:r>
+              <a:rPr>
+                <a:ea typeface="Microsoft JhengHei"/>
+              </a:rPr>
+              <a:t>Screenshot: source passages hidden where applicable. Diagram: schematic.</a:t>
             </a:r>
           </a:p>
         </p:txBody>
@@ -17975,369 +19356,9 @@
           </a:p>
         </p:txBody>
       </p:sp>
-      <p:pic>
-        <p:nvPicPr>
-          <p:cNvPr id="4" name="Picture 3" descr="corpus.png"/>
-          <p:cNvPicPr>
-            <a:picLocks noChangeAspect="1"/>
-          </p:cNvPicPr>
-          <p:nvPr/>
-        </p:nvPicPr>
-        <p:blipFill>
-          <a:blip r:embed="rId2"/>
-          <a:stretch>
-            <a:fillRect/>
-          </a:stretch>
-        </p:blipFill>
-        <p:spPr>
-          <a:xfrm>
-            <a:off x="495299" y="1809750"/>
-            <a:ext cx="8381999" cy="4657725"/>
-          </a:xfrm>
-          <a:prstGeom prst="rect">
-            <a:avLst/>
-          </a:prstGeom>
-        </p:spPr>
-      </p:pic>
-      <p:sp>
-        <p:nvSpPr>
-          <p:cNvPr id="5" name="TextBox 4"/>
-          <p:cNvSpPr txBox="1"/>
-          <p:nvPr/>
-        </p:nvSpPr>
-        <p:spPr>
-          <a:xfrm>
-            <a:off x="9372600" y="1943100"/>
-            <a:ext cx="2324100" cy="371475"/>
-          </a:xfrm>
-          <a:prstGeom prst="rect">
-            <a:avLst/>
-          </a:prstGeom>
-          <a:noFill/>
-        </p:spPr>
-        <p:txBody>
-          <a:bodyPr wrap="square" lIns="0" rIns="0" tIns="0" bIns="0">
-            <a:spAutoFit/>
-          </a:bodyPr>
-          <a:lstStyle/>
-          <a:p>
-            <a:pPr>
-              <a:lnSpc>
-                <a:spcPct val="118000"/>
-              </a:lnSpc>
-              <a:spcBef>
-                <a:spcPts val="0"/>
-              </a:spcBef>
-              <a:spcAft>
-                <a:spcPts val="0"/>
-              </a:spcAft>
-              <a:defRPr sz="2000" b="1">
-                <a:solidFill>
-                  <a:srgbClr val="155F88"/>
-                </a:solidFill>
-                <a:latin typeface="Lato"/>
-              </a:defRPr>
-            </a:pPr>
-            <a:r>
-              <a:rPr>
-                <a:ea typeface="Microsoft JhengHei"/>
-              </a:rPr>
-              <a:t>Find</a:t>
-            </a:r>
-          </a:p>
-        </p:txBody>
-      </p:sp>
-      <p:sp>
-        <p:nvSpPr>
-          <p:cNvPr id="6" name="TextBox 5"/>
-          <p:cNvSpPr txBox="1"/>
-          <p:nvPr/>
-        </p:nvSpPr>
-        <p:spPr>
-          <a:xfrm>
-            <a:off x="9372600" y="2352675"/>
-            <a:ext cx="2324100" cy="895350"/>
-          </a:xfrm>
-          <a:prstGeom prst="rect">
-            <a:avLst/>
-          </a:prstGeom>
-          <a:noFill/>
-        </p:spPr>
-        <p:txBody>
-          <a:bodyPr wrap="square" lIns="0" rIns="0" tIns="0" bIns="0">
-            <a:spAutoFit/>
-          </a:bodyPr>
-          <a:lstStyle/>
-          <a:p>
-            <a:pPr>
-              <a:lnSpc>
-                <a:spcPct val="118000"/>
-              </a:lnSpc>
-              <a:spcBef>
-                <a:spcPts val="0"/>
-              </a:spcBef>
-              <a:spcAft>
-                <a:spcPts val="0"/>
-              </a:spcAft>
-              <a:defRPr sz="1800" b="0">
-                <a:solidFill>
-                  <a:srgbClr val="24384A"/>
-                </a:solidFill>
-                <a:latin typeface="Lato"/>
-              </a:defRPr>
-            </a:pPr>
-            <a:r>
-              <a:rPr>
-                <a:ea typeface="Microsoft JhengHei"/>
-              </a:rPr>
-              <a:t>Search exact wording or select Related passages.</a:t>
-            </a:r>
-          </a:p>
-        </p:txBody>
-      </p:sp>
-      <p:sp>
-        <p:nvSpPr>
-          <p:cNvPr id="7" name="TextBox 6"/>
-          <p:cNvSpPr txBox="1"/>
-          <p:nvPr/>
-        </p:nvSpPr>
-        <p:spPr>
-          <a:xfrm>
-            <a:off x="9372600" y="3305175"/>
-            <a:ext cx="2324100" cy="371475"/>
-          </a:xfrm>
-          <a:prstGeom prst="rect">
-            <a:avLst/>
-          </a:prstGeom>
-          <a:noFill/>
-        </p:spPr>
-        <p:txBody>
-          <a:bodyPr wrap="square" lIns="0" rIns="0" tIns="0" bIns="0">
-            <a:spAutoFit/>
-          </a:bodyPr>
-          <a:lstStyle/>
-          <a:p>
-            <a:pPr>
-              <a:lnSpc>
-                <a:spcPct val="118000"/>
-              </a:lnSpc>
-              <a:spcBef>
-                <a:spcPts val="0"/>
-              </a:spcBef>
-              <a:spcAft>
-                <a:spcPts val="0"/>
-              </a:spcAft>
-              <a:defRPr sz="2000" b="1">
-                <a:solidFill>
-                  <a:srgbClr val="155F88"/>
-                </a:solidFill>
-                <a:latin typeface="Lato"/>
-              </a:defRPr>
-            </a:pPr>
-            <a:r>
-              <a:rPr>
-                <a:ea typeface="Microsoft JhengHei"/>
-              </a:rPr>
-              <a:t>Read</a:t>
-            </a:r>
-          </a:p>
-        </p:txBody>
-      </p:sp>
-      <p:sp>
-        <p:nvSpPr>
-          <p:cNvPr id="8" name="TextBox 7"/>
-          <p:cNvSpPr txBox="1"/>
-          <p:nvPr/>
-        </p:nvSpPr>
-        <p:spPr>
-          <a:xfrm>
-            <a:off x="9372600" y="3714750"/>
-            <a:ext cx="2324100" cy="895350"/>
-          </a:xfrm>
-          <a:prstGeom prst="rect">
-            <a:avLst/>
-          </a:prstGeom>
-          <a:noFill/>
-        </p:spPr>
-        <p:txBody>
-          <a:bodyPr wrap="square" lIns="0" rIns="0" tIns="0" bIns="0">
-            <a:spAutoFit/>
-          </a:bodyPr>
-          <a:lstStyle/>
-          <a:p>
-            <a:pPr>
-              <a:lnSpc>
-                <a:spcPct val="118000"/>
-              </a:lnSpc>
-              <a:spcBef>
-                <a:spcPts val="0"/>
-              </a:spcBef>
-              <a:spcAft>
-                <a:spcPts val="0"/>
-              </a:spcAft>
-              <a:defRPr sz="1800" b="0">
-                <a:solidFill>
-                  <a:srgbClr val="24384A"/>
-                </a:solidFill>
-                <a:latin typeface="Lato"/>
-              </a:defRPr>
-            </a:pPr>
-            <a:r>
-              <a:rPr>
-                <a:ea typeface="Microsoft JhengHei"/>
-              </a:rPr>
-              <a:t>Selected passage on the left; candidates on the right.</a:t>
-            </a:r>
-          </a:p>
-        </p:txBody>
-      </p:sp>
-      <p:sp>
-        <p:nvSpPr>
-          <p:cNvPr id="9" name="TextBox 8"/>
-          <p:cNvSpPr txBox="1"/>
-          <p:nvPr/>
-        </p:nvSpPr>
-        <p:spPr>
-          <a:xfrm>
-            <a:off x="9372600" y="4667250"/>
-            <a:ext cx="2324100" cy="371475"/>
-          </a:xfrm>
-          <a:prstGeom prst="rect">
-            <a:avLst/>
-          </a:prstGeom>
-          <a:noFill/>
-        </p:spPr>
-        <p:txBody>
-          <a:bodyPr wrap="square" lIns="0" rIns="0" tIns="0" bIns="0">
-            <a:spAutoFit/>
-          </a:bodyPr>
-          <a:lstStyle/>
-          <a:p>
-            <a:pPr>
-              <a:lnSpc>
-                <a:spcPct val="118000"/>
-              </a:lnSpc>
-              <a:spcBef>
-                <a:spcPts val="0"/>
-              </a:spcBef>
-              <a:spcAft>
-                <a:spcPts val="0"/>
-              </a:spcAft>
-              <a:defRPr sz="2000" b="1">
-                <a:solidFill>
-                  <a:srgbClr val="155F88"/>
-                </a:solidFill>
-                <a:latin typeface="Lato"/>
-              </a:defRPr>
-            </a:pPr>
-            <a:r>
-              <a:rPr>
-                <a:ea typeface="Microsoft JhengHei"/>
-              </a:rPr>
-              <a:t>Compare</a:t>
-            </a:r>
-          </a:p>
-        </p:txBody>
-      </p:sp>
-      <p:sp>
-        <p:nvSpPr>
-          <p:cNvPr id="10" name="TextBox 9"/>
-          <p:cNvSpPr txBox="1"/>
-          <p:nvPr/>
-        </p:nvSpPr>
-        <p:spPr>
-          <a:xfrm>
-            <a:off x="9372600" y="5076825"/>
-            <a:ext cx="2324100" cy="895350"/>
-          </a:xfrm>
-          <a:prstGeom prst="rect">
-            <a:avLst/>
-          </a:prstGeom>
-          <a:noFill/>
-        </p:spPr>
-        <p:txBody>
-          <a:bodyPr wrap="square" lIns="0" rIns="0" tIns="0" bIns="0">
-            <a:spAutoFit/>
-          </a:bodyPr>
-          <a:lstStyle/>
-          <a:p>
-            <a:pPr>
-              <a:lnSpc>
-                <a:spcPct val="118000"/>
-              </a:lnSpc>
-              <a:spcBef>
-                <a:spcPts val="0"/>
-              </a:spcBef>
-              <a:spcAft>
-                <a:spcPts val="0"/>
-              </a:spcAft>
-              <a:defRPr sz="1800" b="0">
-                <a:solidFill>
-                  <a:srgbClr val="24384A"/>
-                </a:solidFill>
-                <a:latin typeface="Lato"/>
-              </a:defRPr>
-            </a:pPr>
-            <a:r>
-              <a:rPr>
-                <a:ea typeface="Microsoft JhengHei"/>
-              </a:rPr>
-              <a:t>Open shared wording and inspect source positions.</a:t>
-            </a:r>
-          </a:p>
-        </p:txBody>
-      </p:sp>
-      <p:sp>
-        <p:nvSpPr>
-          <p:cNvPr id="11" name="TextBox 10"/>
-          <p:cNvSpPr txBox="1"/>
-          <p:nvPr/>
-        </p:nvSpPr>
-        <p:spPr>
-          <a:xfrm>
-            <a:off x="533400" y="6486525"/>
-            <a:ext cx="8334375" cy="209550"/>
-          </a:xfrm>
-          <a:prstGeom prst="rect">
-            <a:avLst/>
-          </a:prstGeom>
-          <a:noFill/>
-        </p:spPr>
-        <p:txBody>
-          <a:bodyPr wrap="square" lIns="0" rIns="0" tIns="0" bIns="0">
-            <a:spAutoFit/>
-          </a:bodyPr>
-          <a:lstStyle/>
-          <a:p>
-            <a:pPr>
-              <a:lnSpc>
-                <a:spcPct val="118000"/>
-              </a:lnSpc>
-              <a:spcBef>
-                <a:spcPts val="0"/>
-              </a:spcBef>
-              <a:spcAft>
-                <a:spcPts val="0"/>
-              </a:spcAft>
-              <a:defRPr sz="1000" b="0">
-                <a:solidFill>
-                  <a:srgbClr val="526778"/>
-                </a:solidFill>
-                <a:latin typeface="Lato"/>
-              </a:defRPr>
-            </a:pPr>
-            <a:r>
-              <a:rPr>
-                <a:ea typeface="Microsoft JhengHei"/>
-              </a:rPr>
-              <a:t>Source passages hidden; controls and recorded outputs retained.</a:t>
-            </a:r>
-          </a:p>
-        </p:txBody>
-      </p:sp>
-      <p:sp>
-        <p:nvSpPr>
-          <p:cNvPr id="12" name="Rectangle 11"/>
+      <p:sp>
+        <p:nvSpPr>
+          <p:cNvPr id="4" name="Rectangle 3"/>
           <p:cNvSpPr/>
           <p:nvPr/>
         </p:nvSpPr>
@@ -18382,7 +19403,7 @@
       </p:sp>
       <p:sp>
         <p:nvSpPr>
-          <p:cNvPr id="13" name="TextBox 12"/>
+          <p:cNvPr id="5" name="TextBox 4"/>
           <p:cNvSpPr txBox="1"/>
           <p:nvPr/>
         </p:nvSpPr>
@@ -18424,6 +19445,798 @@
                 <a:ea typeface="Microsoft JhengHei"/>
               </a:rPr>
               <a:t>07</a:t>
+            </a:r>
+          </a:p>
+        </p:txBody>
+      </p:sp>
+      <p:pic>
+        <p:nvPicPr>
+          <p:cNvPr id="6" name="Picture 5" descr="corpus.png"/>
+          <p:cNvPicPr>
+            <a:picLocks noChangeAspect="1"/>
+          </p:cNvPicPr>
+          <p:nvPr/>
+        </p:nvPicPr>
+        <p:blipFill>
+          <a:blip r:embed="rId2"/>
+          <a:stretch>
+            <a:fillRect/>
+          </a:stretch>
+        </p:blipFill>
+        <p:spPr>
+          <a:xfrm>
+            <a:off x="495299" y="2057400"/>
+            <a:ext cx="6477000" cy="3600450"/>
+          </a:xfrm>
+          <a:prstGeom prst="rect">
+            <a:avLst/>
+          </a:prstGeom>
+        </p:spPr>
+      </p:pic>
+      <p:sp>
+        <p:nvSpPr>
+          <p:cNvPr id="7" name="TextBox 6"/>
+          <p:cNvSpPr txBox="1"/>
+          <p:nvPr/>
+        </p:nvSpPr>
+        <p:spPr>
+          <a:xfrm>
+            <a:off x="523874" y="1762125"/>
+            <a:ext cx="6477000" cy="276225"/>
+          </a:xfrm>
+          <a:prstGeom prst="rect">
+            <a:avLst/>
+          </a:prstGeom>
+          <a:noFill/>
+        </p:spPr>
+        <p:txBody>
+          <a:bodyPr wrap="square" lIns="0" rIns="0" tIns="0" bIns="0">
+            <a:spAutoFit/>
+          </a:bodyPr>
+          <a:lstStyle/>
+          <a:p>
+            <a:pPr>
+              <a:lnSpc>
+                <a:spcPct val="118000"/>
+              </a:lnSpc>
+              <a:spcBef>
+                <a:spcPts val="0"/>
+              </a:spcBef>
+              <a:spcAft>
+                <a:spcPts val="0"/>
+              </a:spcAft>
+              <a:defRPr sz="1300" b="0">
+                <a:solidFill>
+                  <a:srgbClr val="526778"/>
+                </a:solidFill>
+                <a:latin typeface="Lato"/>
+              </a:defRPr>
+            </a:pPr>
+            <a:r>
+              <a:rPr>
+                <a:ea typeface="Microsoft JhengHei"/>
+              </a:rPr>
+              <a:t>Interface</a:t>
+            </a:r>
+          </a:p>
+        </p:txBody>
+      </p:sp>
+      <p:sp>
+        <p:nvSpPr>
+          <p:cNvPr id="8" name="TextBox 7"/>
+          <p:cNvSpPr txBox="1"/>
+          <p:nvPr/>
+        </p:nvSpPr>
+        <p:spPr>
+          <a:xfrm>
+            <a:off x="7477125" y="1762125"/>
+            <a:ext cx="4048124" cy="276225"/>
+          </a:xfrm>
+          <a:prstGeom prst="rect">
+            <a:avLst/>
+          </a:prstGeom>
+          <a:noFill/>
+        </p:spPr>
+        <p:txBody>
+          <a:bodyPr wrap="square" lIns="0" rIns="0" tIns="0" bIns="0">
+            <a:spAutoFit/>
+          </a:bodyPr>
+          <a:lstStyle/>
+          <a:p>
+            <a:pPr>
+              <a:lnSpc>
+                <a:spcPct val="118000"/>
+              </a:lnSpc>
+              <a:spcBef>
+                <a:spcPts val="0"/>
+              </a:spcBef>
+              <a:spcAft>
+                <a:spcPts val="0"/>
+              </a:spcAft>
+              <a:defRPr sz="1300" b="0">
+                <a:solidFill>
+                  <a:srgbClr val="526778"/>
+                </a:solidFill>
+                <a:latin typeface="Lato"/>
+              </a:defRPr>
+            </a:pPr>
+            <a:r>
+              <a:rPr>
+                <a:ea typeface="Microsoft JhengHei"/>
+              </a:rPr>
+              <a:t>How to use it</a:t>
+            </a:r>
+          </a:p>
+        </p:txBody>
+      </p:sp>
+      <p:sp>
+        <p:nvSpPr>
+          <p:cNvPr id="9" name="Rectangle 8"/>
+          <p:cNvSpPr/>
+          <p:nvPr/>
+        </p:nvSpPr>
+        <p:spPr>
+          <a:xfrm>
+            <a:off x="7477125" y="2190750"/>
+            <a:ext cx="1905000" cy="762000"/>
+          </a:xfrm>
+          <a:prstGeom prst="rect">
+            <a:avLst/>
+          </a:prstGeom>
+          <a:solidFill>
+            <a:srgbClr val="FFFFFF"/>
+          </a:solidFill>
+          <a:ln w="12700">
+            <a:solidFill>
+              <a:srgbClr val="155F88"/>
+            </a:solidFill>
+          </a:ln>
+        </p:spPr>
+        <p:style>
+          <a:lnRef idx="1">
+            <a:schemeClr val="accent1"/>
+          </a:lnRef>
+          <a:fillRef idx="3">
+            <a:schemeClr val="accent1"/>
+          </a:fillRef>
+          <a:effectRef idx="2">
+            <a:schemeClr val="accent1"/>
+          </a:effectRef>
+          <a:fontRef idx="minor">
+            <a:schemeClr val="lt1"/>
+          </a:fontRef>
+        </p:style>
+        <p:txBody>
+          <a:bodyPr rtlCol="0" anchor="ctr"/>
+          <a:lstStyle/>
+          <a:p>
+            <a:pPr algn="ctr"/>
+          </a:p>
+        </p:txBody>
+      </p:sp>
+      <p:sp>
+        <p:nvSpPr>
+          <p:cNvPr id="10" name="TextBox 9"/>
+          <p:cNvSpPr txBox="1"/>
+          <p:nvPr/>
+        </p:nvSpPr>
+        <p:spPr>
+          <a:xfrm>
+            <a:off x="7620000" y="2333625"/>
+            <a:ext cx="1619250" cy="571500"/>
+          </a:xfrm>
+          <a:prstGeom prst="rect">
+            <a:avLst/>
+          </a:prstGeom>
+          <a:noFill/>
+        </p:spPr>
+        <p:txBody>
+          <a:bodyPr wrap="square" lIns="0" rIns="0" tIns="0" bIns="0">
+            <a:spAutoFit/>
+          </a:bodyPr>
+          <a:lstStyle/>
+          <a:p>
+            <a:pPr>
+              <a:lnSpc>
+                <a:spcPct val="118000"/>
+              </a:lnSpc>
+              <a:spcBef>
+                <a:spcPts val="0"/>
+              </a:spcBef>
+              <a:spcAft>
+                <a:spcPts val="0"/>
+              </a:spcAft>
+              <a:defRPr sz="1900" b="1">
+                <a:solidFill>
+                  <a:srgbClr val="155F88"/>
+                </a:solidFill>
+                <a:latin typeface="Lato"/>
+              </a:defRPr>
+            </a:pPr>
+            <a:r>
+              <a:rPr>
+                <a:ea typeface="Microsoft JhengHei"/>
+              </a:rPr>
+              <a:t>Exact phrase</a:t>
+            </a:r>
+          </a:p>
+        </p:txBody>
+      </p:sp>
+      <p:sp>
+        <p:nvSpPr>
+          <p:cNvPr id="11" name="Rectangle 10"/>
+          <p:cNvSpPr/>
+          <p:nvPr/>
+        </p:nvSpPr>
+        <p:spPr>
+          <a:xfrm>
+            <a:off x="9667875" y="2190750"/>
+            <a:ext cx="2000250" cy="762000"/>
+          </a:xfrm>
+          <a:prstGeom prst="rect">
+            <a:avLst/>
+          </a:prstGeom>
+          <a:solidFill>
+            <a:srgbClr val="FFFFFF"/>
+          </a:solidFill>
+          <a:ln w="12700">
+            <a:solidFill>
+              <a:srgbClr val="155F88"/>
+            </a:solidFill>
+          </a:ln>
+        </p:spPr>
+        <p:style>
+          <a:lnRef idx="1">
+            <a:schemeClr val="accent1"/>
+          </a:lnRef>
+          <a:fillRef idx="3">
+            <a:schemeClr val="accent1"/>
+          </a:fillRef>
+          <a:effectRef idx="2">
+            <a:schemeClr val="accent1"/>
+          </a:effectRef>
+          <a:fontRef idx="minor">
+            <a:schemeClr val="lt1"/>
+          </a:fontRef>
+        </p:style>
+        <p:txBody>
+          <a:bodyPr rtlCol="0" anchor="ctr"/>
+          <a:lstStyle/>
+          <a:p>
+            <a:pPr algn="ctr"/>
+          </a:p>
+        </p:txBody>
+      </p:sp>
+      <p:sp>
+        <p:nvSpPr>
+          <p:cNvPr id="12" name="TextBox 11"/>
+          <p:cNvSpPr txBox="1"/>
+          <p:nvPr/>
+        </p:nvSpPr>
+        <p:spPr>
+          <a:xfrm>
+            <a:off x="9810750" y="2333625"/>
+            <a:ext cx="1714500" cy="571500"/>
+          </a:xfrm>
+          <a:prstGeom prst="rect">
+            <a:avLst/>
+          </a:prstGeom>
+          <a:noFill/>
+        </p:spPr>
+        <p:txBody>
+          <a:bodyPr wrap="square" lIns="0" rIns="0" tIns="0" bIns="0">
+            <a:spAutoFit/>
+          </a:bodyPr>
+          <a:lstStyle/>
+          <a:p>
+            <a:pPr>
+              <a:lnSpc>
+                <a:spcPct val="118000"/>
+              </a:lnSpc>
+              <a:spcBef>
+                <a:spcPts val="0"/>
+              </a:spcBef>
+              <a:spcAft>
+                <a:spcPts val="0"/>
+              </a:spcAft>
+              <a:defRPr sz="1900" b="1">
+                <a:solidFill>
+                  <a:srgbClr val="155F88"/>
+                </a:solidFill>
+                <a:latin typeface="Lato"/>
+              </a:defRPr>
+            </a:pPr>
+            <a:r>
+              <a:rPr>
+                <a:ea typeface="Microsoft JhengHei"/>
+              </a:rPr>
+              <a:t>Indexed passage</a:t>
+            </a:r>
+          </a:p>
+        </p:txBody>
+      </p:sp>
+      <p:cxnSp>
+        <p:nvCxnSpPr>
+          <p:cNvPr id="13" name="Connector 12"/>
+          <p:cNvCxnSpPr/>
+          <p:nvPr/>
+        </p:nvCxnSpPr>
+        <p:spPr>
+          <a:xfrm>
+            <a:off x="8429625" y="3028950"/>
+            <a:ext cx="1095375" cy="400050"/>
+          </a:xfrm>
+          <a:prstGeom prst="line">
+            <a:avLst/>
+          </a:prstGeom>
+          <a:ln w="19050">
+            <a:solidFill>
+              <a:srgbClr val="526778"/>
+            </a:solidFill>
+            <a:tailEnd type="triangle"/>
+          </a:ln>
+        </p:spPr>
+        <p:style>
+          <a:lnRef idx="2">
+            <a:schemeClr val="accent1"/>
+          </a:lnRef>
+          <a:fillRef idx="0">
+            <a:schemeClr val="accent1"/>
+          </a:fillRef>
+          <a:effectRef idx="1">
+            <a:schemeClr val="accent1"/>
+          </a:effectRef>
+          <a:fontRef idx="minor">
+            <a:schemeClr val="tx1"/>
+          </a:fontRef>
+        </p:style>
+      </p:cxnSp>
+      <p:cxnSp>
+        <p:nvCxnSpPr>
+          <p:cNvPr id="14" name="Connector 13"/>
+          <p:cNvCxnSpPr/>
+          <p:nvPr/>
+        </p:nvCxnSpPr>
+        <p:spPr>
+          <a:xfrm flipH="1">
+            <a:off x="9525000" y="3028950"/>
+            <a:ext cx="1143000" cy="400050"/>
+          </a:xfrm>
+          <a:prstGeom prst="line">
+            <a:avLst/>
+          </a:prstGeom>
+          <a:ln w="19050">
+            <a:solidFill>
+              <a:srgbClr val="526778"/>
+            </a:solidFill>
+            <a:tailEnd type="triangle"/>
+          </a:ln>
+        </p:spPr>
+        <p:style>
+          <a:lnRef idx="2">
+            <a:schemeClr val="accent1"/>
+          </a:lnRef>
+          <a:fillRef idx="0">
+            <a:schemeClr val="accent1"/>
+          </a:fillRef>
+          <a:effectRef idx="1">
+            <a:schemeClr val="accent1"/>
+          </a:effectRef>
+          <a:fontRef idx="minor">
+            <a:schemeClr val="tx1"/>
+          </a:fontRef>
+        </p:style>
+      </p:cxnSp>
+      <p:sp>
+        <p:nvSpPr>
+          <p:cNvPr id="15" name="Rectangle 14"/>
+          <p:cNvSpPr/>
+          <p:nvPr/>
+        </p:nvSpPr>
+        <p:spPr>
+          <a:xfrm>
+            <a:off x="7477125" y="3590925"/>
+            <a:ext cx="4190999" cy="762000"/>
+          </a:xfrm>
+          <a:prstGeom prst="rect">
+            <a:avLst/>
+          </a:prstGeom>
+          <a:solidFill>
+            <a:srgbClr val="FFFFFF"/>
+          </a:solidFill>
+          <a:ln w="12700">
+            <a:solidFill>
+              <a:srgbClr val="155F88"/>
+            </a:solidFill>
+          </a:ln>
+        </p:spPr>
+        <p:style>
+          <a:lnRef idx="1">
+            <a:schemeClr val="accent1"/>
+          </a:lnRef>
+          <a:fillRef idx="3">
+            <a:schemeClr val="accent1"/>
+          </a:fillRef>
+          <a:effectRef idx="2">
+            <a:schemeClr val="accent1"/>
+          </a:effectRef>
+          <a:fontRef idx="minor">
+            <a:schemeClr val="lt1"/>
+          </a:fontRef>
+        </p:style>
+        <p:txBody>
+          <a:bodyPr rtlCol="0" anchor="ctr"/>
+          <a:lstStyle/>
+          <a:p>
+            <a:pPr algn="ctr"/>
+          </a:p>
+        </p:txBody>
+      </p:sp>
+      <p:sp>
+        <p:nvSpPr>
+          <p:cNvPr id="16" name="TextBox 15"/>
+          <p:cNvSpPr txBox="1"/>
+          <p:nvPr/>
+        </p:nvSpPr>
+        <p:spPr>
+          <a:xfrm>
+            <a:off x="7620000" y="3733799"/>
+            <a:ext cx="3905249" cy="571500"/>
+          </a:xfrm>
+          <a:prstGeom prst="rect">
+            <a:avLst/>
+          </a:prstGeom>
+          <a:noFill/>
+        </p:spPr>
+        <p:txBody>
+          <a:bodyPr wrap="square" lIns="0" rIns="0" tIns="0" bIns="0">
+            <a:spAutoFit/>
+          </a:bodyPr>
+          <a:lstStyle/>
+          <a:p>
+            <a:pPr>
+              <a:lnSpc>
+                <a:spcPct val="118000"/>
+              </a:lnSpc>
+              <a:spcBef>
+                <a:spcPts val="0"/>
+              </a:spcBef>
+              <a:spcAft>
+                <a:spcPts val="0"/>
+              </a:spcAft>
+              <a:defRPr sz="1900" b="1">
+                <a:solidFill>
+                  <a:srgbClr val="155F88"/>
+                </a:solidFill>
+                <a:latin typeface="Lato"/>
+              </a:defRPr>
+            </a:pPr>
+            <a:r>
+              <a:rPr>
+                <a:ea typeface="Microsoft JhengHei"/>
+              </a:rPr>
+              <a:t>Find matches</a:t>
+            </a:r>
+          </a:p>
+        </p:txBody>
+      </p:sp>
+      <p:cxnSp>
+        <p:nvCxnSpPr>
+          <p:cNvPr id="17" name="Connector 16"/>
+          <p:cNvCxnSpPr/>
+          <p:nvPr/>
+        </p:nvCxnSpPr>
+        <p:spPr>
+          <a:xfrm>
+            <a:off x="9572625" y="4419600"/>
+            <a:ext cx="0" cy="371475"/>
+          </a:xfrm>
+          <a:prstGeom prst="line">
+            <a:avLst/>
+          </a:prstGeom>
+          <a:ln w="19050">
+            <a:solidFill>
+              <a:srgbClr val="526778"/>
+            </a:solidFill>
+            <a:tailEnd type="triangle"/>
+          </a:ln>
+        </p:spPr>
+        <p:style>
+          <a:lnRef idx="2">
+            <a:schemeClr val="accent1"/>
+          </a:lnRef>
+          <a:fillRef idx="0">
+            <a:schemeClr val="accent1"/>
+          </a:fillRef>
+          <a:effectRef idx="1">
+            <a:schemeClr val="accent1"/>
+          </a:effectRef>
+          <a:fontRef idx="minor">
+            <a:schemeClr val="tx1"/>
+          </a:fontRef>
+        </p:style>
+      </p:cxnSp>
+      <p:sp>
+        <p:nvSpPr>
+          <p:cNvPr id="18" name="Rectangle 17"/>
+          <p:cNvSpPr/>
+          <p:nvPr/>
+        </p:nvSpPr>
+        <p:spPr>
+          <a:xfrm>
+            <a:off x="7477125" y="4953000"/>
+            <a:ext cx="4190999" cy="762000"/>
+          </a:xfrm>
+          <a:prstGeom prst="rect">
+            <a:avLst/>
+          </a:prstGeom>
+          <a:solidFill>
+            <a:srgbClr val="FFFFFF"/>
+          </a:solidFill>
+          <a:ln w="12700">
+            <a:solidFill>
+              <a:srgbClr val="155F88"/>
+            </a:solidFill>
+          </a:ln>
+        </p:spPr>
+        <p:style>
+          <a:lnRef idx="1">
+            <a:schemeClr val="accent1"/>
+          </a:lnRef>
+          <a:fillRef idx="3">
+            <a:schemeClr val="accent1"/>
+          </a:fillRef>
+          <a:effectRef idx="2">
+            <a:schemeClr val="accent1"/>
+          </a:effectRef>
+          <a:fontRef idx="minor">
+            <a:schemeClr val="lt1"/>
+          </a:fontRef>
+        </p:style>
+        <p:txBody>
+          <a:bodyPr rtlCol="0" anchor="ctr"/>
+          <a:lstStyle/>
+          <a:p>
+            <a:pPr algn="ctr"/>
+          </a:p>
+        </p:txBody>
+      </p:sp>
+      <p:sp>
+        <p:nvSpPr>
+          <p:cNvPr id="19" name="TextBox 18"/>
+          <p:cNvSpPr txBox="1"/>
+          <p:nvPr/>
+        </p:nvSpPr>
+        <p:spPr>
+          <a:xfrm>
+            <a:off x="7620000" y="5095875"/>
+            <a:ext cx="3905249" cy="571500"/>
+          </a:xfrm>
+          <a:prstGeom prst="rect">
+            <a:avLst/>
+          </a:prstGeom>
+          <a:noFill/>
+        </p:spPr>
+        <p:txBody>
+          <a:bodyPr wrap="square" lIns="0" rIns="0" tIns="0" bIns="0">
+            <a:spAutoFit/>
+          </a:bodyPr>
+          <a:lstStyle/>
+          <a:p>
+            <a:pPr>
+              <a:lnSpc>
+                <a:spcPct val="118000"/>
+              </a:lnSpc>
+              <a:spcBef>
+                <a:spcPts val="0"/>
+              </a:spcBef>
+              <a:spcAft>
+                <a:spcPts val="0"/>
+              </a:spcAft>
+              <a:defRPr sz="1900" b="1">
+                <a:solidFill>
+                  <a:srgbClr val="155F88"/>
+                </a:solidFill>
+                <a:latin typeface="Lato"/>
+              </a:defRPr>
+            </a:pPr>
+            <a:r>
+              <a:rPr>
+                <a:ea typeface="Microsoft JhengHei"/>
+              </a:rPr>
+              <a:t>Read and compare passages</a:t>
+            </a:r>
+          </a:p>
+        </p:txBody>
+      </p:sp>
+      <p:sp>
+        <p:nvSpPr>
+          <p:cNvPr id="20" name="TextBox 19"/>
+          <p:cNvSpPr txBox="1"/>
+          <p:nvPr/>
+        </p:nvSpPr>
+        <p:spPr>
+          <a:xfrm>
+            <a:off x="523874" y="5924550"/>
+            <a:ext cx="6477000" cy="495299"/>
+          </a:xfrm>
+          <a:prstGeom prst="rect">
+            <a:avLst/>
+          </a:prstGeom>
+          <a:noFill/>
+        </p:spPr>
+        <p:txBody>
+          <a:bodyPr wrap="square" lIns="0" rIns="0" tIns="0" bIns="0">
+            <a:spAutoFit/>
+          </a:bodyPr>
+          <a:lstStyle/>
+          <a:p>
+            <a:pPr>
+              <a:lnSpc>
+                <a:spcPct val="118000"/>
+              </a:lnSpc>
+              <a:spcBef>
+                <a:spcPts val="0"/>
+              </a:spcBef>
+              <a:spcAft>
+                <a:spcPts val="0"/>
+              </a:spcAft>
+              <a:defRPr sz="2100" b="0">
+                <a:solidFill>
+                  <a:srgbClr val="155F88"/>
+                </a:solidFill>
+                <a:latin typeface="Lato"/>
+              </a:defRPr>
+            </a:pPr>
+            <a:r>
+              <a:rPr>
+                <a:ea typeface="Microsoft JhengHei"/>
+              </a:rPr>
+              <a:t>Exact search or stored-vector retrieval.</a:t>
+            </a:r>
+          </a:p>
+        </p:txBody>
+      </p:sp>
+      <p:sp>
+        <p:nvSpPr>
+          <p:cNvPr id="21" name="TextBox 20"/>
+          <p:cNvSpPr txBox="1"/>
+          <p:nvPr/>
+        </p:nvSpPr>
+        <p:spPr>
+          <a:xfrm>
+            <a:off x="7477125" y="5924550"/>
+            <a:ext cx="4190999" cy="485775"/>
+          </a:xfrm>
+          <a:prstGeom prst="rect">
+            <a:avLst/>
+          </a:prstGeom>
+          <a:noFill/>
+        </p:spPr>
+        <p:txBody>
+          <a:bodyPr wrap="square" lIns="0" rIns="0" tIns="0" bIns="0">
+            <a:spAutoFit/>
+          </a:bodyPr>
+          <a:lstStyle/>
+          <a:p>
+            <a:pPr>
+              <a:lnSpc>
+                <a:spcPct val="118000"/>
+              </a:lnSpc>
+              <a:spcBef>
+                <a:spcPts val="0"/>
+              </a:spcBef>
+              <a:spcAft>
+                <a:spcPts val="0"/>
+              </a:spcAft>
+              <a:defRPr sz="1700" b="0">
+                <a:solidFill>
+                  <a:srgbClr val="526778"/>
+                </a:solidFill>
+                <a:latin typeface="Lato"/>
+              </a:defRPr>
+            </a:pPr>
+            <a:r>
+              <a:rPr>
+                <a:ea typeface="Microsoft JhengHei"/>
+              </a:rPr>
+              <a:t>Browsing does not add graph records.</a:t>
+            </a:r>
+          </a:p>
+        </p:txBody>
+      </p:sp>
+      <p:sp>
+        <p:nvSpPr>
+          <p:cNvPr id="22" name="TextBox 21"/>
+          <p:cNvSpPr txBox="1"/>
+          <p:nvPr/>
+        </p:nvSpPr>
+        <p:spPr>
+          <a:xfrm>
+            <a:off x="523874" y="6515100"/>
+            <a:ext cx="10477500" cy="200025"/>
+          </a:xfrm>
+          <a:prstGeom prst="rect">
+            <a:avLst/>
+          </a:prstGeom>
+          <a:noFill/>
+        </p:spPr>
+        <p:txBody>
+          <a:bodyPr wrap="square" lIns="0" rIns="0" tIns="0" bIns="0">
+            <a:spAutoFit/>
+          </a:bodyPr>
+          <a:lstStyle/>
+          <a:p>
+            <a:pPr>
+              <a:lnSpc>
+                <a:spcPct val="118000"/>
+              </a:lnSpc>
+              <a:spcBef>
+                <a:spcPts val="0"/>
+              </a:spcBef>
+              <a:spcAft>
+                <a:spcPts val="0"/>
+              </a:spcAft>
+              <a:defRPr sz="1000" b="0">
+                <a:solidFill>
+                  <a:srgbClr val="526778"/>
+                </a:solidFill>
+                <a:latin typeface="Lato"/>
+              </a:defRPr>
+            </a:pPr>
+            <a:r>
+              <a:rPr>
+                <a:ea typeface="Microsoft JhengHei"/>
+              </a:rPr>
+              <a:t>Screenshot: source passages hidden where applicable. Diagram: schematic.</a:t>
+            </a:r>
+          </a:p>
+        </p:txBody>
+      </p:sp>
+      <p:sp>
+        <p:nvSpPr>
+          <p:cNvPr id="23" name="TextBox 22"/>
+          <p:cNvSpPr txBox="1"/>
+          <p:nvPr/>
+        </p:nvSpPr>
+        <p:spPr>
+          <a:xfrm>
+            <a:off x="9420225" y="2409825"/>
+            <a:ext cx="238125" cy="285750"/>
+          </a:xfrm>
+          <a:prstGeom prst="rect">
+            <a:avLst/>
+          </a:prstGeom>
+          <a:noFill/>
+        </p:spPr>
+        <p:txBody>
+          <a:bodyPr wrap="square" lIns="0" rIns="0" tIns="0" bIns="0">
+            <a:spAutoFit/>
+          </a:bodyPr>
+          <a:lstStyle/>
+          <a:p>
+            <a:pPr>
+              <a:lnSpc>
+                <a:spcPct val="118000"/>
+              </a:lnSpc>
+              <a:spcBef>
+                <a:spcPts val="0"/>
+              </a:spcBef>
+              <a:spcAft>
+                <a:spcPts val="0"/>
+              </a:spcAft>
+              <a:defRPr sz="1300" b="0">
+                <a:solidFill>
+                  <a:srgbClr val="526778"/>
+                </a:solidFill>
+                <a:latin typeface="Lato"/>
+              </a:defRPr>
+            </a:pPr>
+            <a:r>
+              <a:rPr>
+                <a:ea typeface="Microsoft JhengHei"/>
+              </a:rPr>
+              <a:t>or</a:t>
             </a:r>
           </a:p>
         </p:txBody>

--- a/docs/presentation/cohort-pnc-2026.pptx
+++ b/docs/presentation/cohort-pnc-2026.pptx
@@ -1955,6 +1955,41 @@
         <p:txBody>
           <a:bodyPr/>
           <a:lstStyle/>
+          <a:p>
+            <a:r>
+              <a:t>SAY: The graph helps us trace proposals back to sources, inspect recorded relationships between sources, and retain the history of checks and decisions. A possible next step is edge prediction: suggesting a relationship worth investigating. We have not implemented or evaluated that capability.</a:t>
+            </a:r>
+          </a:p>
+          <a:p/>
+          <a:p>
+            <a:r>
+              <a:t>TERMINOLOGY: Cohort has typed nodes, typed edges and record metadata. These are familiar graph-data techniques. The project deliberately calls this an evidence graph because translator and historical assertions remain contested. This does not mean that all knowledge graphs must contain only certain facts; it explains the terminology and epistemic contract of this application. See docs/design.md principles 1–2 and section 10.</a:t>
+            </a:r>
+          </a:p>
+          <a:p/>
+          <a:p>
+            <a:r>
+              <a:t>DEPENDENCIES: Recorded quotes, parallel_of and descends_from relationships help expose related material. A graph cannot display a dependency that nobody has recorded, and an independence flag is not proof that sources are historically independent. Repeated checks are not independent witnesses.</a:t>
+            </a:r>
+          </a:p>
+          <a:p/>
+          <a:p>
+            <a:r>
+              <a:t>EDGE PREDICTION: In graph research, link prediction scores possible missing relationships between nodes. A future Cohort feature could propose a candidate quotation or textual parallel, retrieve the relevant passages and send it for review. A predicted link would be a proposal, not historical evidence by itself. Current semantic-neighbour retrieval compares passage vectors; it is not a trained graph link-prediction model. The source-grounded edge-proposal workflow would also need implementation and evaluation.</a:t>
+            </a:r>
+          </a:p>
+          <a:p/>
+          <a:p>
+            <a:r>
+              <a:t>BACKGROUND READING: Hogan et al., Knowledge Graphs (2021), https://arxiv.org/abs/2003.02320; Daza et al., Inductive Entity Representations from Text via Link Prediction (2021), https://arxiv.org/abs/2010.03496.</a:t>
+            </a:r>
+          </a:p>
+          <a:p/>
+          <a:p>
+            <a:r>
+              <a:t>EXISTING CHECKS AND DECISIONS</a:t>
+            </a:r>
+          </a:p>
           <a:p>
             <a:r>
               <a:t>SAY: Finding a quotation at its source is one check. Whether it supports the interpretation requires reading. Accepting a passage does not accept every connected proposal.</a:t>
@@ -13903,7 +13938,7 @@
         <p:spPr>
           <a:xfrm>
             <a:off x="495299" y="742950"/>
-            <a:ext cx="11144250" cy="1047749"/>
+            <a:ext cx="11144250" cy="952500"/>
           </a:xfrm>
           <a:prstGeom prst="rect">
             <a:avLst/>
@@ -13937,7 +13972,7 @@
               <a:rPr>
                 <a:ea typeface="Microsoft JhengHei"/>
               </a:rPr>
-              <a:t>Checks and researcher decisions</a:t>
+              <a:t>Why use an evidence graph?</a:t>
             </a:r>
           </a:p>
         </p:txBody>
@@ -13950,31 +13985,31 @@
         </p:nvSpPr>
         <p:spPr>
           <a:xfrm>
-            <a:off x="714375" y="2390775"/>
-            <a:ext cx="3000375" cy="476250"/>
-          </a:xfrm>
-          <a:prstGeom prst="rect">
-            <a:avLst/>
-          </a:prstGeom>
-          <a:noFill/>
-        </p:spPr>
-        <p:txBody>
-          <a:bodyPr wrap="square" lIns="0" rIns="0" tIns="0" bIns="0">
-            <a:spAutoFit/>
-          </a:bodyPr>
-          <a:lstStyle/>
-          <a:p>
-            <a:pPr>
-              <a:lnSpc>
-                <a:spcPct val="118000"/>
-              </a:lnSpc>
-              <a:spcBef>
-                <a:spcPts val="0"/>
-              </a:spcBef>
-              <a:spcAft>
-                <a:spcPts val="0"/>
-              </a:spcAft>
-              <a:defRPr sz="2300" b="1">
+            <a:off x="523874" y="1924049"/>
+            <a:ext cx="3190875" cy="752475"/>
+          </a:xfrm>
+          <a:prstGeom prst="rect">
+            <a:avLst/>
+          </a:prstGeom>
+          <a:noFill/>
+        </p:spPr>
+        <p:txBody>
+          <a:bodyPr wrap="square" lIns="0" rIns="0" tIns="0" bIns="0">
+            <a:spAutoFit/>
+          </a:bodyPr>
+          <a:lstStyle/>
+          <a:p>
+            <a:pPr>
+              <a:lnSpc>
+                <a:spcPct val="118000"/>
+              </a:lnSpc>
+              <a:spcBef>
+                <a:spcPts val="0"/>
+              </a:spcBef>
+              <a:spcAft>
+                <a:spcPts val="0"/>
+              </a:spcAft>
+              <a:defRPr sz="2500" b="1">
                 <a:solidFill>
                   <a:srgbClr val="146C68"/>
                 </a:solidFill>
@@ -13985,7 +14020,7 @@
               <a:rPr>
                 <a:ea typeface="Microsoft JhengHei"/>
               </a:rPr>
-              <a:t>Span verified</a:t>
+              <a:t>Trace a proposal</a:t>
             </a:r>
           </a:p>
         </p:txBody>
@@ -13998,31 +14033,31 @@
         </p:nvSpPr>
         <p:spPr>
           <a:xfrm>
-            <a:off x="714375" y="3000375"/>
-            <a:ext cx="3000375" cy="1333500"/>
-          </a:xfrm>
-          <a:prstGeom prst="rect">
-            <a:avLst/>
-          </a:prstGeom>
-          <a:noFill/>
-        </p:spPr>
-        <p:txBody>
-          <a:bodyPr wrap="square" lIns="0" rIns="0" tIns="0" bIns="0">
-            <a:spAutoFit/>
-          </a:bodyPr>
-          <a:lstStyle/>
-          <a:p>
-            <a:pPr>
-              <a:lnSpc>
-                <a:spcPct val="118000"/>
-              </a:lnSpc>
-              <a:spcBef>
-                <a:spcPts val="0"/>
-              </a:spcBef>
-              <a:spcAft>
-                <a:spcPts val="0"/>
-              </a:spcAft>
-              <a:defRPr sz="2100" b="0">
+            <a:off x="4095750" y="1924049"/>
+            <a:ext cx="7524749" cy="885825"/>
+          </a:xfrm>
+          <a:prstGeom prst="rect">
+            <a:avLst/>
+          </a:prstGeom>
+          <a:noFill/>
+        </p:spPr>
+        <p:txBody>
+          <a:bodyPr wrap="square" lIns="0" rIns="0" tIns="0" bIns="0">
+            <a:spAutoFit/>
+          </a:bodyPr>
+          <a:lstStyle/>
+          <a:p>
+            <a:pPr>
+              <a:lnSpc>
+                <a:spcPct val="118000"/>
+              </a:lnSpc>
+              <a:spcBef>
+                <a:spcPts val="0"/>
+              </a:spcBef>
+              <a:spcAft>
+                <a:spcPts val="0"/>
+              </a:spcAft>
+              <a:defRPr sz="2400" b="0">
                 <a:solidFill>
                   <a:srgbClr val="24384A"/>
                 </a:solidFill>
@@ -14033,21 +14068,92 @@
               <a:rPr>
                 <a:ea typeface="Microsoft JhengHei"/>
               </a:rPr>
-              <a:t>The quotation resolves</a:t>
-            </a:r>
-          </a:p>
-          <a:p>
-            <a:pPr>
-              <a:lnSpc>
-                <a:spcPct val="118000"/>
-              </a:lnSpc>
-              <a:spcBef>
-                <a:spcPts val="0"/>
-              </a:spcBef>
-              <a:spcAft>
-                <a:spcPts val="0"/>
-              </a:spcAft>
-              <a:defRPr sz="2100" b="0">
+              <a:t>Follow its citations to passages and source records.</a:t>
+            </a:r>
+          </a:p>
+        </p:txBody>
+      </p:sp>
+      <p:sp>
+        <p:nvSpPr>
+          <p:cNvPr id="6" name="TextBox 5"/>
+          <p:cNvSpPr txBox="1"/>
+          <p:nvPr/>
+        </p:nvSpPr>
+        <p:spPr>
+          <a:xfrm>
+            <a:off x="523874" y="2962275"/>
+            <a:ext cx="3190875" cy="752475"/>
+          </a:xfrm>
+          <a:prstGeom prst="rect">
+            <a:avLst/>
+          </a:prstGeom>
+          <a:noFill/>
+        </p:spPr>
+        <p:txBody>
+          <a:bodyPr wrap="square" lIns="0" rIns="0" tIns="0" bIns="0">
+            <a:spAutoFit/>
+          </a:bodyPr>
+          <a:lstStyle/>
+          <a:p>
+            <a:pPr>
+              <a:lnSpc>
+                <a:spcPct val="118000"/>
+              </a:lnSpc>
+              <a:spcBef>
+                <a:spcPts val="0"/>
+              </a:spcBef>
+              <a:spcAft>
+                <a:spcPts val="0"/>
+              </a:spcAft>
+              <a:defRPr sz="2500" b="1">
+                <a:solidFill>
+                  <a:srgbClr val="146C68"/>
+                </a:solidFill>
+                <a:latin typeface="Lato"/>
+              </a:defRPr>
+            </a:pPr>
+            <a:r>
+              <a:rPr>
+                <a:ea typeface="Microsoft JhengHei"/>
+              </a:rPr>
+              <a:t>Inspect dependencies</a:t>
+            </a:r>
+          </a:p>
+        </p:txBody>
+      </p:sp>
+      <p:sp>
+        <p:nvSpPr>
+          <p:cNvPr id="7" name="TextBox 6"/>
+          <p:cNvSpPr txBox="1"/>
+          <p:nvPr/>
+        </p:nvSpPr>
+        <p:spPr>
+          <a:xfrm>
+            <a:off x="4095750" y="2962275"/>
+            <a:ext cx="7524749" cy="885825"/>
+          </a:xfrm>
+          <a:prstGeom prst="rect">
+            <a:avLst/>
+          </a:prstGeom>
+          <a:noFill/>
+        </p:spPr>
+        <p:txBody>
+          <a:bodyPr wrap="square" lIns="0" rIns="0" tIns="0" bIns="0">
+            <a:spAutoFit/>
+          </a:bodyPr>
+          <a:lstStyle/>
+          <a:p>
+            <a:pPr>
+              <a:lnSpc>
+                <a:spcPct val="118000"/>
+              </a:lnSpc>
+              <a:spcBef>
+                <a:spcPts val="0"/>
+              </a:spcBef>
+              <a:spcAft>
+                <a:spcPts val="0"/>
+              </a:spcAft>
+              <a:defRPr sz="2400" b="0">
                 <a:solidFill>
                   <a:srgbClr val="24384A"/>
                 </a:solidFill>
@@ -14058,44 +14164,44 @@
               <a:rPr>
                 <a:ea typeface="Microsoft JhengHei"/>
               </a:rPr>
-              <a:t>at its source position.</a:t>
-            </a:r>
-          </a:p>
-        </p:txBody>
-      </p:sp>
-      <p:sp>
-        <p:nvSpPr>
-          <p:cNvPr id="6" name="TextBox 5"/>
-          <p:cNvSpPr txBox="1"/>
-          <p:nvPr/>
-        </p:nvSpPr>
-        <p:spPr>
-          <a:xfrm>
-            <a:off x="4572000" y="2390775"/>
-            <a:ext cx="3000375" cy="476250"/>
-          </a:xfrm>
-          <a:prstGeom prst="rect">
-            <a:avLst/>
-          </a:prstGeom>
-          <a:noFill/>
-        </p:spPr>
-        <p:txBody>
-          <a:bodyPr wrap="square" lIns="0" rIns="0" tIns="0" bIns="0">
-            <a:spAutoFit/>
-          </a:bodyPr>
-          <a:lstStyle/>
-          <a:p>
-            <a:pPr>
-              <a:lnSpc>
-                <a:spcPct val="118000"/>
-              </a:lnSpc>
-              <a:spcBef>
-                <a:spcPts val="0"/>
-              </a:spcBef>
-              <a:spcAft>
-                <a:spcPts val="0"/>
-              </a:spcAft>
-              <a:defRPr sz="2300" b="1">
+              <a:t>See recorded quotation, parallel and descent links.</a:t>
+            </a:r>
+          </a:p>
+        </p:txBody>
+      </p:sp>
+      <p:sp>
+        <p:nvSpPr>
+          <p:cNvPr id="8" name="TextBox 7"/>
+          <p:cNvSpPr txBox="1"/>
+          <p:nvPr/>
+        </p:nvSpPr>
+        <p:spPr>
+          <a:xfrm>
+            <a:off x="523874" y="4000500"/>
+            <a:ext cx="3190875" cy="752475"/>
+          </a:xfrm>
+          <a:prstGeom prst="rect">
+            <a:avLst/>
+          </a:prstGeom>
+          <a:noFill/>
+        </p:spPr>
+        <p:txBody>
+          <a:bodyPr wrap="square" lIns="0" rIns="0" tIns="0" bIns="0">
+            <a:spAutoFit/>
+          </a:bodyPr>
+          <a:lstStyle/>
+          <a:p>
+            <a:pPr>
+              <a:lnSpc>
+                <a:spcPct val="118000"/>
+              </a:lnSpc>
+              <a:spcBef>
+                <a:spcPts val="0"/>
+              </a:spcBef>
+              <a:spcAft>
+                <a:spcPts val="0"/>
+              </a:spcAft>
+              <a:defRPr sz="2500" b="1">
                 <a:solidFill>
                   <a:srgbClr val="146C68"/>
                 </a:solidFill>
@@ -14106,44 +14212,44 @@
               <a:rPr>
                 <a:ea typeface="Microsoft JhengHei"/>
               </a:rPr>
-              <a:t>Review recorded</a:t>
-            </a:r>
-          </a:p>
-        </p:txBody>
-      </p:sp>
-      <p:sp>
-        <p:nvSpPr>
-          <p:cNvPr id="7" name="TextBox 6"/>
-          <p:cNvSpPr txBox="1"/>
-          <p:nvPr/>
-        </p:nvSpPr>
-        <p:spPr>
-          <a:xfrm>
-            <a:off x="4572000" y="3000375"/>
-            <a:ext cx="3000375" cy="1333500"/>
-          </a:xfrm>
-          <a:prstGeom prst="rect">
-            <a:avLst/>
-          </a:prstGeom>
-          <a:noFill/>
-        </p:spPr>
-        <p:txBody>
-          <a:bodyPr wrap="square" lIns="0" rIns="0" tIns="0" bIns="0">
-            <a:spAutoFit/>
-          </a:bodyPr>
-          <a:lstStyle/>
-          <a:p>
-            <a:pPr>
-              <a:lnSpc>
-                <a:spcPct val="118000"/>
-              </a:lnSpc>
-              <a:spcBef>
-                <a:spcPts val="0"/>
-              </a:spcBef>
-              <a:spcAft>
-                <a:spcPts val="0"/>
-              </a:spcAft>
-              <a:defRPr sz="2100" b="0">
+              <a:t>Keep the history</a:t>
+            </a:r>
+          </a:p>
+        </p:txBody>
+      </p:sp>
+      <p:sp>
+        <p:nvSpPr>
+          <p:cNvPr id="9" name="TextBox 8"/>
+          <p:cNvSpPr txBox="1"/>
+          <p:nvPr/>
+        </p:nvSpPr>
+        <p:spPr>
+          <a:xfrm>
+            <a:off x="4095750" y="4000500"/>
+            <a:ext cx="7524749" cy="885825"/>
+          </a:xfrm>
+          <a:prstGeom prst="rect">
+            <a:avLst/>
+          </a:prstGeom>
+          <a:noFill/>
+        </p:spPr>
+        <p:txBody>
+          <a:bodyPr wrap="square" lIns="0" rIns="0" tIns="0" bIns="0">
+            <a:spAutoFit/>
+          </a:bodyPr>
+          <a:lstStyle/>
+          <a:p>
+            <a:pPr>
+              <a:lnSpc>
+                <a:spcPct val="118000"/>
+              </a:lnSpc>
+              <a:spcBef>
+                <a:spcPts val="0"/>
+              </a:spcBef>
+              <a:spcAft>
+                <a:spcPts val="0"/>
+              </a:spcAft>
+              <a:defRPr sz="2400" b="0">
                 <a:solidFill>
                   <a:srgbClr val="24384A"/>
                 </a:solidFill>
@@ -14154,21 +14260,92 @@
               <a:rPr>
                 <a:ea typeface="Microsoft JhengHei"/>
               </a:rPr>
-              <a:t>Inspect the reviewer’s</a:t>
-            </a:r>
-          </a:p>
-          <a:p>
-            <a:pPr>
-              <a:lnSpc>
-                <a:spcPct val="118000"/>
-              </a:lnSpc>
-              <a:spcBef>
-                <a:spcPts val="0"/>
-              </a:spcBef>
-              <a:spcAft>
-                <a:spcPts val="0"/>
-              </a:spcAft>
-              <a:defRPr sz="2100" b="0">
+              <a:t>Who proposed it, what was checked, what the researcher decided.</a:t>
+            </a:r>
+          </a:p>
+        </p:txBody>
+      </p:sp>
+      <p:sp>
+        <p:nvSpPr>
+          <p:cNvPr id="10" name="TextBox 9"/>
+          <p:cNvSpPr txBox="1"/>
+          <p:nvPr/>
+        </p:nvSpPr>
+        <p:spPr>
+          <a:xfrm>
+            <a:off x="523874" y="5276850"/>
+            <a:ext cx="11049000" cy="428625"/>
+          </a:xfrm>
+          <a:prstGeom prst="rect">
+            <a:avLst/>
+          </a:prstGeom>
+          <a:noFill/>
+        </p:spPr>
+        <p:txBody>
+          <a:bodyPr wrap="square" lIns="0" rIns="0" tIns="0" bIns="0">
+            <a:spAutoFit/>
+          </a:bodyPr>
+          <a:lstStyle/>
+          <a:p>
+            <a:pPr>
+              <a:lnSpc>
+                <a:spcPct val="118000"/>
+              </a:lnSpc>
+              <a:spcBef>
+                <a:spcPts val="0"/>
+              </a:spcBef>
+              <a:spcAft>
+                <a:spcPts val="0"/>
+              </a:spcAft>
+              <a:defRPr sz="2400" b="1">
+                <a:solidFill>
+                  <a:srgbClr val="65439A"/>
+                </a:solidFill>
+                <a:latin typeface="Lato"/>
+              </a:defRPr>
+            </a:pPr>
+            <a:r>
+              <a:rPr>
+                <a:ea typeface="Microsoft JhengHei"/>
+              </a:rPr>
+              <a:t>Future work: edge prediction</a:t>
+            </a:r>
+          </a:p>
+        </p:txBody>
+      </p:sp>
+      <p:sp>
+        <p:nvSpPr>
+          <p:cNvPr id="11" name="TextBox 10"/>
+          <p:cNvSpPr txBox="1"/>
+          <p:nvPr/>
+        </p:nvSpPr>
+        <p:spPr>
+          <a:xfrm>
+            <a:off x="523874" y="5810250"/>
+            <a:ext cx="11049000" cy="504825"/>
+          </a:xfrm>
+          <a:prstGeom prst="rect">
+            <a:avLst/>
+          </a:prstGeom>
+          <a:noFill/>
+        </p:spPr>
+        <p:txBody>
+          <a:bodyPr wrap="square" lIns="0" rIns="0" tIns="0" bIns="0">
+            <a:spAutoFit/>
+          </a:bodyPr>
+          <a:lstStyle/>
+          <a:p>
+            <a:pPr>
+              <a:lnSpc>
+                <a:spcPct val="118000"/>
+              </a:lnSpc>
+              <a:spcBef>
+                <a:spcPts val="0"/>
+              </a:spcBef>
+              <a:spcAft>
+                <a:spcPts val="0"/>
+              </a:spcAft>
+              <a:defRPr sz="2300" b="0">
                 <a:solidFill>
                   <a:srgbClr val="24384A"/>
                 </a:solidFill>
@@ -14179,224 +14356,7 @@
               <a:rPr>
                 <a:ea typeface="Microsoft JhengHei"/>
               </a:rPr>
-              <a:t>verdict and evidence.</a:t>
-            </a:r>
-          </a:p>
-        </p:txBody>
-      </p:sp>
-      <p:sp>
-        <p:nvSpPr>
-          <p:cNvPr id="8" name="TextBox 7"/>
-          <p:cNvSpPr txBox="1"/>
-          <p:nvPr/>
-        </p:nvSpPr>
-        <p:spPr>
-          <a:xfrm>
-            <a:off x="8429625" y="2390775"/>
-            <a:ext cx="3000375" cy="476250"/>
-          </a:xfrm>
-          <a:prstGeom prst="rect">
-            <a:avLst/>
-          </a:prstGeom>
-          <a:noFill/>
-        </p:spPr>
-        <p:txBody>
-          <a:bodyPr wrap="square" lIns="0" rIns="0" tIns="0" bIns="0">
-            <a:spAutoFit/>
-          </a:bodyPr>
-          <a:lstStyle/>
-          <a:p>
-            <a:pPr>
-              <a:lnSpc>
-                <a:spcPct val="118000"/>
-              </a:lnSpc>
-              <a:spcBef>
-                <a:spcPts val="0"/>
-              </a:spcBef>
-              <a:spcAft>
-                <a:spcPts val="0"/>
-              </a:spcAft>
-              <a:defRPr sz="2300" b="1">
-                <a:solidFill>
-                  <a:srgbClr val="146C68"/>
-                </a:solidFill>
-                <a:latin typeface="Lato"/>
-              </a:defRPr>
-            </a:pPr>
-            <a:r>
-              <a:rPr>
-                <a:ea typeface="Microsoft JhengHei"/>
-              </a:rPr>
-              <a:t>Researcher decides</a:t>
-            </a:r>
-          </a:p>
-        </p:txBody>
-      </p:sp>
-      <p:sp>
-        <p:nvSpPr>
-          <p:cNvPr id="9" name="TextBox 8"/>
-          <p:cNvSpPr txBox="1"/>
-          <p:nvPr/>
-        </p:nvSpPr>
-        <p:spPr>
-          <a:xfrm>
-            <a:off x="8429625" y="3000375"/>
-            <a:ext cx="3000375" cy="1333500"/>
-          </a:xfrm>
-          <a:prstGeom prst="rect">
-            <a:avLst/>
-          </a:prstGeom>
-          <a:noFill/>
-        </p:spPr>
-        <p:txBody>
-          <a:bodyPr wrap="square" lIns="0" rIns="0" tIns="0" bIns="0">
-            <a:spAutoFit/>
-          </a:bodyPr>
-          <a:lstStyle/>
-          <a:p>
-            <a:pPr>
-              <a:lnSpc>
-                <a:spcPct val="118000"/>
-              </a:lnSpc>
-              <a:spcBef>
-                <a:spcPts val="0"/>
-              </a:spcBef>
-              <a:spcAft>
-                <a:spcPts val="0"/>
-              </a:spcAft>
-              <a:defRPr sz="2100" b="0">
-                <a:solidFill>
-                  <a:srgbClr val="24384A"/>
-                </a:solidFill>
-                <a:latin typeface="Lato"/>
-              </a:defRPr>
-            </a:pPr>
-            <a:r>
-              <a:rPr>
-                <a:ea typeface="Microsoft JhengHei"/>
-              </a:rPr>
-              <a:t>Accept or reject an</a:t>
-            </a:r>
-          </a:p>
-          <a:p>
-            <a:pPr>
-              <a:lnSpc>
-                <a:spcPct val="118000"/>
-              </a:lnSpc>
-              <a:spcBef>
-                <a:spcPts val="0"/>
-              </a:spcBef>
-              <a:spcAft>
-                <a:spcPts val="0"/>
-              </a:spcAft>
-              <a:defRPr sz="2100" b="0">
-                <a:solidFill>
-                  <a:srgbClr val="24384A"/>
-                </a:solidFill>
-                <a:latin typeface="Lato"/>
-              </a:defRPr>
-            </a:pPr>
-            <a:r>
-              <a:rPr>
-                <a:ea typeface="Microsoft JhengHei"/>
-              </a:rPr>
-              <a:t>eligible record.</a:t>
-            </a:r>
-          </a:p>
-        </p:txBody>
-      </p:sp>
-      <p:sp>
-        <p:nvSpPr>
-          <p:cNvPr id="10" name="TextBox 9"/>
-          <p:cNvSpPr txBox="1"/>
-          <p:nvPr/>
-        </p:nvSpPr>
-        <p:spPr>
-          <a:xfrm>
-            <a:off x="523874" y="5038725"/>
-            <a:ext cx="11049000" cy="619125"/>
-          </a:xfrm>
-          <a:prstGeom prst="rect">
-            <a:avLst/>
-          </a:prstGeom>
-          <a:noFill/>
-        </p:spPr>
-        <p:txBody>
-          <a:bodyPr wrap="square" lIns="0" rIns="0" tIns="0" bIns="0">
-            <a:spAutoFit/>
-          </a:bodyPr>
-          <a:lstStyle/>
-          <a:p>
-            <a:pPr>
-              <a:lnSpc>
-                <a:spcPct val="118000"/>
-              </a:lnSpc>
-              <a:spcBef>
-                <a:spcPts val="0"/>
-              </a:spcBef>
-              <a:spcAft>
-                <a:spcPts val="0"/>
-              </a:spcAft>
-              <a:defRPr sz="3000" b="1">
-                <a:solidFill>
-                  <a:srgbClr val="146C68"/>
-                </a:solidFill>
-                <a:latin typeface="Lato"/>
-              </a:defRPr>
-            </a:pPr>
-            <a:r>
-              <a:rPr>
-                <a:ea typeface="Microsoft JhengHei"/>
-              </a:rPr>
-              <a:t>Accepted passage ≠ accepted interpretation</a:t>
-            </a:r>
-          </a:p>
-        </p:txBody>
-      </p:sp>
-      <p:sp>
-        <p:nvSpPr>
-          <p:cNvPr id="11" name="TextBox 10"/>
-          <p:cNvSpPr txBox="1"/>
-          <p:nvPr/>
-        </p:nvSpPr>
-        <p:spPr>
-          <a:xfrm>
-            <a:off x="523874" y="5772150"/>
-            <a:ext cx="11049000" cy="466724"/>
-          </a:xfrm>
-          <a:prstGeom prst="rect">
-            <a:avLst/>
-          </a:prstGeom>
-          <a:noFill/>
-        </p:spPr>
-        <p:txBody>
-          <a:bodyPr wrap="square" lIns="0" rIns="0" tIns="0" bIns="0">
-            <a:spAutoFit/>
-          </a:bodyPr>
-          <a:lstStyle/>
-          <a:p>
-            <a:pPr>
-              <a:lnSpc>
-                <a:spcPct val="118000"/>
-              </a:lnSpc>
-              <a:spcBef>
-                <a:spcPts val="0"/>
-              </a:spcBef>
-              <a:spcAft>
-                <a:spcPts val="0"/>
-              </a:spcAft>
-              <a:defRPr sz="2200" b="0">
-                <a:solidFill>
-                  <a:srgbClr val="24384A"/>
-                </a:solidFill>
-                <a:latin typeface="Lato"/>
-              </a:defRPr>
-            </a:pPr>
-            <a:r>
-              <a:rPr>
-                <a:ea typeface="Microsoft JhengHei"/>
-              </a:rPr>
-              <a:t>Decisions stay in the record. The source text is unchanged.</a:t>
+              <a:t>Suggest a quotation or parallel to investigate, with passages to check.</a:t>
             </a:r>
           </a:p>
         </p:txBody>

--- a/docs/presentation/cohort-pnc-2026.pptx
+++ b/docs/presentation/cohort-pnc-2026.pptx
@@ -1133,6 +1133,12 @@
           <a:lstStyle/>
           <a:p>
             <a:r>
+              <a:t>TIME CUE: Compare material from different periods. Ask whether shared wording reflects transmission, reuse or revision. Dates and the direction of borrowing need historical evidence.</a:t>
+            </a:r>
+          </a:p>
+          <a:p/>
+          <a:p>
+            <a:r>
               <a:t>SAY: T1694 is in the mixed early-material group. Removing it changes that group’s profile and the leader. The target and vocabulary stay fixed. The margin is the score gap divided by distinct matched strings; it is not a probability.</a:t>
             </a:r>
           </a:p>
@@ -1388,6 +1394,12 @@
           <a:lstStyle/>
           <a:p>
             <a:r>
+              <a:t>TIME CUE: Compare material from different periods. Ask whether shared wording reflects transmission, reuse or revision. Dates and the direction of borrowing need historical evidence.</a:t>
+            </a:r>
+          </a:p>
+          <a:p/>
+          <a:p>
+            <a:r>
               <a:t>SAY: The worker can pull material together, suggest explanations we might want to examine, and propose a next search. These are possibilities for research. We inspect the cited passages and recorded checks before deciding what to pursue.</a:t>
             </a:r>
           </a:p>
@@ -3112,6 +3124,12 @@
         <p:txBody>
           <a:bodyPr/>
           <a:lstStyle/>
+          <a:p>
+            <a:r>
+              <a:t>TIME CUE: Compare material from different periods. Ask whether shared wording reflects transmission, reuse or revision. Dates and the direction of borrowing need historical evidence.</a:t>
+            </a:r>
+          </a:p>
+          <a:p/>
           <a:p>
             <a:r>
               <a:t>SAY: These two Lotus windows are close in the embedding index, but their longest exact shared sequence is only three Chinese characters. Retrieval gives us a pair to read; alignment shows where wording matches.</a:t>
@@ -8428,7 +8446,7 @@
               <a:rPr>
                 <a:ea typeface="Microsoft JhengHei"/>
               </a:rPr>
-              <a:t>A recorded comparison · curated strings</a:t>
+              <a:t>Across time · earlier text and later commentary</a:t>
             </a:r>
           </a:p>
         </p:txBody>
@@ -10042,7 +10060,7 @@
               <a:rPr>
                 <a:ea typeface="Microsoft JhengHei"/>
               </a:rPr>
-              <a:t>Interpretation · agents and researcher</a:t>
+              <a:t>Interpretation · reuse, revision and transmission</a:t>
             </a:r>
           </a:p>
         </p:txBody>
@@ -20973,7 +20991,7 @@
               <a:rPr>
                 <a:ea typeface="Microsoft JhengHei"/>
               </a:rPr>
-              <a:t>Retrieval and alignment</a:t>
+              <a:t>Across time · two Lotus translations</a:t>
             </a:r>
           </a:p>
         </p:txBody>

--- a/docs/presentation/cohort-pnc-2026.pptx
+++ b/docs/presentation/cohort-pnc-2026.pptx
@@ -6222,8 +6222,8 @@
         </p:nvSpPr>
         <p:spPr>
           <a:xfrm>
-            <a:off x="495299" y="238125"/>
-            <a:ext cx="10668000" cy="285750"/>
+            <a:off x="495299" y="800100"/>
+            <a:ext cx="11201400" cy="1000125"/>
           </a:xfrm>
           <a:prstGeom prst="rect">
             <a:avLst/>
@@ -6246,13 +6246,44 @@
               <a:spcAft>
                 <a:spcPts val="0"/>
               </a:spcAft>
-              <a:defRPr sz="1400" b="1">
-                <a:solidFill>
-                  <a:srgbClr val="126B85"/>
-                </a:solidFill>
-                <a:latin typeface="Lato"/>
-              </a:defRPr>
-            </a:pPr>
+              <a:defRPr sz="3200" b="1">
+                <a:solidFill>
+                  <a:srgbClr val="24384A"/>
+                </a:solidFill>
+                <a:latin typeface="Lato"/>
+              </a:defRPr>
+            </a:pPr>
+            <a:r>
+              <a:rPr>
+                <a:ea typeface="Microsoft JhengHei"/>
+              </a:rPr>
+              <a:t>Agent-Based Infrastructures for</a:t>
+            </a:r>
+          </a:p>
+          <a:p>
+            <a:pPr>
+              <a:lnSpc>
+                <a:spcPct val="118000"/>
+              </a:lnSpc>
+              <a:spcBef>
+                <a:spcPts val="0"/>
+              </a:spcBef>
+              <a:spcAft>
+                <a:spcPts val="0"/>
+              </a:spcAft>
+              <a:defRPr sz="3200" b="1">
+                <a:solidFill>
+                  <a:srgbClr val="24384A"/>
+                </a:solidFill>
+                <a:latin typeface="Lato"/>
+              </a:defRPr>
+            </a:pPr>
+            <a:r>
+              <a:rPr>
+                <a:ea typeface="Microsoft JhengHei"/>
+              </a:rPr>
+              <a:t>Diachronic Digital Humanities</a:t>
+            </a:r>
           </a:p>
         </p:txBody>
       </p:sp>
@@ -6264,8 +6295,8 @@
         </p:nvSpPr>
         <p:spPr>
           <a:xfrm>
-            <a:off x="495299" y="800100"/>
-            <a:ext cx="11201400" cy="1000125"/>
+            <a:off x="495299" y="6448425"/>
+            <a:ext cx="9048750" cy="209550"/>
           </a:xfrm>
           <a:prstGeom prst="rect">
             <a:avLst/>
@@ -6288,43 +6319,18 @@
               <a:spcAft>
                 <a:spcPts val="0"/>
               </a:spcAft>
-              <a:defRPr sz="3200" b="1">
-                <a:solidFill>
-                  <a:srgbClr val="24384A"/>
-                </a:solidFill>
-                <a:latin typeface="Lato"/>
-              </a:defRPr>
-            </a:pPr>
-            <a:r>
-              <a:rPr>
-                <a:ea typeface="Microsoft JhengHei"/>
-              </a:rPr>
-              <a:t>Agent-Based Infrastructures for</a:t>
-            </a:r>
-          </a:p>
-          <a:p>
-            <a:pPr>
-              <a:lnSpc>
-                <a:spcPct val="118000"/>
-              </a:lnSpc>
-              <a:spcBef>
-                <a:spcPts val="0"/>
-              </a:spcBef>
-              <a:spcAft>
-                <a:spcPts val="0"/>
-              </a:spcAft>
-              <a:defRPr sz="3200" b="1">
-                <a:solidFill>
-                  <a:srgbClr val="24384A"/>
-                </a:solidFill>
-                <a:latin typeface="Lato"/>
-              </a:defRPr>
-            </a:pPr>
-            <a:r>
-              <a:rPr>
-                <a:ea typeface="Microsoft JhengHei"/>
-              </a:rPr>
-              <a:t>Diachronic Digital Humanities</a:t>
+              <a:defRPr sz="1100" b="0">
+                <a:solidFill>
+                  <a:srgbClr val="526778"/>
+                </a:solidFill>
+                <a:latin typeface="Lato"/>
+              </a:defRPr>
+            </a:pPr>
+            <a:r>
+              <a:rPr>
+                <a:ea typeface="Microsoft JhengHei"/>
+              </a:rPr>
+              <a:t>Cohort · PNC 2026</a:t>
             </a:r>
           </a:p>
         </p:txBody>
@@ -6337,8 +6343,8 @@
         </p:nvSpPr>
         <p:spPr>
           <a:xfrm>
-            <a:off x="495299" y="6448425"/>
-            <a:ext cx="9048750" cy="209550"/>
+            <a:off x="523874" y="2571750"/>
+            <a:ext cx="10477500" cy="904875"/>
           </a:xfrm>
           <a:prstGeom prst="rect">
             <a:avLst/>
@@ -6361,18 +6367,18 @@
               <a:spcAft>
                 <a:spcPts val="0"/>
               </a:spcAft>
-              <a:defRPr sz="1100" b="0">
-                <a:solidFill>
-                  <a:srgbClr val="526778"/>
-                </a:solidFill>
-                <a:latin typeface="Lato"/>
-              </a:defRPr>
-            </a:pPr>
-            <a:r>
-              <a:rPr>
-                <a:ea typeface="Microsoft JhengHei"/>
-              </a:rPr>
-              <a:t>Cohort · PNC 2026</a:t>
+              <a:defRPr sz="5800" b="1">
+                <a:solidFill>
+                  <a:srgbClr val="126B85"/>
+                </a:solidFill>
+                <a:latin typeface="Lato"/>
+              </a:defRPr>
+            </a:pPr>
+            <a:r>
+              <a:rPr>
+                <a:ea typeface="Microsoft JhengHei"/>
+              </a:rPr>
+              <a:t>Cohort</a:t>
             </a:r>
           </a:p>
         </p:txBody>
@@ -6385,8 +6391,8 @@
         </p:nvSpPr>
         <p:spPr>
           <a:xfrm>
-            <a:off x="523874" y="2571750"/>
-            <a:ext cx="10477500" cy="904875"/>
+            <a:off x="552450" y="3952875"/>
+            <a:ext cx="10096500" cy="1000125"/>
           </a:xfrm>
           <a:prstGeom prst="rect">
             <a:avLst/>
@@ -6409,18 +6415,18 @@
               <a:spcAft>
                 <a:spcPts val="0"/>
               </a:spcAft>
-              <a:defRPr sz="5800" b="1">
-                <a:solidFill>
-                  <a:srgbClr val="126B85"/>
-                </a:solidFill>
-                <a:latin typeface="Lato"/>
-              </a:defRPr>
-            </a:pPr>
-            <a:r>
-              <a:rPr>
-                <a:ea typeface="Microsoft JhengHei"/>
-              </a:rPr>
-              <a:t>Cohort</a:t>
+              <a:defRPr sz="2800" b="0">
+                <a:solidFill>
+                  <a:srgbClr val="24384A"/>
+                </a:solidFill>
+                <a:latin typeface="Lato"/>
+              </a:defRPr>
+            </a:pPr>
+            <a:r>
+              <a:rPr>
+                <a:ea typeface="Microsoft JhengHei"/>
+              </a:rPr>
+              <a:t>Agents for retrieving, comparing and documenting textual evidence</a:t>
             </a:r>
           </a:p>
         </p:txBody>
@@ -6433,8 +6439,8 @@
         </p:nvSpPr>
         <p:spPr>
           <a:xfrm>
-            <a:off x="552450" y="3952875"/>
-            <a:ext cx="10096500" cy="1000125"/>
+            <a:off x="552450" y="5124450"/>
+            <a:ext cx="11049000" cy="333375"/>
           </a:xfrm>
           <a:prstGeom prst="rect">
             <a:avLst/>
@@ -6457,7 +6463,7 @@
               <a:spcAft>
                 <a:spcPts val="0"/>
               </a:spcAft>
-              <a:defRPr sz="2800" b="0">
+              <a:defRPr sz="2300" b="0">
                 <a:solidFill>
                   <a:srgbClr val="24384A"/>
                 </a:solidFill>
@@ -6468,7 +6474,7 @@
               <a:rPr>
                 <a:ea typeface="Microsoft JhengHei"/>
               </a:rPr>
-              <a:t>Agents for retrieving, comparing and documenting textual evidence</a:t>
+              <a:t>Shu-Kai Hsieh¹² · Da-Chen Lian¹² · Chunki Lim¹ · Lang-Ching Yeh¹</a:t>
             </a:r>
           </a:p>
         </p:txBody>
@@ -6481,7 +6487,7 @@
         </p:nvSpPr>
         <p:spPr>
           <a:xfrm>
-            <a:off x="552450" y="5124450"/>
+            <a:off x="552450" y="5600700"/>
             <a:ext cx="11049000" cy="333375"/>
           </a:xfrm>
           <a:prstGeom prst="rect">
@@ -6505,7 +6511,7 @@
               <a:spcAft>
                 <a:spcPts val="0"/>
               </a:spcAft>
-              <a:defRPr sz="2300" b="0">
+              <a:defRPr sz="1700" b="0">
                 <a:solidFill>
                   <a:srgbClr val="24384A"/>
                 </a:solidFill>
@@ -6516,7 +6522,7 @@
               <a:rPr>
                 <a:ea typeface="Microsoft JhengHei"/>
               </a:rPr>
-              <a:t>Shu-Kai Hsieh¹² · Da-Chen Lian¹² · Chunki Lim¹ · Lang-Ching Yeh¹</a:t>
+              <a:t>¹ Graduate Institute of Linguistics, National Taiwan University, Taipei, Taiwan</a:t>
             </a:r>
           </a:p>
         </p:txBody>
@@ -6529,7 +6535,7 @@
         </p:nvSpPr>
         <p:spPr>
           <a:xfrm>
-            <a:off x="552450" y="5600700"/>
+            <a:off x="552450" y="5876925"/>
             <a:ext cx="11049000" cy="333375"/>
           </a:xfrm>
           <a:prstGeom prst="rect">
@@ -6564,54 +6570,6 @@
               <a:rPr>
                 <a:ea typeface="Microsoft JhengHei"/>
               </a:rPr>
-              <a:t>¹ Graduate Institute of Linguistics, National Taiwan University, Taipei, Taiwan</a:t>
-            </a:r>
-          </a:p>
-        </p:txBody>
-      </p:sp>
-      <p:sp>
-        <p:nvSpPr>
-          <p:cNvPr id="9" name="TextBox 8"/>
-          <p:cNvSpPr txBox="1"/>
-          <p:nvPr/>
-        </p:nvSpPr>
-        <p:spPr>
-          <a:xfrm>
-            <a:off x="552450" y="5876925"/>
-            <a:ext cx="11049000" cy="333375"/>
-          </a:xfrm>
-          <a:prstGeom prst="rect">
-            <a:avLst/>
-          </a:prstGeom>
-          <a:noFill/>
-        </p:spPr>
-        <p:txBody>
-          <a:bodyPr wrap="square" lIns="0" rIns="0" tIns="0" bIns="0">
-            <a:spAutoFit/>
-          </a:bodyPr>
-          <a:lstStyle/>
-          <a:p>
-            <a:pPr>
-              <a:lnSpc>
-                <a:spcPct val="118000"/>
-              </a:lnSpc>
-              <a:spcBef>
-                <a:spcPts val="0"/>
-              </a:spcBef>
-              <a:spcAft>
-                <a:spcPts val="0"/>
-              </a:spcAft>
-              <a:defRPr sz="1700" b="0">
-                <a:solidFill>
-                  <a:srgbClr val="24384A"/>
-                </a:solidFill>
-                <a:latin typeface="Lato"/>
-              </a:defRPr>
-            </a:pPr>
-            <a:r>
-              <a:rPr>
-                <a:ea typeface="Microsoft JhengHei"/>
-              </a:rPr>
               <a:t>² Humanistic-AI lab, College of Liberal Arts, National Taiwan University, Taipei, Taiwan</a:t>
             </a:r>
           </a:p>
@@ -6619,7 +6577,7 @@
       </p:sp>
       <p:sp>
         <p:nvSpPr>
-          <p:cNvPr id="10" name="Rectangle 9"/>
+          <p:cNvPr id="9" name="Rectangle 8"/>
           <p:cNvSpPr/>
           <p:nvPr/>
         </p:nvSpPr>
@@ -6664,7 +6622,7 @@
       </p:sp>
       <p:sp>
         <p:nvSpPr>
-          <p:cNvPr id="11" name="TextBox 10"/>
+          <p:cNvPr id="10" name="TextBox 9"/>
           <p:cNvSpPr txBox="1"/>
           <p:nvPr/>
         </p:nvSpPr>
@@ -6736,8 +6694,8 @@
         </p:nvSpPr>
         <p:spPr>
           <a:xfrm>
-            <a:off x="495299" y="238125"/>
-            <a:ext cx="10953750" cy="266700"/>
+            <a:off x="495299" y="742950"/>
+            <a:ext cx="11144250" cy="1047749"/>
           </a:xfrm>
           <a:prstGeom prst="rect">
             <a:avLst/>
@@ -6760,18 +6718,18 @@
               <a:spcAft>
                 <a:spcPts val="0"/>
               </a:spcAft>
-              <a:defRPr sz="1300" b="1">
-                <a:solidFill>
-                  <a:srgbClr val="146C68"/>
-                </a:solidFill>
-                <a:latin typeface="Lato"/>
-              </a:defRPr>
-            </a:pPr>
-            <a:r>
-              <a:rPr>
-                <a:ea typeface="Microsoft JhengHei"/>
-              </a:rPr>
-              <a:t>String frequencies</a:t>
+              <a:defRPr sz="3200" b="1">
+                <a:solidFill>
+                  <a:srgbClr val="24384A"/>
+                </a:solidFill>
+                <a:latin typeface="Lato"/>
+              </a:defRPr>
+            </a:pPr>
+            <a:r>
+              <a:rPr>
+                <a:ea typeface="Microsoft JhengHei"/>
+              </a:rPr>
+              <a:t>What vocabulary comparison calculates</a:t>
             </a:r>
           </a:p>
         </p:txBody>
@@ -6784,8 +6742,8 @@
         </p:nvSpPr>
         <p:spPr>
           <a:xfrm>
-            <a:off x="495299" y="742950"/>
-            <a:ext cx="11144250" cy="1047749"/>
+            <a:off x="714375" y="2105025"/>
+            <a:ext cx="2857500" cy="476250"/>
           </a:xfrm>
           <a:prstGeom prst="rect">
             <a:avLst/>
@@ -6808,18 +6766,18 @@
               <a:spcAft>
                 <a:spcPts val="0"/>
               </a:spcAft>
-              <a:defRPr sz="3200" b="1">
-                <a:solidFill>
-                  <a:srgbClr val="24384A"/>
-                </a:solidFill>
-                <a:latin typeface="Lato"/>
-              </a:defRPr>
-            </a:pPr>
-            <a:r>
-              <a:rPr>
-                <a:ea typeface="Microsoft JhengHei"/>
-              </a:rPr>
-              <a:t>What vocabulary comparison calculates</a:t>
+              <a:defRPr sz="2300" b="1">
+                <a:solidFill>
+                  <a:srgbClr val="80511B"/>
+                </a:solidFill>
+                <a:latin typeface="Lato"/>
+              </a:defRPr>
+            </a:pPr>
+            <a:r>
+              <a:rPr>
+                <a:ea typeface="Microsoft JhengHei"/>
+              </a:rPr>
+              <a:t>Vocabulary list</a:t>
             </a:r>
           </a:p>
         </p:txBody>
@@ -6832,8 +6790,8 @@
         </p:nvSpPr>
         <p:spPr>
           <a:xfrm>
-            <a:off x="714375" y="2105025"/>
-            <a:ext cx="2857500" cy="476250"/>
+            <a:off x="714375" y="2714625"/>
+            <a:ext cx="2857500" cy="857250"/>
           </a:xfrm>
           <a:prstGeom prst="rect">
             <a:avLst/>
@@ -6856,18 +6814,18 @@
               <a:spcAft>
                 <a:spcPts val="0"/>
               </a:spcAft>
-              <a:defRPr sz="2300" b="1">
-                <a:solidFill>
-                  <a:srgbClr val="80511B"/>
-                </a:solidFill>
-                <a:latin typeface="Lato"/>
-              </a:defRPr>
-            </a:pPr>
-            <a:r>
-              <a:rPr>
-                <a:ea typeface="Microsoft JhengHei"/>
-              </a:rPr>
-              <a:t>Vocabulary list</a:t>
+              <a:defRPr sz="2100" b="0">
+                <a:solidFill>
+                  <a:srgbClr val="24384A"/>
+                </a:solidFill>
+                <a:latin typeface="Lato"/>
+              </a:defRPr>
+            </a:pPr>
+            <a:r>
+              <a:rPr>
+                <a:ea typeface="Microsoft JhengHei"/>
+              </a:rPr>
+              <a:t>Choose strings to count</a:t>
             </a:r>
           </a:p>
         </p:txBody>
@@ -6880,8 +6838,8 @@
         </p:nvSpPr>
         <p:spPr>
           <a:xfrm>
-            <a:off x="714375" y="2714625"/>
-            <a:ext cx="2857500" cy="857250"/>
+            <a:off x="4619625" y="2105025"/>
+            <a:ext cx="2857500" cy="476250"/>
           </a:xfrm>
           <a:prstGeom prst="rect">
             <a:avLst/>
@@ -6904,18 +6862,18 @@
               <a:spcAft>
                 <a:spcPts val="0"/>
               </a:spcAft>
-              <a:defRPr sz="2100" b="0">
-                <a:solidFill>
-                  <a:srgbClr val="24384A"/>
-                </a:solidFill>
-                <a:latin typeface="Lato"/>
-              </a:defRPr>
-            </a:pPr>
-            <a:r>
-              <a:rPr>
-                <a:ea typeface="Microsoft JhengHei"/>
-              </a:rPr>
-              <a:t>Choose strings to count</a:t>
+              <a:defRPr sz="2300" b="1">
+                <a:solidFill>
+                  <a:srgbClr val="80511B"/>
+                </a:solidFill>
+                <a:latin typeface="Lato"/>
+              </a:defRPr>
+            </a:pPr>
+            <a:r>
+              <a:rPr>
+                <a:ea typeface="Microsoft JhengHei"/>
+              </a:rPr>
+              <a:t>Target text</a:t>
             </a:r>
           </a:p>
         </p:txBody>
@@ -6928,8 +6886,8 @@
         </p:nvSpPr>
         <p:spPr>
           <a:xfrm>
-            <a:off x="4619625" y="2105025"/>
-            <a:ext cx="2857500" cy="476250"/>
+            <a:off x="4619625" y="2714625"/>
+            <a:ext cx="2857500" cy="857250"/>
           </a:xfrm>
           <a:prstGeom prst="rect">
             <a:avLst/>
@@ -6952,18 +6910,18 @@
               <a:spcAft>
                 <a:spcPts val="0"/>
               </a:spcAft>
-              <a:defRPr sz="2300" b="1">
-                <a:solidFill>
-                  <a:srgbClr val="80511B"/>
-                </a:solidFill>
-                <a:latin typeface="Lato"/>
-              </a:defRPr>
-            </a:pPr>
-            <a:r>
-              <a:rPr>
-                <a:ea typeface="Microsoft JhengHei"/>
-              </a:rPr>
-              <a:t>Target text</a:t>
+              <a:defRPr sz="2100" b="0">
+                <a:solidFill>
+                  <a:srgbClr val="24384A"/>
+                </a:solidFill>
+                <a:latin typeface="Lato"/>
+              </a:defRPr>
+            </a:pPr>
+            <a:r>
+              <a:rPr>
+                <a:ea typeface="Microsoft JhengHei"/>
+              </a:rPr>
+              <a:t>Count those strings</a:t>
             </a:r>
           </a:p>
         </p:txBody>
@@ -6976,8 +6934,8 @@
         </p:nvSpPr>
         <p:spPr>
           <a:xfrm>
-            <a:off x="4619625" y="2714625"/>
-            <a:ext cx="2857500" cy="857250"/>
+            <a:off x="8524875" y="2105025"/>
+            <a:ext cx="2952750" cy="476250"/>
           </a:xfrm>
           <a:prstGeom prst="rect">
             <a:avLst/>
@@ -7000,18 +6958,18 @@
               <a:spcAft>
                 <a:spcPts val="0"/>
               </a:spcAft>
-              <a:defRPr sz="2100" b="0">
-                <a:solidFill>
-                  <a:srgbClr val="24384A"/>
-                </a:solidFill>
-                <a:latin typeface="Lato"/>
-              </a:defRPr>
-            </a:pPr>
-            <a:r>
-              <a:rPr>
-                <a:ea typeface="Microsoft JhengHei"/>
-              </a:rPr>
-              <a:t>Count those strings</a:t>
+              <a:defRPr sz="2300" b="1">
+                <a:solidFill>
+                  <a:srgbClr val="80511B"/>
+                </a:solidFill>
+                <a:latin typeface="Lato"/>
+              </a:defRPr>
+            </a:pPr>
+            <a:r>
+              <a:rPr>
+                <a:ea typeface="Microsoft JhengHei"/>
+              </a:rPr>
+              <a:t>Group profiles</a:t>
             </a:r>
           </a:p>
         </p:txBody>
@@ -7024,8 +6982,8 @@
         </p:nvSpPr>
         <p:spPr>
           <a:xfrm>
-            <a:off x="8524875" y="2105025"/>
-            <a:ext cx="2952750" cy="476250"/>
+            <a:off x="8524875" y="2714625"/>
+            <a:ext cx="2952750" cy="857250"/>
           </a:xfrm>
           <a:prstGeom prst="rect">
             <a:avLst/>
@@ -7048,54 +7006,6 @@
               <a:spcAft>
                 <a:spcPts val="0"/>
               </a:spcAft>
-              <a:defRPr sz="2300" b="1">
-                <a:solidFill>
-                  <a:srgbClr val="80511B"/>
-                </a:solidFill>
-                <a:latin typeface="Lato"/>
-              </a:defRPr>
-            </a:pPr>
-            <a:r>
-              <a:rPr>
-                <a:ea typeface="Microsoft JhengHei"/>
-              </a:rPr>
-              <a:t>Group profiles</a:t>
-            </a:r>
-          </a:p>
-        </p:txBody>
-      </p:sp>
-      <p:sp>
-        <p:nvSpPr>
-          <p:cNvPr id="9" name="TextBox 8"/>
-          <p:cNvSpPr txBox="1"/>
-          <p:nvPr/>
-        </p:nvSpPr>
-        <p:spPr>
-          <a:xfrm>
-            <a:off x="8524875" y="2714625"/>
-            <a:ext cx="2952750" cy="857250"/>
-          </a:xfrm>
-          <a:prstGeom prst="rect">
-            <a:avLst/>
-          </a:prstGeom>
-          <a:noFill/>
-        </p:spPr>
-        <p:txBody>
-          <a:bodyPr wrap="square" lIns="0" rIns="0" tIns="0" bIns="0">
-            <a:spAutoFit/>
-          </a:bodyPr>
-          <a:lstStyle/>
-          <a:p>
-            <a:pPr>
-              <a:lnSpc>
-                <a:spcPct val="118000"/>
-              </a:lnSpc>
-              <a:spcBef>
-                <a:spcPts val="0"/>
-              </a:spcBef>
-              <a:spcAft>
-                <a:spcPts val="0"/>
-              </a:spcAft>
               <a:defRPr sz="2100" b="0">
                 <a:solidFill>
                   <a:srgbClr val="24384A"/>
@@ -7137,6 +7047,42 @@
           </a:p>
         </p:txBody>
       </p:sp>
+      <p:cxnSp>
+        <p:nvCxnSpPr>
+          <p:cNvPr id="9" name="Connector 8"/>
+          <p:cNvCxnSpPr/>
+          <p:nvPr/>
+        </p:nvCxnSpPr>
+        <p:spPr>
+          <a:xfrm>
+            <a:off x="3810000" y="2809875"/>
+            <a:ext cx="523874" cy="0"/>
+          </a:xfrm>
+          <a:prstGeom prst="line">
+            <a:avLst/>
+          </a:prstGeom>
+          <a:ln w="19050">
+            <a:solidFill>
+              <a:srgbClr val="526778"/>
+            </a:solidFill>
+            <a:tailEnd type="triangle"/>
+          </a:ln>
+        </p:spPr>
+        <p:style>
+          <a:lnRef idx="2">
+            <a:schemeClr val="accent1"/>
+          </a:lnRef>
+          <a:fillRef idx="0">
+            <a:schemeClr val="accent1"/>
+          </a:fillRef>
+          <a:effectRef idx="1">
+            <a:schemeClr val="accent1"/>
+          </a:effectRef>
+          <a:fontRef idx="minor">
+            <a:schemeClr val="tx1"/>
+          </a:fontRef>
+        </p:style>
+      </p:cxnSp>
       <p:cxnSp>
         <p:nvCxnSpPr>
           <p:cNvPr id="10" name="Connector 9"/>
@@ -7145,8 +7091,8 @@
         </p:nvCxnSpPr>
         <p:spPr>
           <a:xfrm>
-            <a:off x="3810000" y="2809875"/>
-            <a:ext cx="523874" cy="0"/>
+            <a:off x="10001250" y="3819524"/>
+            <a:ext cx="0" cy="419100"/>
           </a:xfrm>
           <a:prstGeom prst="line">
             <a:avLst/>
@@ -7181,7 +7127,7 @@
         </p:nvCxnSpPr>
         <p:spPr>
           <a:xfrm>
-            <a:off x="10001250" y="3819524"/>
+            <a:off x="6048375" y="3819524"/>
             <a:ext cx="0" cy="419100"/>
           </a:xfrm>
           <a:prstGeom prst="line">
@@ -7209,45 +7155,9 @@
           </a:fontRef>
         </p:style>
       </p:cxnSp>
-      <p:cxnSp>
-        <p:nvCxnSpPr>
-          <p:cNvPr id="12" name="Connector 11"/>
-          <p:cNvCxnSpPr/>
-          <p:nvPr/>
-        </p:nvCxnSpPr>
-        <p:spPr>
-          <a:xfrm>
-            <a:off x="6048375" y="3819524"/>
-            <a:ext cx="0" cy="419100"/>
-          </a:xfrm>
-          <a:prstGeom prst="line">
-            <a:avLst/>
-          </a:prstGeom>
-          <a:ln w="19050">
-            <a:solidFill>
-              <a:srgbClr val="526778"/>
-            </a:solidFill>
-            <a:tailEnd type="triangle"/>
-          </a:ln>
-        </p:spPr>
-        <p:style>
-          <a:lnRef idx="2">
-            <a:schemeClr val="accent1"/>
-          </a:lnRef>
-          <a:fillRef idx="0">
-            <a:schemeClr val="accent1"/>
-          </a:fillRef>
-          <a:effectRef idx="1">
-            <a:schemeClr val="accent1"/>
-          </a:effectRef>
-          <a:fontRef idx="minor">
-            <a:schemeClr val="tx1"/>
-          </a:fontRef>
-        </p:style>
-      </p:cxnSp>
-      <p:sp>
-        <p:nvSpPr>
-          <p:cNvPr id="13" name="TextBox 12"/>
+      <p:sp>
+        <p:nvSpPr>
+          <p:cNvPr id="12" name="TextBox 11"/>
           <p:cNvSpPr txBox="1"/>
           <p:nvPr/>
         </p:nvSpPr>
@@ -7295,7 +7205,7 @@
       </p:sp>
       <p:sp>
         <p:nvSpPr>
-          <p:cNvPr id="14" name="TextBox 13"/>
+          <p:cNvPr id="13" name="TextBox 12"/>
           <p:cNvSpPr txBox="1"/>
           <p:nvPr/>
         </p:nvSpPr>
@@ -7343,7 +7253,7 @@
       </p:sp>
       <p:sp>
         <p:nvSpPr>
-          <p:cNvPr id="15" name="Rectangle 14"/>
+          <p:cNvPr id="14" name="Rectangle 13"/>
           <p:cNvSpPr/>
           <p:nvPr/>
         </p:nvSpPr>
@@ -7388,7 +7298,7 @@
       </p:sp>
       <p:sp>
         <p:nvSpPr>
-          <p:cNvPr id="16" name="TextBox 15"/>
+          <p:cNvPr id="15" name="TextBox 14"/>
           <p:cNvSpPr txBox="1"/>
           <p:nvPr/>
         </p:nvSpPr>
@@ -7460,8 +7370,8 @@
         </p:nvSpPr>
         <p:spPr>
           <a:xfrm>
-            <a:off x="495299" y="238125"/>
-            <a:ext cx="10953750" cy="266700"/>
+            <a:off x="495299" y="742950"/>
+            <a:ext cx="11144250" cy="952500"/>
           </a:xfrm>
           <a:prstGeom prst="rect">
             <a:avLst/>
@@ -7484,54 +7394,6 @@
               <a:spcAft>
                 <a:spcPts val="0"/>
               </a:spcAft>
-              <a:defRPr sz="1300" b="1">
-                <a:solidFill>
-                  <a:srgbClr val="146C68"/>
-                </a:solidFill>
-                <a:latin typeface="Lato"/>
-              </a:defRPr>
-            </a:pPr>
-            <a:r>
-              <a:rPr>
-                <a:ea typeface="Microsoft JhengHei"/>
-              </a:rPr>
-              <a:t>Vocabulary comparison</a:t>
-            </a:r>
-          </a:p>
-        </p:txBody>
-      </p:sp>
-      <p:sp>
-        <p:nvSpPr>
-          <p:cNvPr id="3" name="TextBox 2"/>
-          <p:cNvSpPr txBox="1"/>
-          <p:nvPr/>
-        </p:nvSpPr>
-        <p:spPr>
-          <a:xfrm>
-            <a:off x="495299" y="742950"/>
-            <a:ext cx="11144250" cy="952500"/>
-          </a:xfrm>
-          <a:prstGeom prst="rect">
-            <a:avLst/>
-          </a:prstGeom>
-          <a:noFill/>
-        </p:spPr>
-        <p:txBody>
-          <a:bodyPr wrap="square" lIns="0" rIns="0" tIns="0" bIns="0">
-            <a:spAutoFit/>
-          </a:bodyPr>
-          <a:lstStyle/>
-          <a:p>
-            <a:pPr>
-              <a:lnSpc>
-                <a:spcPct val="118000"/>
-              </a:lnSpc>
-              <a:spcBef>
-                <a:spcPts val="0"/>
-              </a:spcBef>
-              <a:spcAft>
-                <a:spcPts val="0"/>
-              </a:spcAft>
               <a:defRPr sz="2900" b="1">
                 <a:solidFill>
                   <a:srgbClr val="24384A"/>
@@ -7550,7 +7412,7 @@
       </p:sp>
       <p:sp>
         <p:nvSpPr>
-          <p:cNvPr id="4" name="Rectangle 3"/>
+          <p:cNvPr id="3" name="Rectangle 2"/>
           <p:cNvSpPr/>
           <p:nvPr/>
         </p:nvSpPr>
@@ -7595,7 +7457,7 @@
       </p:sp>
       <p:sp>
         <p:nvSpPr>
-          <p:cNvPr id="5" name="TextBox 4"/>
+          <p:cNvPr id="4" name="TextBox 3"/>
           <p:cNvSpPr txBox="1"/>
           <p:nvPr/>
         </p:nvSpPr>
@@ -7643,7 +7505,7 @@
       </p:sp>
       <p:pic>
         <p:nvPicPr>
-          <p:cNvPr id="6" name="Picture 5" descr="vocabulary.png"/>
+          <p:cNvPr id="5" name="Picture 4" descr="vocabulary.png"/>
           <p:cNvPicPr>
             <a:picLocks noChangeAspect="1"/>
           </p:cNvPicPr>
@@ -7667,7 +7529,7 @@
       </p:pic>
       <p:sp>
         <p:nvSpPr>
-          <p:cNvPr id="7" name="TextBox 6"/>
+          <p:cNvPr id="6" name="TextBox 5"/>
           <p:cNvSpPr txBox="1"/>
           <p:nvPr/>
         </p:nvSpPr>
@@ -7715,7 +7577,7 @@
       </p:sp>
       <p:sp>
         <p:nvSpPr>
-          <p:cNvPr id="8" name="TextBox 7"/>
+          <p:cNvPr id="7" name="TextBox 6"/>
           <p:cNvSpPr txBox="1"/>
           <p:nvPr/>
         </p:nvSpPr>
@@ -7763,7 +7625,7 @@
       </p:sp>
       <p:sp>
         <p:nvSpPr>
-          <p:cNvPr id="9" name="Rectangle 8"/>
+          <p:cNvPr id="8" name="Rectangle 7"/>
           <p:cNvSpPr/>
           <p:nvPr/>
         </p:nvSpPr>
@@ -7808,7 +7670,7 @@
       </p:sp>
       <p:sp>
         <p:nvSpPr>
-          <p:cNvPr id="10" name="TextBox 9"/>
+          <p:cNvPr id="9" name="TextBox 8"/>
           <p:cNvSpPr txBox="1"/>
           <p:nvPr/>
         </p:nvSpPr>
@@ -7856,7 +7718,7 @@
       </p:sp>
       <p:sp>
         <p:nvSpPr>
-          <p:cNvPr id="11" name="Rectangle 10"/>
+          <p:cNvPr id="10" name="Rectangle 9"/>
           <p:cNvSpPr/>
           <p:nvPr/>
         </p:nvSpPr>
@@ -7901,7 +7763,7 @@
       </p:sp>
       <p:sp>
         <p:nvSpPr>
-          <p:cNvPr id="12" name="TextBox 11"/>
+          <p:cNvPr id="11" name="TextBox 10"/>
           <p:cNvSpPr txBox="1"/>
           <p:nvPr/>
         </p:nvSpPr>
@@ -7949,7 +7811,7 @@
       </p:sp>
       <p:cxnSp>
         <p:nvCxnSpPr>
-          <p:cNvPr id="13" name="Connector 12"/>
+          <p:cNvPr id="12" name="Connector 11"/>
           <p:cNvCxnSpPr/>
           <p:nvPr/>
         </p:nvCxnSpPr>
@@ -7985,7 +7847,7 @@
       </p:cxnSp>
       <p:cxnSp>
         <p:nvCxnSpPr>
-          <p:cNvPr id="14" name="Connector 13"/>
+          <p:cNvPr id="13" name="Connector 12"/>
           <p:cNvCxnSpPr/>
           <p:nvPr/>
         </p:nvCxnSpPr>
@@ -8021,7 +7883,7 @@
       </p:cxnSp>
       <p:sp>
         <p:nvSpPr>
-          <p:cNvPr id="15" name="Rectangle 14"/>
+          <p:cNvPr id="14" name="Rectangle 13"/>
           <p:cNvSpPr/>
           <p:nvPr/>
         </p:nvSpPr>
@@ -8066,7 +7928,7 @@
       </p:sp>
       <p:sp>
         <p:nvSpPr>
-          <p:cNvPr id="16" name="TextBox 15"/>
+          <p:cNvPr id="15" name="TextBox 14"/>
           <p:cNvSpPr txBox="1"/>
           <p:nvPr/>
         </p:nvSpPr>
@@ -8114,7 +7976,7 @@
       </p:sp>
       <p:cxnSp>
         <p:nvCxnSpPr>
-          <p:cNvPr id="17" name="Connector 16"/>
+          <p:cNvPr id="16" name="Connector 15"/>
           <p:cNvCxnSpPr/>
           <p:nvPr/>
         </p:nvCxnSpPr>
@@ -8150,7 +8012,7 @@
       </p:cxnSp>
       <p:sp>
         <p:nvSpPr>
-          <p:cNvPr id="18" name="Rectangle 17"/>
+          <p:cNvPr id="17" name="Rectangle 16"/>
           <p:cNvSpPr/>
           <p:nvPr/>
         </p:nvSpPr>
@@ -8195,7 +8057,7 @@
       </p:sp>
       <p:sp>
         <p:nvSpPr>
-          <p:cNvPr id="19" name="TextBox 18"/>
+          <p:cNvPr id="18" name="TextBox 17"/>
           <p:cNvSpPr txBox="1"/>
           <p:nvPr/>
         </p:nvSpPr>
@@ -8243,7 +8105,7 @@
       </p:sp>
       <p:sp>
         <p:nvSpPr>
-          <p:cNvPr id="20" name="TextBox 19"/>
+          <p:cNvPr id="19" name="TextBox 18"/>
           <p:cNvSpPr txBox="1"/>
           <p:nvPr/>
         </p:nvSpPr>
@@ -8291,7 +8153,7 @@
       </p:sp>
       <p:sp>
         <p:nvSpPr>
-          <p:cNvPr id="21" name="TextBox 20"/>
+          <p:cNvPr id="20" name="TextBox 19"/>
           <p:cNvSpPr txBox="1"/>
           <p:nvPr/>
         </p:nvSpPr>
@@ -8339,7 +8201,7 @@
       </p:sp>
       <p:sp>
         <p:nvSpPr>
-          <p:cNvPr id="22" name="TextBox 21"/>
+          <p:cNvPr id="21" name="TextBox 20"/>
           <p:cNvSpPr txBox="1"/>
           <p:nvPr/>
         </p:nvSpPr>
@@ -8411,8 +8273,8 @@
         </p:nvSpPr>
         <p:spPr>
           <a:xfrm>
-            <a:off x="495299" y="238125"/>
-            <a:ext cx="10953750" cy="266700"/>
+            <a:off x="495299" y="742950"/>
+            <a:ext cx="11144250" cy="1047749"/>
           </a:xfrm>
           <a:prstGeom prst="rect">
             <a:avLst/>
@@ -8435,18 +8297,18 @@
               <a:spcAft>
                 <a:spcPts val="0"/>
               </a:spcAft>
-              <a:defRPr sz="1300" b="1">
-                <a:solidFill>
-                  <a:srgbClr val="146C68"/>
-                </a:solidFill>
-                <a:latin typeface="Lato"/>
-              </a:defRPr>
-            </a:pPr>
-            <a:r>
-              <a:rPr>
-                <a:ea typeface="Microsoft JhengHei"/>
-              </a:rPr>
-              <a:t>Across time · earlier text and later commentary</a:t>
+              <a:defRPr sz="3200" b="1">
+                <a:solidFill>
+                  <a:srgbClr val="24384A"/>
+                </a:solidFill>
+                <a:latin typeface="Lato"/>
+              </a:defRPr>
+            </a:pPr>
+            <a:r>
+              <a:rPr>
+                <a:ea typeface="Microsoft JhengHei"/>
+              </a:rPr>
+              <a:t>T0603: remove the later commentary</a:t>
             </a:r>
           </a:p>
         </p:txBody>
@@ -8459,8 +8321,8 @@
         </p:nvSpPr>
         <p:spPr>
           <a:xfrm>
-            <a:off x="495299" y="742950"/>
-            <a:ext cx="11144250" cy="1047749"/>
+            <a:off x="714375" y="2152650"/>
+            <a:ext cx="4762500" cy="476250"/>
           </a:xfrm>
           <a:prstGeom prst="rect">
             <a:avLst/>
@@ -8483,18 +8345,18 @@
               <a:spcAft>
                 <a:spcPts val="0"/>
               </a:spcAft>
-              <a:defRPr sz="3200" b="1">
-                <a:solidFill>
-                  <a:srgbClr val="24384A"/>
-                </a:solidFill>
-                <a:latin typeface="Lato"/>
-              </a:defRPr>
-            </a:pPr>
-            <a:r>
-              <a:rPr>
-                <a:ea typeface="Microsoft JhengHei"/>
-              </a:rPr>
-              <a:t>T0603: remove the later commentary</a:t>
+              <a:defRPr sz="2300" b="1">
+                <a:solidFill>
+                  <a:srgbClr val="80511B"/>
+                </a:solidFill>
+                <a:latin typeface="Lato"/>
+              </a:defRPr>
+            </a:pPr>
+            <a:r>
+              <a:rPr>
+                <a:ea typeface="Microsoft JhengHei"/>
+              </a:rPr>
+              <a:t>With T1694</a:t>
             </a:r>
           </a:p>
         </p:txBody>
@@ -8507,8 +8369,8 @@
         </p:nvSpPr>
         <p:spPr>
           <a:xfrm>
-            <a:off x="714375" y="2152650"/>
-            <a:ext cx="4762500" cy="476250"/>
+            <a:off x="714375" y="2762250"/>
+            <a:ext cx="4762500" cy="1866899"/>
           </a:xfrm>
           <a:prstGeom prst="rect">
             <a:avLst/>
@@ -8531,18 +8393,87 @@
               <a:spcAft>
                 <a:spcPts val="0"/>
               </a:spcAft>
-              <a:defRPr sz="2300" b="1">
-                <a:solidFill>
-                  <a:srgbClr val="80511B"/>
-                </a:solidFill>
-                <a:latin typeface="Lato"/>
-              </a:defRPr>
-            </a:pPr>
-            <a:r>
-              <a:rPr>
-                <a:ea typeface="Microsoft JhengHei"/>
-              </a:rPr>
-              <a:t>With T1694</a:t>
+              <a:defRPr sz="2100" b="0">
+                <a:solidFill>
+                  <a:srgbClr val="24384A"/>
+                </a:solidFill>
+                <a:latin typeface="Lato"/>
+              </a:defRPr>
+            </a:pPr>
+            <a:r>
+              <a:rPr>
+                <a:ea typeface="Microsoft JhengHei"/>
+              </a:rPr>
+              <a:t>First: Other material before</a:t>
+            </a:r>
+          </a:p>
+          <a:p>
+            <a:pPr>
+              <a:lnSpc>
+                <a:spcPct val="118000"/>
+              </a:lnSpc>
+              <a:spcBef>
+                <a:spcPts val="0"/>
+              </a:spcBef>
+              <a:spcAft>
+                <a:spcPts val="0"/>
+              </a:spcAft>
+              <a:defRPr sz="2100" b="0">
+                <a:solidFill>
+                  <a:srgbClr val="24384A"/>
+                </a:solidFill>
+                <a:latin typeface="Lato"/>
+              </a:defRPr>
+            </a:pPr>
+            <a:r>
+              <a:rPr>
+                <a:ea typeface="Microsoft JhengHei"/>
+              </a:rPr>
+              <a:t>Dharmarakṣa 竺法護</a:t>
+            </a:r>
+          </a:p>
+          <a:p>
+            <a:pPr>
+              <a:lnSpc>
+                <a:spcPct val="118000"/>
+              </a:lnSpc>
+              <a:spcBef>
+                <a:spcPts val="0"/>
+              </a:spcBef>
+              <a:spcAft>
+                <a:spcPts val="0"/>
+              </a:spcAft>
+              <a:defRPr sz="2100" b="0">
+                <a:solidFill>
+                  <a:srgbClr val="24384A"/>
+                </a:solidFill>
+                <a:latin typeface="Lato"/>
+              </a:defRPr>
+            </a:pPr>
+          </a:p>
+          <a:p>
+            <a:pPr>
+              <a:lnSpc>
+                <a:spcPct val="118000"/>
+              </a:lnSpc>
+              <a:spcBef>
+                <a:spcPts val="0"/>
+              </a:spcBef>
+              <a:spcAft>
+                <a:spcPts val="0"/>
+              </a:spcAft>
+              <a:defRPr sz="2100" b="0">
+                <a:solidFill>
+                  <a:srgbClr val="24384A"/>
+                </a:solidFill>
+                <a:latin typeface="Lato"/>
+              </a:defRPr>
+            </a:pPr>
+            <a:r>
+              <a:rPr>
+                <a:ea typeface="Microsoft JhengHei"/>
+              </a:rPr>
+              <a:t>Margin over next group: 1.696</a:t>
             </a:r>
           </a:p>
         </p:txBody>
@@ -8555,8 +8486,8 @@
         </p:nvSpPr>
         <p:spPr>
           <a:xfrm>
-            <a:off x="714375" y="2762250"/>
-            <a:ext cx="4762500" cy="1866899"/>
+            <a:off x="6715125" y="2152650"/>
+            <a:ext cx="4762500" cy="476250"/>
           </a:xfrm>
           <a:prstGeom prst="rect">
             <a:avLst/>
@@ -8579,87 +8510,18 @@
               <a:spcAft>
                 <a:spcPts val="0"/>
               </a:spcAft>
-              <a:defRPr sz="2100" b="0">
-                <a:solidFill>
-                  <a:srgbClr val="24384A"/>
-                </a:solidFill>
-                <a:latin typeface="Lato"/>
-              </a:defRPr>
-            </a:pPr>
-            <a:r>
-              <a:rPr>
-                <a:ea typeface="Microsoft JhengHei"/>
-              </a:rPr>
-              <a:t>First: Other material before</a:t>
-            </a:r>
-          </a:p>
-          <a:p>
-            <a:pPr>
-              <a:lnSpc>
-                <a:spcPct val="118000"/>
-              </a:lnSpc>
-              <a:spcBef>
-                <a:spcPts val="0"/>
-              </a:spcBef>
-              <a:spcAft>
-                <a:spcPts val="0"/>
-              </a:spcAft>
-              <a:defRPr sz="2100" b="0">
-                <a:solidFill>
-                  <a:srgbClr val="24384A"/>
-                </a:solidFill>
-                <a:latin typeface="Lato"/>
-              </a:defRPr>
-            </a:pPr>
-            <a:r>
-              <a:rPr>
-                <a:ea typeface="Microsoft JhengHei"/>
-              </a:rPr>
-              <a:t>Dharmarakṣa 竺法護</a:t>
-            </a:r>
-          </a:p>
-          <a:p>
-            <a:pPr>
-              <a:lnSpc>
-                <a:spcPct val="118000"/>
-              </a:lnSpc>
-              <a:spcBef>
-                <a:spcPts val="0"/>
-              </a:spcBef>
-              <a:spcAft>
-                <a:spcPts val="0"/>
-              </a:spcAft>
-              <a:defRPr sz="2100" b="0">
-                <a:solidFill>
-                  <a:srgbClr val="24384A"/>
-                </a:solidFill>
-                <a:latin typeface="Lato"/>
-              </a:defRPr>
-            </a:pPr>
-          </a:p>
-          <a:p>
-            <a:pPr>
-              <a:lnSpc>
-                <a:spcPct val="118000"/>
-              </a:lnSpc>
-              <a:spcBef>
-                <a:spcPts val="0"/>
-              </a:spcBef>
-              <a:spcAft>
-                <a:spcPts val="0"/>
-              </a:spcAft>
-              <a:defRPr sz="2100" b="0">
-                <a:solidFill>
-                  <a:srgbClr val="24384A"/>
-                </a:solidFill>
-                <a:latin typeface="Lato"/>
-              </a:defRPr>
-            </a:pPr>
-            <a:r>
-              <a:rPr>
-                <a:ea typeface="Microsoft JhengHei"/>
-              </a:rPr>
-              <a:t>Margin over next group: 1.696</a:t>
+              <a:defRPr sz="2300" b="1">
+                <a:solidFill>
+                  <a:srgbClr val="146C68"/>
+                </a:solidFill>
+                <a:latin typeface="Lato"/>
+              </a:defRPr>
+            </a:pPr>
+            <a:r>
+              <a:rPr>
+                <a:ea typeface="Microsoft JhengHei"/>
+              </a:rPr>
+              <a:t>Without T1694</a:t>
             </a:r>
           </a:p>
         </p:txBody>
@@ -8672,8 +8534,8 @@
         </p:nvSpPr>
         <p:spPr>
           <a:xfrm>
-            <a:off x="6715125" y="2152650"/>
-            <a:ext cx="4762500" cy="476250"/>
+            <a:off x="6715125" y="2762250"/>
+            <a:ext cx="4762500" cy="1866899"/>
           </a:xfrm>
           <a:prstGeom prst="rect">
             <a:avLst/>
@@ -8696,54 +8558,6 @@
               <a:spcAft>
                 <a:spcPts val="0"/>
               </a:spcAft>
-              <a:defRPr sz="2300" b="1">
-                <a:solidFill>
-                  <a:srgbClr val="146C68"/>
-                </a:solidFill>
-                <a:latin typeface="Lato"/>
-              </a:defRPr>
-            </a:pPr>
-            <a:r>
-              <a:rPr>
-                <a:ea typeface="Microsoft JhengHei"/>
-              </a:rPr>
-              <a:t>Without T1694</a:t>
-            </a:r>
-          </a:p>
-        </p:txBody>
-      </p:sp>
-      <p:sp>
-        <p:nvSpPr>
-          <p:cNvPr id="7" name="TextBox 6"/>
-          <p:cNvSpPr txBox="1"/>
-          <p:nvPr/>
-        </p:nvSpPr>
-        <p:spPr>
-          <a:xfrm>
-            <a:off x="6715125" y="2762250"/>
-            <a:ext cx="4762500" cy="1866899"/>
-          </a:xfrm>
-          <a:prstGeom prst="rect">
-            <a:avLst/>
-          </a:prstGeom>
-          <a:noFill/>
-        </p:spPr>
-        <p:txBody>
-          <a:bodyPr wrap="square" lIns="0" rIns="0" tIns="0" bIns="0">
-            <a:spAutoFit/>
-          </a:bodyPr>
-          <a:lstStyle/>
-          <a:p>
-            <a:pPr>
-              <a:lnSpc>
-                <a:spcPct val="118000"/>
-              </a:lnSpc>
-              <a:spcBef>
-                <a:spcPts val="0"/>
-              </a:spcBef>
-              <a:spcAft>
-                <a:spcPts val="0"/>
-              </a:spcAft>
               <a:defRPr sz="2100" b="0">
                 <a:solidFill>
                   <a:srgbClr val="24384A"/>
@@ -8825,7 +8639,7 @@
       </p:sp>
       <p:cxnSp>
         <p:nvCxnSpPr>
-          <p:cNvPr id="8" name="Connector 7"/>
+          <p:cNvPr id="7" name="Connector 6"/>
           <p:cNvCxnSpPr/>
           <p:nvPr/>
         </p:nvCxnSpPr>
@@ -8861,7 +8675,7 @@
       </p:cxnSp>
       <p:sp>
         <p:nvSpPr>
-          <p:cNvPr id="9" name="TextBox 8"/>
+          <p:cNvPr id="8" name="TextBox 7"/>
           <p:cNvSpPr txBox="1"/>
           <p:nvPr/>
         </p:nvSpPr>
@@ -8909,7 +8723,7 @@
       </p:sp>
       <p:sp>
         <p:nvSpPr>
-          <p:cNvPr id="10" name="TextBox 9"/>
+          <p:cNvPr id="9" name="TextBox 8"/>
           <p:cNvSpPr txBox="1"/>
           <p:nvPr/>
         </p:nvSpPr>
@@ -8957,7 +8771,7 @@
       </p:sp>
       <p:sp>
         <p:nvSpPr>
-          <p:cNvPr id="11" name="Rectangle 10"/>
+          <p:cNvPr id="10" name="Rectangle 9"/>
           <p:cNvSpPr/>
           <p:nvPr/>
         </p:nvSpPr>
@@ -9002,7 +8816,7 @@
       </p:sp>
       <p:sp>
         <p:nvSpPr>
-          <p:cNvPr id="12" name="TextBox 11"/>
+          <p:cNvPr id="11" name="TextBox 10"/>
           <p:cNvSpPr txBox="1"/>
           <p:nvPr/>
         </p:nvSpPr>
@@ -9074,8 +8888,8 @@
         </p:nvSpPr>
         <p:spPr>
           <a:xfrm>
-            <a:off x="495299" y="238125"/>
-            <a:ext cx="10953750" cy="266700"/>
+            <a:off x="495299" y="742950"/>
+            <a:ext cx="11144250" cy="952500"/>
           </a:xfrm>
           <a:prstGeom prst="rect">
             <a:avLst/>
@@ -9098,54 +8912,6 @@
               <a:spcAft>
                 <a:spcPts val="0"/>
               </a:spcAft>
-              <a:defRPr sz="1300" b="1">
-                <a:solidFill>
-                  <a:srgbClr val="146C68"/>
-                </a:solidFill>
-                <a:latin typeface="Lato"/>
-              </a:defRPr>
-            </a:pPr>
-            <a:r>
-              <a:rPr>
-                <a:ea typeface="Microsoft JhengHei"/>
-              </a:rPr>
-              <a:t>Inquiry</a:t>
-            </a:r>
-          </a:p>
-        </p:txBody>
-      </p:sp>
-      <p:sp>
-        <p:nvSpPr>
-          <p:cNvPr id="3" name="TextBox 2"/>
-          <p:cNvSpPr txBox="1"/>
-          <p:nvPr/>
-        </p:nvSpPr>
-        <p:spPr>
-          <a:xfrm>
-            <a:off x="495299" y="742950"/>
-            <a:ext cx="11144250" cy="952500"/>
-          </a:xfrm>
-          <a:prstGeom prst="rect">
-            <a:avLst/>
-          </a:prstGeom>
-          <a:noFill/>
-        </p:spPr>
-        <p:txBody>
-          <a:bodyPr wrap="square" lIns="0" rIns="0" tIns="0" bIns="0">
-            <a:spAutoFit/>
-          </a:bodyPr>
-          <a:lstStyle/>
-          <a:p>
-            <a:pPr>
-              <a:lnSpc>
-                <a:spcPct val="118000"/>
-              </a:lnSpc>
-              <a:spcBef>
-                <a:spcPts val="0"/>
-              </a:spcBef>
-              <a:spcAft>
-                <a:spcPts val="0"/>
-              </a:spcAft>
               <a:defRPr sz="2900" b="1">
                 <a:solidFill>
                   <a:srgbClr val="24384A"/>
@@ -9164,7 +8930,7 @@
       </p:sp>
       <p:sp>
         <p:nvSpPr>
-          <p:cNvPr id="4" name="Rectangle 3"/>
+          <p:cNvPr id="3" name="Rectangle 2"/>
           <p:cNvSpPr/>
           <p:nvPr/>
         </p:nvSpPr>
@@ -9209,7 +8975,7 @@
       </p:sp>
       <p:sp>
         <p:nvSpPr>
-          <p:cNvPr id="5" name="TextBox 4"/>
+          <p:cNvPr id="4" name="TextBox 3"/>
           <p:cNvSpPr txBox="1"/>
           <p:nvPr/>
         </p:nvSpPr>
@@ -9257,7 +9023,7 @@
       </p:sp>
       <p:pic>
         <p:nvPicPr>
-          <p:cNvPr id="6" name="Picture 5" descr="inquiry.png"/>
+          <p:cNvPr id="5" name="Picture 4" descr="inquiry.png"/>
           <p:cNvPicPr>
             <a:picLocks noChangeAspect="1"/>
           </p:cNvPicPr>
@@ -9281,7 +9047,7 @@
       </p:pic>
       <p:sp>
         <p:nvSpPr>
-          <p:cNvPr id="7" name="TextBox 6"/>
+          <p:cNvPr id="6" name="TextBox 5"/>
           <p:cNvSpPr txBox="1"/>
           <p:nvPr/>
         </p:nvSpPr>
@@ -9329,7 +9095,7 @@
       </p:sp>
       <p:sp>
         <p:nvSpPr>
-          <p:cNvPr id="8" name="TextBox 7"/>
+          <p:cNvPr id="7" name="TextBox 6"/>
           <p:cNvSpPr txBox="1"/>
           <p:nvPr/>
         </p:nvSpPr>
@@ -9377,7 +9143,7 @@
       </p:sp>
       <p:sp>
         <p:nvSpPr>
-          <p:cNvPr id="9" name="Rectangle 8"/>
+          <p:cNvPr id="8" name="Rectangle 7"/>
           <p:cNvSpPr/>
           <p:nvPr/>
         </p:nvSpPr>
@@ -9422,7 +9188,7 @@
       </p:sp>
       <p:sp>
         <p:nvSpPr>
-          <p:cNvPr id="10" name="TextBox 9"/>
+          <p:cNvPr id="9" name="TextBox 8"/>
           <p:cNvSpPr txBox="1"/>
           <p:nvPr/>
         </p:nvSpPr>
@@ -9470,7 +9236,7 @@
       </p:sp>
       <p:sp>
         <p:nvSpPr>
-          <p:cNvPr id="11" name="Rectangle 10"/>
+          <p:cNvPr id="10" name="Rectangle 9"/>
           <p:cNvSpPr/>
           <p:nvPr/>
         </p:nvSpPr>
@@ -9515,7 +9281,7 @@
       </p:sp>
       <p:sp>
         <p:nvSpPr>
-          <p:cNvPr id="12" name="TextBox 11"/>
+          <p:cNvPr id="11" name="TextBox 10"/>
           <p:cNvSpPr txBox="1"/>
           <p:nvPr/>
         </p:nvSpPr>
@@ -9563,7 +9329,7 @@
       </p:sp>
       <p:cxnSp>
         <p:nvCxnSpPr>
-          <p:cNvPr id="13" name="Connector 12"/>
+          <p:cNvPr id="12" name="Connector 11"/>
           <p:cNvCxnSpPr/>
           <p:nvPr/>
         </p:nvCxnSpPr>
@@ -9599,7 +9365,7 @@
       </p:cxnSp>
       <p:cxnSp>
         <p:nvCxnSpPr>
-          <p:cNvPr id="14" name="Connector 13"/>
+          <p:cNvPr id="13" name="Connector 12"/>
           <p:cNvCxnSpPr/>
           <p:nvPr/>
         </p:nvCxnSpPr>
@@ -9635,7 +9401,7 @@
       </p:cxnSp>
       <p:sp>
         <p:nvSpPr>
-          <p:cNvPr id="15" name="Rectangle 14"/>
+          <p:cNvPr id="14" name="Rectangle 13"/>
           <p:cNvSpPr/>
           <p:nvPr/>
         </p:nvSpPr>
@@ -9680,7 +9446,7 @@
       </p:sp>
       <p:sp>
         <p:nvSpPr>
-          <p:cNvPr id="16" name="TextBox 15"/>
+          <p:cNvPr id="15" name="TextBox 14"/>
           <p:cNvSpPr txBox="1"/>
           <p:nvPr/>
         </p:nvSpPr>
@@ -9728,7 +9494,7 @@
       </p:sp>
       <p:cxnSp>
         <p:nvCxnSpPr>
-          <p:cNvPr id="17" name="Connector 16"/>
+          <p:cNvPr id="16" name="Connector 15"/>
           <p:cNvCxnSpPr/>
           <p:nvPr/>
         </p:nvCxnSpPr>
@@ -9764,7 +9530,7 @@
       </p:cxnSp>
       <p:sp>
         <p:nvSpPr>
-          <p:cNvPr id="18" name="Rectangle 17"/>
+          <p:cNvPr id="17" name="Rectangle 16"/>
           <p:cNvSpPr/>
           <p:nvPr/>
         </p:nvSpPr>
@@ -9809,7 +9575,7 @@
       </p:sp>
       <p:sp>
         <p:nvSpPr>
-          <p:cNvPr id="19" name="TextBox 18"/>
+          <p:cNvPr id="18" name="TextBox 17"/>
           <p:cNvSpPr txBox="1"/>
           <p:nvPr/>
         </p:nvSpPr>
@@ -9857,7 +9623,7 @@
       </p:sp>
       <p:sp>
         <p:nvSpPr>
-          <p:cNvPr id="20" name="TextBox 19"/>
+          <p:cNvPr id="19" name="TextBox 18"/>
           <p:cNvSpPr txBox="1"/>
           <p:nvPr/>
         </p:nvSpPr>
@@ -9905,7 +9671,7 @@
       </p:sp>
       <p:sp>
         <p:nvSpPr>
-          <p:cNvPr id="21" name="TextBox 20"/>
+          <p:cNvPr id="20" name="TextBox 19"/>
           <p:cNvSpPr txBox="1"/>
           <p:nvPr/>
         </p:nvSpPr>
@@ -9953,7 +9719,7 @@
       </p:sp>
       <p:sp>
         <p:nvSpPr>
-          <p:cNvPr id="22" name="TextBox 21"/>
+          <p:cNvPr id="21" name="TextBox 20"/>
           <p:cNvSpPr txBox="1"/>
           <p:nvPr/>
         </p:nvSpPr>
@@ -10025,8 +9791,8 @@
         </p:nvSpPr>
         <p:spPr>
           <a:xfrm>
-            <a:off x="495299" y="238125"/>
-            <a:ext cx="10953750" cy="266700"/>
+            <a:off x="495299" y="742950"/>
+            <a:ext cx="11144250" cy="952500"/>
           </a:xfrm>
           <a:prstGeom prst="rect">
             <a:avLst/>
@@ -10049,18 +9815,18 @@
               <a:spcAft>
                 <a:spcPts val="0"/>
               </a:spcAft>
-              <a:defRPr sz="1300" b="1">
-                <a:solidFill>
-                  <a:srgbClr val="146C68"/>
-                </a:solidFill>
-                <a:latin typeface="Lato"/>
-              </a:defRPr>
-            </a:pPr>
-            <a:r>
-              <a:rPr>
-                <a:ea typeface="Microsoft JhengHei"/>
-              </a:rPr>
-              <a:t>Interpretation · reuse, revision and transmission</a:t>
+              <a:defRPr sz="3200" b="1">
+                <a:solidFill>
+                  <a:srgbClr val="24384A"/>
+                </a:solidFill>
+                <a:latin typeface="Lato"/>
+              </a:defRPr>
+            </a:pPr>
+            <a:r>
+              <a:rPr>
+                <a:ea typeface="Microsoft JhengHei"/>
+              </a:rPr>
+              <a:t>From passages to research proposals</a:t>
             </a:r>
           </a:p>
         </p:txBody>
@@ -10073,8 +9839,8 @@
         </p:nvSpPr>
         <p:spPr>
           <a:xfrm>
-            <a:off x="495299" y="742950"/>
-            <a:ext cx="11144250" cy="952500"/>
+            <a:off x="523874" y="1828800"/>
+            <a:ext cx="11049000" cy="781050"/>
           </a:xfrm>
           <a:prstGeom prst="rect">
             <a:avLst/>
@@ -10097,7 +9863,7 @@
               <a:spcAft>
                 <a:spcPts val="0"/>
               </a:spcAft>
-              <a:defRPr sz="3200" b="1">
+              <a:defRPr sz="2600" b="0">
                 <a:solidFill>
                   <a:srgbClr val="24384A"/>
                 </a:solidFill>
@@ -10108,54 +9874,6 @@
               <a:rPr>
                 <a:ea typeface="Microsoft JhengHei"/>
               </a:rPr>
-              <a:t>From passages to research proposals</a:t>
-            </a:r>
-          </a:p>
-        </p:txBody>
-      </p:sp>
-      <p:sp>
-        <p:nvSpPr>
-          <p:cNvPr id="4" name="TextBox 3"/>
-          <p:cNvSpPr txBox="1"/>
-          <p:nvPr/>
-        </p:nvSpPr>
-        <p:spPr>
-          <a:xfrm>
-            <a:off x="523874" y="1828800"/>
-            <a:ext cx="11049000" cy="781050"/>
-          </a:xfrm>
-          <a:prstGeom prst="rect">
-            <a:avLst/>
-          </a:prstGeom>
-          <a:noFill/>
-        </p:spPr>
-        <p:txBody>
-          <a:bodyPr wrap="square" lIns="0" rIns="0" tIns="0" bIns="0">
-            <a:spAutoFit/>
-          </a:bodyPr>
-          <a:lstStyle/>
-          <a:p>
-            <a:pPr>
-              <a:lnSpc>
-                <a:spcPct val="118000"/>
-              </a:lnSpc>
-              <a:spcBef>
-                <a:spcPts val="0"/>
-              </a:spcBef>
-              <a:spcAft>
-                <a:spcPts val="0"/>
-              </a:spcAft>
-              <a:defRPr sz="2600" b="0">
-                <a:solidFill>
-                  <a:srgbClr val="24384A"/>
-                </a:solidFill>
-                <a:latin typeface="Lato"/>
-              </a:defRPr>
-            </a:pPr>
-            <a:r>
-              <a:rPr>
-                <a:ea typeface="Microsoft JhengHei"/>
-              </a:rPr>
               <a:t>Agents can compare material, suggest explanations and propose follow-up searches.</a:t>
             </a:r>
           </a:p>
@@ -10163,7 +9881,7 @@
       </p:sp>
       <p:sp>
         <p:nvSpPr>
-          <p:cNvPr id="5" name="Rectangle 4"/>
+          <p:cNvPr id="4" name="Rectangle 3"/>
           <p:cNvSpPr/>
           <p:nvPr/>
         </p:nvSpPr>
@@ -10208,7 +9926,7 @@
       </p:sp>
       <p:sp>
         <p:nvSpPr>
-          <p:cNvPr id="6" name="TextBox 5"/>
+          <p:cNvPr id="5" name="TextBox 4"/>
           <p:cNvSpPr txBox="1"/>
           <p:nvPr/>
         </p:nvSpPr>
@@ -10256,7 +9974,7 @@
       </p:sp>
       <p:sp>
         <p:nvSpPr>
-          <p:cNvPr id="7" name="TextBox 6"/>
+          <p:cNvPr id="6" name="TextBox 5"/>
           <p:cNvSpPr txBox="1"/>
           <p:nvPr/>
         </p:nvSpPr>
@@ -10329,7 +10047,7 @@
       </p:sp>
       <p:sp>
         <p:nvSpPr>
-          <p:cNvPr id="8" name="Rectangle 7"/>
+          <p:cNvPr id="7" name="Rectangle 6"/>
           <p:cNvSpPr/>
           <p:nvPr/>
         </p:nvSpPr>
@@ -10374,7 +10092,7 @@
       </p:sp>
       <p:sp>
         <p:nvSpPr>
-          <p:cNvPr id="9" name="TextBox 8"/>
+          <p:cNvPr id="8" name="TextBox 7"/>
           <p:cNvSpPr txBox="1"/>
           <p:nvPr/>
         </p:nvSpPr>
@@ -10422,7 +10140,7 @@
       </p:sp>
       <p:sp>
         <p:nvSpPr>
-          <p:cNvPr id="10" name="TextBox 9"/>
+          <p:cNvPr id="9" name="TextBox 8"/>
           <p:cNvSpPr txBox="1"/>
           <p:nvPr/>
         </p:nvSpPr>
@@ -10495,7 +10213,7 @@
       </p:sp>
       <p:sp>
         <p:nvSpPr>
-          <p:cNvPr id="11" name="Rectangle 10"/>
+          <p:cNvPr id="10" name="Rectangle 9"/>
           <p:cNvSpPr/>
           <p:nvPr/>
         </p:nvSpPr>
@@ -10540,7 +10258,7 @@
       </p:sp>
       <p:sp>
         <p:nvSpPr>
-          <p:cNvPr id="12" name="TextBox 11"/>
+          <p:cNvPr id="11" name="TextBox 10"/>
           <p:cNvSpPr txBox="1"/>
           <p:nvPr/>
         </p:nvSpPr>
@@ -10588,7 +10306,7 @@
       </p:sp>
       <p:sp>
         <p:nvSpPr>
-          <p:cNvPr id="13" name="TextBox 12"/>
+          <p:cNvPr id="12" name="TextBox 11"/>
           <p:cNvSpPr txBox="1"/>
           <p:nvPr/>
         </p:nvSpPr>
@@ -10661,7 +10379,7 @@
       </p:sp>
       <p:cxnSp>
         <p:nvCxnSpPr>
-          <p:cNvPr id="14" name="Connector 13"/>
+          <p:cNvPr id="13" name="Connector 12"/>
           <p:cNvCxnSpPr/>
           <p:nvPr/>
         </p:nvCxnSpPr>
@@ -10697,7 +10415,7 @@
       </p:cxnSp>
       <p:cxnSp>
         <p:nvCxnSpPr>
-          <p:cNvPr id="15" name="Connector 14"/>
+          <p:cNvPr id="14" name="Connector 13"/>
           <p:cNvCxnSpPr/>
           <p:nvPr/>
         </p:nvCxnSpPr>
@@ -10733,7 +10451,7 @@
       </p:cxnSp>
       <p:sp>
         <p:nvSpPr>
-          <p:cNvPr id="16" name="TextBox 15"/>
+          <p:cNvPr id="15" name="TextBox 14"/>
           <p:cNvSpPr txBox="1"/>
           <p:nvPr/>
         </p:nvSpPr>
@@ -10781,7 +10499,7 @@
       </p:sp>
       <p:sp>
         <p:nvSpPr>
-          <p:cNvPr id="17" name="TextBox 16"/>
+          <p:cNvPr id="16" name="TextBox 15"/>
           <p:cNvSpPr txBox="1"/>
           <p:nvPr/>
         </p:nvSpPr>
@@ -10829,7 +10547,7 @@
       </p:sp>
       <p:sp>
         <p:nvSpPr>
-          <p:cNvPr id="18" name="TextBox 17"/>
+          <p:cNvPr id="17" name="TextBox 16"/>
           <p:cNvSpPr txBox="1"/>
           <p:nvPr/>
         </p:nvSpPr>
@@ -10877,7 +10595,7 @@
       </p:sp>
       <p:sp>
         <p:nvSpPr>
-          <p:cNvPr id="19" name="Rectangle 18"/>
+          <p:cNvPr id="18" name="Rectangle 17"/>
           <p:cNvSpPr/>
           <p:nvPr/>
         </p:nvSpPr>
@@ -10922,7 +10640,7 @@
       </p:sp>
       <p:sp>
         <p:nvSpPr>
-          <p:cNvPr id="20" name="TextBox 19"/>
+          <p:cNvPr id="19" name="TextBox 18"/>
           <p:cNvSpPr txBox="1"/>
           <p:nvPr/>
         </p:nvSpPr>
@@ -10994,8 +10712,8 @@
         </p:nvSpPr>
         <p:spPr>
           <a:xfrm>
-            <a:off x="495299" y="238125"/>
-            <a:ext cx="10953750" cy="266700"/>
+            <a:off x="495299" y="742950"/>
+            <a:ext cx="11144250" cy="952500"/>
           </a:xfrm>
           <a:prstGeom prst="rect">
             <a:avLst/>
@@ -11018,54 +10736,6 @@
               <a:spcAft>
                 <a:spcPts val="0"/>
               </a:spcAft>
-              <a:defRPr sz="1300" b="1">
-                <a:solidFill>
-                  <a:srgbClr val="146C68"/>
-                </a:solidFill>
-                <a:latin typeface="Lato"/>
-              </a:defRPr>
-            </a:pPr>
-            <a:r>
-              <a:rPr>
-                <a:ea typeface="Microsoft JhengHei"/>
-              </a:rPr>
-              <a:t>Findings</a:t>
-            </a:r>
-          </a:p>
-        </p:txBody>
-      </p:sp>
-      <p:sp>
-        <p:nvSpPr>
-          <p:cNvPr id="3" name="TextBox 2"/>
-          <p:cNvSpPr txBox="1"/>
-          <p:nvPr/>
-        </p:nvSpPr>
-        <p:spPr>
-          <a:xfrm>
-            <a:off x="495299" y="742950"/>
-            <a:ext cx="11144250" cy="952500"/>
-          </a:xfrm>
-          <a:prstGeom prst="rect">
-            <a:avLst/>
-          </a:prstGeom>
-          <a:noFill/>
-        </p:spPr>
-        <p:txBody>
-          <a:bodyPr wrap="square" lIns="0" rIns="0" tIns="0" bIns="0">
-            <a:spAutoFit/>
-          </a:bodyPr>
-          <a:lstStyle/>
-          <a:p>
-            <a:pPr>
-              <a:lnSpc>
-                <a:spcPct val="118000"/>
-              </a:lnSpc>
-              <a:spcBef>
-                <a:spcPts val="0"/>
-              </a:spcBef>
-              <a:spcAft>
-                <a:spcPts val="0"/>
-              </a:spcAft>
               <a:defRPr sz="2900" b="1">
                 <a:solidFill>
                   <a:srgbClr val="24384A"/>
@@ -11084,7 +10754,7 @@
       </p:sp>
       <p:sp>
         <p:nvSpPr>
-          <p:cNvPr id="4" name="Rectangle 3"/>
+          <p:cNvPr id="3" name="Rectangle 2"/>
           <p:cNvSpPr/>
           <p:nvPr/>
         </p:nvSpPr>
@@ -11129,7 +10799,7 @@
       </p:sp>
       <p:sp>
         <p:nvSpPr>
-          <p:cNvPr id="5" name="TextBox 4"/>
+          <p:cNvPr id="4" name="TextBox 3"/>
           <p:cNvSpPr txBox="1"/>
           <p:nvPr/>
         </p:nvSpPr>
@@ -11177,7 +10847,7 @@
       </p:sp>
       <p:pic>
         <p:nvPicPr>
-          <p:cNvPr id="6" name="Picture 5" descr="findings.png"/>
+          <p:cNvPr id="5" name="Picture 4" descr="findings.png"/>
           <p:cNvPicPr>
             <a:picLocks noChangeAspect="1"/>
           </p:cNvPicPr>
@@ -11201,7 +10871,7 @@
       </p:pic>
       <p:sp>
         <p:nvSpPr>
-          <p:cNvPr id="7" name="TextBox 6"/>
+          <p:cNvPr id="6" name="TextBox 5"/>
           <p:cNvSpPr txBox="1"/>
           <p:nvPr/>
         </p:nvSpPr>
@@ -11249,7 +10919,7 @@
       </p:sp>
       <p:sp>
         <p:nvSpPr>
-          <p:cNvPr id="8" name="TextBox 7"/>
+          <p:cNvPr id="7" name="TextBox 6"/>
           <p:cNvSpPr txBox="1"/>
           <p:nvPr/>
         </p:nvSpPr>
@@ -11297,7 +10967,7 @@
       </p:sp>
       <p:sp>
         <p:nvSpPr>
-          <p:cNvPr id="9" name="Rectangle 8"/>
+          <p:cNvPr id="8" name="Rectangle 7"/>
           <p:cNvSpPr/>
           <p:nvPr/>
         </p:nvSpPr>
@@ -11342,7 +11012,7 @@
       </p:sp>
       <p:sp>
         <p:nvSpPr>
-          <p:cNvPr id="10" name="TextBox 9"/>
+          <p:cNvPr id="9" name="TextBox 8"/>
           <p:cNvSpPr txBox="1"/>
           <p:nvPr/>
         </p:nvSpPr>
@@ -11390,7 +11060,7 @@
       </p:sp>
       <p:cxnSp>
         <p:nvCxnSpPr>
-          <p:cNvPr id="11" name="Connector 10"/>
+          <p:cNvPr id="10" name="Connector 9"/>
           <p:cNvCxnSpPr/>
           <p:nvPr/>
         </p:nvCxnSpPr>
@@ -11426,7 +11096,7 @@
       </p:cxnSp>
       <p:cxnSp>
         <p:nvCxnSpPr>
-          <p:cNvPr id="12" name="Connector 11"/>
+          <p:cNvPr id="11" name="Connector 10"/>
           <p:cNvCxnSpPr/>
           <p:nvPr/>
         </p:nvCxnSpPr>
@@ -11462,7 +11132,7 @@
       </p:cxnSp>
       <p:sp>
         <p:nvSpPr>
-          <p:cNvPr id="13" name="Rectangle 12"/>
+          <p:cNvPr id="12" name="Rectangle 11"/>
           <p:cNvSpPr/>
           <p:nvPr/>
         </p:nvSpPr>
@@ -11507,7 +11177,7 @@
       </p:sp>
       <p:sp>
         <p:nvSpPr>
-          <p:cNvPr id="14" name="TextBox 13"/>
+          <p:cNvPr id="13" name="TextBox 12"/>
           <p:cNvSpPr txBox="1"/>
           <p:nvPr/>
         </p:nvSpPr>
@@ -11555,7 +11225,7 @@
       </p:sp>
       <p:sp>
         <p:nvSpPr>
-          <p:cNvPr id="15" name="Rectangle 14"/>
+          <p:cNvPr id="14" name="Rectangle 13"/>
           <p:cNvSpPr/>
           <p:nvPr/>
         </p:nvSpPr>
@@ -11600,7 +11270,7 @@
       </p:sp>
       <p:sp>
         <p:nvSpPr>
-          <p:cNvPr id="16" name="TextBox 15"/>
+          <p:cNvPr id="15" name="TextBox 14"/>
           <p:cNvSpPr txBox="1"/>
           <p:nvPr/>
         </p:nvSpPr>
@@ -11648,7 +11318,7 @@
       </p:sp>
       <p:sp>
         <p:nvSpPr>
-          <p:cNvPr id="17" name="TextBox 16"/>
+          <p:cNvPr id="16" name="TextBox 15"/>
           <p:cNvSpPr txBox="1"/>
           <p:nvPr/>
         </p:nvSpPr>
@@ -11721,7 +11391,7 @@
       </p:sp>
       <p:sp>
         <p:nvSpPr>
-          <p:cNvPr id="18" name="TextBox 17"/>
+          <p:cNvPr id="17" name="TextBox 16"/>
           <p:cNvSpPr txBox="1"/>
           <p:nvPr/>
         </p:nvSpPr>
@@ -11769,7 +11439,7 @@
       </p:sp>
       <p:sp>
         <p:nvSpPr>
-          <p:cNvPr id="19" name="TextBox 18"/>
+          <p:cNvPr id="18" name="TextBox 17"/>
           <p:cNvSpPr txBox="1"/>
           <p:nvPr/>
         </p:nvSpPr>
@@ -11817,7 +11487,7 @@
       </p:sp>
       <p:sp>
         <p:nvSpPr>
-          <p:cNvPr id="20" name="TextBox 19"/>
+          <p:cNvPr id="19" name="TextBox 18"/>
           <p:cNvSpPr txBox="1"/>
           <p:nvPr/>
         </p:nvSpPr>
@@ -11889,8 +11559,8 @@
         </p:nvSpPr>
         <p:spPr>
           <a:xfrm>
-            <a:off x="495299" y="238125"/>
-            <a:ext cx="10953750" cy="266700"/>
+            <a:off x="495299" y="742950"/>
+            <a:ext cx="11144250" cy="952500"/>
           </a:xfrm>
           <a:prstGeom prst="rect">
             <a:avLst/>
@@ -11913,54 +11583,6 @@
               <a:spcAft>
                 <a:spcPts val="0"/>
               </a:spcAft>
-              <a:defRPr sz="1300" b="1">
-                <a:solidFill>
-                  <a:srgbClr val="146C68"/>
-                </a:solidFill>
-                <a:latin typeface="Lato"/>
-              </a:defRPr>
-            </a:pPr>
-            <a:r>
-              <a:rPr>
-                <a:ea typeface="Microsoft JhengHei"/>
-              </a:rPr>
-              <a:t>Graph</a:t>
-            </a:r>
-          </a:p>
-        </p:txBody>
-      </p:sp>
-      <p:sp>
-        <p:nvSpPr>
-          <p:cNvPr id="3" name="TextBox 2"/>
-          <p:cNvSpPr txBox="1"/>
-          <p:nvPr/>
-        </p:nvSpPr>
-        <p:spPr>
-          <a:xfrm>
-            <a:off x="495299" y="742950"/>
-            <a:ext cx="11144250" cy="952500"/>
-          </a:xfrm>
-          <a:prstGeom prst="rect">
-            <a:avLst/>
-          </a:prstGeom>
-          <a:noFill/>
-        </p:spPr>
-        <p:txBody>
-          <a:bodyPr wrap="square" lIns="0" rIns="0" tIns="0" bIns="0">
-            <a:spAutoFit/>
-          </a:bodyPr>
-          <a:lstStyle/>
-          <a:p>
-            <a:pPr>
-              <a:lnSpc>
-                <a:spcPct val="118000"/>
-              </a:lnSpc>
-              <a:spcBef>
-                <a:spcPts val="0"/>
-              </a:spcBef>
-              <a:spcAft>
-                <a:spcPts val="0"/>
-              </a:spcAft>
               <a:defRPr sz="2900" b="1">
                 <a:solidFill>
                   <a:srgbClr val="24384A"/>
@@ -11979,7 +11601,7 @@
       </p:sp>
       <p:sp>
         <p:nvSpPr>
-          <p:cNvPr id="4" name="Rectangle 3"/>
+          <p:cNvPr id="3" name="Rectangle 2"/>
           <p:cNvSpPr/>
           <p:nvPr/>
         </p:nvSpPr>
@@ -12024,7 +11646,7 @@
       </p:sp>
       <p:sp>
         <p:nvSpPr>
-          <p:cNvPr id="5" name="TextBox 4"/>
+          <p:cNvPr id="4" name="TextBox 3"/>
           <p:cNvSpPr txBox="1"/>
           <p:nvPr/>
         </p:nvSpPr>
@@ -12072,7 +11694,7 @@
       </p:sp>
       <p:pic>
         <p:nvPicPr>
-          <p:cNvPr id="6" name="Picture 5" descr="graph.png"/>
+          <p:cNvPr id="5" name="Picture 4" descr="graph.png"/>
           <p:cNvPicPr>
             <a:picLocks noChangeAspect="1"/>
           </p:cNvPicPr>
@@ -12096,7 +11718,7 @@
       </p:pic>
       <p:sp>
         <p:nvSpPr>
-          <p:cNvPr id="7" name="TextBox 6"/>
+          <p:cNvPr id="6" name="TextBox 5"/>
           <p:cNvSpPr txBox="1"/>
           <p:nvPr/>
         </p:nvSpPr>
@@ -12144,7 +11766,7 @@
       </p:sp>
       <p:sp>
         <p:nvSpPr>
-          <p:cNvPr id="8" name="TextBox 7"/>
+          <p:cNvPr id="7" name="TextBox 6"/>
           <p:cNvSpPr txBox="1"/>
           <p:nvPr/>
         </p:nvSpPr>
@@ -12192,7 +11814,7 @@
       </p:sp>
       <p:sp>
         <p:nvSpPr>
-          <p:cNvPr id="9" name="Rectangle 8"/>
+          <p:cNvPr id="8" name="Rectangle 7"/>
           <p:cNvSpPr/>
           <p:nvPr/>
         </p:nvSpPr>
@@ -12237,7 +11859,7 @@
       </p:sp>
       <p:sp>
         <p:nvSpPr>
-          <p:cNvPr id="10" name="TextBox 9"/>
+          <p:cNvPr id="9" name="TextBox 8"/>
           <p:cNvSpPr txBox="1"/>
           <p:nvPr/>
         </p:nvSpPr>
@@ -12285,7 +11907,7 @@
       </p:sp>
       <p:cxnSp>
         <p:nvCxnSpPr>
-          <p:cNvPr id="11" name="Connector 10"/>
+          <p:cNvPr id="10" name="Connector 9"/>
           <p:cNvCxnSpPr/>
           <p:nvPr/>
         </p:nvCxnSpPr>
@@ -12321,7 +11943,7 @@
       </p:cxnSp>
       <p:sp>
         <p:nvSpPr>
-          <p:cNvPr id="12" name="Rectangle 11"/>
+          <p:cNvPr id="11" name="Rectangle 10"/>
           <p:cNvSpPr/>
           <p:nvPr/>
         </p:nvSpPr>
@@ -12366,7 +11988,7 @@
       </p:sp>
       <p:sp>
         <p:nvSpPr>
-          <p:cNvPr id="13" name="TextBox 12"/>
+          <p:cNvPr id="12" name="TextBox 11"/>
           <p:cNvSpPr txBox="1"/>
           <p:nvPr/>
         </p:nvSpPr>
@@ -12414,7 +12036,7 @@
       </p:sp>
       <p:cxnSp>
         <p:nvCxnSpPr>
-          <p:cNvPr id="14" name="Connector 13"/>
+          <p:cNvPr id="13" name="Connector 12"/>
           <p:cNvCxnSpPr/>
           <p:nvPr/>
         </p:nvCxnSpPr>
@@ -12450,7 +12072,7 @@
       </p:cxnSp>
       <p:sp>
         <p:nvSpPr>
-          <p:cNvPr id="15" name="Rectangle 14"/>
+          <p:cNvPr id="14" name="Rectangle 13"/>
           <p:cNvSpPr/>
           <p:nvPr/>
         </p:nvSpPr>
@@ -12495,7 +12117,7 @@
       </p:sp>
       <p:sp>
         <p:nvSpPr>
-          <p:cNvPr id="16" name="TextBox 15"/>
+          <p:cNvPr id="15" name="TextBox 14"/>
           <p:cNvSpPr txBox="1"/>
           <p:nvPr/>
         </p:nvSpPr>
@@ -12543,7 +12165,7 @@
       </p:sp>
       <p:sp>
         <p:nvSpPr>
-          <p:cNvPr id="17" name="TextBox 16"/>
+          <p:cNvPr id="16" name="TextBox 15"/>
           <p:cNvSpPr txBox="1"/>
           <p:nvPr/>
         </p:nvSpPr>
@@ -12591,7 +12213,7 @@
       </p:sp>
       <p:sp>
         <p:nvSpPr>
-          <p:cNvPr id="18" name="TextBox 17"/>
+          <p:cNvPr id="17" name="TextBox 16"/>
           <p:cNvSpPr txBox="1"/>
           <p:nvPr/>
         </p:nvSpPr>
@@ -12639,7 +12261,7 @@
       </p:sp>
       <p:sp>
         <p:nvSpPr>
-          <p:cNvPr id="19" name="TextBox 18"/>
+          <p:cNvPr id="18" name="TextBox 17"/>
           <p:cNvSpPr txBox="1"/>
           <p:nvPr/>
         </p:nvSpPr>
@@ -12711,8 +12333,8 @@
         </p:nvSpPr>
         <p:spPr>
           <a:xfrm>
-            <a:off x="495299" y="238125"/>
-            <a:ext cx="10953750" cy="266700"/>
+            <a:off x="495299" y="742950"/>
+            <a:ext cx="11144250" cy="1047749"/>
           </a:xfrm>
           <a:prstGeom prst="rect">
             <a:avLst/>
@@ -12735,54 +12357,6 @@
               <a:spcAft>
                 <a:spcPts val="0"/>
               </a:spcAft>
-              <a:defRPr sz="1300" b="1">
-                <a:solidFill>
-                  <a:srgbClr val="146C68"/>
-                </a:solidFill>
-                <a:latin typeface="Lato"/>
-              </a:defRPr>
-            </a:pPr>
-            <a:r>
-              <a:rPr>
-                <a:ea typeface="Microsoft JhengHei"/>
-              </a:rPr>
-              <a:t>Graph relationships · schematic</a:t>
-            </a:r>
-          </a:p>
-        </p:txBody>
-      </p:sp>
-      <p:sp>
-        <p:nvSpPr>
-          <p:cNvPr id="3" name="TextBox 2"/>
-          <p:cNvSpPr txBox="1"/>
-          <p:nvPr/>
-        </p:nvSpPr>
-        <p:spPr>
-          <a:xfrm>
-            <a:off x="495299" y="742950"/>
-            <a:ext cx="11144250" cy="1047749"/>
-          </a:xfrm>
-          <a:prstGeom prst="rect">
-            <a:avLst/>
-          </a:prstGeom>
-          <a:noFill/>
-        </p:spPr>
-        <p:txBody>
-          <a:bodyPr wrap="square" lIns="0" rIns="0" tIns="0" bIns="0">
-            <a:spAutoFit/>
-          </a:bodyPr>
-          <a:lstStyle/>
-          <a:p>
-            <a:pPr>
-              <a:lnSpc>
-                <a:spcPct val="118000"/>
-              </a:lnSpc>
-              <a:spcBef>
-                <a:spcPts val="0"/>
-              </a:spcBef>
-              <a:spcAft>
-                <a:spcPts val="0"/>
-              </a:spcAft>
               <a:defRPr sz="3200" b="1">
                 <a:solidFill>
                   <a:srgbClr val="24384A"/>
@@ -12801,7 +12375,7 @@
       </p:sp>
       <p:sp>
         <p:nvSpPr>
-          <p:cNvPr id="4" name="Oval 3"/>
+          <p:cNvPr id="3" name="Oval 2"/>
           <p:cNvSpPr/>
           <p:nvPr/>
         </p:nvSpPr>
@@ -12846,7 +12420,7 @@
       </p:sp>
       <p:sp>
         <p:nvSpPr>
-          <p:cNvPr id="5" name="TextBox 4"/>
+          <p:cNvPr id="4" name="TextBox 3"/>
           <p:cNvSpPr txBox="1"/>
           <p:nvPr/>
         </p:nvSpPr>
@@ -12894,7 +12468,7 @@
       </p:sp>
       <p:sp>
         <p:nvSpPr>
-          <p:cNvPr id="6" name="Rectangle 5"/>
+          <p:cNvPr id="5" name="Rectangle 4"/>
           <p:cNvSpPr/>
           <p:nvPr/>
         </p:nvSpPr>
@@ -12939,7 +12513,7 @@
       </p:sp>
       <p:sp>
         <p:nvSpPr>
-          <p:cNvPr id="7" name="TextBox 6"/>
+          <p:cNvPr id="6" name="TextBox 5"/>
           <p:cNvSpPr txBox="1"/>
           <p:nvPr/>
         </p:nvSpPr>
@@ -12987,7 +12561,7 @@
       </p:sp>
       <p:sp>
         <p:nvSpPr>
-          <p:cNvPr id="8" name="Diamond 7"/>
+          <p:cNvPr id="7" name="Diamond 6"/>
           <p:cNvSpPr/>
           <p:nvPr/>
         </p:nvSpPr>
@@ -13032,7 +12606,7 @@
       </p:sp>
       <p:sp>
         <p:nvSpPr>
-          <p:cNvPr id="9" name="TextBox 8"/>
+          <p:cNvPr id="8" name="TextBox 7"/>
           <p:cNvSpPr txBox="1"/>
           <p:nvPr/>
         </p:nvSpPr>
@@ -13105,7 +12679,7 @@
       </p:sp>
       <p:sp>
         <p:nvSpPr>
-          <p:cNvPr id="10" name="Oval 9"/>
+          <p:cNvPr id="9" name="Oval 8"/>
           <p:cNvSpPr/>
           <p:nvPr/>
         </p:nvSpPr>
@@ -13150,7 +12724,7 @@
       </p:sp>
       <p:sp>
         <p:nvSpPr>
-          <p:cNvPr id="11" name="TextBox 10"/>
+          <p:cNvPr id="10" name="TextBox 9"/>
           <p:cNvSpPr txBox="1"/>
           <p:nvPr/>
         </p:nvSpPr>
@@ -13198,7 +12772,7 @@
       </p:sp>
       <p:sp>
         <p:nvSpPr>
-          <p:cNvPr id="12" name="5-Point Star 11"/>
+          <p:cNvPr id="11" name="5-Point Star 10"/>
           <p:cNvSpPr/>
           <p:nvPr/>
         </p:nvSpPr>
@@ -13243,7 +12817,7 @@
       </p:sp>
       <p:sp>
         <p:nvSpPr>
-          <p:cNvPr id="13" name="TextBox 12"/>
+          <p:cNvPr id="12" name="TextBox 11"/>
           <p:cNvSpPr txBox="1"/>
           <p:nvPr/>
         </p:nvSpPr>
@@ -13285,7 +12859,7 @@
       </p:sp>
       <p:cxnSp>
         <p:nvCxnSpPr>
-          <p:cNvPr id="14" name="Connector 13"/>
+          <p:cNvPr id="13" name="Connector 12"/>
           <p:cNvCxnSpPr/>
           <p:nvPr/>
         </p:nvCxnSpPr>
@@ -13321,7 +12895,7 @@
       </p:cxnSp>
       <p:sp>
         <p:nvSpPr>
-          <p:cNvPr id="15" name="TextBox 14"/>
+          <p:cNvPr id="14" name="TextBox 13"/>
           <p:cNvSpPr txBox="1"/>
           <p:nvPr/>
         </p:nvSpPr>
@@ -13369,7 +12943,7 @@
       </p:sp>
       <p:cxnSp>
         <p:nvCxnSpPr>
-          <p:cNvPr id="16" name="Connector 15"/>
+          <p:cNvPr id="15" name="Connector 14"/>
           <p:cNvCxnSpPr/>
           <p:nvPr/>
         </p:nvCxnSpPr>
@@ -13405,7 +12979,7 @@
       </p:cxnSp>
       <p:sp>
         <p:nvSpPr>
-          <p:cNvPr id="17" name="TextBox 16"/>
+          <p:cNvPr id="16" name="TextBox 15"/>
           <p:cNvSpPr txBox="1"/>
           <p:nvPr/>
         </p:nvSpPr>
@@ -13453,7 +13027,7 @@
       </p:sp>
       <p:cxnSp>
         <p:nvCxnSpPr>
-          <p:cNvPr id="18" name="Connector 17"/>
+          <p:cNvPr id="17" name="Connector 16"/>
           <p:cNvCxnSpPr/>
           <p:nvPr/>
         </p:nvCxnSpPr>
@@ -13489,7 +13063,7 @@
       </p:cxnSp>
       <p:sp>
         <p:nvSpPr>
-          <p:cNvPr id="19" name="TextBox 18"/>
+          <p:cNvPr id="18" name="TextBox 17"/>
           <p:cNvSpPr txBox="1"/>
           <p:nvPr/>
         </p:nvSpPr>
@@ -13537,7 +13111,7 @@
       </p:sp>
       <p:sp>
         <p:nvSpPr>
-          <p:cNvPr id="20" name="TextBox 19"/>
+          <p:cNvPr id="19" name="TextBox 18"/>
           <p:cNvSpPr txBox="1"/>
           <p:nvPr/>
         </p:nvSpPr>
@@ -13585,7 +13159,7 @@
       </p:sp>
       <p:cxnSp>
         <p:nvCxnSpPr>
-          <p:cNvPr id="21" name="Connector 20"/>
+          <p:cNvPr id="20" name="Connector 19"/>
           <p:cNvCxnSpPr/>
           <p:nvPr/>
         </p:nvCxnSpPr>
@@ -13621,7 +13195,7 @@
       </p:cxnSp>
       <p:sp>
         <p:nvSpPr>
-          <p:cNvPr id="22" name="TextBox 21"/>
+          <p:cNvPr id="21" name="TextBox 20"/>
           <p:cNvSpPr txBox="1"/>
           <p:nvPr/>
         </p:nvSpPr>
@@ -13669,7 +13243,7 @@
       </p:sp>
       <p:sp>
         <p:nvSpPr>
-          <p:cNvPr id="23" name="TextBox 22"/>
+          <p:cNvPr id="22" name="TextBox 21"/>
           <p:cNvSpPr txBox="1"/>
           <p:nvPr/>
         </p:nvSpPr>
@@ -13717,7 +13291,7 @@
       </p:sp>
       <p:sp>
         <p:nvSpPr>
-          <p:cNvPr id="24" name="TextBox 23"/>
+          <p:cNvPr id="23" name="TextBox 22"/>
           <p:cNvSpPr txBox="1"/>
           <p:nvPr/>
         </p:nvSpPr>
@@ -13790,7 +13364,7 @@
       </p:sp>
       <p:sp>
         <p:nvSpPr>
-          <p:cNvPr id="25" name="Rectangle 24"/>
+          <p:cNvPr id="24" name="Rectangle 23"/>
           <p:cNvSpPr/>
           <p:nvPr/>
         </p:nvSpPr>
@@ -13835,7 +13409,7 @@
       </p:sp>
       <p:sp>
         <p:nvSpPr>
-          <p:cNvPr id="26" name="TextBox 25"/>
+          <p:cNvPr id="25" name="TextBox 24"/>
           <p:cNvSpPr txBox="1"/>
           <p:nvPr/>
         </p:nvSpPr>
@@ -13907,8 +13481,8 @@
         </p:nvSpPr>
         <p:spPr>
           <a:xfrm>
-            <a:off x="495299" y="238125"/>
-            <a:ext cx="10953750" cy="266700"/>
+            <a:off x="495299" y="742950"/>
+            <a:ext cx="11144250" cy="952500"/>
           </a:xfrm>
           <a:prstGeom prst="rect">
             <a:avLst/>
@@ -13931,18 +13505,18 @@
               <a:spcAft>
                 <a:spcPts val="0"/>
               </a:spcAft>
-              <a:defRPr sz="1300" b="1">
-                <a:solidFill>
-                  <a:srgbClr val="146C68"/>
-                </a:solidFill>
-                <a:latin typeface="Lato"/>
-              </a:defRPr>
-            </a:pPr>
-            <a:r>
-              <a:rPr>
-                <a:ea typeface="Microsoft JhengHei"/>
-              </a:rPr>
-              <a:t>Provenance</a:t>
+              <a:defRPr sz="3200" b="1">
+                <a:solidFill>
+                  <a:srgbClr val="24384A"/>
+                </a:solidFill>
+                <a:latin typeface="Lato"/>
+              </a:defRPr>
+            </a:pPr>
+            <a:r>
+              <a:rPr>
+                <a:ea typeface="Microsoft JhengHei"/>
+              </a:rPr>
+              <a:t>Why use an evidence graph?</a:t>
             </a:r>
           </a:p>
         </p:txBody>
@@ -13955,8 +13529,8 @@
         </p:nvSpPr>
         <p:spPr>
           <a:xfrm>
-            <a:off x="495299" y="742950"/>
-            <a:ext cx="11144250" cy="952500"/>
+            <a:off x="523874" y="1924049"/>
+            <a:ext cx="3190875" cy="752475"/>
           </a:xfrm>
           <a:prstGeom prst="rect">
             <a:avLst/>
@@ -13979,18 +13553,18 @@
               <a:spcAft>
                 <a:spcPts val="0"/>
               </a:spcAft>
-              <a:defRPr sz="3200" b="1">
-                <a:solidFill>
-                  <a:srgbClr val="24384A"/>
-                </a:solidFill>
-                <a:latin typeface="Lato"/>
-              </a:defRPr>
-            </a:pPr>
-            <a:r>
-              <a:rPr>
-                <a:ea typeface="Microsoft JhengHei"/>
-              </a:rPr>
-              <a:t>Why use an evidence graph?</a:t>
+              <a:defRPr sz="2500" b="1">
+                <a:solidFill>
+                  <a:srgbClr val="146C68"/>
+                </a:solidFill>
+                <a:latin typeface="Lato"/>
+              </a:defRPr>
+            </a:pPr>
+            <a:r>
+              <a:rPr>
+                <a:ea typeface="Microsoft JhengHei"/>
+              </a:rPr>
+              <a:t>Trace a proposal</a:t>
             </a:r>
           </a:p>
         </p:txBody>
@@ -14003,8 +13577,8 @@
         </p:nvSpPr>
         <p:spPr>
           <a:xfrm>
-            <a:off x="523874" y="1924049"/>
-            <a:ext cx="3190875" cy="752475"/>
+            <a:off x="4095750" y="1924049"/>
+            <a:ext cx="7524749" cy="885825"/>
           </a:xfrm>
           <a:prstGeom prst="rect">
             <a:avLst/>
@@ -14027,18 +13601,18 @@
               <a:spcAft>
                 <a:spcPts val="0"/>
               </a:spcAft>
-              <a:defRPr sz="2500" b="1">
-                <a:solidFill>
-                  <a:srgbClr val="146C68"/>
-                </a:solidFill>
-                <a:latin typeface="Lato"/>
-              </a:defRPr>
-            </a:pPr>
-            <a:r>
-              <a:rPr>
-                <a:ea typeface="Microsoft JhengHei"/>
-              </a:rPr>
-              <a:t>Trace a proposal</a:t>
+              <a:defRPr sz="2400" b="0">
+                <a:solidFill>
+                  <a:srgbClr val="24384A"/>
+                </a:solidFill>
+                <a:latin typeface="Lato"/>
+              </a:defRPr>
+            </a:pPr>
+            <a:r>
+              <a:rPr>
+                <a:ea typeface="Microsoft JhengHei"/>
+              </a:rPr>
+              <a:t>Follow its citations to passages and source records.</a:t>
             </a:r>
           </a:p>
         </p:txBody>
@@ -14051,8 +13625,8 @@
         </p:nvSpPr>
         <p:spPr>
           <a:xfrm>
-            <a:off x="4095750" y="1924049"/>
-            <a:ext cx="7524749" cy="885825"/>
+            <a:off x="523874" y="2962275"/>
+            <a:ext cx="3190875" cy="752475"/>
           </a:xfrm>
           <a:prstGeom prst="rect">
             <a:avLst/>
@@ -14075,18 +13649,18 @@
               <a:spcAft>
                 <a:spcPts val="0"/>
               </a:spcAft>
-              <a:defRPr sz="2400" b="0">
-                <a:solidFill>
-                  <a:srgbClr val="24384A"/>
-                </a:solidFill>
-                <a:latin typeface="Lato"/>
-              </a:defRPr>
-            </a:pPr>
-            <a:r>
-              <a:rPr>
-                <a:ea typeface="Microsoft JhengHei"/>
-              </a:rPr>
-              <a:t>Follow its citations to passages and source records.</a:t>
+              <a:defRPr sz="2500" b="1">
+                <a:solidFill>
+                  <a:srgbClr val="146C68"/>
+                </a:solidFill>
+                <a:latin typeface="Lato"/>
+              </a:defRPr>
+            </a:pPr>
+            <a:r>
+              <a:rPr>
+                <a:ea typeface="Microsoft JhengHei"/>
+              </a:rPr>
+              <a:t>Inspect dependencies</a:t>
             </a:r>
           </a:p>
         </p:txBody>
@@ -14099,8 +13673,8 @@
         </p:nvSpPr>
         <p:spPr>
           <a:xfrm>
-            <a:off x="523874" y="2962275"/>
-            <a:ext cx="3190875" cy="752475"/>
+            <a:off x="4095750" y="2962275"/>
+            <a:ext cx="7524749" cy="885825"/>
           </a:xfrm>
           <a:prstGeom prst="rect">
             <a:avLst/>
@@ -14123,18 +13697,18 @@
               <a:spcAft>
                 <a:spcPts val="0"/>
               </a:spcAft>
-              <a:defRPr sz="2500" b="1">
-                <a:solidFill>
-                  <a:srgbClr val="146C68"/>
-                </a:solidFill>
-                <a:latin typeface="Lato"/>
-              </a:defRPr>
-            </a:pPr>
-            <a:r>
-              <a:rPr>
-                <a:ea typeface="Microsoft JhengHei"/>
-              </a:rPr>
-              <a:t>Inspect dependencies</a:t>
+              <a:defRPr sz="2400" b="0">
+                <a:solidFill>
+                  <a:srgbClr val="24384A"/>
+                </a:solidFill>
+                <a:latin typeface="Lato"/>
+              </a:defRPr>
+            </a:pPr>
+            <a:r>
+              <a:rPr>
+                <a:ea typeface="Microsoft JhengHei"/>
+              </a:rPr>
+              <a:t>See recorded quotation, parallel and descent links.</a:t>
             </a:r>
           </a:p>
         </p:txBody>
@@ -14147,8 +13721,8 @@
         </p:nvSpPr>
         <p:spPr>
           <a:xfrm>
-            <a:off x="4095750" y="2962275"/>
-            <a:ext cx="7524749" cy="885825"/>
+            <a:off x="523874" y="4000500"/>
+            <a:ext cx="3190875" cy="752475"/>
           </a:xfrm>
           <a:prstGeom prst="rect">
             <a:avLst/>
@@ -14171,18 +13745,18 @@
               <a:spcAft>
                 <a:spcPts val="0"/>
               </a:spcAft>
-              <a:defRPr sz="2400" b="0">
-                <a:solidFill>
-                  <a:srgbClr val="24384A"/>
-                </a:solidFill>
-                <a:latin typeface="Lato"/>
-              </a:defRPr>
-            </a:pPr>
-            <a:r>
-              <a:rPr>
-                <a:ea typeface="Microsoft JhengHei"/>
-              </a:rPr>
-              <a:t>See recorded quotation, parallel and descent links.</a:t>
+              <a:defRPr sz="2500" b="1">
+                <a:solidFill>
+                  <a:srgbClr val="146C68"/>
+                </a:solidFill>
+                <a:latin typeface="Lato"/>
+              </a:defRPr>
+            </a:pPr>
+            <a:r>
+              <a:rPr>
+                <a:ea typeface="Microsoft JhengHei"/>
+              </a:rPr>
+              <a:t>Keep the history</a:t>
             </a:r>
           </a:p>
         </p:txBody>
@@ -14195,8 +13769,8 @@
         </p:nvSpPr>
         <p:spPr>
           <a:xfrm>
-            <a:off x="523874" y="4000500"/>
-            <a:ext cx="3190875" cy="752475"/>
+            <a:off x="4095750" y="4000500"/>
+            <a:ext cx="7524749" cy="885825"/>
           </a:xfrm>
           <a:prstGeom prst="rect">
             <a:avLst/>
@@ -14219,18 +13793,18 @@
               <a:spcAft>
                 <a:spcPts val="0"/>
               </a:spcAft>
-              <a:defRPr sz="2500" b="1">
-                <a:solidFill>
-                  <a:srgbClr val="146C68"/>
-                </a:solidFill>
-                <a:latin typeface="Lato"/>
-              </a:defRPr>
-            </a:pPr>
-            <a:r>
-              <a:rPr>
-                <a:ea typeface="Microsoft JhengHei"/>
-              </a:rPr>
-              <a:t>Keep the history</a:t>
+              <a:defRPr sz="2400" b="0">
+                <a:solidFill>
+                  <a:srgbClr val="24384A"/>
+                </a:solidFill>
+                <a:latin typeface="Lato"/>
+              </a:defRPr>
+            </a:pPr>
+            <a:r>
+              <a:rPr>
+                <a:ea typeface="Microsoft JhengHei"/>
+              </a:rPr>
+              <a:t>Who proposed it, what was checked, what the researcher decided.</a:t>
             </a:r>
           </a:p>
         </p:txBody>
@@ -14243,8 +13817,8 @@
         </p:nvSpPr>
         <p:spPr>
           <a:xfrm>
-            <a:off x="4095750" y="4000500"/>
-            <a:ext cx="7524749" cy="885825"/>
+            <a:off x="523874" y="5276850"/>
+            <a:ext cx="11049000" cy="428625"/>
           </a:xfrm>
           <a:prstGeom prst="rect">
             <a:avLst/>
@@ -14267,18 +13841,18 @@
               <a:spcAft>
                 <a:spcPts val="0"/>
               </a:spcAft>
-              <a:defRPr sz="2400" b="0">
-                <a:solidFill>
-                  <a:srgbClr val="24384A"/>
-                </a:solidFill>
-                <a:latin typeface="Lato"/>
-              </a:defRPr>
-            </a:pPr>
-            <a:r>
-              <a:rPr>
-                <a:ea typeface="Microsoft JhengHei"/>
-              </a:rPr>
-              <a:t>Who proposed it, what was checked, what the researcher decided.</a:t>
+              <a:defRPr sz="2400" b="1">
+                <a:solidFill>
+                  <a:srgbClr val="65439A"/>
+                </a:solidFill>
+                <a:latin typeface="Lato"/>
+              </a:defRPr>
+            </a:pPr>
+            <a:r>
+              <a:rPr>
+                <a:ea typeface="Microsoft JhengHei"/>
+              </a:rPr>
+              <a:t>Future work: edge prediction</a:t>
             </a:r>
           </a:p>
         </p:txBody>
@@ -14291,8 +13865,8 @@
         </p:nvSpPr>
         <p:spPr>
           <a:xfrm>
-            <a:off x="523874" y="5276850"/>
-            <a:ext cx="11049000" cy="428625"/>
+            <a:off x="523874" y="5810250"/>
+            <a:ext cx="11049000" cy="504825"/>
           </a:xfrm>
           <a:prstGeom prst="rect">
             <a:avLst/>
@@ -14315,54 +13889,6 @@
               <a:spcAft>
                 <a:spcPts val="0"/>
               </a:spcAft>
-              <a:defRPr sz="2400" b="1">
-                <a:solidFill>
-                  <a:srgbClr val="65439A"/>
-                </a:solidFill>
-                <a:latin typeface="Lato"/>
-              </a:defRPr>
-            </a:pPr>
-            <a:r>
-              <a:rPr>
-                <a:ea typeface="Microsoft JhengHei"/>
-              </a:rPr>
-              <a:t>Future work: edge prediction</a:t>
-            </a:r>
-          </a:p>
-        </p:txBody>
-      </p:sp>
-      <p:sp>
-        <p:nvSpPr>
-          <p:cNvPr id="11" name="TextBox 10"/>
-          <p:cNvSpPr txBox="1"/>
-          <p:nvPr/>
-        </p:nvSpPr>
-        <p:spPr>
-          <a:xfrm>
-            <a:off x="523874" y="5810250"/>
-            <a:ext cx="11049000" cy="504825"/>
-          </a:xfrm>
-          <a:prstGeom prst="rect">
-            <a:avLst/>
-          </a:prstGeom>
-          <a:noFill/>
-        </p:spPr>
-        <p:txBody>
-          <a:bodyPr wrap="square" lIns="0" rIns="0" tIns="0" bIns="0">
-            <a:spAutoFit/>
-          </a:bodyPr>
-          <a:lstStyle/>
-          <a:p>
-            <a:pPr>
-              <a:lnSpc>
-                <a:spcPct val="118000"/>
-              </a:lnSpc>
-              <a:spcBef>
-                <a:spcPts val="0"/>
-              </a:spcBef>
-              <a:spcAft>
-                <a:spcPts val="0"/>
-              </a:spcAft>
               <a:defRPr sz="2300" b="0">
                 <a:solidFill>
                   <a:srgbClr val="24384A"/>
@@ -14381,7 +13907,7 @@
       </p:sp>
       <p:sp>
         <p:nvSpPr>
-          <p:cNvPr id="12" name="Rectangle 11"/>
+          <p:cNvPr id="11" name="Rectangle 10"/>
           <p:cNvSpPr/>
           <p:nvPr/>
         </p:nvSpPr>
@@ -14426,7 +13952,7 @@
       </p:sp>
       <p:sp>
         <p:nvSpPr>
-          <p:cNvPr id="13" name="TextBox 12"/>
+          <p:cNvPr id="12" name="TextBox 11"/>
           <p:cNvSpPr txBox="1"/>
           <p:nvPr/>
         </p:nvSpPr>
@@ -14498,8 +14024,8 @@
         </p:nvSpPr>
         <p:spPr>
           <a:xfrm>
-            <a:off x="495299" y="238125"/>
-            <a:ext cx="10953750" cy="266700"/>
+            <a:off x="495299" y="742950"/>
+            <a:ext cx="11144250" cy="1047749"/>
           </a:xfrm>
           <a:prstGeom prst="rect">
             <a:avLst/>
@@ -14522,18 +14048,18 @@
               <a:spcAft>
                 <a:spcPts val="0"/>
               </a:spcAft>
-              <a:defRPr sz="1300" b="1">
-                <a:solidFill>
-                  <a:srgbClr val="146C68"/>
-                </a:solidFill>
-                <a:latin typeface="Lato"/>
-              </a:defRPr>
-            </a:pPr>
-            <a:r>
-              <a:rPr>
-                <a:ea typeface="Microsoft JhengHei"/>
-              </a:rPr>
-              <a:t>Live application</a:t>
+              <a:defRPr sz="3200" b="1">
+                <a:solidFill>
+                  <a:srgbClr val="24384A"/>
+                </a:solidFill>
+                <a:latin typeface="Lato"/>
+              </a:defRPr>
+            </a:pPr>
+            <a:r>
+              <a:rPr>
+                <a:ea typeface="Microsoft JhengHei"/>
+              </a:rPr>
+              <a:t>Cohort</a:t>
             </a:r>
           </a:p>
         </p:txBody>
@@ -14546,8 +14072,8 @@
         </p:nvSpPr>
         <p:spPr>
           <a:xfrm>
-            <a:off x="495299" y="742950"/>
-            <a:ext cx="11144250" cy="1047749"/>
+            <a:off x="781050" y="2257425"/>
+            <a:ext cx="381000" cy="457200"/>
           </a:xfrm>
           <a:prstGeom prst="rect">
             <a:avLst/>
@@ -14570,18 +14096,18 @@
               <a:spcAft>
                 <a:spcPts val="0"/>
               </a:spcAft>
-              <a:defRPr sz="3200" b="1">
-                <a:solidFill>
-                  <a:srgbClr val="24384A"/>
-                </a:solidFill>
-                <a:latin typeface="Lato"/>
-              </a:defRPr>
-            </a:pPr>
-            <a:r>
-              <a:rPr>
-                <a:ea typeface="Microsoft JhengHei"/>
-              </a:rPr>
-              <a:t>Cohort</a:t>
+              <a:defRPr sz="2900" b="1">
+                <a:solidFill>
+                  <a:srgbClr val="155F88"/>
+                </a:solidFill>
+                <a:latin typeface="Lato"/>
+              </a:defRPr>
+            </a:pPr>
+            <a:r>
+              <a:rPr>
+                <a:ea typeface="Microsoft JhengHei"/>
+              </a:rPr>
+              <a:t>1</a:t>
             </a:r>
           </a:p>
         </p:txBody>
@@ -14594,8 +14120,8 @@
         </p:nvSpPr>
         <p:spPr>
           <a:xfrm>
-            <a:off x="781050" y="2257425"/>
-            <a:ext cx="381000" cy="457200"/>
+            <a:off x="1600200" y="2095499"/>
+            <a:ext cx="2762250" cy="590550"/>
           </a:xfrm>
           <a:prstGeom prst="rect">
             <a:avLst/>
@@ -14618,7 +14144,7 @@
               <a:spcAft>
                 <a:spcPts val="0"/>
               </a:spcAft>
-              <a:defRPr sz="2900" b="1">
+              <a:defRPr sz="3100" b="1">
                 <a:solidFill>
                   <a:srgbClr val="155F88"/>
                 </a:solidFill>
@@ -14629,7 +14155,7 @@
               <a:rPr>
                 <a:ea typeface="Microsoft JhengHei"/>
               </a:rPr>
-              <a:t>1</a:t>
+              <a:t>Find</a:t>
             </a:r>
           </a:p>
         </p:txBody>
@@ -14642,8 +14168,8 @@
         </p:nvSpPr>
         <p:spPr>
           <a:xfrm>
-            <a:off x="1600200" y="2095499"/>
-            <a:ext cx="2762250" cy="590550"/>
+            <a:off x="4667250" y="2209800"/>
+            <a:ext cx="6905625" cy="857250"/>
           </a:xfrm>
           <a:prstGeom prst="rect">
             <a:avLst/>
@@ -14666,18 +14192,18 @@
               <a:spcAft>
                 <a:spcPts val="0"/>
               </a:spcAft>
-              <a:defRPr sz="3100" b="1">
-                <a:solidFill>
-                  <a:srgbClr val="155F88"/>
-                </a:solidFill>
-                <a:latin typeface="Lato"/>
-              </a:defRPr>
-            </a:pPr>
-            <a:r>
-              <a:rPr>
-                <a:ea typeface="Microsoft JhengHei"/>
-              </a:rPr>
-              <a:t>Find</a:t>
+              <a:defRPr sz="2500" b="0">
+                <a:solidFill>
+                  <a:srgbClr val="24384A"/>
+                </a:solidFill>
+                <a:latin typeface="Lato"/>
+              </a:defRPr>
+            </a:pPr>
+            <a:r>
+              <a:rPr>
+                <a:ea typeface="Microsoft JhengHei"/>
+              </a:rPr>
+              <a:t>Lotus passages and shared wording</a:t>
             </a:r>
           </a:p>
         </p:txBody>
@@ -14690,8 +14216,8 @@
         </p:nvSpPr>
         <p:spPr>
           <a:xfrm>
-            <a:off x="4667250" y="2209800"/>
-            <a:ext cx="6905625" cy="857250"/>
+            <a:off x="781050" y="3514725"/>
+            <a:ext cx="381000" cy="457200"/>
           </a:xfrm>
           <a:prstGeom prst="rect">
             <a:avLst/>
@@ -14714,18 +14240,18 @@
               <a:spcAft>
                 <a:spcPts val="0"/>
               </a:spcAft>
-              <a:defRPr sz="2500" b="0">
-                <a:solidFill>
-                  <a:srgbClr val="24384A"/>
-                </a:solidFill>
-                <a:latin typeface="Lato"/>
-              </a:defRPr>
-            </a:pPr>
-            <a:r>
-              <a:rPr>
-                <a:ea typeface="Microsoft JhengHei"/>
-              </a:rPr>
-              <a:t>Lotus passages and shared wording</a:t>
+              <a:defRPr sz="2900" b="1">
+                <a:solidFill>
+                  <a:srgbClr val="80511B"/>
+                </a:solidFill>
+                <a:latin typeface="Lato"/>
+              </a:defRPr>
+            </a:pPr>
+            <a:r>
+              <a:rPr>
+                <a:ea typeface="Microsoft JhengHei"/>
+              </a:rPr>
+              <a:t>2</a:t>
             </a:r>
           </a:p>
         </p:txBody>
@@ -14738,8 +14264,8 @@
         </p:nvSpPr>
         <p:spPr>
           <a:xfrm>
-            <a:off x="781050" y="3514725"/>
-            <a:ext cx="381000" cy="457200"/>
+            <a:off x="1600200" y="3352800"/>
+            <a:ext cx="2762250" cy="590550"/>
           </a:xfrm>
           <a:prstGeom prst="rect">
             <a:avLst/>
@@ -14762,7 +14288,7 @@
               <a:spcAft>
                 <a:spcPts val="0"/>
               </a:spcAft>
-              <a:defRPr sz="2900" b="1">
+              <a:defRPr sz="3100" b="1">
                 <a:solidFill>
                   <a:srgbClr val="80511B"/>
                 </a:solidFill>
@@ -14773,7 +14299,7 @@
               <a:rPr>
                 <a:ea typeface="Microsoft JhengHei"/>
               </a:rPr>
-              <a:t>2</a:t>
+              <a:t>Compare</a:t>
             </a:r>
           </a:p>
         </p:txBody>
@@ -14786,8 +14312,8 @@
         </p:nvSpPr>
         <p:spPr>
           <a:xfrm>
-            <a:off x="1600200" y="3352800"/>
-            <a:ext cx="2762250" cy="590550"/>
+            <a:off x="4667250" y="3467100"/>
+            <a:ext cx="6905625" cy="857250"/>
           </a:xfrm>
           <a:prstGeom prst="rect">
             <a:avLst/>
@@ -14810,18 +14336,18 @@
               <a:spcAft>
                 <a:spcPts val="0"/>
               </a:spcAft>
-              <a:defRPr sz="3100" b="1">
-                <a:solidFill>
-                  <a:srgbClr val="80511B"/>
-                </a:solidFill>
-                <a:latin typeface="Lato"/>
-              </a:defRPr>
-            </a:pPr>
-            <a:r>
-              <a:rPr>
-                <a:ea typeface="Microsoft JhengHei"/>
-              </a:rPr>
-              <a:t>Compare</a:t>
+              <a:defRPr sz="2500" b="0">
+                <a:solidFill>
+                  <a:srgbClr val="24384A"/>
+                </a:solidFill>
+                <a:latin typeface="Lato"/>
+              </a:defRPr>
+            </a:pPr>
+            <a:r>
+              <a:rPr>
+                <a:ea typeface="Microsoft JhengHei"/>
+              </a:rPr>
+              <a:t>T0603 with and without its commentary</a:t>
             </a:r>
           </a:p>
         </p:txBody>
@@ -14834,8 +14360,8 @@
         </p:nvSpPr>
         <p:spPr>
           <a:xfrm>
-            <a:off x="4667250" y="3467100"/>
-            <a:ext cx="6905625" cy="857250"/>
+            <a:off x="781050" y="4772025"/>
+            <a:ext cx="381000" cy="457200"/>
           </a:xfrm>
           <a:prstGeom prst="rect">
             <a:avLst/>
@@ -14858,18 +14384,18 @@
               <a:spcAft>
                 <a:spcPts val="0"/>
               </a:spcAft>
-              <a:defRPr sz="2500" b="0">
-                <a:solidFill>
-                  <a:srgbClr val="24384A"/>
-                </a:solidFill>
-                <a:latin typeface="Lato"/>
-              </a:defRPr>
-            </a:pPr>
-            <a:r>
-              <a:rPr>
-                <a:ea typeface="Microsoft JhengHei"/>
-              </a:rPr>
-              <a:t>T0603 with and without its commentary</a:t>
+              <a:defRPr sz="2900" b="1">
+                <a:solidFill>
+                  <a:srgbClr val="146C68"/>
+                </a:solidFill>
+                <a:latin typeface="Lato"/>
+              </a:defRPr>
+            </a:pPr>
+            <a:r>
+              <a:rPr>
+                <a:ea typeface="Microsoft JhengHei"/>
+              </a:rPr>
+              <a:t>3</a:t>
             </a:r>
           </a:p>
         </p:txBody>
@@ -14882,8 +14408,8 @@
         </p:nvSpPr>
         <p:spPr>
           <a:xfrm>
-            <a:off x="781050" y="4772025"/>
-            <a:ext cx="381000" cy="457200"/>
+            <a:off x="1600200" y="4610100"/>
+            <a:ext cx="2762250" cy="590550"/>
           </a:xfrm>
           <a:prstGeom prst="rect">
             <a:avLst/>
@@ -14906,7 +14432,7 @@
               <a:spcAft>
                 <a:spcPts val="0"/>
               </a:spcAft>
-              <a:defRPr sz="2900" b="1">
+              <a:defRPr sz="3100" b="1">
                 <a:solidFill>
                   <a:srgbClr val="146C68"/>
                 </a:solidFill>
@@ -14917,7 +14443,7 @@
               <a:rPr>
                 <a:ea typeface="Microsoft JhengHei"/>
               </a:rPr>
-              <a:t>3</a:t>
+              <a:t>Inspect</a:t>
             </a:r>
           </a:p>
         </p:txBody>
@@ -14930,8 +14456,8 @@
         </p:nvSpPr>
         <p:spPr>
           <a:xfrm>
-            <a:off x="1600200" y="4610100"/>
-            <a:ext cx="2762250" cy="590550"/>
+            <a:off x="4667250" y="4724400"/>
+            <a:ext cx="6905625" cy="857250"/>
           </a:xfrm>
           <a:prstGeom prst="rect">
             <a:avLst/>
@@ -14954,54 +14480,6 @@
               <a:spcAft>
                 <a:spcPts val="0"/>
               </a:spcAft>
-              <a:defRPr sz="3100" b="1">
-                <a:solidFill>
-                  <a:srgbClr val="146C68"/>
-                </a:solidFill>
-                <a:latin typeface="Lato"/>
-              </a:defRPr>
-            </a:pPr>
-            <a:r>
-              <a:rPr>
-                <a:ea typeface="Microsoft JhengHei"/>
-              </a:rPr>
-              <a:t>Inspect</a:t>
-            </a:r>
-          </a:p>
-        </p:txBody>
-      </p:sp>
-      <p:sp>
-        <p:nvSpPr>
-          <p:cNvPr id="12" name="TextBox 11"/>
-          <p:cNvSpPr txBox="1"/>
-          <p:nvPr/>
-        </p:nvSpPr>
-        <p:spPr>
-          <a:xfrm>
-            <a:off x="4667250" y="4724400"/>
-            <a:ext cx="6905625" cy="857250"/>
-          </a:xfrm>
-          <a:prstGeom prst="rect">
-            <a:avLst/>
-          </a:prstGeom>
-          <a:noFill/>
-        </p:spPr>
-        <p:txBody>
-          <a:bodyPr wrap="square" lIns="0" rIns="0" tIns="0" bIns="0">
-            <a:spAutoFit/>
-          </a:bodyPr>
-          <a:lstStyle/>
-          <a:p>
-            <a:pPr>
-              <a:lnSpc>
-                <a:spcPct val="118000"/>
-              </a:lnSpc>
-              <a:spcBef>
-                <a:spcPts val="0"/>
-              </a:spcBef>
-              <a:spcAft>
-                <a:spcPts val="0"/>
-              </a:spcAft>
               <a:defRPr sz="2500" b="0">
                 <a:solidFill>
                   <a:srgbClr val="24384A"/>
@@ -15020,7 +14498,7 @@
       </p:sp>
       <p:sp>
         <p:nvSpPr>
-          <p:cNvPr id="13" name="Rectangle 12"/>
+          <p:cNvPr id="12" name="Rectangle 11"/>
           <p:cNvSpPr/>
           <p:nvPr/>
         </p:nvSpPr>
@@ -15065,7 +14543,7 @@
       </p:sp>
       <p:sp>
         <p:nvSpPr>
-          <p:cNvPr id="14" name="TextBox 13"/>
+          <p:cNvPr id="13" name="TextBox 12"/>
           <p:cNvSpPr txBox="1"/>
           <p:nvPr/>
         </p:nvSpPr>
@@ -15137,8 +14615,8 @@
         </p:nvSpPr>
         <p:spPr>
           <a:xfrm>
-            <a:off x="495299" y="238125"/>
-            <a:ext cx="10953750" cy="266700"/>
+            <a:off x="495299" y="742950"/>
+            <a:ext cx="11144250" cy="1047749"/>
           </a:xfrm>
           <a:prstGeom prst="rect">
             <a:avLst/>
@@ -15161,18 +14639,18 @@
               <a:spcAft>
                 <a:spcPts val="0"/>
               </a:spcAft>
-              <a:defRPr sz="1300" b="1">
-                <a:solidFill>
-                  <a:srgbClr val="146C68"/>
-                </a:solidFill>
-                <a:latin typeface="Lato"/>
-              </a:defRPr>
-            </a:pPr>
-            <a:r>
-              <a:rPr>
-                <a:ea typeface="Microsoft JhengHei"/>
-              </a:rPr>
-              <a:t>Material</a:t>
+              <a:defRPr sz="3200" b="1">
+                <a:solidFill>
+                  <a:srgbClr val="24384A"/>
+                </a:solidFill>
+                <a:latin typeface="Lato"/>
+              </a:defRPr>
+            </a:pPr>
+            <a:r>
+              <a:rPr>
+                <a:ea typeface="Microsoft JhengHei"/>
+              </a:rPr>
+              <a:t>Acknowledgement</a:t>
             </a:r>
           </a:p>
         </p:txBody>
@@ -15185,8 +14663,8 @@
         </p:nvSpPr>
         <p:spPr>
           <a:xfrm>
-            <a:off x="495299" y="742950"/>
-            <a:ext cx="11144250" cy="1047749"/>
+            <a:off x="523874" y="1809750"/>
+            <a:ext cx="11049000" cy="619125"/>
           </a:xfrm>
           <a:prstGeom prst="rect">
             <a:avLst/>
@@ -15209,18 +14687,18 @@
               <a:spcAft>
                 <a:spcPts val="0"/>
               </a:spcAft>
-              <a:defRPr sz="3200" b="1">
-                <a:solidFill>
-                  <a:srgbClr val="24384A"/>
-                </a:solidFill>
-                <a:latin typeface="Lato"/>
-              </a:defRPr>
-            </a:pPr>
-            <a:r>
-              <a:rPr>
-                <a:ea typeface="Microsoft JhengHei"/>
-              </a:rPr>
-              <a:t>Acknowledgement</a:t>
+              <a:defRPr sz="3400" b="1">
+                <a:solidFill>
+                  <a:srgbClr val="146C68"/>
+                </a:solidFill>
+                <a:latin typeface="Lato"/>
+              </a:defRPr>
+            </a:pPr>
+            <a:r>
+              <a:rPr>
+                <a:ea typeface="Microsoft JhengHei"/>
+              </a:rPr>
+              <a:t>Thank you, Michael Radich</a:t>
             </a:r>
           </a:p>
         </p:txBody>
@@ -15233,8 +14711,8 @@
         </p:nvSpPr>
         <p:spPr>
           <a:xfrm>
-            <a:off x="523874" y="1809750"/>
-            <a:ext cx="11049000" cy="619125"/>
+            <a:off x="714375" y="2867025"/>
+            <a:ext cx="3000375" cy="476250"/>
           </a:xfrm>
           <a:prstGeom prst="rect">
             <a:avLst/>
@@ -15257,18 +14735,18 @@
               <a:spcAft>
                 <a:spcPts val="0"/>
               </a:spcAft>
-              <a:defRPr sz="3400" b="1">
-                <a:solidFill>
-                  <a:srgbClr val="146C68"/>
-                </a:solidFill>
-                <a:latin typeface="Lato"/>
-              </a:defRPr>
-            </a:pPr>
-            <a:r>
-              <a:rPr>
-                <a:ea typeface="Microsoft JhengHei"/>
-              </a:rPr>
-              <a:t>Thank you, Michael Radich</a:t>
+              <a:defRPr sz="2300" b="1">
+                <a:solidFill>
+                  <a:srgbClr val="155F88"/>
+                </a:solidFill>
+                <a:latin typeface="Lato"/>
+              </a:defRPr>
+            </a:pPr>
+            <a:r>
+              <a:rPr>
+                <a:ea typeface="Microsoft JhengHei"/>
+              </a:rPr>
+              <a:t>Texts</a:t>
             </a:r>
           </a:p>
         </p:txBody>
@@ -15281,8 +14759,8 @@
         </p:nvSpPr>
         <p:spPr>
           <a:xfrm>
-            <a:off x="714375" y="2867025"/>
-            <a:ext cx="3000375" cy="476250"/>
+            <a:off x="714375" y="3476625"/>
+            <a:ext cx="3000375" cy="1428750"/>
           </a:xfrm>
           <a:prstGeom prst="rect">
             <a:avLst/>
@@ -15305,18 +14783,43 @@
               <a:spcAft>
                 <a:spcPts val="0"/>
               </a:spcAft>
-              <a:defRPr sz="2300" b="1">
-                <a:solidFill>
-                  <a:srgbClr val="155F88"/>
-                </a:solidFill>
-                <a:latin typeface="Lato"/>
-              </a:defRPr>
-            </a:pPr>
-            <a:r>
-              <a:rPr>
-                <a:ea typeface="Microsoft JhengHei"/>
-              </a:rPr>
-              <a:t>Texts</a:t>
+              <a:defRPr sz="2100" b="0">
+                <a:solidFill>
+                  <a:srgbClr val="24384A"/>
+                </a:solidFill>
+                <a:latin typeface="Lato"/>
+              </a:defRPr>
+            </a:pPr>
+            <a:r>
+              <a:rPr>
+                <a:ea typeface="Microsoft JhengHei"/>
+              </a:rPr>
+              <a:t>A modified, selected</a:t>
+            </a:r>
+          </a:p>
+          <a:p>
+            <a:pPr>
+              <a:lnSpc>
+                <a:spcPct val="118000"/>
+              </a:lnSpc>
+              <a:spcBef>
+                <a:spcPts val="0"/>
+              </a:spcBef>
+              <a:spcAft>
+                <a:spcPts val="0"/>
+              </a:spcAft>
+              <a:defRPr sz="2100" b="0">
+                <a:solidFill>
+                  <a:srgbClr val="24384A"/>
+                </a:solidFill>
+                <a:latin typeface="Lato"/>
+              </a:defRPr>
+            </a:pPr>
+            <a:r>
+              <a:rPr>
+                <a:ea typeface="Microsoft JhengHei"/>
+              </a:rPr>
+              <a:t>CBETA-derived corpus</a:t>
             </a:r>
           </a:p>
         </p:txBody>
@@ -15329,8 +14832,8 @@
         </p:nvSpPr>
         <p:spPr>
           <a:xfrm>
-            <a:off x="714375" y="3476625"/>
-            <a:ext cx="3000375" cy="1428750"/>
+            <a:off x="4572000" y="2867025"/>
+            <a:ext cx="3000375" cy="476250"/>
           </a:xfrm>
           <a:prstGeom prst="rect">
             <a:avLst/>
@@ -15353,43 +14856,18 @@
               <a:spcAft>
                 <a:spcPts val="0"/>
               </a:spcAft>
-              <a:defRPr sz="2100" b="0">
-                <a:solidFill>
-                  <a:srgbClr val="24384A"/>
-                </a:solidFill>
-                <a:latin typeface="Lato"/>
-              </a:defRPr>
-            </a:pPr>
-            <a:r>
-              <a:rPr>
-                <a:ea typeface="Microsoft JhengHei"/>
-              </a:rPr>
-              <a:t>A modified, selected</a:t>
-            </a:r>
-          </a:p>
-          <a:p>
-            <a:pPr>
-              <a:lnSpc>
-                <a:spcPct val="118000"/>
-              </a:lnSpc>
-              <a:spcBef>
-                <a:spcPts val="0"/>
-              </a:spcBef>
-              <a:spcAft>
-                <a:spcPts val="0"/>
-              </a:spcAft>
-              <a:defRPr sz="2100" b="0">
-                <a:solidFill>
-                  <a:srgbClr val="24384A"/>
-                </a:solidFill>
-                <a:latin typeface="Lato"/>
-              </a:defRPr>
-            </a:pPr>
-            <a:r>
-              <a:rPr>
-                <a:ea typeface="Microsoft JhengHei"/>
-              </a:rPr>
-              <a:t>CBETA-derived corpus</a:t>
+              <a:defRPr sz="2300" b="1">
+                <a:solidFill>
+                  <a:srgbClr val="146C68"/>
+                </a:solidFill>
+                <a:latin typeface="Lato"/>
+              </a:defRPr>
+            </a:pPr>
+            <a:r>
+              <a:rPr>
+                <a:ea typeface="Microsoft JhengHei"/>
+              </a:rPr>
+              <a:t>Catalogue</a:t>
             </a:r>
           </a:p>
         </p:txBody>
@@ -15402,8 +14880,8 @@
         </p:nvSpPr>
         <p:spPr>
           <a:xfrm>
-            <a:off x="4572000" y="2867025"/>
-            <a:ext cx="3000375" cy="476250"/>
+            <a:off x="4572000" y="3476625"/>
+            <a:ext cx="3000375" cy="1428750"/>
           </a:xfrm>
           <a:prstGeom prst="rect">
             <a:avLst/>
@@ -15426,18 +14904,43 @@
               <a:spcAft>
                 <a:spcPts val="0"/>
               </a:spcAft>
-              <a:defRPr sz="2300" b="1">
-                <a:solidFill>
-                  <a:srgbClr val="146C68"/>
-                </a:solidFill>
-                <a:latin typeface="Lato"/>
-              </a:defRPr>
-            </a:pPr>
-            <a:r>
-              <a:rPr>
-                <a:ea typeface="Microsoft JhengHei"/>
-              </a:rPr>
-              <a:t>Catalogue</a:t>
+              <a:defRPr sz="2100" b="0">
+                <a:solidFill>
+                  <a:srgbClr val="24384A"/>
+                </a:solidFill>
+                <a:latin typeface="Lato"/>
+              </a:defRPr>
+            </a:pPr>
+            <a:r>
+              <a:rPr>
+                <a:ea typeface="Microsoft JhengHei"/>
+              </a:rPr>
+              <a:t>Translator labels and</a:t>
+            </a:r>
+          </a:p>
+          <a:p>
+            <a:pPr>
+              <a:lnSpc>
+                <a:spcPct val="118000"/>
+              </a:lnSpc>
+              <a:spcBef>
+                <a:spcPts val="0"/>
+              </a:spcBef>
+              <a:spcAft>
+                <a:spcPts val="0"/>
+              </a:spcAft>
+              <a:defRPr sz="2100" b="0">
+                <a:solidFill>
+                  <a:srgbClr val="24384A"/>
+                </a:solidFill>
+                <a:latin typeface="Lato"/>
+              </a:defRPr>
+            </a:pPr>
+            <a:r>
+              <a:rPr>
+                <a:ea typeface="Microsoft JhengHei"/>
+              </a:rPr>
+              <a:t>mixed historical groups</a:t>
             </a:r>
           </a:p>
         </p:txBody>
@@ -15450,8 +14953,8 @@
         </p:nvSpPr>
         <p:spPr>
           <a:xfrm>
-            <a:off x="4572000" y="3476625"/>
-            <a:ext cx="3000375" cy="1428750"/>
+            <a:off x="8429625" y="2867025"/>
+            <a:ext cx="3000375" cy="476250"/>
           </a:xfrm>
           <a:prstGeom prst="rect">
             <a:avLst/>
@@ -15474,43 +14977,18 @@
               <a:spcAft>
                 <a:spcPts val="0"/>
               </a:spcAft>
-              <a:defRPr sz="2100" b="0">
-                <a:solidFill>
-                  <a:srgbClr val="24384A"/>
-                </a:solidFill>
-                <a:latin typeface="Lato"/>
-              </a:defRPr>
-            </a:pPr>
-            <a:r>
-              <a:rPr>
-                <a:ea typeface="Microsoft JhengHei"/>
-              </a:rPr>
-              <a:t>Translator labels and</a:t>
-            </a:r>
-          </a:p>
-          <a:p>
-            <a:pPr>
-              <a:lnSpc>
-                <a:spcPct val="118000"/>
-              </a:lnSpc>
-              <a:spcBef>
-                <a:spcPts val="0"/>
-              </a:spcBef>
-              <a:spcAft>
-                <a:spcPts val="0"/>
-              </a:spcAft>
-              <a:defRPr sz="2100" b="0">
-                <a:solidFill>
-                  <a:srgbClr val="24384A"/>
-                </a:solidFill>
-                <a:latin typeface="Lato"/>
-              </a:defRPr>
-            </a:pPr>
-            <a:r>
-              <a:rPr>
-                <a:ea typeface="Microsoft JhengHei"/>
-              </a:rPr>
-              <a:t>mixed historical groups</a:t>
+              <a:defRPr sz="2300" b="1">
+                <a:solidFill>
+                  <a:srgbClr val="80511B"/>
+                </a:solidFill>
+                <a:latin typeface="Lato"/>
+              </a:defRPr>
+            </a:pPr>
+            <a:r>
+              <a:rPr>
+                <a:ea typeface="Microsoft JhengHei"/>
+              </a:rPr>
+              <a:t>Vocabulary</a:t>
             </a:r>
           </a:p>
         </p:txBody>
@@ -15523,8 +15001,8 @@
         </p:nvSpPr>
         <p:spPr>
           <a:xfrm>
-            <a:off x="8429625" y="2867025"/>
-            <a:ext cx="3000375" cy="476250"/>
+            <a:off x="8429625" y="3476625"/>
+            <a:ext cx="3000375" cy="1428750"/>
           </a:xfrm>
           <a:prstGeom prst="rect">
             <a:avLst/>
@@ -15547,18 +15025,43 @@
               <a:spcAft>
                 <a:spcPts val="0"/>
               </a:spcAft>
-              <a:defRPr sz="2300" b="1">
-                <a:solidFill>
-                  <a:srgbClr val="80511B"/>
-                </a:solidFill>
-                <a:latin typeface="Lato"/>
-              </a:defRPr>
-            </a:pPr>
-            <a:r>
-              <a:rPr>
-                <a:ea typeface="Microsoft JhengHei"/>
-              </a:rPr>
-              <a:t>Vocabulary</a:t>
+              <a:defRPr sz="2100" b="0">
+                <a:solidFill>
+                  <a:srgbClr val="24384A"/>
+                </a:solidFill>
+                <a:latin typeface="Lato"/>
+              </a:defRPr>
+            </a:pPr>
+            <a:r>
+              <a:rPr>
+                <a:ea typeface="Microsoft JhengHei"/>
+              </a:rPr>
+              <a:t>Curated strings for</a:t>
+            </a:r>
+          </a:p>
+          <a:p>
+            <a:pPr>
+              <a:lnSpc>
+                <a:spcPct val="118000"/>
+              </a:lnSpc>
+              <a:spcBef>
+                <a:spcPts val="0"/>
+              </a:spcBef>
+              <a:spcAft>
+                <a:spcPts val="0"/>
+              </a:spcAft>
+              <a:defRPr sz="2100" b="0">
+                <a:solidFill>
+                  <a:srgbClr val="24384A"/>
+                </a:solidFill>
+                <a:latin typeface="Lato"/>
+              </a:defRPr>
+            </a:pPr>
+            <a:r>
+              <a:rPr>
+                <a:ea typeface="Microsoft JhengHei"/>
+              </a:rPr>
+              <a:t>Dharmarakṣa research</a:t>
             </a:r>
           </a:p>
         </p:txBody>
@@ -15571,8 +15074,8 @@
         </p:nvSpPr>
         <p:spPr>
           <a:xfrm>
-            <a:off x="8429625" y="3476625"/>
-            <a:ext cx="3000375" cy="1428750"/>
+            <a:off x="523874" y="5448300"/>
+            <a:ext cx="11049000" cy="619125"/>
           </a:xfrm>
           <a:prstGeom prst="rect">
             <a:avLst/>
@@ -15595,7 +15098,7 @@
               <a:spcAft>
                 <a:spcPts val="0"/>
               </a:spcAft>
-              <a:defRPr sz="2100" b="0">
+              <a:defRPr sz="2600" b="0">
                 <a:solidFill>
                   <a:srgbClr val="24384A"/>
                 </a:solidFill>
@@ -15606,79 +15109,6 @@
               <a:rPr>
                 <a:ea typeface="Microsoft JhengHei"/>
               </a:rPr>
-              <a:t>Curated strings for</a:t>
-            </a:r>
-          </a:p>
-          <a:p>
-            <a:pPr>
-              <a:lnSpc>
-                <a:spcPct val="118000"/>
-              </a:lnSpc>
-              <a:spcBef>
-                <a:spcPts val="0"/>
-              </a:spcBef>
-              <a:spcAft>
-                <a:spcPts val="0"/>
-              </a:spcAft>
-              <a:defRPr sz="2100" b="0">
-                <a:solidFill>
-                  <a:srgbClr val="24384A"/>
-                </a:solidFill>
-                <a:latin typeface="Lato"/>
-              </a:defRPr>
-            </a:pPr>
-            <a:r>
-              <a:rPr>
-                <a:ea typeface="Microsoft JhengHei"/>
-              </a:rPr>
-              <a:t>Dharmarakṣa research</a:t>
-            </a:r>
-          </a:p>
-        </p:txBody>
-      </p:sp>
-      <p:sp>
-        <p:nvSpPr>
-          <p:cNvPr id="11" name="TextBox 10"/>
-          <p:cNvSpPr txBox="1"/>
-          <p:nvPr/>
-        </p:nvSpPr>
-        <p:spPr>
-          <a:xfrm>
-            <a:off x="523874" y="5448300"/>
-            <a:ext cx="11049000" cy="619125"/>
-          </a:xfrm>
-          <a:prstGeom prst="rect">
-            <a:avLst/>
-          </a:prstGeom>
-          <a:noFill/>
-        </p:spPr>
-        <p:txBody>
-          <a:bodyPr wrap="square" lIns="0" rIns="0" tIns="0" bIns="0">
-            <a:spAutoFit/>
-          </a:bodyPr>
-          <a:lstStyle/>
-          <a:p>
-            <a:pPr>
-              <a:lnSpc>
-                <a:spcPct val="118000"/>
-              </a:lnSpc>
-              <a:spcBef>
-                <a:spcPts val="0"/>
-              </a:spcBef>
-              <a:spcAft>
-                <a:spcPts val="0"/>
-              </a:spcAft>
-              <a:defRPr sz="2600" b="0">
-                <a:solidFill>
-                  <a:srgbClr val="24384A"/>
-                </a:solidFill>
-                <a:latin typeface="Lato"/>
-              </a:defRPr>
-            </a:pPr>
-            <a:r>
-              <a:rPr>
-                <a:ea typeface="Microsoft JhengHei"/>
-              </a:rPr>
               <a:t>Cohort builds the profiles and calculates the rankings.</a:t>
             </a:r>
           </a:p>
@@ -15686,7 +15116,7 @@
       </p:sp>
       <p:sp>
         <p:nvSpPr>
-          <p:cNvPr id="12" name="Rectangle 11"/>
+          <p:cNvPr id="11" name="Rectangle 10"/>
           <p:cNvSpPr/>
           <p:nvPr/>
         </p:nvSpPr>
@@ -15731,7 +15161,7 @@
       </p:sp>
       <p:sp>
         <p:nvSpPr>
-          <p:cNvPr id="13" name="TextBox 12"/>
+          <p:cNvPr id="12" name="TextBox 11"/>
           <p:cNvSpPr txBox="1"/>
           <p:nvPr/>
         </p:nvSpPr>
@@ -15803,8 +15233,8 @@
         </p:nvSpPr>
         <p:spPr>
           <a:xfrm>
-            <a:off x="495299" y="238125"/>
-            <a:ext cx="10953750" cy="266700"/>
+            <a:off x="495299" y="742950"/>
+            <a:ext cx="11144250" cy="1047749"/>
           </a:xfrm>
           <a:prstGeom prst="rect">
             <a:avLst/>
@@ -15827,9 +15257,9 @@
               <a:spcAft>
                 <a:spcPts val="0"/>
               </a:spcAft>
-              <a:defRPr sz="1300" b="1">
-                <a:solidFill>
-                  <a:srgbClr val="146C68"/>
+              <a:defRPr sz="3200" b="1">
+                <a:solidFill>
+                  <a:srgbClr val="24384A"/>
                 </a:solidFill>
                 <a:latin typeface="Lato"/>
               </a:defRPr>
@@ -15851,8 +15281,8 @@
         </p:nvSpPr>
         <p:spPr>
           <a:xfrm>
-            <a:off x="495299" y="742950"/>
-            <a:ext cx="11144250" cy="1047749"/>
+            <a:off x="523874" y="1943100"/>
+            <a:ext cx="5286375" cy="485775"/>
           </a:xfrm>
           <a:prstGeom prst="rect">
             <a:avLst/>
@@ -15875,18 +15305,18 @@
               <a:spcAft>
                 <a:spcPts val="0"/>
               </a:spcAft>
-              <a:defRPr sz="3200" b="1">
-                <a:solidFill>
-                  <a:srgbClr val="24384A"/>
-                </a:solidFill>
-                <a:latin typeface="Lato"/>
-              </a:defRPr>
-            </a:pPr>
-            <a:r>
-              <a:rPr>
-                <a:ea typeface="Microsoft JhengHei"/>
-              </a:rPr>
-              <a:t>Results and limits</a:t>
+              <a:defRPr sz="2700" b="1">
+                <a:solidFill>
+                  <a:srgbClr val="146C68"/>
+                </a:solidFill>
+                <a:latin typeface="Lato"/>
+              </a:defRPr>
+            </a:pPr>
+            <a:r>
+              <a:rPr>
+                <a:ea typeface="Microsoft JhengHei"/>
+              </a:rPr>
+              <a:t>Useful outputs</a:t>
             </a:r>
           </a:p>
         </p:txBody>
@@ -15899,8 +15329,8 @@
         </p:nvSpPr>
         <p:spPr>
           <a:xfrm>
-            <a:off x="523874" y="1943100"/>
-            <a:ext cx="5286375" cy="485775"/>
+            <a:off x="6524625" y="1943100"/>
+            <a:ext cx="5143500" cy="485775"/>
           </a:xfrm>
           <a:prstGeom prst="rect">
             <a:avLst/>
@@ -15925,16 +15355,16 @@
               </a:spcAft>
               <a:defRPr sz="2700" b="1">
                 <a:solidFill>
-                  <a:srgbClr val="146C68"/>
-                </a:solidFill>
-                <a:latin typeface="Lato"/>
-              </a:defRPr>
-            </a:pPr>
-            <a:r>
-              <a:rPr>
-                <a:ea typeface="Microsoft JhengHei"/>
-              </a:rPr>
-              <a:t>Useful outputs</a:t>
+                  <a:srgbClr val="80511B"/>
+                </a:solidFill>
+                <a:latin typeface="Lato"/>
+              </a:defRPr>
+            </a:pPr>
+            <a:r>
+              <a:rPr>
+                <a:ea typeface="Microsoft JhengHei"/>
+              </a:rPr>
+              <a:t>Observed limits</a:t>
             </a:r>
           </a:p>
         </p:txBody>
@@ -15947,8 +15377,8 @@
         </p:nvSpPr>
         <p:spPr>
           <a:xfrm>
-            <a:off x="6524625" y="1943100"/>
-            <a:ext cx="5143500" cy="485775"/>
+            <a:off x="762000" y="2714625"/>
+            <a:ext cx="5048250" cy="952500"/>
           </a:xfrm>
           <a:prstGeom prst="rect">
             <a:avLst/>
@@ -15971,18 +15401,43 @@
               <a:spcAft>
                 <a:spcPts val="0"/>
               </a:spcAft>
-              <a:defRPr sz="2700" b="1">
-                <a:solidFill>
-                  <a:srgbClr val="80511B"/>
-                </a:solidFill>
-                <a:latin typeface="Lato"/>
-              </a:defRPr>
-            </a:pPr>
-            <a:r>
-              <a:rPr>
-                <a:ea typeface="Microsoft JhengHei"/>
-              </a:rPr>
-              <a:t>Observed limits</a:t>
+              <a:defRPr sz="2300" b="0">
+                <a:solidFill>
+                  <a:srgbClr val="24384A"/>
+                </a:solidFill>
+                <a:latin typeface="Lato"/>
+              </a:defRPr>
+            </a:pPr>
+            <a:r>
+              <a:rPr>
+                <a:ea typeface="Microsoft JhengHei"/>
+              </a:rPr>
+              <a:t>Lotus: a related passage with</a:t>
+            </a:r>
+          </a:p>
+          <a:p>
+            <a:pPr>
+              <a:lnSpc>
+                <a:spcPct val="118000"/>
+              </a:lnSpc>
+              <a:spcBef>
+                <a:spcPts val="0"/>
+              </a:spcBef>
+              <a:spcAft>
+                <a:spcPts val="0"/>
+              </a:spcAft>
+              <a:defRPr sz="2300" b="0">
+                <a:solidFill>
+                  <a:srgbClr val="24384A"/>
+                </a:solidFill>
+                <a:latin typeface="Lato"/>
+              </a:defRPr>
+            </a:pPr>
+            <a:r>
+              <a:rPr>
+                <a:ea typeface="Microsoft JhengHei"/>
+              </a:rPr>
+              <a:t>little exact shared wording.</a:t>
             </a:r>
           </a:p>
         </p:txBody>
@@ -15995,8 +15450,8 @@
         </p:nvSpPr>
         <p:spPr>
           <a:xfrm>
-            <a:off x="762000" y="2714625"/>
-            <a:ext cx="5048250" cy="952500"/>
+            <a:off x="6762750" y="2714625"/>
+            <a:ext cx="4905375" cy="952500"/>
           </a:xfrm>
           <a:prstGeom prst="rect">
             <a:avLst/>
@@ -16030,7 +15485,7 @@
               <a:rPr>
                 <a:ea typeface="Microsoft JhengHei"/>
               </a:rPr>
-              <a:t>Lotus: a related passage with</a:t>
+              <a:t>Kumārajīva’s Lotus wrongly ranks</a:t>
             </a:r>
           </a:p>
           <a:p>
@@ -16055,7 +15510,7 @@
               <a:rPr>
                 <a:ea typeface="Microsoft JhengHei"/>
               </a:rPr>
-              <a:t>little exact shared wording.</a:t>
+              <a:t>Dharmakṣema first in vocabulary.</a:t>
             </a:r>
           </a:p>
         </p:txBody>
@@ -16068,8 +15523,8 @@
         </p:nvSpPr>
         <p:spPr>
           <a:xfrm>
-            <a:off x="6762750" y="2714625"/>
-            <a:ext cx="4905375" cy="952500"/>
+            <a:off x="762000" y="3886200"/>
+            <a:ext cx="5048250" cy="952500"/>
           </a:xfrm>
           <a:prstGeom prst="rect">
             <a:avLst/>
@@ -16103,7 +15558,7 @@
               <a:rPr>
                 <a:ea typeface="Microsoft JhengHei"/>
               </a:rPr>
-              <a:t>Kumārajīva’s Lotus wrongly ranks</a:t>
+              <a:t>T0603: exclusion exposes the</a:t>
             </a:r>
           </a:p>
           <a:p>
@@ -16128,7 +15583,7 @@
               <a:rPr>
                 <a:ea typeface="Microsoft JhengHei"/>
               </a:rPr>
-              <a:t>Dharmakṣema first in vocabulary.</a:t>
+              <a:t>commentary’s effect on the ranking.</a:t>
             </a:r>
           </a:p>
         </p:txBody>
@@ -16141,8 +15596,8 @@
         </p:nvSpPr>
         <p:spPr>
           <a:xfrm>
-            <a:off x="762000" y="3886200"/>
-            <a:ext cx="5048250" cy="952500"/>
+            <a:off x="6762750" y="3886200"/>
+            <a:ext cx="4905375" cy="952500"/>
           </a:xfrm>
           <a:prstGeom prst="rect">
             <a:avLst/>
@@ -16176,7 +15631,7 @@
               <a:rPr>
                 <a:ea typeface="Microsoft JhengHei"/>
               </a:rPr>
-              <a:t>T0603: exclusion exposes the</a:t>
+              <a:t>One known-answer example</a:t>
             </a:r>
           </a:p>
           <a:p>
@@ -16201,7 +15656,7 @@
               <a:rPr>
                 <a:ea typeface="Microsoft JhengHei"/>
               </a:rPr>
-              <a:t>commentary’s effect on the ranking.</a:t>
+              <a:t>cannot validate attribution.</a:t>
             </a:r>
           </a:p>
         </p:txBody>
@@ -16214,8 +15669,8 @@
         </p:nvSpPr>
         <p:spPr>
           <a:xfrm>
-            <a:off x="6762750" y="3886200"/>
-            <a:ext cx="4905375" cy="952500"/>
+            <a:off x="762000" y="5057775"/>
+            <a:ext cx="5048250" cy="952500"/>
           </a:xfrm>
           <a:prstGeom prst="rect">
             <a:avLst/>
@@ -16249,7 +15704,7 @@
               <a:rPr>
                 <a:ea typeface="Microsoft JhengHei"/>
               </a:rPr>
-              <a:t>One known-answer example</a:t>
+              <a:t>Proposals, sources and checks</a:t>
             </a:r>
           </a:p>
           <a:p>
@@ -16274,7 +15729,7 @@
               <a:rPr>
                 <a:ea typeface="Microsoft JhengHei"/>
               </a:rPr>
-              <a:t>cannot validate attribution.</a:t>
+              <a:t>can be inspected together.</a:t>
             </a:r>
           </a:p>
         </p:txBody>
@@ -16287,8 +15742,8 @@
         </p:nvSpPr>
         <p:spPr>
           <a:xfrm>
-            <a:off x="762000" y="5057775"/>
-            <a:ext cx="5048250" cy="952500"/>
+            <a:off x="6762750" y="5057775"/>
+            <a:ext cx="4905375" cy="952500"/>
           </a:xfrm>
           <a:prstGeom prst="rect">
             <a:avLst/>
@@ -16322,7 +15777,7 @@
               <a:rPr>
                 <a:ea typeface="Microsoft JhengHei"/>
               </a:rPr>
-              <a:t>Proposals, sources and checks</a:t>
+              <a:t>Weak tests and reviewer errors</a:t>
             </a:r>
           </a:p>
           <a:p>
@@ -16347,79 +15802,6 @@
               <a:rPr>
                 <a:ea typeface="Microsoft JhengHei"/>
               </a:rPr>
-              <a:t>can be inspected together.</a:t>
-            </a:r>
-          </a:p>
-        </p:txBody>
-      </p:sp>
-      <p:sp>
-        <p:nvSpPr>
-          <p:cNvPr id="11" name="TextBox 10"/>
-          <p:cNvSpPr txBox="1"/>
-          <p:nvPr/>
-        </p:nvSpPr>
-        <p:spPr>
-          <a:xfrm>
-            <a:off x="6762750" y="5057775"/>
-            <a:ext cx="4905375" cy="952500"/>
-          </a:xfrm>
-          <a:prstGeom prst="rect">
-            <a:avLst/>
-          </a:prstGeom>
-          <a:noFill/>
-        </p:spPr>
-        <p:txBody>
-          <a:bodyPr wrap="square" lIns="0" rIns="0" tIns="0" bIns="0">
-            <a:spAutoFit/>
-          </a:bodyPr>
-          <a:lstStyle/>
-          <a:p>
-            <a:pPr>
-              <a:lnSpc>
-                <a:spcPct val="118000"/>
-              </a:lnSpc>
-              <a:spcBef>
-                <a:spcPts val="0"/>
-              </a:spcBef>
-              <a:spcAft>
-                <a:spcPts val="0"/>
-              </a:spcAft>
-              <a:defRPr sz="2300" b="0">
-                <a:solidFill>
-                  <a:srgbClr val="24384A"/>
-                </a:solidFill>
-                <a:latin typeface="Lato"/>
-              </a:defRPr>
-            </a:pPr>
-            <a:r>
-              <a:rPr>
-                <a:ea typeface="Microsoft JhengHei"/>
-              </a:rPr>
-              <a:t>Weak tests and reviewer errors</a:t>
-            </a:r>
-          </a:p>
-          <a:p>
-            <a:pPr>
-              <a:lnSpc>
-                <a:spcPct val="118000"/>
-              </a:lnSpc>
-              <a:spcBef>
-                <a:spcPts val="0"/>
-              </a:spcBef>
-              <a:spcAft>
-                <a:spcPts val="0"/>
-              </a:spcAft>
-              <a:defRPr sz="2300" b="0">
-                <a:solidFill>
-                  <a:srgbClr val="24384A"/>
-                </a:solidFill>
-                <a:latin typeface="Lato"/>
-              </a:defRPr>
-            </a:pPr>
-            <a:r>
-              <a:rPr>
-                <a:ea typeface="Microsoft JhengHei"/>
-              </a:rPr>
               <a:t>still require researcher scrutiny.</a:t>
             </a:r>
           </a:p>
@@ -16427,7 +15809,7 @@
       </p:sp>
       <p:sp>
         <p:nvSpPr>
-          <p:cNvPr id="12" name="Rectangle 11"/>
+          <p:cNvPr id="11" name="Rectangle 10"/>
           <p:cNvSpPr/>
           <p:nvPr/>
         </p:nvSpPr>
@@ -16472,7 +15854,7 @@
       </p:sp>
       <p:sp>
         <p:nvSpPr>
-          <p:cNvPr id="13" name="TextBox 12"/>
+          <p:cNvPr id="12" name="TextBox 11"/>
           <p:cNvSpPr txBox="1"/>
           <p:nvPr/>
         </p:nvSpPr>
@@ -16544,8 +15926,8 @@
         </p:nvSpPr>
         <p:spPr>
           <a:xfrm>
-            <a:off x="495299" y="238125"/>
-            <a:ext cx="10953750" cy="266700"/>
+            <a:off x="495299" y="742950"/>
+            <a:ext cx="11144250" cy="952500"/>
           </a:xfrm>
           <a:prstGeom prst="rect">
             <a:avLst/>
@@ -16568,18 +15950,18 @@
               <a:spcAft>
                 <a:spcPts val="0"/>
               </a:spcAft>
-              <a:defRPr sz="1300" b="1">
-                <a:solidFill>
-                  <a:srgbClr val="146C68"/>
-                </a:solidFill>
-                <a:latin typeface="Lato"/>
-              </a:defRPr>
-            </a:pPr>
-            <a:r>
-              <a:rPr>
-                <a:ea typeface="Microsoft JhengHei"/>
-              </a:rPr>
-              <a:t>Purpose</a:t>
+              <a:defRPr sz="3200" b="1">
+                <a:solidFill>
+                  <a:srgbClr val="24384A"/>
+                </a:solidFill>
+                <a:latin typeface="Lato"/>
+              </a:defRPr>
+            </a:pPr>
+            <a:r>
+              <a:rPr>
+                <a:ea typeface="Microsoft JhengHei"/>
+              </a:rPr>
+              <a:t>Why we built Cohort</a:t>
             </a:r>
           </a:p>
         </p:txBody>
@@ -16592,8 +15974,8 @@
         </p:nvSpPr>
         <p:spPr>
           <a:xfrm>
-            <a:off x="495299" y="742950"/>
-            <a:ext cx="11144250" cy="952500"/>
+            <a:off x="523874" y="1952624"/>
+            <a:ext cx="10953750" cy="1238250"/>
           </a:xfrm>
           <a:prstGeom prst="rect">
             <a:avLst/>
@@ -16616,7 +15998,7 @@
               <a:spcAft>
                 <a:spcPts val="0"/>
               </a:spcAft>
-              <a:defRPr sz="3200" b="1">
+              <a:defRPr sz="3200" b="0">
                 <a:solidFill>
                   <a:srgbClr val="24384A"/>
                 </a:solidFill>
@@ -16627,7 +16009,32 @@
               <a:rPr>
                 <a:ea typeface="Microsoft JhengHei"/>
               </a:rPr>
-              <a:t>Why we built Cohort</a:t>
+              <a:t>Let researchers direct agents and inspect</a:t>
+            </a:r>
+          </a:p>
+          <a:p>
+            <a:pPr>
+              <a:lnSpc>
+                <a:spcPct val="118000"/>
+              </a:lnSpc>
+              <a:spcBef>
+                <a:spcPts val="0"/>
+              </a:spcBef>
+              <a:spcAft>
+                <a:spcPts val="0"/>
+              </a:spcAft>
+              <a:defRPr sz="3200" b="0">
+                <a:solidFill>
+                  <a:srgbClr val="24384A"/>
+                </a:solidFill>
+                <a:latin typeface="Lato"/>
+              </a:defRPr>
+            </a:pPr>
+            <a:r>
+              <a:rPr>
+                <a:ea typeface="Microsoft JhengHei"/>
+              </a:rPr>
+              <a:t>the evidence behind their proposals.</a:t>
             </a:r>
           </a:p>
         </p:txBody>
@@ -16640,8 +16047,8 @@
         </p:nvSpPr>
         <p:spPr>
           <a:xfrm>
-            <a:off x="523874" y="1952624"/>
-            <a:ext cx="10953750" cy="1238250"/>
+            <a:off x="742950" y="3905249"/>
+            <a:ext cx="10477500" cy="523874"/>
           </a:xfrm>
           <a:prstGeom prst="rect">
             <a:avLst/>
@@ -16664,43 +16071,18 @@
               <a:spcAft>
                 <a:spcPts val="0"/>
               </a:spcAft>
-              <a:defRPr sz="3200" b="0">
-                <a:solidFill>
-                  <a:srgbClr val="24384A"/>
-                </a:solidFill>
-                <a:latin typeface="Lato"/>
-              </a:defRPr>
-            </a:pPr>
-            <a:r>
-              <a:rPr>
-                <a:ea typeface="Microsoft JhengHei"/>
-              </a:rPr>
-              <a:t>Let researchers direct agents and inspect</a:t>
-            </a:r>
-          </a:p>
-          <a:p>
-            <a:pPr>
-              <a:lnSpc>
-                <a:spcPct val="118000"/>
-              </a:lnSpc>
-              <a:spcBef>
-                <a:spcPts val="0"/>
-              </a:spcBef>
-              <a:spcAft>
-                <a:spcPts val="0"/>
-              </a:spcAft>
-              <a:defRPr sz="3200" b="0">
-                <a:solidFill>
-                  <a:srgbClr val="24384A"/>
-                </a:solidFill>
-                <a:latin typeface="Lato"/>
-              </a:defRPr>
-            </a:pPr>
-            <a:r>
-              <a:rPr>
-                <a:ea typeface="Microsoft JhengHei"/>
-              </a:rPr>
-              <a:t>the evidence behind their proposals.</a:t>
+              <a:defRPr sz="2600" b="1">
+                <a:solidFill>
+                  <a:srgbClr val="146C68"/>
+                </a:solidFill>
+                <a:latin typeface="Lato"/>
+              </a:defRPr>
+            </a:pPr>
+            <a:r>
+              <a:rPr>
+                <a:ea typeface="Microsoft JhengHei"/>
+              </a:rPr>
+              <a:t>Today’s presentation</a:t>
             </a:r>
           </a:p>
         </p:txBody>
@@ -16713,8 +16095,8 @@
         </p:nvSpPr>
         <p:spPr>
           <a:xfrm>
-            <a:off x="742950" y="3905249"/>
-            <a:ext cx="10477500" cy="523874"/>
+            <a:off x="742950" y="4591050"/>
+            <a:ext cx="10477500" cy="1000125"/>
           </a:xfrm>
           <a:prstGeom prst="rect">
             <a:avLst/>
@@ -16737,18 +16119,43 @@
               <a:spcAft>
                 <a:spcPts val="0"/>
               </a:spcAft>
-              <a:defRPr sz="2600" b="1">
-                <a:solidFill>
-                  <a:srgbClr val="146C68"/>
-                </a:solidFill>
-                <a:latin typeface="Lato"/>
-              </a:defRPr>
-            </a:pPr>
-            <a:r>
-              <a:rPr>
-                <a:ea typeface="Microsoft JhengHei"/>
-              </a:rPr>
-              <a:t>Today’s presentation</a:t>
+              <a:defRPr sz="2600" b="0">
+                <a:solidFill>
+                  <a:srgbClr val="24384A"/>
+                </a:solidFill>
+                <a:latin typeface="Lato"/>
+              </a:defRPr>
+            </a:pPr>
+            <a:r>
+              <a:rPr>
+                <a:ea typeface="Microsoft JhengHei"/>
+              </a:rPr>
+              <a:t>Use Buddhist texts to show the functions,</a:t>
+            </a:r>
+          </a:p>
+          <a:p>
+            <a:pPr>
+              <a:lnSpc>
+                <a:spcPct val="118000"/>
+              </a:lnSpc>
+              <a:spcBef>
+                <a:spcPts val="0"/>
+              </a:spcBef>
+              <a:spcAft>
+                <a:spcPts val="0"/>
+              </a:spcAft>
+              <a:defRPr sz="2600" b="0">
+                <a:solidFill>
+                  <a:srgbClr val="24384A"/>
+                </a:solidFill>
+                <a:latin typeface="Lato"/>
+              </a:defRPr>
+            </a:pPr>
+            <a:r>
+              <a:rPr>
+                <a:ea typeface="Microsoft JhengHei"/>
+              </a:rPr>
+              <a:t>where results can mislead, and what the researcher decides.</a:t>
             </a:r>
           </a:p>
         </p:txBody>
@@ -16761,8 +16168,8 @@
         </p:nvSpPr>
         <p:spPr>
           <a:xfrm>
-            <a:off x="742950" y="4591050"/>
-            <a:ext cx="10477500" cy="1000125"/>
+            <a:off x="523874" y="5981700"/>
+            <a:ext cx="11049000" cy="400050"/>
           </a:xfrm>
           <a:prstGeom prst="rect">
             <a:avLst/>
@@ -16785,79 +16192,6 @@
               <a:spcAft>
                 <a:spcPts val="0"/>
               </a:spcAft>
-              <a:defRPr sz="2600" b="0">
-                <a:solidFill>
-                  <a:srgbClr val="24384A"/>
-                </a:solidFill>
-                <a:latin typeface="Lato"/>
-              </a:defRPr>
-            </a:pPr>
-            <a:r>
-              <a:rPr>
-                <a:ea typeface="Microsoft JhengHei"/>
-              </a:rPr>
-              <a:t>Use Buddhist texts to show the functions,</a:t>
-            </a:r>
-          </a:p>
-          <a:p>
-            <a:pPr>
-              <a:lnSpc>
-                <a:spcPct val="118000"/>
-              </a:lnSpc>
-              <a:spcBef>
-                <a:spcPts val="0"/>
-              </a:spcBef>
-              <a:spcAft>
-                <a:spcPts val="0"/>
-              </a:spcAft>
-              <a:defRPr sz="2600" b="0">
-                <a:solidFill>
-                  <a:srgbClr val="24384A"/>
-                </a:solidFill>
-                <a:latin typeface="Lato"/>
-              </a:defRPr>
-            </a:pPr>
-            <a:r>
-              <a:rPr>
-                <a:ea typeface="Microsoft JhengHei"/>
-              </a:rPr>
-              <a:t>where results can mislead, and what the researcher decides.</a:t>
-            </a:r>
-          </a:p>
-        </p:txBody>
-      </p:sp>
-      <p:sp>
-        <p:nvSpPr>
-          <p:cNvPr id="7" name="TextBox 6"/>
-          <p:cNvSpPr txBox="1"/>
-          <p:nvPr/>
-        </p:nvSpPr>
-        <p:spPr>
-          <a:xfrm>
-            <a:off x="523874" y="5981700"/>
-            <a:ext cx="11049000" cy="400050"/>
-          </a:xfrm>
-          <a:prstGeom prst="rect">
-            <a:avLst/>
-          </a:prstGeom>
-          <a:noFill/>
-        </p:spPr>
-        <p:txBody>
-          <a:bodyPr wrap="square" lIns="0" rIns="0" tIns="0" bIns="0">
-            <a:spAutoFit/>
-          </a:bodyPr>
-          <a:lstStyle/>
-          <a:p>
-            <a:pPr>
-              <a:lnSpc>
-                <a:spcPct val="118000"/>
-              </a:lnSpc>
-              <a:spcBef>
-                <a:spcPts val="0"/>
-              </a:spcBef>
-              <a:spcAft>
-                <a:spcPts val="0"/>
-              </a:spcAft>
               <a:defRPr sz="1800" b="0">
                 <a:solidFill>
                   <a:srgbClr val="526778"/>
@@ -16876,7 +16210,7 @@
       </p:sp>
       <p:sp>
         <p:nvSpPr>
-          <p:cNvPr id="8" name="Rectangle 7"/>
+          <p:cNvPr id="7" name="Rectangle 6"/>
           <p:cNvSpPr/>
           <p:nvPr/>
         </p:nvSpPr>
@@ -16921,7 +16255,7 @@
       </p:sp>
       <p:sp>
         <p:nvSpPr>
-          <p:cNvPr id="9" name="TextBox 8"/>
+          <p:cNvPr id="8" name="TextBox 7"/>
           <p:cNvSpPr txBox="1"/>
           <p:nvPr/>
         </p:nvSpPr>
@@ -16993,8 +16327,8 @@
         </p:nvSpPr>
         <p:spPr>
           <a:xfrm>
-            <a:off x="495299" y="238125"/>
-            <a:ext cx="10953750" cy="266700"/>
+            <a:off x="495299" y="742950"/>
+            <a:ext cx="11144250" cy="952500"/>
           </a:xfrm>
           <a:prstGeom prst="rect">
             <a:avLst/>
@@ -17017,18 +16351,18 @@
               <a:spcAft>
                 <a:spcPts val="0"/>
               </a:spcAft>
-              <a:defRPr sz="1300" b="1">
-                <a:solidFill>
-                  <a:srgbClr val="146C68"/>
-                </a:solidFill>
-                <a:latin typeface="Lato"/>
-              </a:defRPr>
-            </a:pPr>
-            <a:r>
-              <a:rPr>
-                <a:ea typeface="Microsoft JhengHei"/>
-              </a:rPr>
-              <a:t>From the abstract</a:t>
+              <a:defRPr sz="3200" b="1">
+                <a:solidFill>
+                  <a:srgbClr val="24384A"/>
+                </a:solidFill>
+                <a:latin typeface="Lato"/>
+              </a:defRPr>
+            </a:pPr>
+            <a:r>
+              <a:rPr>
+                <a:ea typeface="Microsoft JhengHei"/>
+              </a:rPr>
+              <a:t>Agent support for diachronic research</a:t>
             </a:r>
           </a:p>
         </p:txBody>
@@ -17041,8 +16375,8 @@
         </p:nvSpPr>
         <p:spPr>
           <a:xfrm>
-            <a:off x="495299" y="742950"/>
-            <a:ext cx="11144250" cy="952500"/>
+            <a:off x="523874" y="1809750"/>
+            <a:ext cx="11049000" cy="666750"/>
           </a:xfrm>
           <a:prstGeom prst="rect">
             <a:avLst/>
@@ -17065,7 +16399,7 @@
               <a:spcAft>
                 <a:spcPts val="0"/>
               </a:spcAft>
-              <a:defRPr sz="3200" b="1">
+              <a:defRPr sz="2800" b="0">
                 <a:solidFill>
                   <a:srgbClr val="24384A"/>
                 </a:solidFill>
@@ -17076,7 +16410,7 @@
               <a:rPr>
                 <a:ea typeface="Microsoft JhengHei"/>
               </a:rPr>
-              <a:t>Agent support for diachronic research</a:t>
+              <a:t>Study texts and their relationships across time.</a:t>
             </a:r>
           </a:p>
         </p:txBody>
@@ -17089,8 +16423,8 @@
         </p:nvSpPr>
         <p:spPr>
           <a:xfrm>
-            <a:off x="523874" y="1809750"/>
-            <a:ext cx="11049000" cy="666750"/>
+            <a:off x="676275" y="2981325"/>
+            <a:ext cx="2266950" cy="495299"/>
           </a:xfrm>
           <a:prstGeom prst="rect">
             <a:avLst/>
@@ -17113,18 +16447,18 @@
               <a:spcAft>
                 <a:spcPts val="0"/>
               </a:spcAft>
-              <a:defRPr sz="2800" b="0">
-                <a:solidFill>
-                  <a:srgbClr val="24384A"/>
-                </a:solidFill>
-                <a:latin typeface="Lato"/>
-              </a:defRPr>
-            </a:pPr>
-            <a:r>
-              <a:rPr>
-                <a:ea typeface="Microsoft JhengHei"/>
-              </a:rPr>
-              <a:t>Study texts and their relationships across time.</a:t>
+              <a:defRPr sz="2000" b="1">
+                <a:solidFill>
+                  <a:srgbClr val="155F88"/>
+                </a:solidFill>
+                <a:latin typeface="Lato"/>
+              </a:defRPr>
+            </a:pPr>
+            <a:r>
+              <a:rPr>
+                <a:ea typeface="Microsoft JhengHei"/>
+              </a:rPr>
+              <a:t>Corpus retrieval</a:t>
             </a:r>
           </a:p>
         </p:txBody>
@@ -17137,8 +16471,8 @@
         </p:nvSpPr>
         <p:spPr>
           <a:xfrm>
-            <a:off x="676275" y="2981325"/>
-            <a:ext cx="2266950" cy="495299"/>
+            <a:off x="676275" y="3657600"/>
+            <a:ext cx="2266950" cy="723900"/>
           </a:xfrm>
           <a:prstGeom prst="rect">
             <a:avLst/>
@@ -17161,18 +16495,43 @@
               <a:spcAft>
                 <a:spcPts val="0"/>
               </a:spcAft>
-              <a:defRPr sz="2000" b="1">
-                <a:solidFill>
-                  <a:srgbClr val="155F88"/>
-                </a:solidFill>
-                <a:latin typeface="Lato"/>
-              </a:defRPr>
-            </a:pPr>
-            <a:r>
-              <a:rPr>
-                <a:ea typeface="Microsoft JhengHei"/>
-              </a:rPr>
-              <a:t>Corpus retrieval</a:t>
+              <a:defRPr sz="1900" b="0">
+                <a:solidFill>
+                  <a:srgbClr val="24384A"/>
+                </a:solidFill>
+                <a:latin typeface="Lato"/>
+              </a:defRPr>
+            </a:pPr>
+            <a:r>
+              <a:rPr>
+                <a:ea typeface="Microsoft JhengHei"/>
+              </a:rPr>
+              <a:t>Find relevant texts</a:t>
+            </a:r>
+          </a:p>
+          <a:p>
+            <a:pPr>
+              <a:lnSpc>
+                <a:spcPct val="118000"/>
+              </a:lnSpc>
+              <a:spcBef>
+                <a:spcPts val="0"/>
+              </a:spcBef>
+              <a:spcAft>
+                <a:spcPts val="0"/>
+              </a:spcAft>
+              <a:defRPr sz="1900" b="0">
+                <a:solidFill>
+                  <a:srgbClr val="24384A"/>
+                </a:solidFill>
+                <a:latin typeface="Lato"/>
+              </a:defRPr>
+            </a:pPr>
+            <a:r>
+              <a:rPr>
+                <a:ea typeface="Microsoft JhengHei"/>
+              </a:rPr>
+              <a:t>and passages.</a:t>
             </a:r>
           </a:p>
         </p:txBody>
@@ -17185,8 +16544,8 @@
         </p:nvSpPr>
         <p:spPr>
           <a:xfrm>
-            <a:off x="676275" y="3657600"/>
-            <a:ext cx="2266950" cy="723900"/>
+            <a:off x="3533775" y="2981325"/>
+            <a:ext cx="2266950" cy="495299"/>
           </a:xfrm>
           <a:prstGeom prst="rect">
             <a:avLst/>
@@ -17209,43 +16568,18 @@
               <a:spcAft>
                 <a:spcPts val="0"/>
               </a:spcAft>
-              <a:defRPr sz="1900" b="0">
-                <a:solidFill>
-                  <a:srgbClr val="24384A"/>
-                </a:solidFill>
-                <a:latin typeface="Lato"/>
-              </a:defRPr>
-            </a:pPr>
-            <a:r>
-              <a:rPr>
-                <a:ea typeface="Microsoft JhengHei"/>
-              </a:rPr>
-              <a:t>Find relevant texts</a:t>
-            </a:r>
-          </a:p>
-          <a:p>
-            <a:pPr>
-              <a:lnSpc>
-                <a:spcPct val="118000"/>
-              </a:lnSpc>
-              <a:spcBef>
-                <a:spcPts val="0"/>
-              </a:spcBef>
-              <a:spcAft>
-                <a:spcPts val="0"/>
-              </a:spcAft>
-              <a:defRPr sz="1900" b="0">
-                <a:solidFill>
-                  <a:srgbClr val="24384A"/>
-                </a:solidFill>
-                <a:latin typeface="Lato"/>
-              </a:defRPr>
-            </a:pPr>
-            <a:r>
-              <a:rPr>
-                <a:ea typeface="Microsoft JhengHei"/>
-              </a:rPr>
-              <a:t>and passages.</a:t>
+              <a:defRPr sz="2000" b="1">
+                <a:solidFill>
+                  <a:srgbClr val="155F88"/>
+                </a:solidFill>
+                <a:latin typeface="Lato"/>
+              </a:defRPr>
+            </a:pPr>
+            <a:r>
+              <a:rPr>
+                <a:ea typeface="Microsoft JhengHei"/>
+              </a:rPr>
+              <a:t>Semantic analysis</a:t>
             </a:r>
           </a:p>
         </p:txBody>
@@ -17258,8 +16592,8 @@
         </p:nvSpPr>
         <p:spPr>
           <a:xfrm>
-            <a:off x="3533775" y="2981325"/>
-            <a:ext cx="2266950" cy="495299"/>
+            <a:off x="3533775" y="3657600"/>
+            <a:ext cx="2266950" cy="723900"/>
           </a:xfrm>
           <a:prstGeom prst="rect">
             <a:avLst/>
@@ -17282,18 +16616,43 @@
               <a:spcAft>
                 <a:spcPts val="0"/>
               </a:spcAft>
-              <a:defRPr sz="2000" b="1">
-                <a:solidFill>
-                  <a:srgbClr val="155F88"/>
-                </a:solidFill>
-                <a:latin typeface="Lato"/>
-              </a:defRPr>
-            </a:pPr>
-            <a:r>
-              <a:rPr>
-                <a:ea typeface="Microsoft JhengHei"/>
-              </a:rPr>
-              <a:t>Semantic analysis</a:t>
+              <a:defRPr sz="1900" b="0">
+                <a:solidFill>
+                  <a:srgbClr val="24384A"/>
+                </a:solidFill>
+                <a:latin typeface="Lato"/>
+              </a:defRPr>
+            </a:pPr>
+            <a:r>
+              <a:rPr>
+                <a:ea typeface="Microsoft JhengHei"/>
+              </a:rPr>
+              <a:t>Find passages with</a:t>
+            </a:r>
+          </a:p>
+          <a:p>
+            <a:pPr>
+              <a:lnSpc>
+                <a:spcPct val="118000"/>
+              </a:lnSpc>
+              <a:spcBef>
+                <a:spcPts val="0"/>
+              </a:spcBef>
+              <a:spcAft>
+                <a:spcPts val="0"/>
+              </a:spcAft>
+              <a:defRPr sz="1900" b="0">
+                <a:solidFill>
+                  <a:srgbClr val="24384A"/>
+                </a:solidFill>
+                <a:latin typeface="Lato"/>
+              </a:defRPr>
+            </a:pPr>
+            <a:r>
+              <a:rPr>
+                <a:ea typeface="Microsoft JhengHei"/>
+              </a:rPr>
+              <a:t>related content.</a:t>
             </a:r>
           </a:p>
         </p:txBody>
@@ -17306,8 +16665,8 @@
         </p:nvSpPr>
         <p:spPr>
           <a:xfrm>
-            <a:off x="3533775" y="3657600"/>
-            <a:ext cx="2266950" cy="723900"/>
+            <a:off x="6391275" y="2981325"/>
+            <a:ext cx="2266950" cy="495299"/>
           </a:xfrm>
           <a:prstGeom prst="rect">
             <a:avLst/>
@@ -17330,43 +16689,18 @@
               <a:spcAft>
                 <a:spcPts val="0"/>
               </a:spcAft>
-              <a:defRPr sz="1900" b="0">
-                <a:solidFill>
-                  <a:srgbClr val="24384A"/>
-                </a:solidFill>
-                <a:latin typeface="Lato"/>
-              </a:defRPr>
-            </a:pPr>
-            <a:r>
-              <a:rPr>
-                <a:ea typeface="Microsoft JhengHei"/>
-              </a:rPr>
-              <a:t>Find passages with</a:t>
-            </a:r>
-          </a:p>
-          <a:p>
-            <a:pPr>
-              <a:lnSpc>
-                <a:spcPct val="118000"/>
-              </a:lnSpc>
-              <a:spcBef>
-                <a:spcPts val="0"/>
-              </a:spcBef>
-              <a:spcAft>
-                <a:spcPts val="0"/>
-              </a:spcAft>
-              <a:defRPr sz="1900" b="0">
-                <a:solidFill>
-                  <a:srgbClr val="24384A"/>
-                </a:solidFill>
-                <a:latin typeface="Lato"/>
-              </a:defRPr>
-            </a:pPr>
-            <a:r>
-              <a:rPr>
-                <a:ea typeface="Microsoft JhengHei"/>
-              </a:rPr>
-              <a:t>related content.</a:t>
+              <a:defRPr sz="2000" b="1">
+                <a:solidFill>
+                  <a:srgbClr val="80511B"/>
+                </a:solidFill>
+                <a:latin typeface="Lato"/>
+              </a:defRPr>
+            </a:pPr>
+            <a:r>
+              <a:rPr>
+                <a:ea typeface="Microsoft JhengHei"/>
+              </a:rPr>
+              <a:t>Alignment</a:t>
             </a:r>
           </a:p>
         </p:txBody>
@@ -17379,8 +16713,8 @@
         </p:nvSpPr>
         <p:spPr>
           <a:xfrm>
-            <a:off x="6391275" y="2981325"/>
-            <a:ext cx="2266950" cy="495299"/>
+            <a:off x="6391275" y="3657600"/>
+            <a:ext cx="2266950" cy="723900"/>
           </a:xfrm>
           <a:prstGeom prst="rect">
             <a:avLst/>
@@ -17403,18 +16737,43 @@
               <a:spcAft>
                 <a:spcPts val="0"/>
               </a:spcAft>
-              <a:defRPr sz="2000" b="1">
-                <a:solidFill>
-                  <a:srgbClr val="80511B"/>
-                </a:solidFill>
-                <a:latin typeface="Lato"/>
-              </a:defRPr>
-            </a:pPr>
-            <a:r>
-              <a:rPr>
-                <a:ea typeface="Microsoft JhengHei"/>
-              </a:rPr>
-              <a:t>Alignment</a:t>
+              <a:defRPr sz="1800" b="0">
+                <a:solidFill>
+                  <a:srgbClr val="24384A"/>
+                </a:solidFill>
+                <a:latin typeface="Lato"/>
+              </a:defRPr>
+            </a:pPr>
+            <a:r>
+              <a:rPr>
+                <a:ea typeface="Microsoft JhengHei"/>
+              </a:rPr>
+              <a:t>Locate matching</a:t>
+            </a:r>
+          </a:p>
+          <a:p>
+            <a:pPr>
+              <a:lnSpc>
+                <a:spcPct val="118000"/>
+              </a:lnSpc>
+              <a:spcBef>
+                <a:spcPts val="0"/>
+              </a:spcBef>
+              <a:spcAft>
+                <a:spcPts val="0"/>
+              </a:spcAft>
+              <a:defRPr sz="1800" b="0">
+                <a:solidFill>
+                  <a:srgbClr val="24384A"/>
+                </a:solidFill>
+                <a:latin typeface="Lato"/>
+              </a:defRPr>
+            </a:pPr>
+            <a:r>
+              <a:rPr>
+                <a:ea typeface="Microsoft JhengHei"/>
+              </a:rPr>
+              <a:t>wording and positions.</a:t>
             </a:r>
           </a:p>
         </p:txBody>
@@ -17427,8 +16786,8 @@
         </p:nvSpPr>
         <p:spPr>
           <a:xfrm>
-            <a:off x="6391275" y="3657600"/>
-            <a:ext cx="2266950" cy="723900"/>
+            <a:off x="9248775" y="2981325"/>
+            <a:ext cx="2266950" cy="495299"/>
           </a:xfrm>
           <a:prstGeom prst="rect">
             <a:avLst/>
@@ -17451,43 +16810,18 @@
               <a:spcAft>
                 <a:spcPts val="0"/>
               </a:spcAft>
-              <a:defRPr sz="1800" b="0">
-                <a:solidFill>
-                  <a:srgbClr val="24384A"/>
-                </a:solidFill>
-                <a:latin typeface="Lato"/>
-              </a:defRPr>
-            </a:pPr>
-            <a:r>
-              <a:rPr>
-                <a:ea typeface="Microsoft JhengHei"/>
-              </a:rPr>
-              <a:t>Locate matching</a:t>
-            </a:r>
-          </a:p>
-          <a:p>
-            <a:pPr>
-              <a:lnSpc>
-                <a:spcPct val="118000"/>
-              </a:lnSpc>
-              <a:spcBef>
-                <a:spcPts val="0"/>
-              </a:spcBef>
-              <a:spcAft>
-                <a:spcPts val="0"/>
-              </a:spcAft>
-              <a:defRPr sz="1800" b="0">
-                <a:solidFill>
-                  <a:srgbClr val="24384A"/>
-                </a:solidFill>
-                <a:latin typeface="Lato"/>
-              </a:defRPr>
-            </a:pPr>
-            <a:r>
-              <a:rPr>
-                <a:ea typeface="Microsoft JhengHei"/>
-              </a:rPr>
-              <a:t>wording and positions.</a:t>
+              <a:defRPr sz="2000" b="1">
+                <a:solidFill>
+                  <a:srgbClr val="65439A"/>
+                </a:solidFill>
+                <a:latin typeface="Lato"/>
+              </a:defRPr>
+            </a:pPr>
+            <a:r>
+              <a:rPr>
+                <a:ea typeface="Microsoft JhengHei"/>
+              </a:rPr>
+              <a:t>Interpretation</a:t>
             </a:r>
           </a:p>
         </p:txBody>
@@ -17500,8 +16834,8 @@
         </p:nvSpPr>
         <p:spPr>
           <a:xfrm>
-            <a:off x="9248775" y="2981325"/>
-            <a:ext cx="2266950" cy="495299"/>
+            <a:off x="9248775" y="3657600"/>
+            <a:ext cx="2266950" cy="723900"/>
           </a:xfrm>
           <a:prstGeom prst="rect">
             <a:avLst/>
@@ -17524,18 +16858,43 @@
               <a:spcAft>
                 <a:spcPts val="0"/>
               </a:spcAft>
-              <a:defRPr sz="2000" b="1">
-                <a:solidFill>
-                  <a:srgbClr val="65439A"/>
-                </a:solidFill>
-                <a:latin typeface="Lato"/>
-              </a:defRPr>
-            </a:pPr>
-            <a:r>
-              <a:rPr>
-                <a:ea typeface="Microsoft JhengHei"/>
-              </a:rPr>
-              <a:t>Interpretation</a:t>
+              <a:defRPr sz="1900" b="0">
+                <a:solidFill>
+                  <a:srgbClr val="24384A"/>
+                </a:solidFill>
+                <a:latin typeface="Lato"/>
+              </a:defRPr>
+            </a:pPr>
+            <a:r>
+              <a:rPr>
+                <a:ea typeface="Microsoft JhengHei"/>
+              </a:rPr>
+              <a:t>Propose explanations</a:t>
+            </a:r>
+          </a:p>
+          <a:p>
+            <a:pPr>
+              <a:lnSpc>
+                <a:spcPct val="118000"/>
+              </a:lnSpc>
+              <a:spcBef>
+                <a:spcPts val="0"/>
+              </a:spcBef>
+              <a:spcAft>
+                <a:spcPts val="0"/>
+              </a:spcAft>
+              <a:defRPr sz="1900" b="0">
+                <a:solidFill>
+                  <a:srgbClr val="24384A"/>
+                </a:solidFill>
+                <a:latin typeface="Lato"/>
+              </a:defRPr>
+            </a:pPr>
+            <a:r>
+              <a:rPr>
+                <a:ea typeface="Microsoft JhengHei"/>
+              </a:rPr>
+              <a:t>and alternatives.</a:t>
             </a:r>
           </a:p>
         </p:txBody>
@@ -17548,8 +16907,8 @@
         </p:nvSpPr>
         <p:spPr>
           <a:xfrm>
-            <a:off x="9248775" y="3657600"/>
-            <a:ext cx="2266950" cy="723900"/>
+            <a:off x="723900" y="5143500"/>
+            <a:ext cx="2762250" cy="428625"/>
           </a:xfrm>
           <a:prstGeom prst="rect">
             <a:avLst/>
@@ -17572,43 +16931,18 @@
               <a:spcAft>
                 <a:spcPts val="0"/>
               </a:spcAft>
-              <a:defRPr sz="1900" b="0">
-                <a:solidFill>
-                  <a:srgbClr val="24384A"/>
-                </a:solidFill>
-                <a:latin typeface="Lato"/>
-              </a:defRPr>
-            </a:pPr>
-            <a:r>
-              <a:rPr>
-                <a:ea typeface="Microsoft JhengHei"/>
-              </a:rPr>
-              <a:t>Propose explanations</a:t>
-            </a:r>
-          </a:p>
-          <a:p>
-            <a:pPr>
-              <a:lnSpc>
-                <a:spcPct val="118000"/>
-              </a:lnSpc>
-              <a:spcBef>
-                <a:spcPts val="0"/>
-              </a:spcBef>
-              <a:spcAft>
-                <a:spcPts val="0"/>
-              </a:spcAft>
-              <a:defRPr sz="1900" b="0">
-                <a:solidFill>
-                  <a:srgbClr val="24384A"/>
-                </a:solidFill>
-                <a:latin typeface="Lato"/>
-              </a:defRPr>
-            </a:pPr>
-            <a:r>
-              <a:rPr>
-                <a:ea typeface="Microsoft JhengHei"/>
-              </a:rPr>
-              <a:t>and alternatives.</a:t>
+              <a:defRPr sz="2300" b="1">
+                <a:solidFill>
+                  <a:srgbClr val="146C68"/>
+                </a:solidFill>
+                <a:latin typeface="Lato"/>
+              </a:defRPr>
+            </a:pPr>
+            <a:r>
+              <a:rPr>
+                <a:ea typeface="Microsoft JhengHei"/>
+              </a:rPr>
+              <a:t>Provenance</a:t>
             </a:r>
           </a:p>
         </p:txBody>
@@ -17621,8 +16955,8 @@
         </p:nvSpPr>
         <p:spPr>
           <a:xfrm>
-            <a:off x="723900" y="5143500"/>
-            <a:ext cx="2762250" cy="428625"/>
+            <a:off x="3810000" y="5143500"/>
+            <a:ext cx="7524749" cy="457200"/>
           </a:xfrm>
           <a:prstGeom prst="rect">
             <a:avLst/>
@@ -17645,18 +16979,18 @@
               <a:spcAft>
                 <a:spcPts val="0"/>
               </a:spcAft>
-              <a:defRPr sz="2300" b="1">
-                <a:solidFill>
-                  <a:srgbClr val="146C68"/>
-                </a:solidFill>
-                <a:latin typeface="Lato"/>
-              </a:defRPr>
-            </a:pPr>
-            <a:r>
-              <a:rPr>
-                <a:ea typeface="Microsoft JhengHei"/>
-              </a:rPr>
-              <a:t>Provenance</a:t>
+              <a:defRPr sz="2300" b="0">
+                <a:solidFill>
+                  <a:srgbClr val="24384A"/>
+                </a:solidFill>
+                <a:latin typeface="Lato"/>
+              </a:defRPr>
+            </a:pPr>
+            <a:r>
+              <a:rPr>
+                <a:ea typeface="Microsoft JhengHei"/>
+              </a:rPr>
+              <a:t>Keep sources and checks attached to proposals.</a:t>
             </a:r>
           </a:p>
         </p:txBody>
@@ -17669,8 +17003,8 @@
         </p:nvSpPr>
         <p:spPr>
           <a:xfrm>
-            <a:off x="3810000" y="5143500"/>
-            <a:ext cx="7524749" cy="457200"/>
+            <a:off x="723900" y="5610225"/>
+            <a:ext cx="2952750" cy="381000"/>
           </a:xfrm>
           <a:prstGeom prst="rect">
             <a:avLst/>
@@ -17693,18 +17027,18 @@
               <a:spcAft>
                 <a:spcPts val="0"/>
               </a:spcAft>
-              <a:defRPr sz="2300" b="0">
-                <a:solidFill>
-                  <a:srgbClr val="24384A"/>
-                </a:solidFill>
-                <a:latin typeface="Lato"/>
-              </a:defRPr>
-            </a:pPr>
-            <a:r>
-              <a:rPr>
-                <a:ea typeface="Microsoft JhengHei"/>
-              </a:rPr>
-              <a:t>Keep sources and checks attached to proposals.</a:t>
+              <a:defRPr sz="2100" b="1">
+                <a:solidFill>
+                  <a:srgbClr val="146C68"/>
+                </a:solidFill>
+                <a:latin typeface="Lato"/>
+              </a:defRPr>
+            </a:pPr>
+            <a:r>
+              <a:rPr>
+                <a:ea typeface="Microsoft JhengHei"/>
+              </a:rPr>
+              <a:t>Researcher decisions</a:t>
             </a:r>
           </a:p>
         </p:txBody>
@@ -17717,8 +17051,8 @@
         </p:nvSpPr>
         <p:spPr>
           <a:xfrm>
-            <a:off x="723900" y="5610225"/>
-            <a:ext cx="2952750" cy="381000"/>
+            <a:off x="3810000" y="5610225"/>
+            <a:ext cx="7524749" cy="400050"/>
           </a:xfrm>
           <a:prstGeom prst="rect">
             <a:avLst/>
@@ -17741,54 +17075,6 @@
               <a:spcAft>
                 <a:spcPts val="0"/>
               </a:spcAft>
-              <a:defRPr sz="2100" b="1">
-                <a:solidFill>
-                  <a:srgbClr val="146C68"/>
-                </a:solidFill>
-                <a:latin typeface="Lato"/>
-              </a:defRPr>
-            </a:pPr>
-            <a:r>
-              <a:rPr>
-                <a:ea typeface="Microsoft JhengHei"/>
-              </a:rPr>
-              <a:t>Researcher decisions</a:t>
-            </a:r>
-          </a:p>
-        </p:txBody>
-      </p:sp>
-      <p:sp>
-        <p:nvSpPr>
-          <p:cNvPr id="16" name="TextBox 15"/>
-          <p:cNvSpPr txBox="1"/>
-          <p:nvPr/>
-        </p:nvSpPr>
-        <p:spPr>
-          <a:xfrm>
-            <a:off x="3810000" y="5610225"/>
-            <a:ext cx="7524749" cy="400050"/>
-          </a:xfrm>
-          <a:prstGeom prst="rect">
-            <a:avLst/>
-          </a:prstGeom>
-          <a:noFill/>
-        </p:spPr>
-        <p:txBody>
-          <a:bodyPr wrap="square" lIns="0" rIns="0" tIns="0" bIns="0">
-            <a:spAutoFit/>
-          </a:bodyPr>
-          <a:lstStyle/>
-          <a:p>
-            <a:pPr>
-              <a:lnSpc>
-                <a:spcPct val="118000"/>
-              </a:lnSpc>
-              <a:spcBef>
-                <a:spcPts val="0"/>
-              </a:spcBef>
-              <a:spcAft>
-                <a:spcPts val="0"/>
-              </a:spcAft>
               <a:defRPr sz="2200" b="0">
                 <a:solidFill>
                   <a:srgbClr val="24384A"/>
@@ -17807,7 +17093,7 @@
       </p:sp>
       <p:sp>
         <p:nvSpPr>
-          <p:cNvPr id="17" name="Rectangle 16"/>
+          <p:cNvPr id="16" name="Rectangle 15"/>
           <p:cNvSpPr/>
           <p:nvPr/>
         </p:nvSpPr>
@@ -17852,7 +17138,7 @@
       </p:sp>
       <p:sp>
         <p:nvSpPr>
-          <p:cNvPr id="18" name="TextBox 17"/>
+          <p:cNvPr id="17" name="TextBox 16"/>
           <p:cNvSpPr txBox="1"/>
           <p:nvPr/>
         </p:nvSpPr>
@@ -17924,8 +17210,8 @@
         </p:nvSpPr>
         <p:spPr>
           <a:xfrm>
-            <a:off x="495299" y="238125"/>
-            <a:ext cx="10953750" cy="266700"/>
+            <a:off x="495299" y="742950"/>
+            <a:ext cx="11144250" cy="1047749"/>
           </a:xfrm>
           <a:prstGeom prst="rect">
             <a:avLst/>
@@ -17948,54 +17234,6 @@
               <a:spcAft>
                 <a:spcPts val="0"/>
               </a:spcAft>
-              <a:defRPr sz="1300" b="1">
-                <a:solidFill>
-                  <a:srgbClr val="146C68"/>
-                </a:solidFill>
-                <a:latin typeface="Lato"/>
-              </a:defRPr>
-            </a:pPr>
-            <a:r>
-              <a:rPr>
-                <a:ea typeface="Microsoft JhengHei"/>
-              </a:rPr>
-              <a:t>Five tabs</a:t>
-            </a:r>
-          </a:p>
-        </p:txBody>
-      </p:sp>
-      <p:sp>
-        <p:nvSpPr>
-          <p:cNvPr id="3" name="TextBox 2"/>
-          <p:cNvSpPr txBox="1"/>
-          <p:nvPr/>
-        </p:nvSpPr>
-        <p:spPr>
-          <a:xfrm>
-            <a:off x="495299" y="742950"/>
-            <a:ext cx="11144250" cy="1047749"/>
-          </a:xfrm>
-          <a:prstGeom prst="rect">
-            <a:avLst/>
-          </a:prstGeom>
-          <a:noFill/>
-        </p:spPr>
-        <p:txBody>
-          <a:bodyPr wrap="square" lIns="0" rIns="0" tIns="0" bIns="0">
-            <a:spAutoFit/>
-          </a:bodyPr>
-          <a:lstStyle/>
-          <a:p>
-            <a:pPr>
-              <a:lnSpc>
-                <a:spcPct val="118000"/>
-              </a:lnSpc>
-              <a:spcBef>
-                <a:spcPts val="0"/>
-              </a:spcBef>
-              <a:spcAft>
-                <a:spcPts val="0"/>
-              </a:spcAft>
               <a:defRPr sz="3200" b="1">
                 <a:solidFill>
                   <a:srgbClr val="24384A"/>
@@ -18014,7 +17252,7 @@
       </p:sp>
       <p:sp>
         <p:nvSpPr>
-          <p:cNvPr id="4" name="Rectangle 3"/>
+          <p:cNvPr id="3" name="Rectangle 2"/>
           <p:cNvSpPr/>
           <p:nvPr/>
         </p:nvSpPr>
@@ -18059,7 +17297,7 @@
       </p:sp>
       <p:sp>
         <p:nvSpPr>
-          <p:cNvPr id="5" name="TextBox 4"/>
+          <p:cNvPr id="4" name="TextBox 3"/>
           <p:cNvSpPr txBox="1"/>
           <p:nvPr/>
         </p:nvSpPr>
@@ -18107,7 +17345,7 @@
       </p:sp>
       <p:sp>
         <p:nvSpPr>
-          <p:cNvPr id="6" name="TextBox 5"/>
+          <p:cNvPr id="5" name="TextBox 4"/>
           <p:cNvSpPr txBox="1"/>
           <p:nvPr/>
         </p:nvSpPr>
@@ -18155,7 +17393,7 @@
       </p:sp>
       <p:sp>
         <p:nvSpPr>
-          <p:cNvPr id="7" name="TextBox 6"/>
+          <p:cNvPr id="6" name="TextBox 5"/>
           <p:cNvSpPr txBox="1"/>
           <p:nvPr/>
         </p:nvSpPr>
@@ -18203,7 +17441,7 @@
       </p:sp>
       <p:sp>
         <p:nvSpPr>
-          <p:cNvPr id="8" name="TextBox 7"/>
+          <p:cNvPr id="7" name="TextBox 6"/>
           <p:cNvSpPr txBox="1"/>
           <p:nvPr/>
         </p:nvSpPr>
@@ -18251,7 +17489,7 @@
       </p:sp>
       <p:sp>
         <p:nvSpPr>
-          <p:cNvPr id="9" name="TextBox 8"/>
+          <p:cNvPr id="8" name="TextBox 7"/>
           <p:cNvSpPr txBox="1"/>
           <p:nvPr/>
         </p:nvSpPr>
@@ -18299,7 +17537,7 @@
       </p:sp>
       <p:sp>
         <p:nvSpPr>
-          <p:cNvPr id="10" name="TextBox 9"/>
+          <p:cNvPr id="9" name="TextBox 8"/>
           <p:cNvSpPr txBox="1"/>
           <p:nvPr/>
         </p:nvSpPr>
@@ -18347,7 +17585,7 @@
       </p:sp>
       <p:sp>
         <p:nvSpPr>
-          <p:cNvPr id="11" name="TextBox 10"/>
+          <p:cNvPr id="10" name="TextBox 9"/>
           <p:cNvSpPr txBox="1"/>
           <p:nvPr/>
         </p:nvSpPr>
@@ -18395,7 +17633,7 @@
       </p:sp>
       <p:sp>
         <p:nvSpPr>
-          <p:cNvPr id="12" name="TextBox 11"/>
+          <p:cNvPr id="11" name="TextBox 10"/>
           <p:cNvSpPr txBox="1"/>
           <p:nvPr/>
         </p:nvSpPr>
@@ -18443,7 +17681,7 @@
       </p:sp>
       <p:sp>
         <p:nvSpPr>
-          <p:cNvPr id="13" name="TextBox 12"/>
+          <p:cNvPr id="12" name="TextBox 11"/>
           <p:cNvSpPr txBox="1"/>
           <p:nvPr/>
         </p:nvSpPr>
@@ -18491,7 +17729,7 @@
       </p:sp>
       <p:sp>
         <p:nvSpPr>
-          <p:cNvPr id="14" name="TextBox 13"/>
+          <p:cNvPr id="13" name="TextBox 12"/>
           <p:cNvSpPr txBox="1"/>
           <p:nvPr/>
         </p:nvSpPr>
@@ -18539,7 +17777,7 @@
       </p:sp>
       <p:sp>
         <p:nvSpPr>
-          <p:cNvPr id="15" name="TextBox 14"/>
+          <p:cNvPr id="14" name="TextBox 13"/>
           <p:cNvSpPr txBox="1"/>
           <p:nvPr/>
         </p:nvSpPr>
@@ -18611,8 +17849,8 @@
         </p:nvSpPr>
         <p:spPr>
           <a:xfrm>
-            <a:off x="495299" y="238125"/>
-            <a:ext cx="10953750" cy="266700"/>
+            <a:off x="495299" y="742950"/>
+            <a:ext cx="11144250" cy="1047749"/>
           </a:xfrm>
           <a:prstGeom prst="rect">
             <a:avLst/>
@@ -18635,18 +17873,18 @@
               <a:spcAft>
                 <a:spcPts val="0"/>
               </a:spcAft>
-              <a:defRPr sz="1300" b="1">
-                <a:solidFill>
-                  <a:srgbClr val="146C68"/>
-                </a:solidFill>
-                <a:latin typeface="Lato"/>
-              </a:defRPr>
-            </a:pPr>
-            <a:r>
-              <a:rPr>
-                <a:ea typeface="Microsoft JhengHei"/>
-              </a:rPr>
-              <a:t>Chinese Buddhist texts over time</a:t>
+              <a:defRPr sz="3200" b="1">
+                <a:solidFill>
+                  <a:srgbClr val="24384A"/>
+                </a:solidFill>
+                <a:latin typeface="Lato"/>
+              </a:defRPr>
+            </a:pPr>
+            <a:r>
+              <a:rPr>
+                <a:ea typeface="Microsoft JhengHei"/>
+              </a:rPr>
+              <a:t>Example research questions</a:t>
             </a:r>
           </a:p>
         </p:txBody>
@@ -18659,8 +17897,8 @@
         </p:nvSpPr>
         <p:spPr>
           <a:xfrm>
-            <a:off x="495299" y="742950"/>
-            <a:ext cx="11144250" cy="1047749"/>
+            <a:off x="714375" y="2152650"/>
+            <a:ext cx="4905375" cy="476250"/>
           </a:xfrm>
           <a:prstGeom prst="rect">
             <a:avLst/>
@@ -18683,18 +17921,18 @@
               <a:spcAft>
                 <a:spcPts val="0"/>
               </a:spcAft>
-              <a:defRPr sz="3200" b="1">
-                <a:solidFill>
-                  <a:srgbClr val="24384A"/>
-                </a:solidFill>
-                <a:latin typeface="Lato"/>
-              </a:defRPr>
-            </a:pPr>
-            <a:r>
-              <a:rPr>
-                <a:ea typeface="Microsoft JhengHei"/>
-              </a:rPr>
-              <a:t>Example research questions</a:t>
+              <a:defRPr sz="2300" b="1">
+                <a:solidFill>
+                  <a:srgbClr val="155F88"/>
+                </a:solidFill>
+                <a:latin typeface="Lato"/>
+              </a:defRPr>
+            </a:pPr>
+            <a:r>
+              <a:rPr>
+                <a:ea typeface="Microsoft JhengHei"/>
+              </a:rPr>
+              <a:t>Two Lotus translations</a:t>
             </a:r>
           </a:p>
         </p:txBody>
@@ -18707,8 +17945,8 @@
         </p:nvSpPr>
         <p:spPr>
           <a:xfrm>
-            <a:off x="714375" y="2152650"/>
-            <a:ext cx="4905375" cy="476250"/>
+            <a:off x="714375" y="2762250"/>
+            <a:ext cx="4905375" cy="2095499"/>
           </a:xfrm>
           <a:prstGeom prst="rect">
             <a:avLst/>
@@ -18731,18 +17969,112 @@
               <a:spcAft>
                 <a:spcPts val="0"/>
               </a:spcAft>
-              <a:defRPr sz="2300" b="1">
-                <a:solidFill>
-                  <a:srgbClr val="155F88"/>
-                </a:solidFill>
-                <a:latin typeface="Lato"/>
-              </a:defRPr>
-            </a:pPr>
-            <a:r>
-              <a:rPr>
-                <a:ea typeface="Microsoft JhengHei"/>
-              </a:rPr>
-              <a:t>Two Lotus translations</a:t>
+              <a:defRPr sz="2100" b="0">
+                <a:solidFill>
+                  <a:srgbClr val="24384A"/>
+                </a:solidFill>
+                <a:latin typeface="Lato"/>
+              </a:defRPr>
+            </a:pPr>
+            <a:r>
+              <a:rPr>
+                <a:ea typeface="Microsoft JhengHei"/>
+              </a:rPr>
+              <a:t>Dharmarakṣa 竺法護 · T0263</a:t>
+            </a:r>
+          </a:p>
+          <a:p>
+            <a:pPr>
+              <a:lnSpc>
+                <a:spcPct val="118000"/>
+              </a:lnSpc>
+              <a:spcBef>
+                <a:spcPts val="0"/>
+              </a:spcBef>
+              <a:spcAft>
+                <a:spcPts val="0"/>
+              </a:spcAft>
+              <a:defRPr sz="2100" b="0">
+                <a:solidFill>
+                  <a:srgbClr val="24384A"/>
+                </a:solidFill>
+                <a:latin typeface="Lato"/>
+              </a:defRPr>
+            </a:pPr>
+            <a:r>
+              <a:rPr>
+                <a:ea typeface="Microsoft JhengHei"/>
+              </a:rPr>
+              <a:t>Kumārajīva 鳩摩羅什 · T0262</a:t>
+            </a:r>
+          </a:p>
+          <a:p>
+            <a:pPr>
+              <a:lnSpc>
+                <a:spcPct val="118000"/>
+              </a:lnSpc>
+              <a:spcBef>
+                <a:spcPts val="0"/>
+              </a:spcBef>
+              <a:spcAft>
+                <a:spcPts val="0"/>
+              </a:spcAft>
+              <a:defRPr sz="2100" b="0">
+                <a:solidFill>
+                  <a:srgbClr val="24384A"/>
+                </a:solidFill>
+                <a:latin typeface="Lato"/>
+              </a:defRPr>
+            </a:pPr>
+          </a:p>
+          <a:p>
+            <a:pPr>
+              <a:lnSpc>
+                <a:spcPct val="118000"/>
+              </a:lnSpc>
+              <a:spcBef>
+                <a:spcPts val="0"/>
+              </a:spcBef>
+              <a:spcAft>
+                <a:spcPts val="0"/>
+              </a:spcAft>
+              <a:defRPr sz="2100" b="0">
+                <a:solidFill>
+                  <a:srgbClr val="24384A"/>
+                </a:solidFill>
+                <a:latin typeface="Lato"/>
+              </a:defRPr>
+            </a:pPr>
+            <a:r>
+              <a:rPr>
+                <a:ea typeface="Microsoft JhengHei"/>
+              </a:rPr>
+              <a:t>Can we find related passages</a:t>
+            </a:r>
+          </a:p>
+          <a:p>
+            <a:pPr>
+              <a:lnSpc>
+                <a:spcPct val="118000"/>
+              </a:lnSpc>
+              <a:spcBef>
+                <a:spcPts val="0"/>
+              </a:spcBef>
+              <a:spcAft>
+                <a:spcPts val="0"/>
+              </a:spcAft>
+              <a:defRPr sz="2100" b="0">
+                <a:solidFill>
+                  <a:srgbClr val="24384A"/>
+                </a:solidFill>
+                <a:latin typeface="Lato"/>
+              </a:defRPr>
+            </a:pPr>
+            <a:r>
+              <a:rPr>
+                <a:ea typeface="Microsoft JhengHei"/>
+              </a:rPr>
+              <a:t>when the wording differs?</a:t>
             </a:r>
           </a:p>
         </p:txBody>
@@ -18755,8 +18087,8 @@
         </p:nvSpPr>
         <p:spPr>
           <a:xfrm>
-            <a:off x="714375" y="2762250"/>
-            <a:ext cx="4905375" cy="2095499"/>
+            <a:off x="6524625" y="2152650"/>
+            <a:ext cx="4905375" cy="476250"/>
           </a:xfrm>
           <a:prstGeom prst="rect">
             <a:avLst/>
@@ -18779,112 +18111,18 @@
               <a:spcAft>
                 <a:spcPts val="0"/>
               </a:spcAft>
-              <a:defRPr sz="2100" b="0">
-                <a:solidFill>
-                  <a:srgbClr val="24384A"/>
-                </a:solidFill>
-                <a:latin typeface="Lato"/>
-              </a:defRPr>
-            </a:pPr>
-            <a:r>
-              <a:rPr>
-                <a:ea typeface="Microsoft JhengHei"/>
-              </a:rPr>
-              <a:t>Dharmarakṣa 竺法護 · T0263</a:t>
-            </a:r>
-          </a:p>
-          <a:p>
-            <a:pPr>
-              <a:lnSpc>
-                <a:spcPct val="118000"/>
-              </a:lnSpc>
-              <a:spcBef>
-                <a:spcPts val="0"/>
-              </a:spcBef>
-              <a:spcAft>
-                <a:spcPts val="0"/>
-              </a:spcAft>
-              <a:defRPr sz="2100" b="0">
-                <a:solidFill>
-                  <a:srgbClr val="24384A"/>
-                </a:solidFill>
-                <a:latin typeface="Lato"/>
-              </a:defRPr>
-            </a:pPr>
-            <a:r>
-              <a:rPr>
-                <a:ea typeface="Microsoft JhengHei"/>
-              </a:rPr>
-              <a:t>Kumārajīva 鳩摩羅什 · T0262</a:t>
-            </a:r>
-          </a:p>
-          <a:p>
-            <a:pPr>
-              <a:lnSpc>
-                <a:spcPct val="118000"/>
-              </a:lnSpc>
-              <a:spcBef>
-                <a:spcPts val="0"/>
-              </a:spcBef>
-              <a:spcAft>
-                <a:spcPts val="0"/>
-              </a:spcAft>
-              <a:defRPr sz="2100" b="0">
-                <a:solidFill>
-                  <a:srgbClr val="24384A"/>
-                </a:solidFill>
-                <a:latin typeface="Lato"/>
-              </a:defRPr>
-            </a:pPr>
-          </a:p>
-          <a:p>
-            <a:pPr>
-              <a:lnSpc>
-                <a:spcPct val="118000"/>
-              </a:lnSpc>
-              <a:spcBef>
-                <a:spcPts val="0"/>
-              </a:spcBef>
-              <a:spcAft>
-                <a:spcPts val="0"/>
-              </a:spcAft>
-              <a:defRPr sz="2100" b="0">
-                <a:solidFill>
-                  <a:srgbClr val="24384A"/>
-                </a:solidFill>
-                <a:latin typeface="Lato"/>
-              </a:defRPr>
-            </a:pPr>
-            <a:r>
-              <a:rPr>
-                <a:ea typeface="Microsoft JhengHei"/>
-              </a:rPr>
-              <a:t>Can we find related passages</a:t>
-            </a:r>
-          </a:p>
-          <a:p>
-            <a:pPr>
-              <a:lnSpc>
-                <a:spcPct val="118000"/>
-              </a:lnSpc>
-              <a:spcBef>
-                <a:spcPts val="0"/>
-              </a:spcBef>
-              <a:spcAft>
-                <a:spcPts val="0"/>
-              </a:spcAft>
-              <a:defRPr sz="2100" b="0">
-                <a:solidFill>
-                  <a:srgbClr val="24384A"/>
-                </a:solidFill>
-                <a:latin typeface="Lato"/>
-              </a:defRPr>
-            </a:pPr>
-            <a:r>
-              <a:rPr>
-                <a:ea typeface="Microsoft JhengHei"/>
-              </a:rPr>
-              <a:t>when the wording differs?</a:t>
+              <a:defRPr sz="2300" b="1">
+                <a:solidFill>
+                  <a:srgbClr val="80511B"/>
+                </a:solidFill>
+                <a:latin typeface="Lato"/>
+              </a:defRPr>
+            </a:pPr>
+            <a:r>
+              <a:rPr>
+                <a:ea typeface="Microsoft JhengHei"/>
+              </a:rPr>
+              <a:t>Text and later commentary</a:t>
             </a:r>
           </a:p>
         </p:txBody>
@@ -18897,8 +18135,8 @@
         </p:nvSpPr>
         <p:spPr>
           <a:xfrm>
-            <a:off x="6524625" y="2152650"/>
-            <a:ext cx="4905375" cy="476250"/>
+            <a:off x="6524625" y="2762250"/>
+            <a:ext cx="4905375" cy="2095499"/>
           </a:xfrm>
           <a:prstGeom prst="rect">
             <a:avLst/>
@@ -18921,18 +18159,112 @@
               <a:spcAft>
                 <a:spcPts val="0"/>
               </a:spcAft>
-              <a:defRPr sz="2300" b="1">
-                <a:solidFill>
-                  <a:srgbClr val="80511B"/>
-                </a:solidFill>
-                <a:latin typeface="Lato"/>
-              </a:defRPr>
-            </a:pPr>
-            <a:r>
-              <a:rPr>
-                <a:ea typeface="Microsoft JhengHei"/>
-              </a:rPr>
-              <a:t>Text and later commentary</a:t>
+              <a:defRPr sz="2000" b="0">
+                <a:solidFill>
+                  <a:srgbClr val="24384A"/>
+                </a:solidFill>
+                <a:latin typeface="Lato"/>
+              </a:defRPr>
+            </a:pPr>
+            <a:r>
+              <a:rPr>
+                <a:ea typeface="Microsoft JhengHei"/>
+              </a:rPr>
+              <a:t>Yin chi ru jing 陰持入經 · T0603</a:t>
+            </a:r>
+          </a:p>
+          <a:p>
+            <a:pPr>
+              <a:lnSpc>
+                <a:spcPct val="118000"/>
+              </a:lnSpc>
+              <a:spcBef>
+                <a:spcPts val="0"/>
+              </a:spcBef>
+              <a:spcAft>
+                <a:spcPts val="0"/>
+              </a:spcAft>
+              <a:defRPr sz="2000" b="0">
+                <a:solidFill>
+                  <a:srgbClr val="24384A"/>
+                </a:solidFill>
+                <a:latin typeface="Lato"/>
+              </a:defRPr>
+            </a:pPr>
+            <a:r>
+              <a:rPr>
+                <a:ea typeface="Microsoft JhengHei"/>
+              </a:rPr>
+              <a:t>Body, mind and senses</a:t>
+            </a:r>
+          </a:p>
+          <a:p>
+            <a:pPr>
+              <a:lnSpc>
+                <a:spcPct val="118000"/>
+              </a:lnSpc>
+              <a:spcBef>
+                <a:spcPts val="0"/>
+              </a:spcBef>
+              <a:spcAft>
+                <a:spcPts val="0"/>
+              </a:spcAft>
+              <a:defRPr sz="2000" b="0">
+                <a:solidFill>
+                  <a:srgbClr val="24384A"/>
+                </a:solidFill>
+                <a:latin typeface="Lato"/>
+              </a:defRPr>
+            </a:pPr>
+          </a:p>
+          <a:p>
+            <a:pPr>
+              <a:lnSpc>
+                <a:spcPct val="118000"/>
+              </a:lnSpc>
+              <a:spcBef>
+                <a:spcPts val="0"/>
+              </a:spcBef>
+              <a:spcAft>
+                <a:spcPts val="0"/>
+              </a:spcAft>
+              <a:defRPr sz="2000" b="0">
+                <a:solidFill>
+                  <a:srgbClr val="24384A"/>
+                </a:solidFill>
+                <a:latin typeface="Lato"/>
+              </a:defRPr>
+            </a:pPr>
+            <a:r>
+              <a:rPr>
+                <a:ea typeface="Microsoft JhengHei"/>
+              </a:rPr>
+              <a:t>Could shared wording mislead us</a:t>
+            </a:r>
+          </a:p>
+          <a:p>
+            <a:pPr>
+              <a:lnSpc>
+                <a:spcPct val="118000"/>
+              </a:lnSpc>
+              <a:spcBef>
+                <a:spcPts val="0"/>
+              </a:spcBef>
+              <a:spcAft>
+                <a:spcPts val="0"/>
+              </a:spcAft>
+              <a:defRPr sz="2000" b="0">
+                <a:solidFill>
+                  <a:srgbClr val="24384A"/>
+                </a:solidFill>
+                <a:latin typeface="Lato"/>
+              </a:defRPr>
+            </a:pPr>
+            <a:r>
+              <a:rPr>
+                <a:ea typeface="Microsoft JhengHei"/>
+              </a:rPr>
+              <a:t>about who translated this text?</a:t>
             </a:r>
           </a:p>
         </p:txBody>
@@ -18945,8 +18277,8 @@
         </p:nvSpPr>
         <p:spPr>
           <a:xfrm>
-            <a:off x="6524625" y="2762250"/>
-            <a:ext cx="4905375" cy="2095499"/>
+            <a:off x="523874" y="5457825"/>
+            <a:ext cx="11049000" cy="619125"/>
           </a:xfrm>
           <a:prstGeom prst="rect">
             <a:avLst/>
@@ -18969,7 +18301,7 @@
               <a:spcAft>
                 <a:spcPts val="0"/>
               </a:spcAft>
-              <a:defRPr sz="2000" b="0">
+              <a:defRPr sz="2400" b="0">
                 <a:solidFill>
                   <a:srgbClr val="24384A"/>
                 </a:solidFill>
@@ -18980,148 +18312,6 @@
               <a:rPr>
                 <a:ea typeface="Microsoft JhengHei"/>
               </a:rPr>
-              <a:t>Yin chi ru jing 陰持入經 · T0603</a:t>
-            </a:r>
-          </a:p>
-          <a:p>
-            <a:pPr>
-              <a:lnSpc>
-                <a:spcPct val="118000"/>
-              </a:lnSpc>
-              <a:spcBef>
-                <a:spcPts val="0"/>
-              </a:spcBef>
-              <a:spcAft>
-                <a:spcPts val="0"/>
-              </a:spcAft>
-              <a:defRPr sz="2000" b="0">
-                <a:solidFill>
-                  <a:srgbClr val="24384A"/>
-                </a:solidFill>
-                <a:latin typeface="Lato"/>
-              </a:defRPr>
-            </a:pPr>
-            <a:r>
-              <a:rPr>
-                <a:ea typeface="Microsoft JhengHei"/>
-              </a:rPr>
-              <a:t>Body, mind and senses</a:t>
-            </a:r>
-          </a:p>
-          <a:p>
-            <a:pPr>
-              <a:lnSpc>
-                <a:spcPct val="118000"/>
-              </a:lnSpc>
-              <a:spcBef>
-                <a:spcPts val="0"/>
-              </a:spcBef>
-              <a:spcAft>
-                <a:spcPts val="0"/>
-              </a:spcAft>
-              <a:defRPr sz="2000" b="0">
-                <a:solidFill>
-                  <a:srgbClr val="24384A"/>
-                </a:solidFill>
-                <a:latin typeface="Lato"/>
-              </a:defRPr>
-            </a:pPr>
-          </a:p>
-          <a:p>
-            <a:pPr>
-              <a:lnSpc>
-                <a:spcPct val="118000"/>
-              </a:lnSpc>
-              <a:spcBef>
-                <a:spcPts val="0"/>
-              </a:spcBef>
-              <a:spcAft>
-                <a:spcPts val="0"/>
-              </a:spcAft>
-              <a:defRPr sz="2000" b="0">
-                <a:solidFill>
-                  <a:srgbClr val="24384A"/>
-                </a:solidFill>
-                <a:latin typeface="Lato"/>
-              </a:defRPr>
-            </a:pPr>
-            <a:r>
-              <a:rPr>
-                <a:ea typeface="Microsoft JhengHei"/>
-              </a:rPr>
-              <a:t>Could shared wording mislead us</a:t>
-            </a:r>
-          </a:p>
-          <a:p>
-            <a:pPr>
-              <a:lnSpc>
-                <a:spcPct val="118000"/>
-              </a:lnSpc>
-              <a:spcBef>
-                <a:spcPts val="0"/>
-              </a:spcBef>
-              <a:spcAft>
-                <a:spcPts val="0"/>
-              </a:spcAft>
-              <a:defRPr sz="2000" b="0">
-                <a:solidFill>
-                  <a:srgbClr val="24384A"/>
-                </a:solidFill>
-                <a:latin typeface="Lato"/>
-              </a:defRPr>
-            </a:pPr>
-            <a:r>
-              <a:rPr>
-                <a:ea typeface="Microsoft JhengHei"/>
-              </a:rPr>
-              <a:t>about who translated this text?</a:t>
-            </a:r>
-          </a:p>
-        </p:txBody>
-      </p:sp>
-      <p:sp>
-        <p:nvSpPr>
-          <p:cNvPr id="8" name="TextBox 7"/>
-          <p:cNvSpPr txBox="1"/>
-          <p:nvPr/>
-        </p:nvSpPr>
-        <p:spPr>
-          <a:xfrm>
-            <a:off x="523874" y="5457825"/>
-            <a:ext cx="11049000" cy="619125"/>
-          </a:xfrm>
-          <a:prstGeom prst="rect">
-            <a:avLst/>
-          </a:prstGeom>
-          <a:noFill/>
-        </p:spPr>
-        <p:txBody>
-          <a:bodyPr wrap="square" lIns="0" rIns="0" tIns="0" bIns="0">
-            <a:spAutoFit/>
-          </a:bodyPr>
-          <a:lstStyle/>
-          <a:p>
-            <a:pPr>
-              <a:lnSpc>
-                <a:spcPct val="118000"/>
-              </a:lnSpc>
-              <a:spcBef>
-                <a:spcPts val="0"/>
-              </a:spcBef>
-              <a:spcAft>
-                <a:spcPts val="0"/>
-              </a:spcAft>
-              <a:defRPr sz="2400" b="0">
-                <a:solidFill>
-                  <a:srgbClr val="24384A"/>
-                </a:solidFill>
-                <a:latin typeface="Lato"/>
-              </a:defRPr>
-            </a:pPr>
-            <a:r>
-              <a:rPr>
-                <a:ea typeface="Microsoft JhengHei"/>
-              </a:rPr>
               <a:t>Known relationships let us inspect what the tools get right and wrong.</a:t>
             </a:r>
           </a:p>
@@ -19129,7 +18319,7 @@
       </p:sp>
       <p:sp>
         <p:nvSpPr>
-          <p:cNvPr id="9" name="Rectangle 8"/>
+          <p:cNvPr id="8" name="Rectangle 7"/>
           <p:cNvSpPr/>
           <p:nvPr/>
         </p:nvSpPr>
@@ -19174,7 +18364,7 @@
       </p:sp>
       <p:sp>
         <p:nvSpPr>
-          <p:cNvPr id="10" name="TextBox 9"/>
+          <p:cNvPr id="9" name="TextBox 8"/>
           <p:cNvSpPr txBox="1"/>
           <p:nvPr/>
         </p:nvSpPr>
@@ -19246,8 +18436,8 @@
         </p:nvSpPr>
         <p:spPr>
           <a:xfrm>
-            <a:off x="495299" y="238125"/>
-            <a:ext cx="10953750" cy="266700"/>
+            <a:off x="495299" y="742950"/>
+            <a:ext cx="11144250" cy="952500"/>
           </a:xfrm>
           <a:prstGeom prst="rect">
             <a:avLst/>
@@ -19270,54 +18460,6 @@
               <a:spcAft>
                 <a:spcPts val="0"/>
               </a:spcAft>
-              <a:defRPr sz="1300" b="1">
-                <a:solidFill>
-                  <a:srgbClr val="146C68"/>
-                </a:solidFill>
-                <a:latin typeface="Lato"/>
-              </a:defRPr>
-            </a:pPr>
-            <a:r>
-              <a:rPr>
-                <a:ea typeface="Microsoft JhengHei"/>
-              </a:rPr>
-              <a:t>Corpus</a:t>
-            </a:r>
-          </a:p>
-        </p:txBody>
-      </p:sp>
-      <p:sp>
-        <p:nvSpPr>
-          <p:cNvPr id="3" name="TextBox 2"/>
-          <p:cNvSpPr txBox="1"/>
-          <p:nvPr/>
-        </p:nvSpPr>
-        <p:spPr>
-          <a:xfrm>
-            <a:off x="495299" y="742950"/>
-            <a:ext cx="11144250" cy="952500"/>
-          </a:xfrm>
-          <a:prstGeom prst="rect">
-            <a:avLst/>
-          </a:prstGeom>
-          <a:noFill/>
-        </p:spPr>
-        <p:txBody>
-          <a:bodyPr wrap="square" lIns="0" rIns="0" tIns="0" bIns="0">
-            <a:spAutoFit/>
-          </a:bodyPr>
-          <a:lstStyle/>
-          <a:p>
-            <a:pPr>
-              <a:lnSpc>
-                <a:spcPct val="118000"/>
-              </a:lnSpc>
-              <a:spcBef>
-                <a:spcPts val="0"/>
-              </a:spcBef>
-              <a:spcAft>
-                <a:spcPts val="0"/>
-              </a:spcAft>
               <a:defRPr sz="2900" b="1">
                 <a:solidFill>
                   <a:srgbClr val="24384A"/>
@@ -19336,7 +18478,7 @@
       </p:sp>
       <p:sp>
         <p:nvSpPr>
-          <p:cNvPr id="4" name="Rectangle 3"/>
+          <p:cNvPr id="3" name="Rectangle 2"/>
           <p:cNvSpPr/>
           <p:nvPr/>
         </p:nvSpPr>
@@ -19381,7 +18523,7 @@
       </p:sp>
       <p:sp>
         <p:nvSpPr>
-          <p:cNvPr id="5" name="TextBox 4"/>
+          <p:cNvPr id="4" name="TextBox 3"/>
           <p:cNvSpPr txBox="1"/>
           <p:nvPr/>
         </p:nvSpPr>
@@ -19429,7 +18571,7 @@
       </p:sp>
       <p:pic>
         <p:nvPicPr>
-          <p:cNvPr id="6" name="Picture 5" descr="corpus.png"/>
+          <p:cNvPr id="5" name="Picture 4" descr="corpus.png"/>
           <p:cNvPicPr>
             <a:picLocks noChangeAspect="1"/>
           </p:cNvPicPr>
@@ -19453,7 +18595,7 @@
       </p:pic>
       <p:sp>
         <p:nvSpPr>
-          <p:cNvPr id="7" name="TextBox 6"/>
+          <p:cNvPr id="6" name="TextBox 5"/>
           <p:cNvSpPr txBox="1"/>
           <p:nvPr/>
         </p:nvSpPr>
@@ -19501,7 +18643,7 @@
       </p:sp>
       <p:sp>
         <p:nvSpPr>
-          <p:cNvPr id="8" name="TextBox 7"/>
+          <p:cNvPr id="7" name="TextBox 6"/>
           <p:cNvSpPr txBox="1"/>
           <p:nvPr/>
         </p:nvSpPr>
@@ -19549,7 +18691,7 @@
       </p:sp>
       <p:sp>
         <p:nvSpPr>
-          <p:cNvPr id="9" name="Rectangle 8"/>
+          <p:cNvPr id="8" name="Rectangle 7"/>
           <p:cNvSpPr/>
           <p:nvPr/>
         </p:nvSpPr>
@@ -19594,7 +18736,7 @@
       </p:sp>
       <p:sp>
         <p:nvSpPr>
-          <p:cNvPr id="10" name="TextBox 9"/>
+          <p:cNvPr id="9" name="TextBox 8"/>
           <p:cNvSpPr txBox="1"/>
           <p:nvPr/>
         </p:nvSpPr>
@@ -19642,7 +18784,7 @@
       </p:sp>
       <p:sp>
         <p:nvSpPr>
-          <p:cNvPr id="11" name="Rectangle 10"/>
+          <p:cNvPr id="10" name="Rectangle 9"/>
           <p:cNvSpPr/>
           <p:nvPr/>
         </p:nvSpPr>
@@ -19687,7 +18829,7 @@
       </p:sp>
       <p:sp>
         <p:nvSpPr>
-          <p:cNvPr id="12" name="TextBox 11"/>
+          <p:cNvPr id="11" name="TextBox 10"/>
           <p:cNvSpPr txBox="1"/>
           <p:nvPr/>
         </p:nvSpPr>
@@ -19735,7 +18877,7 @@
       </p:sp>
       <p:cxnSp>
         <p:nvCxnSpPr>
-          <p:cNvPr id="13" name="Connector 12"/>
+          <p:cNvPr id="12" name="Connector 11"/>
           <p:cNvCxnSpPr/>
           <p:nvPr/>
         </p:nvCxnSpPr>
@@ -19771,7 +18913,7 @@
       </p:cxnSp>
       <p:cxnSp>
         <p:nvCxnSpPr>
-          <p:cNvPr id="14" name="Connector 13"/>
+          <p:cNvPr id="13" name="Connector 12"/>
           <p:cNvCxnSpPr/>
           <p:nvPr/>
         </p:nvCxnSpPr>
@@ -19807,7 +18949,7 @@
       </p:cxnSp>
       <p:sp>
         <p:nvSpPr>
-          <p:cNvPr id="15" name="Rectangle 14"/>
+          <p:cNvPr id="14" name="Rectangle 13"/>
           <p:cNvSpPr/>
           <p:nvPr/>
         </p:nvSpPr>
@@ -19852,7 +18994,7 @@
       </p:sp>
       <p:sp>
         <p:nvSpPr>
-          <p:cNvPr id="16" name="TextBox 15"/>
+          <p:cNvPr id="15" name="TextBox 14"/>
           <p:cNvSpPr txBox="1"/>
           <p:nvPr/>
         </p:nvSpPr>
@@ -19900,7 +19042,7 @@
       </p:sp>
       <p:cxnSp>
         <p:nvCxnSpPr>
-          <p:cNvPr id="17" name="Connector 16"/>
+          <p:cNvPr id="16" name="Connector 15"/>
           <p:cNvCxnSpPr/>
           <p:nvPr/>
         </p:nvCxnSpPr>
@@ -19936,7 +19078,7 @@
       </p:cxnSp>
       <p:sp>
         <p:nvSpPr>
-          <p:cNvPr id="18" name="Rectangle 17"/>
+          <p:cNvPr id="17" name="Rectangle 16"/>
           <p:cNvSpPr/>
           <p:nvPr/>
         </p:nvSpPr>
@@ -19981,7 +19123,7 @@
       </p:sp>
       <p:sp>
         <p:nvSpPr>
-          <p:cNvPr id="19" name="TextBox 18"/>
+          <p:cNvPr id="18" name="TextBox 17"/>
           <p:cNvSpPr txBox="1"/>
           <p:nvPr/>
         </p:nvSpPr>
@@ -20029,7 +19171,7 @@
       </p:sp>
       <p:sp>
         <p:nvSpPr>
-          <p:cNvPr id="20" name="TextBox 19"/>
+          <p:cNvPr id="19" name="TextBox 18"/>
           <p:cNvSpPr txBox="1"/>
           <p:nvPr/>
         </p:nvSpPr>
@@ -20077,7 +19219,7 @@
       </p:sp>
       <p:sp>
         <p:nvSpPr>
-          <p:cNvPr id="21" name="TextBox 20"/>
+          <p:cNvPr id="20" name="TextBox 19"/>
           <p:cNvSpPr txBox="1"/>
           <p:nvPr/>
         </p:nvSpPr>
@@ -20125,7 +19267,7 @@
       </p:sp>
       <p:sp>
         <p:nvSpPr>
-          <p:cNvPr id="22" name="TextBox 21"/>
+          <p:cNvPr id="21" name="TextBox 20"/>
           <p:cNvSpPr txBox="1"/>
           <p:nvPr/>
         </p:nvSpPr>
@@ -20173,7 +19315,7 @@
       </p:sp>
       <p:sp>
         <p:nvSpPr>
-          <p:cNvPr id="23" name="TextBox 22"/>
+          <p:cNvPr id="22" name="TextBox 21"/>
           <p:cNvSpPr txBox="1"/>
           <p:nvPr/>
         </p:nvSpPr>
@@ -20245,8 +19387,8 @@
         </p:nvSpPr>
         <p:spPr>
           <a:xfrm>
-            <a:off x="495299" y="238125"/>
-            <a:ext cx="10953750" cy="266700"/>
+            <a:off x="495299" y="742950"/>
+            <a:ext cx="11144250" cy="1047749"/>
           </a:xfrm>
           <a:prstGeom prst="rect">
             <a:avLst/>
@@ -20269,18 +19411,18 @@
               <a:spcAft>
                 <a:spcPts val="0"/>
               </a:spcAft>
-              <a:defRPr sz="1300" b="1">
-                <a:solidFill>
-                  <a:srgbClr val="146C68"/>
-                </a:solidFill>
-                <a:latin typeface="Lato"/>
-              </a:defRPr>
-            </a:pPr>
-            <a:r>
-              <a:rPr>
-                <a:ea typeface="Microsoft JhengHei"/>
-              </a:rPr>
-              <a:t>Semantic analysis</a:t>
+              <a:defRPr sz="3200" b="1">
+                <a:solidFill>
+                  <a:srgbClr val="24384A"/>
+                </a:solidFill>
+                <a:latin typeface="Lato"/>
+              </a:defRPr>
+            </a:pPr>
+            <a:r>
+              <a:rPr>
+                <a:ea typeface="Microsoft JhengHei"/>
+              </a:rPr>
+              <a:t>How related passages are found</a:t>
             </a:r>
           </a:p>
         </p:txBody>
@@ -20293,8 +19435,8 @@
         </p:nvSpPr>
         <p:spPr>
           <a:xfrm>
-            <a:off x="495299" y="742950"/>
-            <a:ext cx="11144250" cy="1047749"/>
+            <a:off x="523874" y="1857375"/>
+            <a:ext cx="10953750" cy="523874"/>
           </a:xfrm>
           <a:prstGeom prst="rect">
             <a:avLst/>
@@ -20317,18 +19459,18 @@
               <a:spcAft>
                 <a:spcPts val="0"/>
               </a:spcAft>
-              <a:defRPr sz="3200" b="1">
-                <a:solidFill>
-                  <a:srgbClr val="24384A"/>
-                </a:solidFill>
-                <a:latin typeface="Lato"/>
-              </a:defRPr>
-            </a:pPr>
-            <a:r>
-              <a:rPr>
-                <a:ea typeface="Microsoft JhengHei"/>
-              </a:rPr>
-              <a:t>How related passages are found</a:t>
+              <a:defRPr sz="3100" b="1">
+                <a:solidFill>
+                  <a:srgbClr val="155F88"/>
+                </a:solidFill>
+                <a:latin typeface="Lato"/>
+              </a:defRPr>
+            </a:pPr>
+            <a:r>
+              <a:rPr>
+                <a:ea typeface="Microsoft JhengHei"/>
+              </a:rPr>
+              <a:t>mitra-qwen35-embedder</a:t>
             </a:r>
           </a:p>
         </p:txBody>
@@ -20341,8 +19483,8 @@
         </p:nvSpPr>
         <p:spPr>
           <a:xfrm>
-            <a:off x="523874" y="1857375"/>
-            <a:ext cx="10953750" cy="523874"/>
+            <a:off x="714375" y="2962275"/>
+            <a:ext cx="3000375" cy="476250"/>
           </a:xfrm>
           <a:prstGeom prst="rect">
             <a:avLst/>
@@ -20365,7 +19507,7 @@
               <a:spcAft>
                 <a:spcPts val="0"/>
               </a:spcAft>
-              <a:defRPr sz="3100" b="1">
+              <a:defRPr sz="2300" b="1">
                 <a:solidFill>
                   <a:srgbClr val="155F88"/>
                 </a:solidFill>
@@ -20376,7 +19518,7 @@
               <a:rPr>
                 <a:ea typeface="Microsoft JhengHei"/>
               </a:rPr>
-              <a:t>mitra-qwen35-embedder</a:t>
+              <a:t>Selected passage</a:t>
             </a:r>
           </a:p>
         </p:txBody>
@@ -20389,8 +19531,8 @@
         </p:nvSpPr>
         <p:spPr>
           <a:xfrm>
-            <a:off x="714375" y="2962275"/>
-            <a:ext cx="3000375" cy="476250"/>
+            <a:off x="714375" y="3571875"/>
+            <a:ext cx="3000375" cy="952500"/>
           </a:xfrm>
           <a:prstGeom prst="rect">
             <a:avLst/>
@@ -20413,18 +19555,18 @@
               <a:spcAft>
                 <a:spcPts val="0"/>
               </a:spcAft>
-              <a:defRPr sz="2300" b="1">
-                <a:solidFill>
-                  <a:srgbClr val="155F88"/>
-                </a:solidFill>
-                <a:latin typeface="Lato"/>
-              </a:defRPr>
-            </a:pPr>
-            <a:r>
-              <a:rPr>
-                <a:ea typeface="Microsoft JhengHei"/>
-              </a:rPr>
-              <a:t>Selected passage</a:t>
+              <a:defRPr sz="2100" b="0">
+                <a:solidFill>
+                  <a:srgbClr val="24384A"/>
+                </a:solidFill>
+                <a:latin typeface="Lato"/>
+              </a:defRPr>
+            </a:pPr>
+            <a:r>
+              <a:rPr>
+                <a:ea typeface="Microsoft JhengHei"/>
+              </a:rPr>
+              <a:t>Use its stored vector</a:t>
             </a:r>
           </a:p>
         </p:txBody>
@@ -20437,8 +19579,8 @@
         </p:nvSpPr>
         <p:spPr>
           <a:xfrm>
-            <a:off x="714375" y="3571875"/>
-            <a:ext cx="3000375" cy="952500"/>
+            <a:off x="4572000" y="2962275"/>
+            <a:ext cx="3000375" cy="476250"/>
           </a:xfrm>
           <a:prstGeom prst="rect">
             <a:avLst/>
@@ -20461,18 +19603,18 @@
               <a:spcAft>
                 <a:spcPts val="0"/>
               </a:spcAft>
-              <a:defRPr sz="2100" b="0">
-                <a:solidFill>
-                  <a:srgbClr val="24384A"/>
-                </a:solidFill>
-                <a:latin typeface="Lato"/>
-              </a:defRPr>
-            </a:pPr>
-            <a:r>
-              <a:rPr>
-                <a:ea typeface="Microsoft JhengHei"/>
-              </a:rPr>
-              <a:t>Use its stored vector</a:t>
+              <a:defRPr sz="2300" b="1">
+                <a:solidFill>
+                  <a:srgbClr val="155F88"/>
+                </a:solidFill>
+                <a:latin typeface="Lato"/>
+              </a:defRPr>
+            </a:pPr>
+            <a:r>
+              <a:rPr>
+                <a:ea typeface="Microsoft JhengHei"/>
+              </a:rPr>
+              <a:t>Cosine similarity</a:t>
             </a:r>
           </a:p>
         </p:txBody>
@@ -20485,8 +19627,8 @@
         </p:nvSpPr>
         <p:spPr>
           <a:xfrm>
-            <a:off x="4572000" y="2962275"/>
-            <a:ext cx="3000375" cy="476250"/>
+            <a:off x="4572000" y="3571875"/>
+            <a:ext cx="3000375" cy="952500"/>
           </a:xfrm>
           <a:prstGeom prst="rect">
             <a:avLst/>
@@ -20509,18 +19651,18 @@
               <a:spcAft>
                 <a:spcPts val="0"/>
               </a:spcAft>
-              <a:defRPr sz="2300" b="1">
-                <a:solidFill>
-                  <a:srgbClr val="155F88"/>
-                </a:solidFill>
-                <a:latin typeface="Lato"/>
-              </a:defRPr>
-            </a:pPr>
-            <a:r>
-              <a:rPr>
-                <a:ea typeface="Microsoft JhengHei"/>
-              </a:rPr>
-              <a:t>Cosine similarity</a:t>
+              <a:defRPr sz="2100" b="0">
+                <a:solidFill>
+                  <a:srgbClr val="24384A"/>
+                </a:solidFill>
+                <a:latin typeface="Lato"/>
+              </a:defRPr>
+            </a:pPr>
+            <a:r>
+              <a:rPr>
+                <a:ea typeface="Microsoft JhengHei"/>
+              </a:rPr>
+              <a:t>Compare with other works</a:t>
             </a:r>
           </a:p>
         </p:txBody>
@@ -20533,8 +19675,8 @@
         </p:nvSpPr>
         <p:spPr>
           <a:xfrm>
-            <a:off x="4572000" y="3571875"/>
-            <a:ext cx="3000375" cy="952500"/>
+            <a:off x="8429625" y="2962275"/>
+            <a:ext cx="3000375" cy="476250"/>
           </a:xfrm>
           <a:prstGeom prst="rect">
             <a:avLst/>
@@ -20557,18 +19699,18 @@
               <a:spcAft>
                 <a:spcPts val="0"/>
               </a:spcAft>
-              <a:defRPr sz="2100" b="0">
-                <a:solidFill>
-                  <a:srgbClr val="24384A"/>
-                </a:solidFill>
-                <a:latin typeface="Lato"/>
-              </a:defRPr>
-            </a:pPr>
-            <a:r>
-              <a:rPr>
-                <a:ea typeface="Microsoft JhengHei"/>
-              </a:rPr>
-              <a:t>Compare with other works</a:t>
+              <a:defRPr sz="2300" b="1">
+                <a:solidFill>
+                  <a:srgbClr val="155F88"/>
+                </a:solidFill>
+                <a:latin typeface="Lato"/>
+              </a:defRPr>
+            </a:pPr>
+            <a:r>
+              <a:rPr>
+                <a:ea typeface="Microsoft JhengHei"/>
+              </a:rPr>
+              <a:t>Related passages</a:t>
             </a:r>
           </a:p>
         </p:txBody>
@@ -20581,8 +19723,8 @@
         </p:nvSpPr>
         <p:spPr>
           <a:xfrm>
-            <a:off x="8429625" y="2962275"/>
-            <a:ext cx="3000375" cy="476250"/>
+            <a:off x="8429625" y="3571875"/>
+            <a:ext cx="3000375" cy="952500"/>
           </a:xfrm>
           <a:prstGeom prst="rect">
             <a:avLst/>
@@ -20605,54 +19747,6 @@
               <a:spcAft>
                 <a:spcPts val="0"/>
               </a:spcAft>
-              <a:defRPr sz="2300" b="1">
-                <a:solidFill>
-                  <a:srgbClr val="155F88"/>
-                </a:solidFill>
-                <a:latin typeface="Lato"/>
-              </a:defRPr>
-            </a:pPr>
-            <a:r>
-              <a:rPr>
-                <a:ea typeface="Microsoft JhengHei"/>
-              </a:rPr>
-              <a:t>Related passages</a:t>
-            </a:r>
-          </a:p>
-        </p:txBody>
-      </p:sp>
-      <p:sp>
-        <p:nvSpPr>
-          <p:cNvPr id="10" name="TextBox 9"/>
-          <p:cNvSpPr txBox="1"/>
-          <p:nvPr/>
-        </p:nvSpPr>
-        <p:spPr>
-          <a:xfrm>
-            <a:off x="8429625" y="3571875"/>
-            <a:ext cx="3000375" cy="952500"/>
-          </a:xfrm>
-          <a:prstGeom prst="rect">
-            <a:avLst/>
-          </a:prstGeom>
-          <a:noFill/>
-        </p:spPr>
-        <p:txBody>
-          <a:bodyPr wrap="square" lIns="0" rIns="0" tIns="0" bIns="0">
-            <a:spAutoFit/>
-          </a:bodyPr>
-          <a:lstStyle/>
-          <a:p>
-            <a:pPr>
-              <a:lnSpc>
-                <a:spcPct val="118000"/>
-              </a:lnSpc>
-              <a:spcBef>
-                <a:spcPts val="0"/>
-              </a:spcBef>
-              <a:spcAft>
-                <a:spcPts val="0"/>
-              </a:spcAft>
               <a:defRPr sz="2100" b="0">
                 <a:solidFill>
                   <a:srgbClr val="24384A"/>
@@ -20671,7 +19765,7 @@
       </p:sp>
       <p:cxnSp>
         <p:nvCxnSpPr>
-          <p:cNvPr id="11" name="Connector 10"/>
+          <p:cNvPr id="10" name="Connector 9"/>
           <p:cNvCxnSpPr/>
           <p:nvPr/>
         </p:nvCxnSpPr>
@@ -20707,7 +19801,7 @@
       </p:cxnSp>
       <p:cxnSp>
         <p:nvCxnSpPr>
-          <p:cNvPr id="12" name="Connector 11"/>
+          <p:cNvPr id="11" name="Connector 10"/>
           <p:cNvCxnSpPr/>
           <p:nvPr/>
         </p:nvCxnSpPr>
@@ -20743,7 +19837,7 @@
       </p:cxnSp>
       <p:sp>
         <p:nvSpPr>
-          <p:cNvPr id="13" name="TextBox 12"/>
+          <p:cNvPr id="12" name="TextBox 11"/>
           <p:cNvSpPr txBox="1"/>
           <p:nvPr/>
         </p:nvSpPr>
@@ -20791,7 +19885,7 @@
       </p:sp>
       <p:sp>
         <p:nvSpPr>
-          <p:cNvPr id="14" name="TextBox 13"/>
+          <p:cNvPr id="13" name="TextBox 12"/>
           <p:cNvSpPr txBox="1"/>
           <p:nvPr/>
         </p:nvSpPr>
@@ -20839,7 +19933,7 @@
       </p:sp>
       <p:sp>
         <p:nvSpPr>
-          <p:cNvPr id="15" name="Rectangle 14"/>
+          <p:cNvPr id="14" name="Rectangle 13"/>
           <p:cNvSpPr/>
           <p:nvPr/>
         </p:nvSpPr>
@@ -20884,7 +19978,7 @@
       </p:sp>
       <p:sp>
         <p:nvSpPr>
-          <p:cNvPr id="16" name="TextBox 15"/>
+          <p:cNvPr id="15" name="TextBox 14"/>
           <p:cNvSpPr txBox="1"/>
           <p:nvPr/>
         </p:nvSpPr>
@@ -20956,8 +20050,8 @@
         </p:nvSpPr>
         <p:spPr>
           <a:xfrm>
-            <a:off x="495299" y="238125"/>
-            <a:ext cx="10953750" cy="266700"/>
+            <a:off x="495299" y="742950"/>
+            <a:ext cx="11144250" cy="1047749"/>
           </a:xfrm>
           <a:prstGeom prst="rect">
             <a:avLst/>
@@ -20980,18 +20074,18 @@
               <a:spcAft>
                 <a:spcPts val="0"/>
               </a:spcAft>
-              <a:defRPr sz="1300" b="1">
-                <a:solidFill>
-                  <a:srgbClr val="146C68"/>
-                </a:solidFill>
-                <a:latin typeface="Lato"/>
-              </a:defRPr>
-            </a:pPr>
-            <a:r>
-              <a:rPr>
-                <a:ea typeface="Microsoft JhengHei"/>
-              </a:rPr>
-              <a:t>Across time · two Lotus translations</a:t>
+              <a:defRPr sz="3200" b="1">
+                <a:solidFill>
+                  <a:srgbClr val="24384A"/>
+                </a:solidFill>
+                <a:latin typeface="Lato"/>
+              </a:defRPr>
+            </a:pPr>
+            <a:r>
+              <a:rPr>
+                <a:ea typeface="Microsoft JhengHei"/>
+              </a:rPr>
+              <a:t>Example: related content, little shared wording</a:t>
             </a:r>
           </a:p>
         </p:txBody>
@@ -21004,8 +20098,8 @@
         </p:nvSpPr>
         <p:spPr>
           <a:xfrm>
-            <a:off x="495299" y="742950"/>
-            <a:ext cx="11144250" cy="1047749"/>
+            <a:off x="714375" y="2152650"/>
+            <a:ext cx="3905249" cy="476250"/>
           </a:xfrm>
           <a:prstGeom prst="rect">
             <a:avLst/>
@@ -21028,18 +20122,18 @@
               <a:spcAft>
                 <a:spcPts val="0"/>
               </a:spcAft>
-              <a:defRPr sz="3200" b="1">
-                <a:solidFill>
-                  <a:srgbClr val="24384A"/>
-                </a:solidFill>
-                <a:latin typeface="Lato"/>
-              </a:defRPr>
-            </a:pPr>
-            <a:r>
-              <a:rPr>
-                <a:ea typeface="Microsoft JhengHei"/>
-              </a:rPr>
-              <a:t>Example: related content, little shared wording</a:t>
+              <a:defRPr sz="2300" b="1">
+                <a:solidFill>
+                  <a:srgbClr val="155F88"/>
+                </a:solidFill>
+                <a:latin typeface="Lato"/>
+              </a:defRPr>
+            </a:pPr>
+            <a:r>
+              <a:rPr>
+                <a:ea typeface="Microsoft JhengHei"/>
+              </a:rPr>
+              <a:t>Earlier Lotus translation</a:t>
             </a:r>
           </a:p>
         </p:txBody>
@@ -21052,8 +20146,8 @@
         </p:nvSpPr>
         <p:spPr>
           <a:xfrm>
-            <a:off x="714375" y="2152650"/>
-            <a:ext cx="3905249" cy="476250"/>
+            <a:off x="714375" y="2762250"/>
+            <a:ext cx="3905249" cy="1095375"/>
           </a:xfrm>
           <a:prstGeom prst="rect">
             <a:avLst/>
@@ -21076,18 +20170,43 @@
               <a:spcAft>
                 <a:spcPts val="0"/>
               </a:spcAft>
-              <a:defRPr sz="2300" b="1">
-                <a:solidFill>
-                  <a:srgbClr val="155F88"/>
-                </a:solidFill>
-                <a:latin typeface="Lato"/>
-              </a:defRPr>
-            </a:pPr>
-            <a:r>
-              <a:rPr>
-                <a:ea typeface="Microsoft JhengHei"/>
-              </a:rPr>
-              <a:t>Earlier Lotus translation</a:t>
+              <a:defRPr sz="2100" b="0">
+                <a:solidFill>
+                  <a:srgbClr val="24384A"/>
+                </a:solidFill>
+                <a:latin typeface="Lato"/>
+              </a:defRPr>
+            </a:pPr>
+            <a:r>
+              <a:rPr>
+                <a:ea typeface="Microsoft JhengHei"/>
+              </a:rPr>
+              <a:t>Dharmarakṣa · T0263-rest</a:t>
+            </a:r>
+          </a:p>
+          <a:p>
+            <a:pPr>
+              <a:lnSpc>
+                <a:spcPct val="118000"/>
+              </a:lnSpc>
+              <a:spcBef>
+                <a:spcPts val="0"/>
+              </a:spcBef>
+              <a:spcAft>
+                <a:spcPts val="0"/>
+              </a:spcAft>
+              <a:defRPr sz="2100" b="0">
+                <a:solidFill>
+                  <a:srgbClr val="24384A"/>
+                </a:solidFill>
+                <a:latin typeface="Lato"/>
+              </a:defRPr>
+            </a:pPr>
+            <a:r>
+              <a:rPr>
+                <a:ea typeface="Microsoft JhengHei"/>
+              </a:rPr>
+              <a:t>Source position 4000</a:t>
             </a:r>
           </a:p>
         </p:txBody>
@@ -21100,8 +20219,8 @@
         </p:nvSpPr>
         <p:spPr>
           <a:xfrm>
-            <a:off x="714375" y="2762250"/>
-            <a:ext cx="3905249" cy="1095375"/>
+            <a:off x="7572375" y="2152650"/>
+            <a:ext cx="3905249" cy="476250"/>
           </a:xfrm>
           <a:prstGeom prst="rect">
             <a:avLst/>
@@ -21124,43 +20243,18 @@
               <a:spcAft>
                 <a:spcPts val="0"/>
               </a:spcAft>
-              <a:defRPr sz="2100" b="0">
-                <a:solidFill>
-                  <a:srgbClr val="24384A"/>
-                </a:solidFill>
-                <a:latin typeface="Lato"/>
-              </a:defRPr>
-            </a:pPr>
-            <a:r>
-              <a:rPr>
-                <a:ea typeface="Microsoft JhengHei"/>
-              </a:rPr>
-              <a:t>Dharmarakṣa · T0263-rest</a:t>
-            </a:r>
-          </a:p>
-          <a:p>
-            <a:pPr>
-              <a:lnSpc>
-                <a:spcPct val="118000"/>
-              </a:lnSpc>
-              <a:spcBef>
-                <a:spcPts val="0"/>
-              </a:spcBef>
-              <a:spcAft>
-                <a:spcPts val="0"/>
-              </a:spcAft>
-              <a:defRPr sz="2100" b="0">
-                <a:solidFill>
-                  <a:srgbClr val="24384A"/>
-                </a:solidFill>
-                <a:latin typeface="Lato"/>
-              </a:defRPr>
-            </a:pPr>
-            <a:r>
-              <a:rPr>
-                <a:ea typeface="Microsoft JhengHei"/>
-              </a:rPr>
-              <a:t>Source position 4000</a:t>
+              <a:defRPr sz="2300" b="1">
+                <a:solidFill>
+                  <a:srgbClr val="155F88"/>
+                </a:solidFill>
+                <a:latin typeface="Lato"/>
+              </a:defRPr>
+            </a:pPr>
+            <a:r>
+              <a:rPr>
+                <a:ea typeface="Microsoft JhengHei"/>
+              </a:rPr>
+              <a:t>Later Lotus translation</a:t>
             </a:r>
           </a:p>
         </p:txBody>
@@ -21173,8 +20267,8 @@
         </p:nvSpPr>
         <p:spPr>
           <a:xfrm>
-            <a:off x="7572375" y="2152650"/>
-            <a:ext cx="3905249" cy="476250"/>
+            <a:off x="7572375" y="2762250"/>
+            <a:ext cx="3905249" cy="1095375"/>
           </a:xfrm>
           <a:prstGeom prst="rect">
             <a:avLst/>
@@ -21197,54 +20291,6 @@
               <a:spcAft>
                 <a:spcPts val="0"/>
               </a:spcAft>
-              <a:defRPr sz="2300" b="1">
-                <a:solidFill>
-                  <a:srgbClr val="155F88"/>
-                </a:solidFill>
-                <a:latin typeface="Lato"/>
-              </a:defRPr>
-            </a:pPr>
-            <a:r>
-              <a:rPr>
-                <a:ea typeface="Microsoft JhengHei"/>
-              </a:rPr>
-              <a:t>Later Lotus translation</a:t>
-            </a:r>
-          </a:p>
-        </p:txBody>
-      </p:sp>
-      <p:sp>
-        <p:nvSpPr>
-          <p:cNvPr id="7" name="TextBox 6"/>
-          <p:cNvSpPr txBox="1"/>
-          <p:nvPr/>
-        </p:nvSpPr>
-        <p:spPr>
-          <a:xfrm>
-            <a:off x="7572375" y="2762250"/>
-            <a:ext cx="3905249" cy="1095375"/>
-          </a:xfrm>
-          <a:prstGeom prst="rect">
-            <a:avLst/>
-          </a:prstGeom>
-          <a:noFill/>
-        </p:spPr>
-        <p:txBody>
-          <a:bodyPr wrap="square" lIns="0" rIns="0" tIns="0" bIns="0">
-            <a:spAutoFit/>
-          </a:bodyPr>
-          <a:lstStyle/>
-          <a:p>
-            <a:pPr>
-              <a:lnSpc>
-                <a:spcPct val="118000"/>
-              </a:lnSpc>
-              <a:spcBef>
-                <a:spcPts val="0"/>
-              </a:spcBef>
-              <a:spcAft>
-                <a:spcPts val="0"/>
-              </a:spcAft>
               <a:defRPr sz="2100" b="0">
                 <a:solidFill>
                   <a:srgbClr val="24384A"/>
@@ -21288,7 +20334,7 @@
       </p:sp>
       <p:cxnSp>
         <p:nvCxnSpPr>
-          <p:cNvPr id="8" name="Connector 7"/>
+          <p:cNvPr id="7" name="Connector 6"/>
           <p:cNvCxnSpPr/>
           <p:nvPr/>
         </p:nvCxnSpPr>
@@ -21324,7 +20370,7 @@
       </p:cxnSp>
       <p:sp>
         <p:nvSpPr>
-          <p:cNvPr id="9" name="TextBox 8"/>
+          <p:cNvPr id="8" name="TextBox 7"/>
           <p:cNvSpPr txBox="1"/>
           <p:nvPr/>
         </p:nvSpPr>
@@ -21372,7 +20418,7 @@
       </p:sp>
       <p:sp>
         <p:nvSpPr>
-          <p:cNvPr id="10" name="TextBox 9"/>
+          <p:cNvPr id="9" name="TextBox 8"/>
           <p:cNvSpPr txBox="1"/>
           <p:nvPr/>
         </p:nvSpPr>
@@ -21420,7 +20466,7 @@
       </p:sp>
       <p:sp>
         <p:nvSpPr>
-          <p:cNvPr id="11" name="TextBox 10"/>
+          <p:cNvPr id="10" name="TextBox 9"/>
           <p:cNvSpPr txBox="1"/>
           <p:nvPr/>
         </p:nvSpPr>
@@ -21468,7 +20514,7 @@
       </p:sp>
       <p:sp>
         <p:nvSpPr>
-          <p:cNvPr id="12" name="Rectangle 11"/>
+          <p:cNvPr id="11" name="Rectangle 10"/>
           <p:cNvSpPr/>
           <p:nvPr/>
         </p:nvSpPr>
@@ -21513,7 +20559,7 @@
       </p:sp>
       <p:sp>
         <p:nvSpPr>
-          <p:cNvPr id="13" name="TextBox 12"/>
+          <p:cNvPr id="12" name="TextBox 11"/>
           <p:cNvSpPr txBox="1"/>
           <p:nvPr/>
         </p:nvSpPr>

--- a/docs/presentation/cohort-pnc-2026.pptx
+++ b/docs/presentation/cohort-pnc-2026.pptx
@@ -3126,91 +3126,28 @@
           <a:lstStyle/>
           <a:p>
             <a:r>
-              <a:t>TIME CUE: Compare material from different periods. Ask whether shared wording reflects transmission, reuse or revision. Dates and the direction of borrowing need historical evidence.</a:t>
+              <a:t>TIME CUE: Two translations from different periods.</a:t>
             </a:r>
           </a:p>
           <a:p/>
           <a:p>
             <a:r>
-              <a:t>SAY: These two Lotus windows are close in the embedding index, but their longest exact shared sequence is only three Chinese characters. Retrieval gives us a pair to read; alignment shows where wording matches.</a:t>
+              <a:t>SAY: We start with Dharmarakṣa’s Lotus translation. The retrieved passage comes from Kumārajīva’s translation of the same sūtra. That makes it a relevant candidate for comparing how the work was translated, even though these windows share little exact wording.</a:t>
             </a:r>
           </a:p>
           <a:p/>
           <a:p>
             <a:r>
-              <a:t>BACKGROUND</a:t>
-            </a:r>
-          </a:p>
-          <a:p>
-            <a:r>
-              <a:t>Historical orientation: An Shigao worked in the second century CE. Scholarship identifies T1694 as a later commentary, probably from the third century; do not treat the date as inferred by Cohort. Its title repeats 陰持入經 and adds 註, commentary. This is why shared wording may reflect transmission over time rather than the same translator.</a:t>
+              <a:t>The measured source window is T0263-rest at position 4000; its nearest indexed window is T0262-exDevadatta at position 2800. Cosine similarity is 0.865 and the longest shared Chinese-character sequence is three characters. These values come from method-examples.json. The score ranks a candidate; it does not prove that the windows are exact counterparts. This presentation has not established a specialist passage-by-passage correspondence for the pair.</a:t>
             </a:r>
           </a:p>
           <a:p/>
           <a:p>
             <a:r>
-              <a:t>Explain the titles. T0603 is the Yin chi ru jing, associated with An Shigao. T1694 is its commentary; this relationship is known from scholarship. The tool locates shared runs, not the historical direction of borrowing.</a:t>
+              <a:t>T0263-rest is a catalogue remainder of Dharmarakṣa’s Lotus translation. T0262-exDevadatta is Kumārajīva’s translation with the separately catalogued Devadatta chapter excluded. CBETA links open the complete online work; local character offsets do not directly map to its pages.</a:t>
             </a:r>
           </a:p>
           <a:p/>
-          <a:p>
-            <a:r>
-              <a:t>These are tools available to agents; they are not separate top-level tabs.</a:t>
-            </a:r>
-          </a:p>
-          <a:p/>
-          <a:p>
-            <a:r>
-              <a:t>**Semantic neighbours** searches an embedding index. An embedding is a numerical representation used to retrieve passages with similar content. It supplies candidates to inspect. It does not establish who translated a passage. A nearest neighbour is the closest among the candidates searched; that alone does not make it a useful match.</a:t>
-            </a:r>
-          </a:p>
-          <a:p/>
-          <a:p>
-            <a:r>
-              <a:t>**Align passages** compares two selected texts for exact shared Chinese-character sequences and returns matching runs with source positions. Normalisation removes material such as punctuation from that comparison. Shared wording can suggest reuse, a common source or a recurring formula. Its direction and historical explanation require further evidence.</a:t>
-            </a:r>
-          </a:p>
-          <a:p/>
-          <a:p>
-            <a:r>
-              <a:t>T0603 is the *Yin chi ru jing* 陰持入經, traditionally associated with **An Shigao 安世高**. T1694 is the *Yin chi ru jing zhu* 陰持入經註, a commentary on it. The character 註 in the title means commentary, and the relationship is identified in scholarship. Cohort did not discover the genre from a similarity score. See the scholarly references at the end of this guide.</a:t>
-            </a:r>
-          </a:p>
-          <a:p/>
-          <a:p>
-            <a:r>
-              <a:t>In a saved run, show the action that retrieved candidates and the action that compared T0603 with T1694. Explain the tool inputs before the result. If the worker searched a short string taken from an earlier alignment, say that it reused a retrieved string. Do not describe a previously observed match as an independent prediction.</a:t>
-            </a:r>
-          </a:p>
-          <a:p/>
-          <a:p>
-            <a:r>
-              <a:t>The tools for comparing edition apparatus require the appropriate XML source configuration. The current plain-text setup supports the exact-overlap example; do not present it as a full textual-variant collation or a reconstruction of a text’s genealogy.</a:t>
-            </a:r>
-          </a:p>
-          <a:p/>
-          <a:p>
-            <a:r>
-              <a:t>SAY: The methods give us different things: candidate passages, vocabulary rankings and a way to test exclusions.</a:t>
-            </a:r>
-          </a:p>
-          <a:p/>
-          <a:p>
-            <a:r>
-              <a:t>NEXT: Explain the limitations.</a:t>
-            </a:r>
-          </a:p>
-          <a:p/>
-          <a:p>
-            <a:r>
-              <a:t>BACKGROUND</a:t>
-            </a:r>
-          </a:p>
-          <a:p>
-            <a:r>
-              <a:t>The first count concerns T0263-rest and T0262-exDevadatta, not every passage in complete editions. Nearest means first under vector similarity among indexed other works. This is an illustrative case selected after inspecting outputs, not a retrieval accuracy benchmark. Vocabulary excludes the target’s entire Taishō work, but other dependence and genre effects remain. Reverse control: T0262-exDevadatta ranks with Dharmakṣema under both vocabularies, not its catalogue label Kumārajīva. Mention that failure verbally: agreement for one example does not validate attribution. Measurements: scripts/check_method_examples.py; docs/presentation/method-examples.json.</a:t>
-            </a:r>
-          </a:p>
         </p:txBody>
       </p:sp>
       <p:sp>
@@ -20085,7 +20022,7 @@
               <a:rPr>
                 <a:ea typeface="Microsoft JhengHei"/>
               </a:rPr>
-              <a:t>Example: related content, little shared wording</a:t>
+              <a:t>Example: finding another Lotus translation</a:t>
             </a:r>
           </a:p>
         </p:txBody>
@@ -20473,7 +20410,7 @@
         <p:spPr>
           <a:xfrm>
             <a:off x="742950" y="5248275"/>
-            <a:ext cx="10620375" cy="476250"/>
+            <a:ext cx="10620375" cy="857250"/>
           </a:xfrm>
           <a:prstGeom prst="rect">
             <a:avLst/>
@@ -20496,7 +20433,7 @@
               <a:spcAft>
                 <a:spcPts val="0"/>
               </a:spcAft>
-              <a:defRPr sz="2200" b="0">
+              <a:defRPr sz="2300" b="0">
                 <a:solidFill>
                   <a:srgbClr val="24384A"/>
                 </a:solidFill>
@@ -20507,7 +20444,32 @@
               <a:rPr>
                 <a:ea typeface="Microsoft JhengHei"/>
               </a:rPr>
-              <a:t>Shared wording is checked separately, with positions in both sources.</a:t>
+              <a:t>The result is from another translation of the same sūtra.</a:t>
+            </a:r>
+          </a:p>
+          <a:p>
+            <a:pPr>
+              <a:lnSpc>
+                <a:spcPct val="118000"/>
+              </a:lnSpc>
+              <a:spcBef>
+                <a:spcPts val="0"/>
+              </a:spcBef>
+              <a:spcAft>
+                <a:spcPts val="0"/>
+              </a:spcAft>
+              <a:defRPr sz="2300" b="0">
+                <a:solidFill>
+                  <a:srgbClr val="24384A"/>
+                </a:solidFill>
+                <a:latin typeface="Lato"/>
+              </a:defRPr>
+            </a:pPr>
+            <a:r>
+              <a:rPr>
+                <a:ea typeface="Microsoft JhengHei"/>
+              </a:rPr>
+              <a:t>Read the passages to judge how closely they correspond.</a:t>
             </a:r>
           </a:p>
         </p:txBody>
